--- a/assets/figures-editable/c1-c2/c1-e20.pptx
+++ b/assets/figures-editable/c1-c2/c1-e20.pptx
@@ -7,7 +7,7 @@
   <p:sldIdLst>
     <p:sldId id="256" r:id="rId7"/>
   </p:sldIdLst>
-  <p:sldSz cx="11948160" cy="7924799" type="screen4x3"/>
+  <p:sldSz cx="12191695" cy="6858000" type="screen4x3"/>
   <p:notesSz cx="6858000" cy="9144000"/>
   <p:defaultTextStyle>
     <a:defPPr>
@@ -3098,14 +3098,14 @@
       <p:grpSpPr/>
       <p:sp>
         <p:nvSpPr>
-          <p:cNvPr id="2" name="text1" descr="sci-ppt:C1-E20-001"/>
+          <p:cNvPr id="2" name="C1-E20 text 0" descr="sci-ppt:o000"/>
           <p:cNvSpPr txBox="1"/>
           <p:nvPr/>
         </p:nvSpPr>
         <p:spPr>
           <a:xfrm>
-            <a:off x="316992" y="268224"/>
-            <a:ext cx="11277600" cy="359054"/>
+            <a:off x="274320" y="118872"/>
+            <a:ext cx="11612880" cy="340105"/>
           </a:xfrm>
           <a:prstGeom prst="rect">
             <a:avLst/>
@@ -3114,7 +3114,7 @@
           <a:effectLst/>
         </p:spPr>
         <p:txBody>
-          <a:bodyPr wrap="none" lIns="27432" rIns="27432" tIns="18288" bIns="18288" anchor="ctr">
+          <a:bodyPr wrap="none" lIns="18288" rIns="18288" tIns="18288" bIns="18288" anchor="t">
             <a:spAutoFit/>
           </a:bodyPr>
           <a:lstStyle/>
@@ -3125,34 +3125,31 @@
               </a:spcAft>
             </a:pPr>
             <a:r>
-              <a:rPr sz="1823" b="0" i="0">
+              <a:rPr sz="1900" b="1" i="0">
                 <a:solidFill>
                   <a:srgbClr val="8EDBD4"/>
                 </a:solidFill>
                 <a:latin typeface="Arial"/>
               </a:rPr>
-              <a:t>C1-E20 | Physical-variable diagram</a:t>
-            </a:r>
-          </a:p>
-        </p:txBody>
-      </p:sp>
-      <p:sp>
-        <p:nvSpPr>
-          <p:cNvPr id="3" name="rect2" descr="sci-ppt:C1-E20-002"/>
-          <p:cNvSpPr/>
+              <a:t>C1-E20 · Ideal-trajectory diagnostic, not a physical limit</a:t>
+            </a:r>
+          </a:p>
+        </p:txBody>
+      </p:sp>
+      <p:cxnSp>
+        <p:nvCxnSpPr>
+          <p:cNvPr id="3" name="C1-E20 line 1" descr="sci-ppt:o001"/>
+          <p:cNvCxnSpPr/>
           <p:nvPr/>
-        </p:nvSpPr>
-        <p:spPr>
-          <a:xfrm>
-            <a:off x="1219200" y="1828800"/>
-            <a:ext cx="3657600" cy="1158240"/>
-          </a:xfrm>
-          <a:prstGeom prst="rect">
+        </p:nvCxnSpPr>
+        <p:spPr>
+          <a:xfrm>
+            <a:off x="914400" y="5029200"/>
+            <a:ext cx="6035040" cy="0"/>
+          </a:xfrm>
+          <a:prstGeom prst="line">
             <a:avLst/>
           </a:prstGeom>
-          <a:solidFill>
-            <a:srgbClr val="213E4B"/>
-          </a:solidFill>
           <a:ln w="19050">
             <a:solidFill>
               <a:srgbClr val="B4C7D2"/>
@@ -3160,71 +3157,21 @@
           </a:ln>
           <a:effectLst/>
         </p:spPr>
-        <p:txBody>
-          <a:bodyPr rtlCol="0" anchor="ctr"/>
-          <a:lstStyle/>
-          <a:p>
-            <a:pPr algn="ctr"/>
-          </a:p>
-        </p:txBody>
-      </p:sp>
-      <p:sp>
-        <p:nvSpPr>
-          <p:cNvPr id="4" name="text3" descr="sci-ppt:C1-E20-003"/>
-          <p:cNvSpPr txBox="1"/>
+      </p:cxnSp>
+      <p:cxnSp>
+        <p:nvCxnSpPr>
+          <p:cNvPr id="4" name="C1-E20 line 2" descr="sci-ppt:o002"/>
+          <p:cNvCxnSpPr/>
           <p:nvPr/>
-        </p:nvSpPr>
-        <p:spPr>
-          <a:xfrm>
-            <a:off x="1341120" y="1950720"/>
-            <a:ext cx="3474720" cy="340156"/>
-          </a:xfrm>
-          <a:prstGeom prst="rect">
+        </p:nvCxnSpPr>
+        <p:spPr>
+          <a:xfrm>
+            <a:off x="914400" y="1371600"/>
+            <a:ext cx="0" cy="3657600"/>
+          </a:xfrm>
+          <a:prstGeom prst="line">
             <a:avLst/>
           </a:prstGeom>
-          <a:noFill/>
-          <a:effectLst/>
-        </p:spPr>
-        <p:txBody>
-          <a:bodyPr wrap="none" lIns="27432" rIns="27432" tIns="18288" bIns="18288" anchor="ctr">
-            <a:spAutoFit/>
-          </a:bodyPr>
-          <a:lstStyle/>
-          <a:p>
-            <a:pPr algn="l">
-              <a:spcAft>
-                <a:spcPts val="0"/>
-              </a:spcAft>
-            </a:pPr>
-            <a:r>
-              <a:rPr sz="1728" b="0" i="0">
-                <a:solidFill>
-                  <a:srgbClr val="E7F0F3"/>
-                </a:solidFill>
-                <a:latin typeface="Arial"/>
-              </a:rPr>
-              <a:t>Wall speed / sound speed</a:t>
-            </a:r>
-          </a:p>
-        </p:txBody>
-      </p:sp>
-      <p:sp>
-        <p:nvSpPr>
-          <p:cNvPr id="5" name="rect4" descr="sci-ppt:C1-E20-004"/>
-          <p:cNvSpPr/>
-          <p:nvPr/>
-        </p:nvSpPr>
-        <p:spPr>
-          <a:xfrm>
-            <a:off x="6949440" y="1828800"/>
-            <a:ext cx="3657600" cy="1158240"/>
-          </a:xfrm>
-          <a:prstGeom prst="rect">
-            <a:avLst/>
-          </a:prstGeom>
-          <a:solidFill>
-            <a:srgbClr val="213E4B"/>
-          </a:solidFill>
           <a:ln w="19050">
             <a:solidFill>
               <a:srgbClr val="B4C7D2"/>
@@ -3232,24 +3179,61 @@
           </a:ln>
           <a:effectLst/>
         </p:spPr>
-        <p:txBody>
-          <a:bodyPr rtlCol="0" anchor="ctr"/>
-          <a:lstStyle/>
-          <a:p>
-            <a:pPr algn="ctr"/>
-          </a:p>
-        </p:txBody>
-      </p:sp>
-      <p:sp>
-        <p:nvSpPr>
-          <p:cNvPr id="6" name="text5" descr="sci-ppt:C1-E20-005"/>
+      </p:cxnSp>
+      <p:cxnSp>
+        <p:nvCxnSpPr>
+          <p:cNvPr id="5" name="C1-E20 line 3" descr="sci-ppt:o003"/>
+          <p:cNvCxnSpPr/>
+          <p:nvPr/>
+        </p:nvCxnSpPr>
+        <p:spPr>
+          <a:xfrm>
+            <a:off x="914400" y="5029200"/>
+            <a:ext cx="0" cy="64008"/>
+          </a:xfrm>
+          <a:prstGeom prst="line">
+            <a:avLst/>
+          </a:prstGeom>
+          <a:ln w="12700">
+            <a:solidFill>
+              <a:srgbClr val="B4C7D2"/>
+            </a:solidFill>
+          </a:ln>
+          <a:effectLst/>
+        </p:spPr>
+      </p:cxnSp>
+      <p:cxnSp>
+        <p:nvCxnSpPr>
+          <p:cNvPr id="6" name="C1-E20 line 4" descr="sci-ppt:o004"/>
+          <p:cNvCxnSpPr/>
+          <p:nvPr/>
+        </p:nvCxnSpPr>
+        <p:spPr>
+          <a:xfrm>
+            <a:off x="914400" y="1371600"/>
+            <a:ext cx="0" cy="3657600"/>
+          </a:xfrm>
+          <a:prstGeom prst="line">
+            <a:avLst/>
+          </a:prstGeom>
+          <a:ln w="7620">
+            <a:solidFill>
+              <a:srgbClr val="2E4756"/>
+            </a:solidFill>
+          </a:ln>
+          <a:effectLst/>
+        </p:spPr>
+      </p:cxnSp>
+      <p:sp>
+        <p:nvSpPr>
+          <p:cNvPr id="7" name="C1-E20 text 5" descr="sci-ppt:o005"/>
           <p:cNvSpPr txBox="1"/>
           <p:nvPr/>
         </p:nvSpPr>
         <p:spPr>
           <a:xfrm>
-            <a:off x="7071360" y="1950720"/>
-            <a:ext cx="3474720" cy="340156"/>
+            <a:off x="457200" y="5111496"/>
+            <a:ext cx="914400" cy="208407"/>
           </a:xfrm>
           <a:prstGeom prst="rect">
             <a:avLst/>
@@ -3258,7 +3242,781 @@
           <a:effectLst/>
         </p:spPr>
         <p:txBody>
-          <a:bodyPr wrap="none" lIns="27432" rIns="27432" tIns="18288" bIns="18288" anchor="ctr">
+          <a:bodyPr wrap="none" lIns="18288" rIns="18288" tIns="18288" bIns="18288" anchor="t">
+            <a:spAutoFit/>
+          </a:bodyPr>
+          <a:lstStyle/>
+          <a:p>
+            <a:pPr algn="ctr">
+              <a:spcAft>
+                <a:spcPts val="0"/>
+              </a:spcAft>
+            </a:pPr>
+            <a:r>
+              <a:rPr sz="1050" b="0" i="0">
+                <a:solidFill>
+                  <a:srgbClr val="B4C7D2"/>
+                </a:solidFill>
+                <a:latin typeface="Arial"/>
+              </a:rPr>
+              <a:t>0.025</a:t>
+            </a:r>
+          </a:p>
+        </p:txBody>
+      </p:sp>
+      <p:cxnSp>
+        <p:nvCxnSpPr>
+          <p:cNvPr id="8" name="C1-E20 line 6" descr="sci-ppt:o006"/>
+          <p:cNvCxnSpPr/>
+          <p:nvPr/>
+        </p:nvCxnSpPr>
+        <p:spPr>
+          <a:xfrm>
+            <a:off x="2048395" y="5029200"/>
+            <a:ext cx="0" cy="64008"/>
+          </a:xfrm>
+          <a:prstGeom prst="line">
+            <a:avLst/>
+          </a:prstGeom>
+          <a:ln w="12700">
+            <a:solidFill>
+              <a:srgbClr val="B4C7D2"/>
+            </a:solidFill>
+          </a:ln>
+          <a:effectLst/>
+        </p:spPr>
+      </p:cxnSp>
+      <p:cxnSp>
+        <p:nvCxnSpPr>
+          <p:cNvPr id="9" name="C1-E20 line 7" descr="sci-ppt:o007"/>
+          <p:cNvCxnSpPr/>
+          <p:nvPr/>
+        </p:nvCxnSpPr>
+        <p:spPr>
+          <a:xfrm>
+            <a:off x="2048395" y="1371600"/>
+            <a:ext cx="0" cy="3657600"/>
+          </a:xfrm>
+          <a:prstGeom prst="line">
+            <a:avLst/>
+          </a:prstGeom>
+          <a:ln w="7620">
+            <a:solidFill>
+              <a:srgbClr val="2E4756"/>
+            </a:solidFill>
+          </a:ln>
+          <a:effectLst/>
+        </p:spPr>
+      </p:cxnSp>
+      <p:sp>
+        <p:nvSpPr>
+          <p:cNvPr id="10" name="C1-E20 text 8" descr="sci-ppt:o008"/>
+          <p:cNvSpPr txBox="1"/>
+          <p:nvPr/>
+        </p:nvSpPr>
+        <p:spPr>
+          <a:xfrm>
+            <a:off x="1591195" y="5111496"/>
+            <a:ext cx="914400" cy="208407"/>
+          </a:xfrm>
+          <a:prstGeom prst="rect">
+            <a:avLst/>
+          </a:prstGeom>
+          <a:noFill/>
+          <a:effectLst/>
+        </p:spPr>
+        <p:txBody>
+          <a:bodyPr wrap="none" lIns="18288" rIns="18288" tIns="18288" bIns="18288" anchor="t">
+            <a:spAutoFit/>
+          </a:bodyPr>
+          <a:lstStyle/>
+          <a:p>
+            <a:pPr algn="ctr">
+              <a:spcAft>
+                <a:spcPts val="0"/>
+              </a:spcAft>
+            </a:pPr>
+            <a:r>
+              <a:rPr sz="1050" b="0" i="0">
+                <a:solidFill>
+                  <a:srgbClr val="B4C7D2"/>
+                </a:solidFill>
+                <a:latin typeface="Arial"/>
+              </a:rPr>
+              <a:t>0.05</a:t>
+            </a:r>
+          </a:p>
+        </p:txBody>
+      </p:sp>
+      <p:cxnSp>
+        <p:nvCxnSpPr>
+          <p:cNvPr id="11" name="C1-E20 line 9" descr="sci-ppt:o009"/>
+          <p:cNvCxnSpPr/>
+          <p:nvPr/>
+        </p:nvCxnSpPr>
+        <p:spPr>
+          <a:xfrm>
+            <a:off x="3182390" y="5029200"/>
+            <a:ext cx="0" cy="64008"/>
+          </a:xfrm>
+          <a:prstGeom prst="line">
+            <a:avLst/>
+          </a:prstGeom>
+          <a:ln w="12700">
+            <a:solidFill>
+              <a:srgbClr val="B4C7D2"/>
+            </a:solidFill>
+          </a:ln>
+          <a:effectLst/>
+        </p:spPr>
+      </p:cxnSp>
+      <p:cxnSp>
+        <p:nvCxnSpPr>
+          <p:cNvPr id="12" name="C1-E20 line 10" descr="sci-ppt:o010"/>
+          <p:cNvCxnSpPr/>
+          <p:nvPr/>
+        </p:nvCxnSpPr>
+        <p:spPr>
+          <a:xfrm>
+            <a:off x="3182390" y="1371600"/>
+            <a:ext cx="0" cy="3657600"/>
+          </a:xfrm>
+          <a:prstGeom prst="line">
+            <a:avLst/>
+          </a:prstGeom>
+          <a:ln w="7620">
+            <a:solidFill>
+              <a:srgbClr val="2E4756"/>
+            </a:solidFill>
+          </a:ln>
+          <a:effectLst/>
+        </p:spPr>
+      </p:cxnSp>
+      <p:sp>
+        <p:nvSpPr>
+          <p:cNvPr id="13" name="C1-E20 text 11" descr="sci-ppt:o011"/>
+          <p:cNvSpPr txBox="1"/>
+          <p:nvPr/>
+        </p:nvSpPr>
+        <p:spPr>
+          <a:xfrm>
+            <a:off x="2725190" y="5111496"/>
+            <a:ext cx="914400" cy="208407"/>
+          </a:xfrm>
+          <a:prstGeom prst="rect">
+            <a:avLst/>
+          </a:prstGeom>
+          <a:noFill/>
+          <a:effectLst/>
+        </p:spPr>
+        <p:txBody>
+          <a:bodyPr wrap="none" lIns="18288" rIns="18288" tIns="18288" bIns="18288" anchor="t">
+            <a:spAutoFit/>
+          </a:bodyPr>
+          <a:lstStyle/>
+          <a:p>
+            <a:pPr algn="ctr">
+              <a:spcAft>
+                <a:spcPts val="0"/>
+              </a:spcAft>
+            </a:pPr>
+            <a:r>
+              <a:rPr sz="1050" b="0" i="0">
+                <a:solidFill>
+                  <a:srgbClr val="B4C7D2"/>
+                </a:solidFill>
+                <a:latin typeface="Arial"/>
+              </a:rPr>
+              <a:t>0.1</a:t>
+            </a:r>
+          </a:p>
+        </p:txBody>
+      </p:sp>
+      <p:cxnSp>
+        <p:nvCxnSpPr>
+          <p:cNvPr id="14" name="C1-E20 line 12" descr="sci-ppt:o012"/>
+          <p:cNvCxnSpPr/>
+          <p:nvPr/>
+        </p:nvCxnSpPr>
+        <p:spPr>
+          <a:xfrm>
+            <a:off x="4316385" y="5029200"/>
+            <a:ext cx="0" cy="64008"/>
+          </a:xfrm>
+          <a:prstGeom prst="line">
+            <a:avLst/>
+          </a:prstGeom>
+          <a:ln w="12700">
+            <a:solidFill>
+              <a:srgbClr val="B4C7D2"/>
+            </a:solidFill>
+          </a:ln>
+          <a:effectLst/>
+        </p:spPr>
+      </p:cxnSp>
+      <p:cxnSp>
+        <p:nvCxnSpPr>
+          <p:cNvPr id="15" name="C1-E20 line 13" descr="sci-ppt:o013"/>
+          <p:cNvCxnSpPr/>
+          <p:nvPr/>
+        </p:nvCxnSpPr>
+        <p:spPr>
+          <a:xfrm>
+            <a:off x="4316385" y="1371600"/>
+            <a:ext cx="0" cy="3657600"/>
+          </a:xfrm>
+          <a:prstGeom prst="line">
+            <a:avLst/>
+          </a:prstGeom>
+          <a:ln w="7620">
+            <a:solidFill>
+              <a:srgbClr val="2E4756"/>
+            </a:solidFill>
+          </a:ln>
+          <a:effectLst/>
+        </p:spPr>
+      </p:cxnSp>
+      <p:sp>
+        <p:nvSpPr>
+          <p:cNvPr id="16" name="C1-E20 text 14" descr="sci-ppt:o014"/>
+          <p:cNvSpPr txBox="1"/>
+          <p:nvPr/>
+        </p:nvSpPr>
+        <p:spPr>
+          <a:xfrm>
+            <a:off x="3859185" y="5111496"/>
+            <a:ext cx="914400" cy="208407"/>
+          </a:xfrm>
+          <a:prstGeom prst="rect">
+            <a:avLst/>
+          </a:prstGeom>
+          <a:noFill/>
+          <a:effectLst/>
+        </p:spPr>
+        <p:txBody>
+          <a:bodyPr wrap="none" lIns="18288" rIns="18288" tIns="18288" bIns="18288" anchor="t">
+            <a:spAutoFit/>
+          </a:bodyPr>
+          <a:lstStyle/>
+          <a:p>
+            <a:pPr algn="ctr">
+              <a:spcAft>
+                <a:spcPts val="0"/>
+              </a:spcAft>
+            </a:pPr>
+            <a:r>
+              <a:rPr sz="1050" b="0" i="0">
+                <a:solidFill>
+                  <a:srgbClr val="B4C7D2"/>
+                </a:solidFill>
+                <a:latin typeface="Arial"/>
+              </a:rPr>
+              <a:t>0.2</a:t>
+            </a:r>
+          </a:p>
+        </p:txBody>
+      </p:sp>
+      <p:cxnSp>
+        <p:nvCxnSpPr>
+          <p:cNvPr id="17" name="C1-E20 line 15" descr="sci-ppt:o015"/>
+          <p:cNvCxnSpPr/>
+          <p:nvPr/>
+        </p:nvCxnSpPr>
+        <p:spPr>
+          <a:xfrm>
+            <a:off x="5815444" y="5029200"/>
+            <a:ext cx="0" cy="64008"/>
+          </a:xfrm>
+          <a:prstGeom prst="line">
+            <a:avLst/>
+          </a:prstGeom>
+          <a:ln w="12700">
+            <a:solidFill>
+              <a:srgbClr val="B4C7D2"/>
+            </a:solidFill>
+          </a:ln>
+          <a:effectLst/>
+        </p:spPr>
+      </p:cxnSp>
+      <p:cxnSp>
+        <p:nvCxnSpPr>
+          <p:cNvPr id="18" name="C1-E20 line 16" descr="sci-ppt:o016"/>
+          <p:cNvCxnSpPr/>
+          <p:nvPr/>
+        </p:nvCxnSpPr>
+        <p:spPr>
+          <a:xfrm>
+            <a:off x="5815444" y="1371600"/>
+            <a:ext cx="0" cy="3657600"/>
+          </a:xfrm>
+          <a:prstGeom prst="line">
+            <a:avLst/>
+          </a:prstGeom>
+          <a:ln w="7620">
+            <a:solidFill>
+              <a:srgbClr val="2E4756"/>
+            </a:solidFill>
+          </a:ln>
+          <a:effectLst/>
+        </p:spPr>
+      </p:cxnSp>
+      <p:sp>
+        <p:nvSpPr>
+          <p:cNvPr id="19" name="C1-E20 text 17" descr="sci-ppt:o017"/>
+          <p:cNvSpPr txBox="1"/>
+          <p:nvPr/>
+        </p:nvSpPr>
+        <p:spPr>
+          <a:xfrm>
+            <a:off x="5358244" y="5111496"/>
+            <a:ext cx="914400" cy="208407"/>
+          </a:xfrm>
+          <a:prstGeom prst="rect">
+            <a:avLst/>
+          </a:prstGeom>
+          <a:noFill/>
+          <a:effectLst/>
+        </p:spPr>
+        <p:txBody>
+          <a:bodyPr wrap="none" lIns="18288" rIns="18288" tIns="18288" bIns="18288" anchor="t">
+            <a:spAutoFit/>
+          </a:bodyPr>
+          <a:lstStyle/>
+          <a:p>
+            <a:pPr algn="ctr">
+              <a:spcAft>
+                <a:spcPts val="0"/>
+              </a:spcAft>
+            </a:pPr>
+            <a:r>
+              <a:rPr sz="1050" b="0" i="0">
+                <a:solidFill>
+                  <a:srgbClr val="B4C7D2"/>
+                </a:solidFill>
+                <a:latin typeface="Arial"/>
+              </a:rPr>
+              <a:t>0.5</a:t>
+            </a:r>
+          </a:p>
+        </p:txBody>
+      </p:sp>
+      <p:cxnSp>
+        <p:nvCxnSpPr>
+          <p:cNvPr id="20" name="C1-E20 line 18" descr="sci-ppt:o018"/>
+          <p:cNvCxnSpPr/>
+          <p:nvPr/>
+        </p:nvCxnSpPr>
+        <p:spPr>
+          <a:xfrm>
+            <a:off x="6949440" y="5029200"/>
+            <a:ext cx="0" cy="64008"/>
+          </a:xfrm>
+          <a:prstGeom prst="line">
+            <a:avLst/>
+          </a:prstGeom>
+          <a:ln w="12700">
+            <a:solidFill>
+              <a:srgbClr val="B4C7D2"/>
+            </a:solidFill>
+          </a:ln>
+          <a:effectLst/>
+        </p:spPr>
+      </p:cxnSp>
+      <p:cxnSp>
+        <p:nvCxnSpPr>
+          <p:cNvPr id="21" name="C1-E20 line 19" descr="sci-ppt:o019"/>
+          <p:cNvCxnSpPr/>
+          <p:nvPr/>
+        </p:nvCxnSpPr>
+        <p:spPr>
+          <a:xfrm>
+            <a:off x="6949440" y="1371600"/>
+            <a:ext cx="0" cy="3657600"/>
+          </a:xfrm>
+          <a:prstGeom prst="line">
+            <a:avLst/>
+          </a:prstGeom>
+          <a:ln w="7620">
+            <a:solidFill>
+              <a:srgbClr val="2E4756"/>
+            </a:solidFill>
+          </a:ln>
+          <a:effectLst/>
+        </p:spPr>
+      </p:cxnSp>
+      <p:sp>
+        <p:nvSpPr>
+          <p:cNvPr id="22" name="C1-E20 text 20" descr="sci-ppt:o020"/>
+          <p:cNvSpPr txBox="1"/>
+          <p:nvPr/>
+        </p:nvSpPr>
+        <p:spPr>
+          <a:xfrm>
+            <a:off x="6492240" y="5111496"/>
+            <a:ext cx="914400" cy="208407"/>
+          </a:xfrm>
+          <a:prstGeom prst="rect">
+            <a:avLst/>
+          </a:prstGeom>
+          <a:noFill/>
+          <a:effectLst/>
+        </p:spPr>
+        <p:txBody>
+          <a:bodyPr wrap="none" lIns="18288" rIns="18288" tIns="18288" bIns="18288" anchor="t">
+            <a:spAutoFit/>
+          </a:bodyPr>
+          <a:lstStyle/>
+          <a:p>
+            <a:pPr algn="ctr">
+              <a:spcAft>
+                <a:spcPts val="0"/>
+              </a:spcAft>
+            </a:pPr>
+            <a:r>
+              <a:rPr sz="1050" b="0" i="0">
+                <a:solidFill>
+                  <a:srgbClr val="B4C7D2"/>
+                </a:solidFill>
+                <a:latin typeface="Arial"/>
+              </a:rPr>
+              <a:t>1</a:t>
+            </a:r>
+          </a:p>
+        </p:txBody>
+      </p:sp>
+      <p:cxnSp>
+        <p:nvCxnSpPr>
+          <p:cNvPr id="23" name="C1-E20 line 21" descr="sci-ppt:o021"/>
+          <p:cNvCxnSpPr/>
+          <p:nvPr/>
+        </p:nvCxnSpPr>
+        <p:spPr>
+          <a:xfrm>
+            <a:off x="850392" y="5029200"/>
+            <a:ext cx="64008" cy="0"/>
+          </a:xfrm>
+          <a:prstGeom prst="line">
+            <a:avLst/>
+          </a:prstGeom>
+          <a:ln w="12700">
+            <a:solidFill>
+              <a:srgbClr val="B4C7D2"/>
+            </a:solidFill>
+          </a:ln>
+          <a:effectLst/>
+        </p:spPr>
+      </p:cxnSp>
+      <p:cxnSp>
+        <p:nvCxnSpPr>
+          <p:cNvPr id="24" name="C1-E20 line 22" descr="sci-ppt:o022"/>
+          <p:cNvCxnSpPr/>
+          <p:nvPr/>
+        </p:nvCxnSpPr>
+        <p:spPr>
+          <a:xfrm>
+            <a:off x="850392" y="3810000"/>
+            <a:ext cx="64008" cy="0"/>
+          </a:xfrm>
+          <a:prstGeom prst="line">
+            <a:avLst/>
+          </a:prstGeom>
+          <a:ln w="12700">
+            <a:solidFill>
+              <a:srgbClr val="B4C7D2"/>
+            </a:solidFill>
+          </a:ln>
+          <a:effectLst/>
+        </p:spPr>
+      </p:cxnSp>
+      <p:cxnSp>
+        <p:nvCxnSpPr>
+          <p:cNvPr id="25" name="C1-E20 line 23" descr="sci-ppt:o023"/>
+          <p:cNvCxnSpPr/>
+          <p:nvPr/>
+        </p:nvCxnSpPr>
+        <p:spPr>
+          <a:xfrm>
+            <a:off x="914400" y="3810000"/>
+            <a:ext cx="6035040" cy="0"/>
+          </a:xfrm>
+          <a:prstGeom prst="line">
+            <a:avLst/>
+          </a:prstGeom>
+          <a:ln w="7620">
+            <a:solidFill>
+              <a:srgbClr val="2E4756"/>
+            </a:solidFill>
+          </a:ln>
+          <a:effectLst/>
+        </p:spPr>
+      </p:cxnSp>
+      <p:sp>
+        <p:nvSpPr>
+          <p:cNvPr id="26" name="C1-E20 text 24" descr="sci-ppt:o024"/>
+          <p:cNvSpPr txBox="1"/>
+          <p:nvPr/>
+        </p:nvSpPr>
+        <p:spPr>
+          <a:xfrm>
+            <a:off x="45720" y="3727704"/>
+            <a:ext cx="777240" cy="208407"/>
+          </a:xfrm>
+          <a:prstGeom prst="rect">
+            <a:avLst/>
+          </a:prstGeom>
+          <a:noFill/>
+          <a:effectLst/>
+        </p:spPr>
+        <p:txBody>
+          <a:bodyPr wrap="none" lIns="18288" rIns="18288" tIns="18288" bIns="18288" anchor="t">
+            <a:spAutoFit/>
+          </a:bodyPr>
+          <a:lstStyle/>
+          <a:p>
+            <a:pPr algn="r">
+              <a:spcAft>
+                <a:spcPts val="0"/>
+              </a:spcAft>
+            </a:pPr>
+            <a:r>
+              <a:rPr sz="1050" b="0" i="0">
+                <a:solidFill>
+                  <a:srgbClr val="B4C7D2"/>
+                </a:solidFill>
+                <a:latin typeface="Arial"/>
+              </a:rPr>
+              <a:t>0.01</a:t>
+            </a:r>
+          </a:p>
+        </p:txBody>
+      </p:sp>
+      <p:cxnSp>
+        <p:nvCxnSpPr>
+          <p:cNvPr id="27" name="C1-E20 line 25" descr="sci-ppt:o025"/>
+          <p:cNvCxnSpPr/>
+          <p:nvPr/>
+        </p:nvCxnSpPr>
+        <p:spPr>
+          <a:xfrm>
+            <a:off x="850392" y="2590800"/>
+            <a:ext cx="64008" cy="0"/>
+          </a:xfrm>
+          <a:prstGeom prst="line">
+            <a:avLst/>
+          </a:prstGeom>
+          <a:ln w="12700">
+            <a:solidFill>
+              <a:srgbClr val="B4C7D2"/>
+            </a:solidFill>
+          </a:ln>
+          <a:effectLst/>
+        </p:spPr>
+      </p:cxnSp>
+      <p:cxnSp>
+        <p:nvCxnSpPr>
+          <p:cNvPr id="28" name="C1-E20 line 26" descr="sci-ppt:o026"/>
+          <p:cNvCxnSpPr/>
+          <p:nvPr/>
+        </p:nvCxnSpPr>
+        <p:spPr>
+          <a:xfrm>
+            <a:off x="914400" y="2590800"/>
+            <a:ext cx="6035040" cy="0"/>
+          </a:xfrm>
+          <a:prstGeom prst="line">
+            <a:avLst/>
+          </a:prstGeom>
+          <a:ln w="7620">
+            <a:solidFill>
+              <a:srgbClr val="2E4756"/>
+            </a:solidFill>
+          </a:ln>
+          <a:effectLst/>
+        </p:spPr>
+      </p:cxnSp>
+      <p:sp>
+        <p:nvSpPr>
+          <p:cNvPr id="29" name="C1-E20 text 27" descr="sci-ppt:o027"/>
+          <p:cNvSpPr txBox="1"/>
+          <p:nvPr/>
+        </p:nvSpPr>
+        <p:spPr>
+          <a:xfrm>
+            <a:off x="45720" y="2508504"/>
+            <a:ext cx="777240" cy="208407"/>
+          </a:xfrm>
+          <a:prstGeom prst="rect">
+            <a:avLst/>
+          </a:prstGeom>
+          <a:noFill/>
+          <a:effectLst/>
+        </p:spPr>
+        <p:txBody>
+          <a:bodyPr wrap="none" lIns="18288" rIns="18288" tIns="18288" bIns="18288" anchor="t">
+            <a:spAutoFit/>
+          </a:bodyPr>
+          <a:lstStyle/>
+          <a:p>
+            <a:pPr algn="r">
+              <a:spcAft>
+                <a:spcPts val="0"/>
+              </a:spcAft>
+            </a:pPr>
+            <a:r>
+              <a:rPr sz="1050" b="0" i="0">
+                <a:solidFill>
+                  <a:srgbClr val="B4C7D2"/>
+                </a:solidFill>
+                <a:latin typeface="Arial"/>
+              </a:rPr>
+              <a:t>0.1</a:t>
+            </a:r>
+          </a:p>
+        </p:txBody>
+      </p:sp>
+      <p:cxnSp>
+        <p:nvCxnSpPr>
+          <p:cNvPr id="30" name="C1-E20 line 28" descr="sci-ppt:o028"/>
+          <p:cNvCxnSpPr/>
+          <p:nvPr/>
+        </p:nvCxnSpPr>
+        <p:spPr>
+          <a:xfrm>
+            <a:off x="850392" y="1371600"/>
+            <a:ext cx="64008" cy="0"/>
+          </a:xfrm>
+          <a:prstGeom prst="line">
+            <a:avLst/>
+          </a:prstGeom>
+          <a:ln w="12700">
+            <a:solidFill>
+              <a:srgbClr val="B4C7D2"/>
+            </a:solidFill>
+          </a:ln>
+          <a:effectLst/>
+        </p:spPr>
+      </p:cxnSp>
+      <p:cxnSp>
+        <p:nvCxnSpPr>
+          <p:cNvPr id="31" name="C1-E20 line 29" descr="sci-ppt:o029"/>
+          <p:cNvCxnSpPr/>
+          <p:nvPr/>
+        </p:nvCxnSpPr>
+        <p:spPr>
+          <a:xfrm>
+            <a:off x="914400" y="1371600"/>
+            <a:ext cx="6035040" cy="0"/>
+          </a:xfrm>
+          <a:prstGeom prst="line">
+            <a:avLst/>
+          </a:prstGeom>
+          <a:ln w="7620">
+            <a:solidFill>
+              <a:srgbClr val="2E4756"/>
+            </a:solidFill>
+          </a:ln>
+          <a:effectLst/>
+        </p:spPr>
+      </p:cxnSp>
+      <p:sp>
+        <p:nvSpPr>
+          <p:cNvPr id="32" name="C1-E20 text 30" descr="sci-ppt:o030"/>
+          <p:cNvSpPr txBox="1"/>
+          <p:nvPr/>
+        </p:nvSpPr>
+        <p:spPr>
+          <a:xfrm>
+            <a:off x="45720" y="1289304"/>
+            <a:ext cx="777240" cy="208407"/>
+          </a:xfrm>
+          <a:prstGeom prst="rect">
+            <a:avLst/>
+          </a:prstGeom>
+          <a:noFill/>
+          <a:effectLst/>
+        </p:spPr>
+        <p:txBody>
+          <a:bodyPr wrap="none" lIns="18288" rIns="18288" tIns="18288" bIns="18288" anchor="t">
+            <a:spAutoFit/>
+          </a:bodyPr>
+          <a:lstStyle/>
+          <a:p>
+            <a:pPr algn="r">
+              <a:spcAft>
+                <a:spcPts val="0"/>
+              </a:spcAft>
+            </a:pPr>
+            <a:r>
+              <a:rPr sz="1050" b="0" i="0">
+                <a:solidFill>
+                  <a:srgbClr val="B4C7D2"/>
+                </a:solidFill>
+                <a:latin typeface="Arial"/>
+              </a:rPr>
+              <a:t>1</a:t>
+            </a:r>
+          </a:p>
+        </p:txBody>
+      </p:sp>
+      <p:sp>
+        <p:nvSpPr>
+          <p:cNvPr id="33" name="C1-E20 text 31" descr="sci-ppt:o031"/>
+          <p:cNvSpPr txBox="1"/>
+          <p:nvPr/>
+        </p:nvSpPr>
+        <p:spPr>
+          <a:xfrm>
+            <a:off x="914400" y="5312664"/>
+            <a:ext cx="6035040" cy="231648"/>
+          </a:xfrm>
+          <a:prstGeom prst="rect">
+            <a:avLst/>
+          </a:prstGeom>
+          <a:noFill/>
+          <a:effectLst/>
+        </p:spPr>
+        <p:txBody>
+          <a:bodyPr wrap="none" lIns="18288" rIns="18288" tIns="18288" bIns="18288" anchor="t">
+            <a:spAutoFit/>
+          </a:bodyPr>
+          <a:lstStyle/>
+          <a:p>
+            <a:pPr algn="ctr">
+              <a:spcAft>
+                <a:spcPts val="0"/>
+              </a:spcAft>
+            </a:pPr>
+            <a:r>
+              <a:rPr sz="1200" b="0" i="0">
+                <a:solidFill>
+                  <a:srgbClr val="E7F0F3"/>
+                </a:solidFill>
+                <a:latin typeface="Arial"/>
+              </a:rPr>
+              <a:t>R / Rₘₐₓ</a:t>
+            </a:r>
+          </a:p>
+        </p:txBody>
+      </p:sp>
+      <p:sp>
+        <p:nvSpPr>
+          <p:cNvPr id="34" name="C1-E20 text 32" descr="sci-ppt:o032"/>
+          <p:cNvSpPr txBox="1"/>
+          <p:nvPr/>
+        </p:nvSpPr>
+        <p:spPr>
+          <a:xfrm>
+            <a:off x="365760" y="1024128"/>
+            <a:ext cx="6035040" cy="231648"/>
+          </a:xfrm>
+          <a:prstGeom prst="rect">
+            <a:avLst/>
+          </a:prstGeom>
+          <a:noFill/>
+          <a:effectLst/>
+        </p:spPr>
+        <p:txBody>
+          <a:bodyPr wrap="none" lIns="18288" rIns="18288" tIns="18288" bIns="18288" anchor="t">
             <a:spAutoFit/>
           </a:bodyPr>
           <a:lstStyle/>
@@ -3269,51 +4027,538 @@
               </a:spcAft>
             </a:pPr>
             <a:r>
-              <a:rPr sz="1728" b="0" i="0">
+              <a:rPr sz="1200" b="0" i="0">
                 <a:solidFill>
                   <a:srgbClr val="E7F0F3"/>
                 </a:solidFill>
                 <a:latin typeface="Arial"/>
               </a:rPr>
-              <a:t>Propagation / event time</a:t>
-            </a:r>
+              <a:t>wall Mach number |Ṙ| / c</a:t>
+            </a:r>
+          </a:p>
+        </p:txBody>
+      </p:sp>
+      <p:sp>
+        <p:nvSpPr>
+          <p:cNvPr id="35" name="C1-E20 polygon 33" descr="sci-ppt:o033"/>
+          <p:cNvSpPr/>
+          <p:nvPr/>
+        </p:nvSpPr>
+        <p:spPr>
+          <a:xfrm>
+            <a:off x="922160" y="1371600"/>
+            <a:ext cx="6007121" cy="3628605"/>
+          </a:xfrm>
+          <a:custGeom>
+            <a:avLst/>
+            <a:gdLst/>
+            <a:ahLst/>
+            <a:cxnLst/>
+            <a:rect l="l" t="t" r="r" b="b"/>
+            <a:pathLst>
+              <a:path w="6007121" h="3628605">
+                <a:moveTo>
+                  <a:pt x="0" y="0"/>
+                </a:moveTo>
+                <a:lnTo>
+                  <a:pt x="40316" y="0"/>
+                </a:lnTo>
+                <a:lnTo>
+                  <a:pt x="80632" y="0"/>
+                </a:lnTo>
+                <a:lnTo>
+                  <a:pt x="120948" y="0"/>
+                </a:lnTo>
+                <a:lnTo>
+                  <a:pt x="161265" y="0"/>
+                </a:lnTo>
+                <a:lnTo>
+                  <a:pt x="201581" y="0"/>
+                </a:lnTo>
+                <a:lnTo>
+                  <a:pt x="241897" y="0"/>
+                </a:lnTo>
+                <a:lnTo>
+                  <a:pt x="282213" y="0"/>
+                </a:lnTo>
+                <a:lnTo>
+                  <a:pt x="322530" y="0"/>
+                </a:lnTo>
+                <a:lnTo>
+                  <a:pt x="362846" y="10515"/>
+                </a:lnTo>
+                <a:lnTo>
+                  <a:pt x="403162" y="30088"/>
+                </a:lnTo>
+                <a:lnTo>
+                  <a:pt x="443478" y="49662"/>
+                </a:lnTo>
+                <a:lnTo>
+                  <a:pt x="483795" y="69235"/>
+                </a:lnTo>
+                <a:lnTo>
+                  <a:pt x="524111" y="88808"/>
+                </a:lnTo>
+                <a:lnTo>
+                  <a:pt x="564427" y="108381"/>
+                </a:lnTo>
+                <a:lnTo>
+                  <a:pt x="604743" y="127955"/>
+                </a:lnTo>
+                <a:lnTo>
+                  <a:pt x="645060" y="147528"/>
+                </a:lnTo>
+                <a:lnTo>
+                  <a:pt x="685376" y="167101"/>
+                </a:lnTo>
+                <a:lnTo>
+                  <a:pt x="725692" y="186675"/>
+                </a:lnTo>
+                <a:lnTo>
+                  <a:pt x="766008" y="206249"/>
+                </a:lnTo>
+                <a:lnTo>
+                  <a:pt x="806325" y="225822"/>
+                </a:lnTo>
+                <a:lnTo>
+                  <a:pt x="846641" y="245396"/>
+                </a:lnTo>
+                <a:lnTo>
+                  <a:pt x="886957" y="264970"/>
+                </a:lnTo>
+                <a:lnTo>
+                  <a:pt x="927273" y="284544"/>
+                </a:lnTo>
+                <a:lnTo>
+                  <a:pt x="967590" y="304119"/>
+                </a:lnTo>
+                <a:lnTo>
+                  <a:pt x="1007906" y="323693"/>
+                </a:lnTo>
+                <a:lnTo>
+                  <a:pt x="1048222" y="343267"/>
+                </a:lnTo>
+                <a:lnTo>
+                  <a:pt x="1088538" y="362842"/>
+                </a:lnTo>
+                <a:lnTo>
+                  <a:pt x="1128855" y="382417"/>
+                </a:lnTo>
+                <a:lnTo>
+                  <a:pt x="1169171" y="401992"/>
+                </a:lnTo>
+                <a:lnTo>
+                  <a:pt x="1209487" y="421567"/>
+                </a:lnTo>
+                <a:lnTo>
+                  <a:pt x="1249803" y="441142"/>
+                </a:lnTo>
+                <a:lnTo>
+                  <a:pt x="1290120" y="460718"/>
+                </a:lnTo>
+                <a:lnTo>
+                  <a:pt x="1330436" y="480294"/>
+                </a:lnTo>
+                <a:lnTo>
+                  <a:pt x="1370752" y="499870"/>
+                </a:lnTo>
+                <a:lnTo>
+                  <a:pt x="1411068" y="519446"/>
+                </a:lnTo>
+                <a:lnTo>
+                  <a:pt x="1451385" y="539023"/>
+                </a:lnTo>
+                <a:lnTo>
+                  <a:pt x="1491701" y="558600"/>
+                </a:lnTo>
+                <a:lnTo>
+                  <a:pt x="1532017" y="578178"/>
+                </a:lnTo>
+                <a:lnTo>
+                  <a:pt x="1572333" y="597755"/>
+                </a:lnTo>
+                <a:lnTo>
+                  <a:pt x="1612650" y="617334"/>
+                </a:lnTo>
+                <a:lnTo>
+                  <a:pt x="1652966" y="636912"/>
+                </a:lnTo>
+                <a:lnTo>
+                  <a:pt x="1693282" y="656491"/>
+                </a:lnTo>
+                <a:lnTo>
+                  <a:pt x="1733598" y="676071"/>
+                </a:lnTo>
+                <a:lnTo>
+                  <a:pt x="1773915" y="695651"/>
+                </a:lnTo>
+                <a:lnTo>
+                  <a:pt x="1814231" y="715232"/>
+                </a:lnTo>
+                <a:lnTo>
+                  <a:pt x="1854547" y="734813"/>
+                </a:lnTo>
+                <a:lnTo>
+                  <a:pt x="1894864" y="754395"/>
+                </a:lnTo>
+                <a:lnTo>
+                  <a:pt x="1935180" y="773978"/>
+                </a:lnTo>
+                <a:lnTo>
+                  <a:pt x="1975496" y="793562"/>
+                </a:lnTo>
+                <a:lnTo>
+                  <a:pt x="2015812" y="813146"/>
+                </a:lnTo>
+                <a:lnTo>
+                  <a:pt x="2056129" y="832732"/>
+                </a:lnTo>
+                <a:lnTo>
+                  <a:pt x="2096445" y="852318"/>
+                </a:lnTo>
+                <a:lnTo>
+                  <a:pt x="2136761" y="871906"/>
+                </a:lnTo>
+                <a:lnTo>
+                  <a:pt x="2177077" y="891494"/>
+                </a:lnTo>
+                <a:lnTo>
+                  <a:pt x="2217394" y="911084"/>
+                </a:lnTo>
+                <a:lnTo>
+                  <a:pt x="2257710" y="930676"/>
+                </a:lnTo>
+                <a:lnTo>
+                  <a:pt x="2298026" y="950268"/>
+                </a:lnTo>
+                <a:lnTo>
+                  <a:pt x="2338342" y="969862"/>
+                </a:lnTo>
+                <a:lnTo>
+                  <a:pt x="2378659" y="989458"/>
+                </a:lnTo>
+                <a:lnTo>
+                  <a:pt x="2418975" y="1009056"/>
+                </a:lnTo>
+                <a:lnTo>
+                  <a:pt x="2459291" y="1028656"/>
+                </a:lnTo>
+                <a:lnTo>
+                  <a:pt x="2499607" y="1048258"/>
+                </a:lnTo>
+                <a:lnTo>
+                  <a:pt x="2539924" y="1067862"/>
+                </a:lnTo>
+                <a:lnTo>
+                  <a:pt x="2580240" y="1087468"/>
+                </a:lnTo>
+                <a:lnTo>
+                  <a:pt x="2620556" y="1107077"/>
+                </a:lnTo>
+                <a:lnTo>
+                  <a:pt x="2660872" y="1126689"/>
+                </a:lnTo>
+                <a:lnTo>
+                  <a:pt x="2701189" y="1146304"/>
+                </a:lnTo>
+                <a:lnTo>
+                  <a:pt x="2741505" y="1165922"/>
+                </a:lnTo>
+                <a:lnTo>
+                  <a:pt x="2781821" y="1185544"/>
+                </a:lnTo>
+                <a:lnTo>
+                  <a:pt x="2822137" y="1205169"/>
+                </a:lnTo>
+                <a:lnTo>
+                  <a:pt x="2862454" y="1224799"/>
+                </a:lnTo>
+                <a:lnTo>
+                  <a:pt x="2902770" y="1244432"/>
+                </a:lnTo>
+                <a:lnTo>
+                  <a:pt x="2943086" y="1264071"/>
+                </a:lnTo>
+                <a:lnTo>
+                  <a:pt x="2983402" y="1283715"/>
+                </a:lnTo>
+                <a:lnTo>
+                  <a:pt x="3023719" y="1303364"/>
+                </a:lnTo>
+                <a:lnTo>
+                  <a:pt x="3064035" y="1323019"/>
+                </a:lnTo>
+                <a:lnTo>
+                  <a:pt x="3104351" y="1342681"/>
+                </a:lnTo>
+                <a:lnTo>
+                  <a:pt x="3144667" y="1362349"/>
+                </a:lnTo>
+                <a:lnTo>
+                  <a:pt x="3184984" y="1382025"/>
+                </a:lnTo>
+                <a:lnTo>
+                  <a:pt x="3225300" y="1401709"/>
+                </a:lnTo>
+                <a:lnTo>
+                  <a:pt x="3265616" y="1421401"/>
+                </a:lnTo>
+                <a:lnTo>
+                  <a:pt x="3305932" y="1441103"/>
+                </a:lnTo>
+                <a:lnTo>
+                  <a:pt x="3346249" y="1460815"/>
+                </a:lnTo>
+                <a:lnTo>
+                  <a:pt x="3386565" y="1480537"/>
+                </a:lnTo>
+                <a:lnTo>
+                  <a:pt x="3426881" y="1500271"/>
+                </a:lnTo>
+                <a:lnTo>
+                  <a:pt x="3467197" y="1520018"/>
+                </a:lnTo>
+                <a:lnTo>
+                  <a:pt x="3507514" y="1539778"/>
+                </a:lnTo>
+                <a:lnTo>
+                  <a:pt x="3547830" y="1559552"/>
+                </a:lnTo>
+                <a:lnTo>
+                  <a:pt x="3588146" y="1579342"/>
+                </a:lnTo>
+                <a:lnTo>
+                  <a:pt x="3628462" y="1599149"/>
+                </a:lnTo>
+                <a:lnTo>
+                  <a:pt x="3668779" y="1618975"/>
+                </a:lnTo>
+                <a:lnTo>
+                  <a:pt x="3709095" y="1638820"/>
+                </a:lnTo>
+                <a:lnTo>
+                  <a:pt x="3749411" y="1658686"/>
+                </a:lnTo>
+                <a:lnTo>
+                  <a:pt x="3789727" y="1678575"/>
+                </a:lnTo>
+                <a:lnTo>
+                  <a:pt x="3830044" y="1698489"/>
+                </a:lnTo>
+                <a:lnTo>
+                  <a:pt x="3870360" y="1718430"/>
+                </a:lnTo>
+                <a:lnTo>
+                  <a:pt x="3910676" y="1738399"/>
+                </a:lnTo>
+                <a:lnTo>
+                  <a:pt x="3950992" y="1758400"/>
+                </a:lnTo>
+                <a:lnTo>
+                  <a:pt x="3991309" y="1778434"/>
+                </a:lnTo>
+                <a:lnTo>
+                  <a:pt x="4031625" y="1798505"/>
+                </a:lnTo>
+                <a:lnTo>
+                  <a:pt x="4071941" y="1818614"/>
+                </a:lnTo>
+                <a:lnTo>
+                  <a:pt x="4112257" y="1838767"/>
+                </a:lnTo>
+                <a:lnTo>
+                  <a:pt x="4152574" y="1858965"/>
+                </a:lnTo>
+                <a:lnTo>
+                  <a:pt x="4192890" y="1879213"/>
+                </a:lnTo>
+                <a:lnTo>
+                  <a:pt x="4233206" y="1899514"/>
+                </a:lnTo>
+                <a:lnTo>
+                  <a:pt x="4273522" y="1919874"/>
+                </a:lnTo>
+                <a:lnTo>
+                  <a:pt x="4313839" y="1940297"/>
+                </a:lnTo>
+                <a:lnTo>
+                  <a:pt x="4354155" y="1960788"/>
+                </a:lnTo>
+                <a:lnTo>
+                  <a:pt x="4394471" y="1981353"/>
+                </a:lnTo>
+                <a:lnTo>
+                  <a:pt x="4434787" y="2001999"/>
+                </a:lnTo>
+                <a:lnTo>
+                  <a:pt x="4475104" y="2022732"/>
+                </a:lnTo>
+                <a:lnTo>
+                  <a:pt x="4515420" y="2043559"/>
+                </a:lnTo>
+                <a:lnTo>
+                  <a:pt x="4555736" y="2064490"/>
+                </a:lnTo>
+                <a:lnTo>
+                  <a:pt x="4596052" y="2085532"/>
+                </a:lnTo>
+                <a:lnTo>
+                  <a:pt x="4636369" y="2106697"/>
+                </a:lnTo>
+                <a:lnTo>
+                  <a:pt x="4676685" y="2127994"/>
+                </a:lnTo>
+                <a:lnTo>
+                  <a:pt x="4717001" y="2149437"/>
+                </a:lnTo>
+                <a:lnTo>
+                  <a:pt x="4757318" y="2171038"/>
+                </a:lnTo>
+                <a:lnTo>
+                  <a:pt x="4797634" y="2192812"/>
+                </a:lnTo>
+                <a:lnTo>
+                  <a:pt x="4837950" y="2214776"/>
+                </a:lnTo>
+                <a:lnTo>
+                  <a:pt x="4878266" y="2236947"/>
+                </a:lnTo>
+                <a:lnTo>
+                  <a:pt x="4918583" y="2259347"/>
+                </a:lnTo>
+                <a:lnTo>
+                  <a:pt x="4958899" y="2281998"/>
+                </a:lnTo>
+                <a:lnTo>
+                  <a:pt x="4999215" y="2304925"/>
+                </a:lnTo>
+                <a:lnTo>
+                  <a:pt x="5039531" y="2328158"/>
+                </a:lnTo>
+                <a:lnTo>
+                  <a:pt x="5079848" y="2351730"/>
+                </a:lnTo>
+                <a:lnTo>
+                  <a:pt x="5120164" y="2375677"/>
+                </a:lnTo>
+                <a:lnTo>
+                  <a:pt x="5160480" y="2400042"/>
+                </a:lnTo>
+                <a:lnTo>
+                  <a:pt x="5200796" y="2424873"/>
+                </a:lnTo>
+                <a:lnTo>
+                  <a:pt x="5241113" y="2450228"/>
+                </a:lnTo>
+                <a:lnTo>
+                  <a:pt x="5281429" y="2476170"/>
+                </a:lnTo>
+                <a:lnTo>
+                  <a:pt x="5321745" y="2502777"/>
+                </a:lnTo>
+                <a:lnTo>
+                  <a:pt x="5362061" y="2530139"/>
+                </a:lnTo>
+                <a:lnTo>
+                  <a:pt x="5402378" y="2558363"/>
+                </a:lnTo>
+                <a:lnTo>
+                  <a:pt x="5442694" y="2587578"/>
+                </a:lnTo>
+                <a:lnTo>
+                  <a:pt x="5483010" y="2617942"/>
+                </a:lnTo>
+                <a:lnTo>
+                  <a:pt x="5523326" y="2649647"/>
+                </a:lnTo>
+                <a:lnTo>
+                  <a:pt x="5563643" y="2682936"/>
+                </a:lnTo>
+                <a:lnTo>
+                  <a:pt x="5603959" y="2718119"/>
+                </a:lnTo>
+                <a:lnTo>
+                  <a:pt x="5644275" y="2755597"/>
+                </a:lnTo>
+                <a:lnTo>
+                  <a:pt x="5684591" y="2795907"/>
+                </a:lnTo>
+                <a:lnTo>
+                  <a:pt x="5724908" y="2839788"/>
+                </a:lnTo>
+                <a:lnTo>
+                  <a:pt x="5765224" y="2888300"/>
+                </a:lnTo>
+                <a:lnTo>
+                  <a:pt x="5805540" y="2943035"/>
+                </a:lnTo>
+                <a:lnTo>
+                  <a:pt x="5845856" y="3006549"/>
+                </a:lnTo>
+                <a:lnTo>
+                  <a:pt x="5886173" y="3083351"/>
+                </a:lnTo>
+                <a:lnTo>
+                  <a:pt x="5926489" y="3182579"/>
+                </a:lnTo>
+                <a:lnTo>
+                  <a:pt x="5966805" y="3327845"/>
+                </a:lnTo>
+                <a:lnTo>
+                  <a:pt x="6007121" y="3628605"/>
+                </a:lnTo>
+              </a:path>
+            </a:pathLst>
+          </a:custGeom>
+          <a:noFill/>
+          <a:ln w="38100">
+            <a:solidFill>
+              <a:srgbClr val="8EDBD4"/>
+            </a:solidFill>
+          </a:ln>
+          <a:effectLst/>
+        </p:spPr>
+        <p:txBody>
+          <a:bodyPr rtlCol="0" anchor="ctr"/>
+          <a:lstStyle/>
+          <a:p>
+            <a:pPr algn="ctr"/>
           </a:p>
         </p:txBody>
       </p:sp>
       <p:cxnSp>
         <p:nvCxnSpPr>
-          <p:cNvPr id="7" name="arrow6" descr="sci-ppt:C1-E20-006"/>
+          <p:cNvPr id="36" name="C1-E20 line 34" descr="sci-ppt:o034"/>
           <p:cNvCxnSpPr/>
           <p:nvPr/>
         </p:nvCxnSpPr>
         <p:spPr>
           <a:xfrm>
-            <a:off x="4937760" y="2414016"/>
-            <a:ext cx="1889760" cy="0"/>
+            <a:off x="914400" y="2590800"/>
+            <a:ext cx="6035040" cy="0"/>
           </a:xfrm>
           <a:prstGeom prst="line">
             <a:avLst/>
           </a:prstGeom>
-          <a:ln w="25400">
+          <a:ln w="16510">
             <a:solidFill>
-              <a:srgbClr val="8EDBD4"/>
+              <a:srgbClr val="F2B880"/>
             </a:solidFill>
-            <a:headEnd type="none" w="med" len="med"/>
-            <a:tailEnd type="triangle" w="med" len="med"/>
+            <a:prstDash val="dash"/>
           </a:ln>
           <a:effectLst/>
         </p:spPr>
       </p:cxnSp>
       <p:sp>
         <p:nvSpPr>
-          <p:cNvPr id="8" name="text7" descr="sci-ppt:C1-E20-007"/>
+          <p:cNvPr id="37" name="C1-E20 text 35" descr="sci-ppt:o035"/>
           <p:cNvSpPr txBox="1"/>
           <p:nvPr/>
         </p:nvSpPr>
         <p:spPr>
           <a:xfrm>
-            <a:off x="1463040" y="3657600"/>
-            <a:ext cx="9631680" cy="377952"/>
+            <a:off x="5888596" y="2298192"/>
+            <a:ext cx="1371600" cy="239395"/>
           </a:xfrm>
           <a:prstGeom prst="rect">
             <a:avLst/>
@@ -3322,7 +4567,7 @@
           <a:effectLst/>
         </p:spPr>
         <p:txBody>
-          <a:bodyPr wrap="none" lIns="27432" rIns="27432" tIns="18288" bIns="18288" anchor="ctr">
+          <a:bodyPr wrap="none" lIns="18288" rIns="18288" tIns="18288" bIns="18288" anchor="t">
             <a:spAutoFit/>
           </a:bodyPr>
           <a:lstStyle/>
@@ -3333,27 +4578,347 @@
               </a:spcAft>
             </a:pPr>
             <a:r>
-              <a:rPr sz="1920" b="0" i="0">
+              <a:rPr sz="1250" b="0" i="0">
+                <a:solidFill>
+                  <a:srgbClr val="F2B880"/>
+                </a:solidFill>
+                <a:latin typeface="Arial"/>
+              </a:rPr>
+              <a:t>M* = 0.1</a:t>
+            </a:r>
+          </a:p>
+        </p:txBody>
+      </p:sp>
+      <p:sp>
+        <p:nvSpPr>
+          <p:cNvPr id="38" name="C1-E20 polygon 36" descr="sci-ppt:o036"/>
+          <p:cNvSpPr/>
+          <p:nvPr/>
+        </p:nvSpPr>
+        <p:spPr>
+          <a:xfrm>
+            <a:off x="922160" y="1371600"/>
+            <a:ext cx="2850955" cy="3657600"/>
+          </a:xfrm>
+          <a:custGeom>
+            <a:avLst/>
+            <a:gdLst/>
+            <a:ahLst/>
+            <a:cxnLst/>
+            <a:rect l="l" t="t" r="r" b="b"/>
+            <a:pathLst>
+              <a:path w="2850955" h="3657600">
+                <a:moveTo>
+                  <a:pt x="0" y="0"/>
+                </a:moveTo>
+                <a:lnTo>
+                  <a:pt x="2850955" y="0"/>
+                </a:lnTo>
+                <a:lnTo>
+                  <a:pt x="2850955" y="3657600"/>
+                </a:lnTo>
+                <a:lnTo>
+                  <a:pt x="0" y="3657600"/>
+                </a:lnTo>
+                <a:close/>
+              </a:path>
+            </a:pathLst>
+          </a:custGeom>
+          <a:solidFill>
+            <a:srgbClr val="F28BA0">
+              <a:alpha val="18000"/>
+            </a:srgbClr>
+          </a:solidFill>
+          <a:ln w="6350">
+            <a:solidFill>
+              <a:srgbClr val="F28BA0">
+                <a:alpha val="18000"/>
+              </a:srgbClr>
+            </a:solidFill>
+          </a:ln>
+          <a:effectLst/>
+        </p:spPr>
+        <p:txBody>
+          <a:bodyPr rtlCol="0" anchor="ctr"/>
+          <a:lstStyle/>
+          <a:p>
+            <a:pPr algn="ctr"/>
+          </a:p>
+        </p:txBody>
+      </p:sp>
+      <p:cxnSp>
+        <p:nvCxnSpPr>
+          <p:cNvPr id="39" name="C1-E20 line 37" descr="sci-ppt:o037"/>
+          <p:cNvCxnSpPr/>
+          <p:nvPr/>
+        </p:nvCxnSpPr>
+        <p:spPr>
+          <a:xfrm>
+            <a:off x="3773115" y="1371600"/>
+            <a:ext cx="0" cy="3657600"/>
+          </a:xfrm>
+          <a:prstGeom prst="line">
+            <a:avLst/>
+          </a:prstGeom>
+          <a:ln w="16510">
+            <a:solidFill>
+              <a:srgbClr val="F28BA0"/>
+            </a:solidFill>
+            <a:prstDash val="dash"/>
+          </a:ln>
+          <a:effectLst/>
+        </p:spPr>
+      </p:cxnSp>
+      <p:sp>
+        <p:nvSpPr>
+          <p:cNvPr id="40" name="C1-E20 ellipse 38" descr="sci-ppt:o038"/>
+          <p:cNvSpPr/>
+          <p:nvPr/>
+        </p:nvSpPr>
+        <p:spPr>
+          <a:xfrm>
+            <a:off x="3699963" y="2517648"/>
+            <a:ext cx="146304" cy="146304"/>
+          </a:xfrm>
+          <a:prstGeom prst="ellipse">
+            <a:avLst/>
+          </a:prstGeom>
+          <a:solidFill>
+            <a:srgbClr val="F28BA0"/>
+          </a:solidFill>
+          <a:ln w="12700">
+            <a:solidFill>
+              <a:srgbClr val="F28BA0"/>
+            </a:solidFill>
+          </a:ln>
+          <a:effectLst/>
+        </p:spPr>
+        <p:txBody>
+          <a:bodyPr rtlCol="0" anchor="ctr"/>
+          <a:lstStyle/>
+          <a:p>
+            <a:pPr algn="ctr"/>
+          </a:p>
+        </p:txBody>
+      </p:sp>
+      <p:sp>
+        <p:nvSpPr>
+          <p:cNvPr id="41" name="C1-E20 text 39" descr="sci-ppt:o039"/>
+          <p:cNvSpPr txBox="1"/>
+          <p:nvPr/>
+        </p:nvSpPr>
+        <p:spPr>
+          <a:xfrm>
+            <a:off x="3864555" y="2133600"/>
+            <a:ext cx="2011680" cy="231648"/>
+          </a:xfrm>
+          <a:prstGeom prst="rect">
+            <a:avLst/>
+          </a:prstGeom>
+          <a:noFill/>
+          <a:effectLst/>
+        </p:spPr>
+        <p:txBody>
+          <a:bodyPr wrap="none" lIns="18288" rIns="18288" tIns="18288" bIns="18288" anchor="t">
+            <a:spAutoFit/>
+          </a:bodyPr>
+          <a:lstStyle/>
+          <a:p>
+            <a:pPr algn="l">
+              <a:spcAft>
+                <a:spcPts val="0"/>
+              </a:spcAft>
+            </a:pPr>
+            <a:r>
+              <a:rPr sz="1200" b="0" i="0">
+                <a:solidFill>
+                  <a:srgbClr val="F28BA0"/>
+                </a:solidFill>
+                <a:latin typeface="Arial"/>
+              </a:rPr>
+              <a:t>x_M = 0.143487</a:t>
+            </a:r>
+          </a:p>
+        </p:txBody>
+      </p:sp>
+      <p:sp>
+        <p:nvSpPr>
+          <p:cNvPr id="42" name="C1-E20 text 40" descr="sci-ppt:o040"/>
+          <p:cNvSpPr txBox="1"/>
+          <p:nvPr/>
+        </p:nvSpPr>
+        <p:spPr>
+          <a:xfrm>
+            <a:off x="1113460" y="3837968"/>
+            <a:ext cx="2011680" cy="417576"/>
+          </a:xfrm>
+          <a:prstGeom prst="rect">
+            <a:avLst/>
+          </a:prstGeom>
+          <a:noFill/>
+          <a:effectLst/>
+        </p:spPr>
+        <p:txBody>
+          <a:bodyPr wrap="none" lIns="18288" rIns="18288" tIns="18288" bIns="18288" anchor="t">
+            <a:spAutoFit/>
+          </a:bodyPr>
+          <a:lstStyle/>
+          <a:p>
+            <a:pPr algn="l">
+              <a:spcAft>
+                <a:spcPts val="0"/>
+              </a:spcAft>
+            </a:pPr>
+            <a:r>
+              <a:rPr sz="1200" b="0" i="0">
+                <a:solidFill>
+                  <a:srgbClr val="F28BA0"/>
+                </a:solidFill>
+                <a:latin typeface="Arial"/>
+              </a:rPr>
+              <a:t>incompressible model</a:t>
+            </a:r>
+          </a:p>
+          <a:p>
+            <a:pPr algn="l">
+              <a:spcAft>
+                <a:spcPts val="0"/>
+              </a:spcAft>
+            </a:pPr>
+            <a:r>
+              <a:rPr sz="1200" b="0" i="0">
+                <a:solidFill>
+                  <a:srgbClr val="F28BA0"/>
+                </a:solidFill>
+                <a:latin typeface="Arial"/>
+              </a:rPr>
+              <a:t>not trusted here</a:t>
+            </a:r>
+          </a:p>
+        </p:txBody>
+      </p:sp>
+      <p:sp>
+        <p:nvSpPr>
+          <p:cNvPr id="43" name="C1-E20 round_rect 41" descr="sci-ppt:o041"/>
+          <p:cNvSpPr/>
+          <p:nvPr/>
+        </p:nvSpPr>
+        <p:spPr>
+          <a:xfrm>
+            <a:off x="7315200" y="1371600"/>
+            <a:ext cx="4526280" cy="3657600"/>
+          </a:xfrm>
+          <a:prstGeom prst="roundRect">
+            <a:avLst/>
+          </a:prstGeom>
+          <a:solidFill>
+            <a:srgbClr val="213E4B"/>
+          </a:solidFill>
+          <a:ln w="20320">
+            <a:solidFill>
+              <a:srgbClr val="8EDBD4"/>
+            </a:solidFill>
+          </a:ln>
+          <a:effectLst/>
+        </p:spPr>
+        <p:txBody>
+          <a:bodyPr rtlCol="0" anchor="ctr"/>
+          <a:lstStyle/>
+          <a:p>
+            <a:pPr algn="ctr"/>
+          </a:p>
+        </p:txBody>
+      </p:sp>
+      <p:sp>
+        <p:nvSpPr>
+          <p:cNvPr id="44" name="C1-E20 text 42" descr="sci-ppt:o042"/>
+          <p:cNvSpPr txBox="1"/>
+          <p:nvPr/>
+        </p:nvSpPr>
+        <p:spPr>
+          <a:xfrm>
+            <a:off x="7424927" y="1426464"/>
+            <a:ext cx="4306824" cy="254889"/>
+          </a:xfrm>
+          <a:prstGeom prst="rect">
+            <a:avLst/>
+          </a:prstGeom>
+          <a:noFill/>
+          <a:effectLst/>
+        </p:spPr>
+        <p:txBody>
+          <a:bodyPr wrap="none" lIns="18288" rIns="18288" tIns="18288" bIns="18288" anchor="t">
+            <a:spAutoFit/>
+          </a:bodyPr>
+          <a:lstStyle/>
+          <a:p>
+            <a:pPr algn="l">
+              <a:spcAft>
+                <a:spcPts val="0"/>
+              </a:spcAft>
+            </a:pPr>
+            <a:r>
+              <a:rPr sz="1350" b="1" i="0">
+                <a:solidFill>
+                  <a:srgbClr val="8EDBD4"/>
+                </a:solidFill>
+                <a:latin typeface="Arial"/>
+              </a:rPr>
+              <a:t>A diagnostic, not a limit</a:t>
+            </a:r>
+          </a:p>
+        </p:txBody>
+      </p:sp>
+      <p:sp>
+        <p:nvSpPr>
+          <p:cNvPr id="45" name="C1-E20 text 43" descr="sci-ppt:o043"/>
+          <p:cNvSpPr txBox="1"/>
+          <p:nvPr/>
+        </p:nvSpPr>
+        <p:spPr>
+          <a:xfrm>
+            <a:off x="7452360" y="1828800"/>
+            <a:ext cx="4297680" cy="247142"/>
+          </a:xfrm>
+          <a:prstGeom prst="rect">
+            <a:avLst/>
+          </a:prstGeom>
+          <a:noFill/>
+          <a:effectLst/>
+        </p:spPr>
+        <p:txBody>
+          <a:bodyPr wrap="none" lIns="18288" rIns="18288" tIns="18288" bIns="18288" anchor="t">
+            <a:spAutoFit/>
+          </a:bodyPr>
+          <a:lstStyle/>
+          <a:p>
+            <a:pPr algn="l">
+              <a:spcAft>
+                <a:spcPts val="0"/>
+              </a:spcAft>
+            </a:pPr>
+            <a:r>
+              <a:rPr sz="1300" b="1" i="0">
                 <a:solidFill>
                   <a:srgbClr val="E7F0F3"/>
                 </a:solidFill>
                 <a:latin typeface="Arial"/>
               </a:rPr>
-              <a:t>Check both motion and pressure communication.</a:t>
-            </a:r>
-          </a:p>
-        </p:txBody>
-      </p:sp>
-      <p:sp>
-        <p:nvSpPr>
-          <p:cNvPr id="9" name="text8" descr="sci-ppt:C1-E20-008"/>
+              <a:t>x_M = [ 1 + 3ρc²M*² / (2Δp_c) ]^(−1/3)</a:t>
+            </a:r>
+          </a:p>
+        </p:txBody>
+      </p:sp>
+      <p:sp>
+        <p:nvSpPr>
+          <p:cNvPr id="46" name="C1-E20 text 44" descr="sci-ppt:o044"/>
           <p:cNvSpPr txBox="1"/>
           <p:nvPr/>
         </p:nvSpPr>
         <p:spPr>
           <a:xfrm>
-            <a:off x="365760" y="4974336"/>
-            <a:ext cx="5547360" cy="321259"/>
+            <a:off x="7653528" y="2423160"/>
+            <a:ext cx="4096512" cy="433070"/>
           </a:xfrm>
           <a:prstGeom prst="rect">
             <a:avLst/>
@@ -3362,7 +4927,7 @@
           <a:effectLst/>
         </p:spPr>
         <p:txBody>
-          <a:bodyPr wrap="none" lIns="27432" rIns="27432" tIns="18288" bIns="18288" anchor="ctr">
+          <a:bodyPr wrap="none" lIns="18288" rIns="18288" tIns="18288" bIns="18288" anchor="t">
             <a:spAutoFit/>
           </a:bodyPr>
           <a:lstStyle/>
@@ -3373,39 +4938,15 @@
               </a:spcAft>
             </a:pPr>
             <a:r>
-              <a:rPr sz="1632" b="0" i="0">
+              <a:rPr sz="1250" b="0" i="0">
                 <a:solidFill>
                   <a:srgbClr val="E7F0F3"/>
                 </a:solidFill>
                 <a:latin typeface="Arial"/>
               </a:rPr>
-              <a:t>Mw = |Ṙ|/c</a:t>
-            </a:r>
-          </a:p>
-        </p:txBody>
-      </p:sp>
-      <p:sp>
-        <p:nvSpPr>
-          <p:cNvPr id="10" name="text9" descr="sci-ppt:C1-E20-009"/>
-          <p:cNvSpPr txBox="1"/>
-          <p:nvPr/>
-        </p:nvSpPr>
-        <p:spPr>
-          <a:xfrm>
-            <a:off x="365760" y="5266944"/>
-            <a:ext cx="5547360" cy="321259"/>
-          </a:xfrm>
-          <a:prstGeom prst="rect">
-            <a:avLst/>
-          </a:prstGeom>
-          <a:noFill/>
-          <a:effectLst/>
-        </p:spPr>
-        <p:txBody>
-          <a:bodyPr wrap="none" lIns="27432" rIns="27432" tIns="18288" bIns="18288" anchor="ctr">
-            <a:spAutoFit/>
-          </a:bodyPr>
-          <a:lstStyle/>
+              <a:t>With c = 1500 m/s and M* = 0.1 the ideal</a:t>
+            </a:r>
+          </a:p>
           <a:p>
             <a:pPr algn="l">
               <a:spcAft>
@@ -3413,27 +4954,59 @@
               </a:spcAft>
             </a:pPr>
             <a:r>
-              <a:rPr sz="1632" b="0" i="0">
+              <a:rPr sz="1250" b="0" i="0">
                 <a:solidFill>
                   <a:srgbClr val="E7F0F3"/>
                 </a:solidFill>
                 <a:latin typeface="Arial"/>
               </a:rPr>
-              <a:t>c = 1500 m/s</a:t>
-            </a:r>
-          </a:p>
-        </p:txBody>
-      </p:sp>
-      <p:sp>
-        <p:nvSpPr>
-          <p:cNvPr id="11" name="text10" descr="sci-ppt:C1-E20-010"/>
+              <a:t>collapse reaches M* at R = 0.143 Rₘₐₓ.</a:t>
+            </a:r>
+          </a:p>
+        </p:txBody>
+      </p:sp>
+      <p:sp>
+        <p:nvSpPr>
+          <p:cNvPr id="47" name="C1-E20 ellipse 45" descr="sci-ppt:o045"/>
+          <p:cNvSpPr/>
+          <p:nvPr/>
+        </p:nvSpPr>
+        <p:spPr>
+          <a:xfrm>
+            <a:off x="7484364" y="2480437"/>
+            <a:ext cx="82296" cy="82296"/>
+          </a:xfrm>
+          <a:prstGeom prst="ellipse">
+            <a:avLst/>
+          </a:prstGeom>
+          <a:solidFill>
+            <a:srgbClr val="8EDBD4"/>
+          </a:solidFill>
+          <a:ln w="12700">
+            <a:solidFill>
+              <a:srgbClr val="8EDBD4"/>
+            </a:solidFill>
+          </a:ln>
+          <a:effectLst/>
+        </p:spPr>
+        <p:txBody>
+          <a:bodyPr rtlCol="0" anchor="ctr"/>
+          <a:lstStyle/>
+          <a:p>
+            <a:pPr algn="ctr"/>
+          </a:p>
+        </p:txBody>
+      </p:sp>
+      <p:sp>
+        <p:nvSpPr>
+          <p:cNvPr id="48" name="C1-E20 text 46" descr="sci-ppt:o046"/>
           <p:cNvSpPr txBox="1"/>
           <p:nvPr/>
         </p:nvSpPr>
         <p:spPr>
           <a:xfrm>
-            <a:off x="365760" y="5559552"/>
-            <a:ext cx="5547360" cy="321259"/>
+            <a:off x="7653528" y="2901949"/>
+            <a:ext cx="4096512" cy="433070"/>
           </a:xfrm>
           <a:prstGeom prst="rect">
             <a:avLst/>
@@ -3442,7 +5015,7 @@
           <a:effectLst/>
         </p:spPr>
         <p:txBody>
-          <a:bodyPr wrap="none" lIns="27432" rIns="27432" tIns="18288" bIns="18288" anchor="ctr">
+          <a:bodyPr wrap="none" lIns="18288" rIns="18288" tIns="18288" bIns="18288" anchor="t">
             <a:spAutoFit/>
           </a:bodyPr>
           <a:lstStyle/>
@@ -3453,39 +5026,15 @@
               </a:spcAft>
             </a:pPr>
             <a:r>
-              <a:rPr sz="1632" b="0" i="0">
+              <a:rPr sz="1250" b="0" i="0">
                 <a:solidFill>
                   <a:srgbClr val="E7F0F3"/>
                 </a:solidFill>
                 <a:latin typeface="Arial"/>
               </a:rPr>
-              <a:t>xM = RM/Rmax</a:t>
-            </a:r>
-          </a:p>
-        </p:txBody>
-      </p:sp>
-      <p:sp>
-        <p:nvSpPr>
-          <p:cNvPr id="12" name="text11" descr="sci-ppt:C1-E20-011"/>
-          <p:cNvSpPr txBox="1"/>
-          <p:nvPr/>
-        </p:nvSpPr>
-        <p:spPr>
-          <a:xfrm>
-            <a:off x="365760" y="5852160"/>
-            <a:ext cx="5547360" cy="321259"/>
-          </a:xfrm>
-          <a:prstGeom prst="rect">
-            <a:avLst/>
-          </a:prstGeom>
-          <a:noFill/>
-          <a:effectLst/>
-        </p:spPr>
-        <p:txBody>
-          <a:bodyPr wrap="none" lIns="27432" rIns="27432" tIns="18288" bIns="18288" anchor="ctr">
-            <a:spAutoFit/>
-          </a:bodyPr>
-          <a:lstStyle/>
+              <a:t>Inside that radius the speed is large enough</a:t>
+            </a:r>
+          </a:p>
           <a:p>
             <a:pPr algn="l">
               <a:spcAft>
@@ -3493,27 +5042,59 @@
               </a:spcAft>
             </a:pPr>
             <a:r>
-              <a:rPr sz="1632" b="0" i="0">
+              <a:rPr sz="1250" b="0" i="0">
                 <a:solidFill>
                   <a:srgbClr val="E7F0F3"/>
                 </a:solidFill>
                 <a:latin typeface="Arial"/>
               </a:rPr>
-              <a:t>Δpc</a:t>
-            </a:r>
-          </a:p>
-        </p:txBody>
-      </p:sp>
-      <p:sp>
-        <p:nvSpPr>
-          <p:cNvPr id="13" name="text12" descr="sci-ppt:C1-E20-012"/>
+              <a:t>that liquid compressibility must be added.</a:t>
+            </a:r>
+          </a:p>
+        </p:txBody>
+      </p:sp>
+      <p:sp>
+        <p:nvSpPr>
+          <p:cNvPr id="49" name="C1-E20 ellipse 47" descr="sci-ppt:o047"/>
+          <p:cNvSpPr/>
+          <p:nvPr/>
+        </p:nvSpPr>
+        <p:spPr>
+          <a:xfrm>
+            <a:off x="7484364" y="2959226"/>
+            <a:ext cx="82296" cy="82296"/>
+          </a:xfrm>
+          <a:prstGeom prst="ellipse">
+            <a:avLst/>
+          </a:prstGeom>
+          <a:solidFill>
+            <a:srgbClr val="8EDBD4"/>
+          </a:solidFill>
+          <a:ln w="12700">
+            <a:solidFill>
+              <a:srgbClr val="8EDBD4"/>
+            </a:solidFill>
+          </a:ln>
+          <a:effectLst/>
+        </p:spPr>
+        <p:txBody>
+          <a:bodyPr rtlCol="0" anchor="ctr"/>
+          <a:lstStyle/>
+          <a:p>
+            <a:pPr algn="ctr"/>
+          </a:p>
+        </p:txBody>
+      </p:sp>
+      <p:sp>
+        <p:nvSpPr>
+          <p:cNvPr id="50" name="C1-E20 text 48" descr="sci-ppt:o048"/>
           <p:cNvSpPr txBox="1"/>
           <p:nvPr/>
         </p:nvSpPr>
         <p:spPr>
           <a:xfrm>
-            <a:off x="6156960" y="4974336"/>
-            <a:ext cx="5547360" cy="321259"/>
+            <a:off x="7653528" y="3380739"/>
+            <a:ext cx="4096512" cy="433070"/>
           </a:xfrm>
           <a:prstGeom prst="rect">
             <a:avLst/>
@@ -3522,7 +5103,7 @@
           <a:effectLst/>
         </p:spPr>
         <p:txBody>
-          <a:bodyPr wrap="none" lIns="27432" rIns="27432" tIns="18288" bIns="18288" anchor="ctr">
+          <a:bodyPr wrap="none" lIns="18288" rIns="18288" tIns="18288" bIns="18288" anchor="t">
             <a:spAutoFit/>
           </a:bodyPr>
           <a:lstStyle/>
@@ -3533,39 +5114,15 @@
               </a:spcAft>
             </a:pPr>
             <a:r>
-              <a:rPr sz="1632" b="0" i="0">
+              <a:rPr sz="1250" b="0" i="0">
                 <a:solidFill>
                   <a:srgbClr val="E7F0F3"/>
                 </a:solidFill>
                 <a:latin typeface="Arial"/>
               </a:rPr>
-              <a:t>Ṙ</a:t>
-            </a:r>
-          </a:p>
-        </p:txBody>
-      </p:sp>
-      <p:sp>
-        <p:nvSpPr>
-          <p:cNvPr id="14" name="text13" descr="sci-ppt:C1-E20-013"/>
-          <p:cNvSpPr txBox="1"/>
-          <p:nvPr/>
-        </p:nvSpPr>
-        <p:spPr>
-          <a:xfrm>
-            <a:off x="6156960" y="5266944"/>
-            <a:ext cx="5547360" cy="321259"/>
-          </a:xfrm>
-          <a:prstGeom prst="rect">
-            <a:avLst/>
-          </a:prstGeom>
-          <a:noFill/>
-          <a:effectLst/>
-        </p:spPr>
-        <p:txBody>
-          <a:bodyPr wrap="none" lIns="27432" rIns="27432" tIns="18288" bIns="18288" anchor="ctr">
-            <a:spAutoFit/>
-          </a:bodyPr>
-          <a:lstStyle/>
+              <a:t>The ideal trajectory itself is not a physical</a:t>
+            </a:r>
+          </a:p>
           <a:p>
             <a:pPr algn="l">
               <a:spcAft>
@@ -3573,27 +5130,59 @@
               </a:spcAft>
             </a:pPr>
             <a:r>
-              <a:rPr sz="1632" b="0" i="0">
+              <a:rPr sz="1250" b="0" i="0">
                 <a:solidFill>
                   <a:srgbClr val="E7F0F3"/>
                 </a:solidFill>
                 <a:latin typeface="Arial"/>
               </a:rPr>
-              <a:t>M* = 0.1</a:t>
-            </a:r>
-          </a:p>
-        </p:txBody>
-      </p:sp>
-      <p:sp>
-        <p:nvSpPr>
-          <p:cNvPr id="15" name="text14" descr="sci-ppt:C1-E20-014"/>
+              <a:t>prediction.</a:t>
+            </a:r>
+          </a:p>
+        </p:txBody>
+      </p:sp>
+      <p:sp>
+        <p:nvSpPr>
+          <p:cNvPr id="51" name="C1-E20 ellipse 49" descr="sci-ppt:o049"/>
+          <p:cNvSpPr/>
+          <p:nvPr/>
+        </p:nvSpPr>
+        <p:spPr>
+          <a:xfrm>
+            <a:off x="7484364" y="3438016"/>
+            <a:ext cx="82296" cy="82296"/>
+          </a:xfrm>
+          <a:prstGeom prst="ellipse">
+            <a:avLst/>
+          </a:prstGeom>
+          <a:solidFill>
+            <a:srgbClr val="8EDBD4"/>
+          </a:solidFill>
+          <a:ln w="12700">
+            <a:solidFill>
+              <a:srgbClr val="8EDBD4"/>
+            </a:solidFill>
+          </a:ln>
+          <a:effectLst/>
+        </p:spPr>
+        <p:txBody>
+          <a:bodyPr rtlCol="0" anchor="ctr"/>
+          <a:lstStyle/>
+          <a:p>
+            <a:pPr algn="ctr"/>
+          </a:p>
+        </p:txBody>
+      </p:sp>
+      <p:sp>
+        <p:nvSpPr>
+          <p:cNvPr id="52" name="C1-E20 text 50" descr="sci-ppt:o050"/>
           <p:cNvSpPr txBox="1"/>
           <p:nvPr/>
         </p:nvSpPr>
         <p:spPr>
           <a:xfrm>
-            <a:off x="6156960" y="5559552"/>
-            <a:ext cx="5547360" cy="321259"/>
+            <a:off x="914400" y="5733288"/>
+            <a:ext cx="10972800" cy="247142"/>
           </a:xfrm>
           <a:prstGeom prst="rect">
             <a:avLst/>
@@ -3602,7 +5191,7 @@
           <a:effectLst/>
         </p:spPr>
         <p:txBody>
-          <a:bodyPr wrap="none" lIns="27432" rIns="27432" tIns="18288" bIns="18288" anchor="ctr">
+          <a:bodyPr wrap="none" lIns="18288" rIns="18288" tIns="18288" bIns="18288" anchor="t">
             <a:spAutoFit/>
           </a:bodyPr>
           <a:lstStyle/>
@@ -3613,27 +5202,27 @@
               </a:spcAft>
             </a:pPr>
             <a:r>
-              <a:rPr sz="1632" b="0" i="0">
+              <a:rPr sz="1300" b="0" i="0">
                 <a:solidFill>
                   <a:srgbClr val="E7F0F3"/>
                 </a:solidFill>
                 <a:latin typeface="Arial"/>
               </a:rPr>
-              <a:t>ρ</a:t>
-            </a:r>
-          </a:p>
-        </p:txBody>
-      </p:sp>
-      <p:sp>
-        <p:nvSpPr>
-          <p:cNvPr id="16" name="text15" descr="sci-ppt:C1-E20-015"/>
+              <a:t>Wall Mach number M_w = |Ṙ|/c grows as R shrinks, so the incompressible formulas lose validity near the end of the collapse.</a:t>
+            </a:r>
+          </a:p>
+        </p:txBody>
+      </p:sp>
+      <p:sp>
+        <p:nvSpPr>
+          <p:cNvPr id="53" name="C1-E20 text 51" descr="sci-ppt:o051"/>
           <p:cNvSpPr txBox="1"/>
           <p:nvPr/>
         </p:nvSpPr>
         <p:spPr>
           <a:xfrm>
-            <a:off x="6156960" y="5852160"/>
-            <a:ext cx="5547360" cy="321259"/>
+            <a:off x="320040" y="6510528"/>
+            <a:ext cx="11521440" cy="200660"/>
           </a:xfrm>
           <a:prstGeom prst="rect">
             <a:avLst/>
@@ -3642,7 +5231,7 @@
           <a:effectLst/>
         </p:spPr>
         <p:txBody>
-          <a:bodyPr wrap="none" lIns="27432" rIns="27432" tIns="18288" bIns="18288" anchor="ctr">
+          <a:bodyPr wrap="none" lIns="18288" rIns="18288" tIns="18288" bIns="18288" anchor="t">
             <a:spAutoFit/>
           </a:bodyPr>
           <a:lstStyle/>
@@ -3653,53 +5242,13 @@
               </a:spcAft>
             </a:pPr>
             <a:r>
-              <a:rPr sz="1632" b="0" i="0">
-                <a:solidFill>
-                  <a:srgbClr val="E7F0F3"/>
-                </a:solidFill>
-                <a:latin typeface="Arial"/>
-              </a:rPr>
-              <a:t>RM ≈ 4.305 μm</a:t>
-            </a:r>
-          </a:p>
-        </p:txBody>
-      </p:sp>
-      <p:sp>
-        <p:nvSpPr>
-          <p:cNvPr id="17" name="text16" descr="sci-ppt:C1-E20-016"/>
-          <p:cNvSpPr txBox="1"/>
-          <p:nvPr/>
-        </p:nvSpPr>
-        <p:spPr>
-          <a:xfrm>
-            <a:off x="365760" y="6339840"/>
-            <a:ext cx="11277600" cy="302361"/>
-          </a:xfrm>
-          <a:prstGeom prst="rect">
-            <a:avLst/>
-          </a:prstGeom>
-          <a:noFill/>
-          <a:effectLst/>
-        </p:spPr>
-        <p:txBody>
-          <a:bodyPr wrap="none" lIns="27432" rIns="27432" tIns="18288" bIns="18288" anchor="ctr">
-            <a:spAutoFit/>
-          </a:bodyPr>
-          <a:lstStyle/>
-          <a:p>
-            <a:pPr algn="l">
-              <a:spcAft>
-                <a:spcPts val="0"/>
-              </a:spcAft>
-            </a:pPr>
-            <a:r>
-              <a:rPr sz="1536" b="0" i="0">
+              <a:rPr sz="1000" b="0" i="0">
                 <a:solidFill>
                   <a:srgbClr val="B4C7D2"/>
                 </a:solidFill>
                 <a:latin typeface="Arial"/>
               </a:rPr>
-              <a:t>The selected threshold flags omitted physics; it does not stop a real cavity</a:t>
+              <a:t>Curve from Eq. C1-E15 with c = 1500 m/s; threshold from Eq. C1-E20 (teaching inputs).</a:t>
             </a:r>
           </a:p>
         </p:txBody>

--- a/assets/figures-editable/c1-c2/c1-e20.pptx
+++ b/assets/figures-editable/c1-c2/c1-e20.pptx
@@ -3131,7 +3131,7 @@
                 </a:solidFill>
                 <a:latin typeface="Arial"/>
               </a:rPr>
-              <a:t>C1-E20 · Ideal-trajectory diagnostic, not a physical limit</a:t>
+              <a:t>C1-E20 · Definition of local pressure impulse</a:t>
             </a:r>
           </a:p>
         </p:txBody>
@@ -3145,7 +3145,7 @@
         <p:spPr>
           <a:xfrm>
             <a:off x="914400" y="5029200"/>
-            <a:ext cx="6035040" cy="0"/>
+            <a:ext cx="6583679" cy="0"/>
           </a:xfrm>
           <a:prstGeom prst="line">
             <a:avLst/>
@@ -3259,7 +3259,7 @@
                 </a:solidFill>
                 <a:latin typeface="Arial"/>
               </a:rPr>
-              <a:t>0.025</a:t>
+              <a:t>0.0</a:t>
             </a:r>
           </a:p>
         </p:txBody>
@@ -3272,7 +3272,7 @@
         </p:nvCxnSpPr>
         <p:spPr>
           <a:xfrm>
-            <a:off x="2048395" y="5029200"/>
+            <a:off x="2560320" y="5029200"/>
             <a:ext cx="0" cy="64008"/>
           </a:xfrm>
           <a:prstGeom prst="line">
@@ -3294,7 +3294,7 @@
         </p:nvCxnSpPr>
         <p:spPr>
           <a:xfrm>
-            <a:off x="2048395" y="1371600"/>
+            <a:off x="2560320" y="1371600"/>
             <a:ext cx="0" cy="3657600"/>
           </a:xfrm>
           <a:prstGeom prst="line">
@@ -3316,7 +3316,7 @@
         </p:nvSpPr>
         <p:spPr>
           <a:xfrm>
-            <a:off x="1591195" y="5111496"/>
+            <a:off x="2103120" y="5111496"/>
             <a:ext cx="914400" cy="208407"/>
           </a:xfrm>
           <a:prstGeom prst="rect">
@@ -3343,7 +3343,7 @@
                 </a:solidFill>
                 <a:latin typeface="Arial"/>
               </a:rPr>
-              <a:t>0.05</a:t>
+              <a:t>0.5</a:t>
             </a:r>
           </a:p>
         </p:txBody>
@@ -3356,7 +3356,7 @@
         </p:nvCxnSpPr>
         <p:spPr>
           <a:xfrm>
-            <a:off x="3182390" y="5029200"/>
+            <a:off x="4206240" y="5029200"/>
             <a:ext cx="0" cy="64008"/>
           </a:xfrm>
           <a:prstGeom prst="line">
@@ -3378,7 +3378,7 @@
         </p:nvCxnSpPr>
         <p:spPr>
           <a:xfrm>
-            <a:off x="3182390" y="1371600"/>
+            <a:off x="4206240" y="1371600"/>
             <a:ext cx="0" cy="3657600"/>
           </a:xfrm>
           <a:prstGeom prst="line">
@@ -3400,7 +3400,7 @@
         </p:nvSpPr>
         <p:spPr>
           <a:xfrm>
-            <a:off x="2725190" y="5111496"/>
+            <a:off x="3749039" y="5111496"/>
             <a:ext cx="914400" cy="208407"/>
           </a:xfrm>
           <a:prstGeom prst="rect">
@@ -3427,7 +3427,7 @@
                 </a:solidFill>
                 <a:latin typeface="Arial"/>
               </a:rPr>
-              <a:t>0.1</a:t>
+              <a:t>1.0</a:t>
             </a:r>
           </a:p>
         </p:txBody>
@@ -3440,7 +3440,7 @@
         </p:nvCxnSpPr>
         <p:spPr>
           <a:xfrm>
-            <a:off x="4316385" y="5029200"/>
+            <a:off x="5852160" y="5029200"/>
             <a:ext cx="0" cy="64008"/>
           </a:xfrm>
           <a:prstGeom prst="line">
@@ -3462,7 +3462,7 @@
         </p:nvCxnSpPr>
         <p:spPr>
           <a:xfrm>
-            <a:off x="4316385" y="1371600"/>
+            <a:off x="5852160" y="1371600"/>
             <a:ext cx="0" cy="3657600"/>
           </a:xfrm>
           <a:prstGeom prst="line">
@@ -3484,7 +3484,7 @@
         </p:nvSpPr>
         <p:spPr>
           <a:xfrm>
-            <a:off x="3859185" y="5111496"/>
+            <a:off x="5394960" y="5111496"/>
             <a:ext cx="914400" cy="208407"/>
           </a:xfrm>
           <a:prstGeom prst="rect">
@@ -3511,7 +3511,7 @@
                 </a:solidFill>
                 <a:latin typeface="Arial"/>
               </a:rPr>
-              <a:t>0.2</a:t>
+              <a:t>1.5</a:t>
             </a:r>
           </a:p>
         </p:txBody>
@@ -3524,7 +3524,7 @@
         </p:nvCxnSpPr>
         <p:spPr>
           <a:xfrm>
-            <a:off x="5815444" y="5029200"/>
+            <a:off x="7498079" y="5029200"/>
             <a:ext cx="0" cy="64008"/>
           </a:xfrm>
           <a:prstGeom prst="line">
@@ -3546,7 +3546,7 @@
         </p:nvCxnSpPr>
         <p:spPr>
           <a:xfrm>
-            <a:off x="5815444" y="1371600"/>
+            <a:off x="7498079" y="1371600"/>
             <a:ext cx="0" cy="3657600"/>
           </a:xfrm>
           <a:prstGeom prst="line">
@@ -3568,7 +3568,7 @@
         </p:nvSpPr>
         <p:spPr>
           <a:xfrm>
-            <a:off x="5358244" y="5111496"/>
+            <a:off x="7040879" y="5111496"/>
             <a:ext cx="914400" cy="208407"/>
           </a:xfrm>
           <a:prstGeom prst="rect">
@@ -3595,7 +3595,7 @@
                 </a:solidFill>
                 <a:latin typeface="Arial"/>
               </a:rPr>
-              <a:t>0.5</a:t>
+              <a:t>2.0</a:t>
             </a:r>
           </a:p>
         </p:txBody>
@@ -3603,90 +3603,6 @@
       <p:cxnSp>
         <p:nvCxnSpPr>
           <p:cNvPr id="20" name="C1-E20 line 18" descr="sci-ppt:o018"/>
-          <p:cNvCxnSpPr/>
-          <p:nvPr/>
-        </p:nvCxnSpPr>
-        <p:spPr>
-          <a:xfrm>
-            <a:off x="6949440" y="5029200"/>
-            <a:ext cx="0" cy="64008"/>
-          </a:xfrm>
-          <a:prstGeom prst="line">
-            <a:avLst/>
-          </a:prstGeom>
-          <a:ln w="12700">
-            <a:solidFill>
-              <a:srgbClr val="B4C7D2"/>
-            </a:solidFill>
-          </a:ln>
-          <a:effectLst/>
-        </p:spPr>
-      </p:cxnSp>
-      <p:cxnSp>
-        <p:nvCxnSpPr>
-          <p:cNvPr id="21" name="C1-E20 line 19" descr="sci-ppt:o019"/>
-          <p:cNvCxnSpPr/>
-          <p:nvPr/>
-        </p:nvCxnSpPr>
-        <p:spPr>
-          <a:xfrm>
-            <a:off x="6949440" y="1371600"/>
-            <a:ext cx="0" cy="3657600"/>
-          </a:xfrm>
-          <a:prstGeom prst="line">
-            <a:avLst/>
-          </a:prstGeom>
-          <a:ln w="7620">
-            <a:solidFill>
-              <a:srgbClr val="2E4756"/>
-            </a:solidFill>
-          </a:ln>
-          <a:effectLst/>
-        </p:spPr>
-      </p:cxnSp>
-      <p:sp>
-        <p:nvSpPr>
-          <p:cNvPr id="22" name="C1-E20 text 20" descr="sci-ppt:o020"/>
-          <p:cNvSpPr txBox="1"/>
-          <p:nvPr/>
-        </p:nvSpPr>
-        <p:spPr>
-          <a:xfrm>
-            <a:off x="6492240" y="5111496"/>
-            <a:ext cx="914400" cy="208407"/>
-          </a:xfrm>
-          <a:prstGeom prst="rect">
-            <a:avLst/>
-          </a:prstGeom>
-          <a:noFill/>
-          <a:effectLst/>
-        </p:spPr>
-        <p:txBody>
-          <a:bodyPr wrap="none" lIns="18288" rIns="18288" tIns="18288" bIns="18288" anchor="t">
-            <a:spAutoFit/>
-          </a:bodyPr>
-          <a:lstStyle/>
-          <a:p>
-            <a:pPr algn="ctr">
-              <a:spcAft>
-                <a:spcPts val="0"/>
-              </a:spcAft>
-            </a:pPr>
-            <a:r>
-              <a:rPr sz="1050" b="0" i="0">
-                <a:solidFill>
-                  <a:srgbClr val="B4C7D2"/>
-                </a:solidFill>
-                <a:latin typeface="Arial"/>
-              </a:rPr>
-              <a:t>1</a:t>
-            </a:r>
-          </a:p>
-        </p:txBody>
-      </p:sp>
-      <p:cxnSp>
-        <p:nvCxnSpPr>
-          <p:cNvPr id="23" name="C1-E20 line 21" descr="sci-ppt:o021"/>
           <p:cNvCxnSpPr/>
           <p:nvPr/>
         </p:nvCxnSpPr>
@@ -3708,13 +3624,97 @@
       </p:cxnSp>
       <p:cxnSp>
         <p:nvCxnSpPr>
+          <p:cNvPr id="21" name="C1-E20 line 19" descr="sci-ppt:o019"/>
+          <p:cNvCxnSpPr/>
+          <p:nvPr/>
+        </p:nvCxnSpPr>
+        <p:spPr>
+          <a:xfrm>
+            <a:off x="850392" y="4053840"/>
+            <a:ext cx="64008" cy="0"/>
+          </a:xfrm>
+          <a:prstGeom prst="line">
+            <a:avLst/>
+          </a:prstGeom>
+          <a:ln w="12700">
+            <a:solidFill>
+              <a:srgbClr val="B4C7D2"/>
+            </a:solidFill>
+          </a:ln>
+          <a:effectLst/>
+        </p:spPr>
+      </p:cxnSp>
+      <p:cxnSp>
+        <p:nvCxnSpPr>
+          <p:cNvPr id="22" name="C1-E20 line 20" descr="sci-ppt:o020"/>
+          <p:cNvCxnSpPr/>
+          <p:nvPr/>
+        </p:nvCxnSpPr>
+        <p:spPr>
+          <a:xfrm>
+            <a:off x="914400" y="4053840"/>
+            <a:ext cx="6583679" cy="0"/>
+          </a:xfrm>
+          <a:prstGeom prst="line">
+            <a:avLst/>
+          </a:prstGeom>
+          <a:ln w="7620">
+            <a:solidFill>
+              <a:srgbClr val="2E4756"/>
+            </a:solidFill>
+          </a:ln>
+          <a:effectLst/>
+        </p:spPr>
+      </p:cxnSp>
+      <p:sp>
+        <p:nvSpPr>
+          <p:cNvPr id="23" name="C1-E20 text 21" descr="sci-ppt:o021"/>
+          <p:cNvSpPr txBox="1"/>
+          <p:nvPr/>
+        </p:nvSpPr>
+        <p:spPr>
+          <a:xfrm>
+            <a:off x="45720" y="3971544"/>
+            <a:ext cx="777240" cy="208407"/>
+          </a:xfrm>
+          <a:prstGeom prst="rect">
+            <a:avLst/>
+          </a:prstGeom>
+          <a:noFill/>
+          <a:effectLst/>
+        </p:spPr>
+        <p:txBody>
+          <a:bodyPr wrap="none" lIns="18288" rIns="18288" tIns="18288" bIns="18288" anchor="t">
+            <a:spAutoFit/>
+          </a:bodyPr>
+          <a:lstStyle/>
+          <a:p>
+            <a:pPr algn="r">
+              <a:spcAft>
+                <a:spcPts val="0"/>
+              </a:spcAft>
+            </a:pPr>
+            <a:r>
+              <a:rPr sz="1050" b="0" i="0">
+                <a:solidFill>
+                  <a:srgbClr val="B4C7D2"/>
+                </a:solidFill>
+                <a:latin typeface="Arial"/>
+              </a:rPr>
+              <a:t>0.2</a:t>
+            </a:r>
+          </a:p>
+        </p:txBody>
+      </p:sp>
+      <p:cxnSp>
+        <p:nvCxnSpPr>
           <p:cNvPr id="24" name="C1-E20 line 22" descr="sci-ppt:o022"/>
           <p:cNvCxnSpPr/>
           <p:nvPr/>
         </p:nvCxnSpPr>
         <p:spPr>
           <a:xfrm>
-            <a:off x="850392" y="3810000"/>
+            <a:off x="850392" y="3078480"/>
             <a:ext cx="64008" cy="0"/>
           </a:xfrm>
           <a:prstGeom prst="line">
@@ -3736,8 +3736,8 @@
         </p:nvCxnSpPr>
         <p:spPr>
           <a:xfrm>
-            <a:off x="914400" y="3810000"/>
-            <a:ext cx="6035040" cy="0"/>
+            <a:off x="914400" y="3078480"/>
+            <a:ext cx="6583679" cy="0"/>
           </a:xfrm>
           <a:prstGeom prst="line">
             <a:avLst/>
@@ -3758,7 +3758,7 @@
         </p:nvSpPr>
         <p:spPr>
           <a:xfrm>
-            <a:off x="45720" y="3727704"/>
+            <a:off x="45720" y="2996184"/>
             <a:ext cx="777240" cy="208407"/>
           </a:xfrm>
           <a:prstGeom prst="rect">
@@ -3785,7 +3785,7 @@
                 </a:solidFill>
                 <a:latin typeface="Arial"/>
               </a:rPr>
-              <a:t>0.01</a:t>
+              <a:t>0.4</a:t>
             </a:r>
           </a:p>
         </p:txBody>
@@ -3798,7 +3798,7 @@
         </p:nvCxnSpPr>
         <p:spPr>
           <a:xfrm>
-            <a:off x="850392" y="2590800"/>
+            <a:off x="850392" y="2103120"/>
             <a:ext cx="64008" cy="0"/>
           </a:xfrm>
           <a:prstGeom prst="line">
@@ -3820,8 +3820,8 @@
         </p:nvCxnSpPr>
         <p:spPr>
           <a:xfrm>
-            <a:off x="914400" y="2590800"/>
-            <a:ext cx="6035040" cy="0"/>
+            <a:off x="914400" y="2103120"/>
+            <a:ext cx="6583679" cy="0"/>
           </a:xfrm>
           <a:prstGeom prst="line">
             <a:avLst/>
@@ -3842,7 +3842,7 @@
         </p:nvSpPr>
         <p:spPr>
           <a:xfrm>
-            <a:off x="45720" y="2508504"/>
+            <a:off x="45720" y="2020824"/>
             <a:ext cx="777240" cy="208407"/>
           </a:xfrm>
           <a:prstGeom prst="rect">
@@ -3869,65 +3869,21 @@
                 </a:solidFill>
                 <a:latin typeface="Arial"/>
               </a:rPr>
-              <a:t>0.1</a:t>
+              <a:t>0.6</a:t>
             </a:r>
           </a:p>
         </p:txBody>
       </p:sp>
-      <p:cxnSp>
-        <p:nvCxnSpPr>
-          <p:cNvPr id="30" name="C1-E20 line 28" descr="sci-ppt:o028"/>
-          <p:cNvCxnSpPr/>
-          <p:nvPr/>
-        </p:nvCxnSpPr>
-        <p:spPr>
-          <a:xfrm>
-            <a:off x="850392" y="1371600"/>
-            <a:ext cx="64008" cy="0"/>
-          </a:xfrm>
-          <a:prstGeom prst="line">
-            <a:avLst/>
-          </a:prstGeom>
-          <a:ln w="12700">
-            <a:solidFill>
-              <a:srgbClr val="B4C7D2"/>
-            </a:solidFill>
-          </a:ln>
-          <a:effectLst/>
-        </p:spPr>
-      </p:cxnSp>
-      <p:cxnSp>
-        <p:nvCxnSpPr>
-          <p:cNvPr id="31" name="C1-E20 line 29" descr="sci-ppt:o029"/>
-          <p:cNvCxnSpPr/>
-          <p:nvPr/>
-        </p:nvCxnSpPr>
-        <p:spPr>
-          <a:xfrm>
-            <a:off x="914400" y="1371600"/>
-            <a:ext cx="6035040" cy="0"/>
-          </a:xfrm>
-          <a:prstGeom prst="line">
-            <a:avLst/>
-          </a:prstGeom>
-          <a:ln w="7620">
-            <a:solidFill>
-              <a:srgbClr val="2E4756"/>
-            </a:solidFill>
-          </a:ln>
-          <a:effectLst/>
-        </p:spPr>
-      </p:cxnSp>
       <p:sp>
         <p:nvSpPr>
-          <p:cNvPr id="32" name="C1-E20 text 30" descr="sci-ppt:o030"/>
+          <p:cNvPr id="30" name="C1-E20 text 28" descr="sci-ppt:o028"/>
           <p:cNvSpPr txBox="1"/>
           <p:nvPr/>
         </p:nvSpPr>
         <p:spPr>
           <a:xfrm>
-            <a:off x="45720" y="1289304"/>
-            <a:ext cx="777240" cy="208407"/>
+            <a:off x="914400" y="5312664"/>
+            <a:ext cx="6583680" cy="231648"/>
           </a:xfrm>
           <a:prstGeom prst="rect">
             <a:avLst/>
@@ -3941,33 +3897,33 @@
           </a:bodyPr>
           <a:lstStyle/>
           <a:p>
-            <a:pPr algn="r">
+            <a:pPr algn="ctr">
               <a:spcAft>
                 <a:spcPts val="0"/>
               </a:spcAft>
             </a:pPr>
             <a:r>
-              <a:rPr sz="1050" b="0" i="0">
+              <a:rPr sz="1200" b="0" i="0">
                 <a:solidFill>
-                  <a:srgbClr val="B4C7D2"/>
+                  <a:srgbClr val="E7F0F3"/>
                 </a:solidFill>
                 <a:latin typeface="Arial"/>
               </a:rPr>
-              <a:t>1</a:t>
+              <a:t>t  (µs)</a:t>
             </a:r>
           </a:p>
         </p:txBody>
       </p:sp>
       <p:sp>
         <p:nvSpPr>
-          <p:cNvPr id="33" name="C1-E20 text 31" descr="sci-ppt:o031"/>
+          <p:cNvPr id="31" name="C1-E20 text 29" descr="sci-ppt:o029"/>
           <p:cNvSpPr txBox="1"/>
           <p:nvPr/>
         </p:nvSpPr>
         <p:spPr>
           <a:xfrm>
-            <a:off x="914400" y="5312664"/>
-            <a:ext cx="6035040" cy="231648"/>
+            <a:off x="365760" y="1024128"/>
+            <a:ext cx="6583680" cy="231648"/>
           </a:xfrm>
           <a:prstGeom prst="rect">
             <a:avLst/>
@@ -3981,46 +3937,6 @@
           </a:bodyPr>
           <a:lstStyle/>
           <a:p>
-            <a:pPr algn="ctr">
-              <a:spcAft>
-                <a:spcPts val="0"/>
-              </a:spcAft>
-            </a:pPr>
-            <a:r>
-              <a:rPr sz="1200" b="0" i="0">
-                <a:solidFill>
-                  <a:srgbClr val="E7F0F3"/>
-                </a:solidFill>
-                <a:latin typeface="Arial"/>
-              </a:rPr>
-              <a:t>R / Rₘₐₓ</a:t>
-            </a:r>
-          </a:p>
-        </p:txBody>
-      </p:sp>
-      <p:sp>
-        <p:nvSpPr>
-          <p:cNvPr id="34" name="C1-E20 text 32" descr="sci-ppt:o032"/>
-          <p:cNvSpPr txBox="1"/>
-          <p:nvPr/>
-        </p:nvSpPr>
-        <p:spPr>
-          <a:xfrm>
-            <a:off x="365760" y="1024128"/>
-            <a:ext cx="6035040" cy="231648"/>
-          </a:xfrm>
-          <a:prstGeom prst="rect">
-            <a:avLst/>
-          </a:prstGeom>
-          <a:noFill/>
-          <a:effectLst/>
-        </p:spPr>
-        <p:txBody>
-          <a:bodyPr wrap="none" lIns="18288" rIns="18288" tIns="18288" bIns="18288" anchor="t">
-            <a:spAutoFit/>
-          </a:bodyPr>
-          <a:lstStyle/>
-          <a:p>
             <a:pPr algn="l">
               <a:spcAft>
                 <a:spcPts val="0"/>
@@ -4033,21 +3949,21 @@
                 </a:solidFill>
                 <a:latin typeface="Arial"/>
               </a:rPr>
-              <a:t>wall Mach number |Ṙ| / c</a:t>
+              <a:t>p − p_ref  (MPa)</a:t>
             </a:r>
           </a:p>
         </p:txBody>
       </p:sp>
       <p:sp>
         <p:nvSpPr>
-          <p:cNvPr id="35" name="C1-E20 polygon 33" descr="sci-ppt:o033"/>
+          <p:cNvPr id="32" name="C1-E20 polygon 30" descr="sci-ppt:o030"/>
           <p:cNvSpPr/>
           <p:nvPr/>
         </p:nvSpPr>
         <p:spPr>
           <a:xfrm>
-            <a:off x="922160" y="1371600"/>
-            <a:ext cx="6007121" cy="3628605"/>
+            <a:off x="914400" y="4053840"/>
+            <a:ext cx="6583679" cy="975360"/>
           </a:xfrm>
           <a:custGeom>
             <a:avLst/>
@@ -4056,456 +3972,7311 @@
             <a:cxnLst/>
             <a:rect l="l" t="t" r="r" b="b"/>
             <a:pathLst>
-              <a:path w="6007121" h="3628605">
+              <a:path w="6583679" h="975360">
                 <a:moveTo>
                   <a:pt x="0" y="0"/>
                 </a:moveTo>
                 <a:lnTo>
-                  <a:pt x="40316" y="0"/>
-                </a:lnTo>
-                <a:lnTo>
-                  <a:pt x="80632" y="0"/>
-                </a:lnTo>
-                <a:lnTo>
-                  <a:pt x="120948" y="0"/>
-                </a:lnTo>
-                <a:lnTo>
-                  <a:pt x="161265" y="0"/>
-                </a:lnTo>
-                <a:lnTo>
-                  <a:pt x="201581" y="0"/>
-                </a:lnTo>
-                <a:lnTo>
-                  <a:pt x="241897" y="0"/>
-                </a:lnTo>
-                <a:lnTo>
-                  <a:pt x="282213" y="0"/>
-                </a:lnTo>
-                <a:lnTo>
-                  <a:pt x="322530" y="0"/>
-                </a:lnTo>
-                <a:lnTo>
-                  <a:pt x="362846" y="10515"/>
-                </a:lnTo>
-                <a:lnTo>
-                  <a:pt x="403162" y="30088"/>
-                </a:lnTo>
-                <a:lnTo>
-                  <a:pt x="443478" y="49662"/>
-                </a:lnTo>
-                <a:lnTo>
-                  <a:pt x="483795" y="69235"/>
-                </a:lnTo>
-                <a:lnTo>
-                  <a:pt x="524111" y="88808"/>
-                </a:lnTo>
-                <a:lnTo>
-                  <a:pt x="564427" y="108381"/>
-                </a:lnTo>
-                <a:lnTo>
-                  <a:pt x="604743" y="127955"/>
-                </a:lnTo>
-                <a:lnTo>
-                  <a:pt x="645060" y="147528"/>
-                </a:lnTo>
-                <a:lnTo>
-                  <a:pt x="685376" y="167101"/>
-                </a:lnTo>
-                <a:lnTo>
-                  <a:pt x="725692" y="186675"/>
-                </a:lnTo>
-                <a:lnTo>
-                  <a:pt x="766008" y="206249"/>
-                </a:lnTo>
-                <a:lnTo>
-                  <a:pt x="806325" y="225822"/>
-                </a:lnTo>
-                <a:lnTo>
-                  <a:pt x="846641" y="245396"/>
-                </a:lnTo>
-                <a:lnTo>
-                  <a:pt x="886957" y="264970"/>
-                </a:lnTo>
-                <a:lnTo>
-                  <a:pt x="927273" y="284544"/>
-                </a:lnTo>
-                <a:lnTo>
-                  <a:pt x="967590" y="304119"/>
-                </a:lnTo>
-                <a:lnTo>
-                  <a:pt x="1007906" y="323693"/>
-                </a:lnTo>
-                <a:lnTo>
-                  <a:pt x="1048222" y="343267"/>
-                </a:lnTo>
-                <a:lnTo>
-                  <a:pt x="1088538" y="362842"/>
-                </a:lnTo>
-                <a:lnTo>
-                  <a:pt x="1128855" y="382417"/>
-                </a:lnTo>
-                <a:lnTo>
-                  <a:pt x="1169171" y="401992"/>
-                </a:lnTo>
-                <a:lnTo>
-                  <a:pt x="1209487" y="421567"/>
-                </a:lnTo>
-                <a:lnTo>
-                  <a:pt x="1249803" y="441142"/>
-                </a:lnTo>
-                <a:lnTo>
-                  <a:pt x="1290120" y="460718"/>
-                </a:lnTo>
-                <a:lnTo>
-                  <a:pt x="1330436" y="480294"/>
-                </a:lnTo>
-                <a:lnTo>
-                  <a:pt x="1370752" y="499870"/>
-                </a:lnTo>
-                <a:lnTo>
-                  <a:pt x="1411068" y="519446"/>
-                </a:lnTo>
-                <a:lnTo>
-                  <a:pt x="1451385" y="539023"/>
-                </a:lnTo>
-                <a:lnTo>
-                  <a:pt x="1491701" y="558600"/>
-                </a:lnTo>
-                <a:lnTo>
-                  <a:pt x="1532017" y="578178"/>
-                </a:lnTo>
-                <a:lnTo>
-                  <a:pt x="1572333" y="597755"/>
-                </a:lnTo>
-                <a:lnTo>
-                  <a:pt x="1612650" y="617334"/>
-                </a:lnTo>
-                <a:lnTo>
-                  <a:pt x="1652966" y="636912"/>
-                </a:lnTo>
-                <a:lnTo>
-                  <a:pt x="1693282" y="656491"/>
-                </a:lnTo>
-                <a:lnTo>
-                  <a:pt x="1733598" y="676071"/>
-                </a:lnTo>
-                <a:lnTo>
-                  <a:pt x="1773915" y="695651"/>
-                </a:lnTo>
-                <a:lnTo>
-                  <a:pt x="1814231" y="715232"/>
-                </a:lnTo>
-                <a:lnTo>
-                  <a:pt x="1854547" y="734813"/>
-                </a:lnTo>
-                <a:lnTo>
-                  <a:pt x="1894864" y="754395"/>
-                </a:lnTo>
-                <a:lnTo>
-                  <a:pt x="1935180" y="773978"/>
-                </a:lnTo>
-                <a:lnTo>
-                  <a:pt x="1975496" y="793562"/>
-                </a:lnTo>
-                <a:lnTo>
-                  <a:pt x="2015812" y="813146"/>
-                </a:lnTo>
-                <a:lnTo>
-                  <a:pt x="2056129" y="832732"/>
-                </a:lnTo>
-                <a:lnTo>
-                  <a:pt x="2096445" y="852318"/>
-                </a:lnTo>
-                <a:lnTo>
-                  <a:pt x="2136761" y="871906"/>
-                </a:lnTo>
-                <a:lnTo>
-                  <a:pt x="2177077" y="891494"/>
-                </a:lnTo>
-                <a:lnTo>
-                  <a:pt x="2217394" y="911084"/>
-                </a:lnTo>
-                <a:lnTo>
-                  <a:pt x="2257710" y="930676"/>
-                </a:lnTo>
-                <a:lnTo>
-                  <a:pt x="2298026" y="950268"/>
-                </a:lnTo>
-                <a:lnTo>
-                  <a:pt x="2338342" y="969862"/>
-                </a:lnTo>
-                <a:lnTo>
-                  <a:pt x="2378659" y="989458"/>
-                </a:lnTo>
-                <a:lnTo>
-                  <a:pt x="2418975" y="1009056"/>
-                </a:lnTo>
-                <a:lnTo>
-                  <a:pt x="2459291" y="1028656"/>
-                </a:lnTo>
-                <a:lnTo>
-                  <a:pt x="2499607" y="1048258"/>
-                </a:lnTo>
-                <a:lnTo>
-                  <a:pt x="2539924" y="1067862"/>
-                </a:lnTo>
-                <a:lnTo>
-                  <a:pt x="2580240" y="1087468"/>
-                </a:lnTo>
-                <a:lnTo>
-                  <a:pt x="2620556" y="1107077"/>
-                </a:lnTo>
-                <a:lnTo>
-                  <a:pt x="2660872" y="1126689"/>
-                </a:lnTo>
-                <a:lnTo>
-                  <a:pt x="2701189" y="1146304"/>
-                </a:lnTo>
-                <a:lnTo>
-                  <a:pt x="2741505" y="1165922"/>
-                </a:lnTo>
-                <a:lnTo>
-                  <a:pt x="2781821" y="1185544"/>
-                </a:lnTo>
-                <a:lnTo>
-                  <a:pt x="2822137" y="1205169"/>
-                </a:lnTo>
-                <a:lnTo>
-                  <a:pt x="2862454" y="1224799"/>
-                </a:lnTo>
-                <a:lnTo>
-                  <a:pt x="2902770" y="1244432"/>
-                </a:lnTo>
-                <a:lnTo>
-                  <a:pt x="2943086" y="1264071"/>
-                </a:lnTo>
-                <a:lnTo>
-                  <a:pt x="2983402" y="1283715"/>
-                </a:lnTo>
-                <a:lnTo>
-                  <a:pt x="3023719" y="1303364"/>
-                </a:lnTo>
-                <a:lnTo>
-                  <a:pt x="3064035" y="1323019"/>
-                </a:lnTo>
-                <a:lnTo>
-                  <a:pt x="3104351" y="1342681"/>
-                </a:lnTo>
-                <a:lnTo>
-                  <a:pt x="3144667" y="1362349"/>
-                </a:lnTo>
-                <a:lnTo>
-                  <a:pt x="3184984" y="1382025"/>
-                </a:lnTo>
-                <a:lnTo>
-                  <a:pt x="3225300" y="1401709"/>
-                </a:lnTo>
-                <a:lnTo>
-                  <a:pt x="3265616" y="1421401"/>
-                </a:lnTo>
-                <a:lnTo>
-                  <a:pt x="3305932" y="1441103"/>
-                </a:lnTo>
-                <a:lnTo>
-                  <a:pt x="3346249" y="1460815"/>
-                </a:lnTo>
-                <a:lnTo>
-                  <a:pt x="3386565" y="1480537"/>
-                </a:lnTo>
-                <a:lnTo>
-                  <a:pt x="3426881" y="1500271"/>
-                </a:lnTo>
-                <a:lnTo>
-                  <a:pt x="3467197" y="1520018"/>
-                </a:lnTo>
-                <a:lnTo>
-                  <a:pt x="3507514" y="1539778"/>
-                </a:lnTo>
-                <a:lnTo>
-                  <a:pt x="3547830" y="1559552"/>
-                </a:lnTo>
-                <a:lnTo>
-                  <a:pt x="3588146" y="1579342"/>
-                </a:lnTo>
-                <a:lnTo>
-                  <a:pt x="3628462" y="1599149"/>
-                </a:lnTo>
-                <a:lnTo>
-                  <a:pt x="3668779" y="1618975"/>
-                </a:lnTo>
-                <a:lnTo>
-                  <a:pt x="3709095" y="1638820"/>
-                </a:lnTo>
-                <a:lnTo>
-                  <a:pt x="3749411" y="1658686"/>
-                </a:lnTo>
-                <a:lnTo>
-                  <a:pt x="3789727" y="1678575"/>
-                </a:lnTo>
-                <a:lnTo>
-                  <a:pt x="3830044" y="1698489"/>
-                </a:lnTo>
-                <a:lnTo>
-                  <a:pt x="3870360" y="1718430"/>
-                </a:lnTo>
-                <a:lnTo>
-                  <a:pt x="3910676" y="1738399"/>
-                </a:lnTo>
-                <a:lnTo>
-                  <a:pt x="3950992" y="1758400"/>
-                </a:lnTo>
-                <a:lnTo>
-                  <a:pt x="3991309" y="1778434"/>
-                </a:lnTo>
-                <a:lnTo>
-                  <a:pt x="4031625" y="1798505"/>
-                </a:lnTo>
-                <a:lnTo>
-                  <a:pt x="4071941" y="1818614"/>
-                </a:lnTo>
-                <a:lnTo>
-                  <a:pt x="4112257" y="1838767"/>
-                </a:lnTo>
-                <a:lnTo>
-                  <a:pt x="4152574" y="1858965"/>
-                </a:lnTo>
-                <a:lnTo>
-                  <a:pt x="4192890" y="1879213"/>
-                </a:lnTo>
-                <a:lnTo>
-                  <a:pt x="4233206" y="1899514"/>
-                </a:lnTo>
-                <a:lnTo>
-                  <a:pt x="4273522" y="1919874"/>
-                </a:lnTo>
-                <a:lnTo>
-                  <a:pt x="4313839" y="1940297"/>
-                </a:lnTo>
-                <a:lnTo>
-                  <a:pt x="4354155" y="1960788"/>
-                </a:lnTo>
-                <a:lnTo>
-                  <a:pt x="4394471" y="1981353"/>
-                </a:lnTo>
-                <a:lnTo>
-                  <a:pt x="4434787" y="2001999"/>
-                </a:lnTo>
-                <a:lnTo>
-                  <a:pt x="4475104" y="2022732"/>
-                </a:lnTo>
-                <a:lnTo>
-                  <a:pt x="4515420" y="2043559"/>
-                </a:lnTo>
-                <a:lnTo>
-                  <a:pt x="4555736" y="2064490"/>
-                </a:lnTo>
-                <a:lnTo>
-                  <a:pt x="4596052" y="2085532"/>
-                </a:lnTo>
-                <a:lnTo>
-                  <a:pt x="4636369" y="2106697"/>
-                </a:lnTo>
-                <a:lnTo>
-                  <a:pt x="4676685" y="2127994"/>
-                </a:lnTo>
-                <a:lnTo>
-                  <a:pt x="4717001" y="2149437"/>
-                </a:lnTo>
-                <a:lnTo>
-                  <a:pt x="4757318" y="2171038"/>
-                </a:lnTo>
-                <a:lnTo>
-                  <a:pt x="4797634" y="2192812"/>
-                </a:lnTo>
-                <a:lnTo>
-                  <a:pt x="4837950" y="2214776"/>
-                </a:lnTo>
-                <a:lnTo>
-                  <a:pt x="4878266" y="2236947"/>
-                </a:lnTo>
-                <a:lnTo>
-                  <a:pt x="4918583" y="2259347"/>
-                </a:lnTo>
-                <a:lnTo>
-                  <a:pt x="4958899" y="2281998"/>
-                </a:lnTo>
-                <a:lnTo>
-                  <a:pt x="4999215" y="2304925"/>
-                </a:lnTo>
-                <a:lnTo>
-                  <a:pt x="5039531" y="2328158"/>
-                </a:lnTo>
-                <a:lnTo>
-                  <a:pt x="5079848" y="2351730"/>
-                </a:lnTo>
-                <a:lnTo>
-                  <a:pt x="5120164" y="2375677"/>
-                </a:lnTo>
-                <a:lnTo>
-                  <a:pt x="5160480" y="2400042"/>
-                </a:lnTo>
-                <a:lnTo>
-                  <a:pt x="5200796" y="2424873"/>
-                </a:lnTo>
-                <a:lnTo>
-                  <a:pt x="5241113" y="2450228"/>
-                </a:lnTo>
-                <a:lnTo>
-                  <a:pt x="5281429" y="2476170"/>
-                </a:lnTo>
-                <a:lnTo>
-                  <a:pt x="5321745" y="2502777"/>
-                </a:lnTo>
-                <a:lnTo>
-                  <a:pt x="5362061" y="2530139"/>
-                </a:lnTo>
-                <a:lnTo>
-                  <a:pt x="5402378" y="2558363"/>
-                </a:lnTo>
-                <a:lnTo>
-                  <a:pt x="5442694" y="2587578"/>
-                </a:lnTo>
-                <a:lnTo>
-                  <a:pt x="5483010" y="2617942"/>
-                </a:lnTo>
-                <a:lnTo>
-                  <a:pt x="5523326" y="2649647"/>
-                </a:lnTo>
-                <a:lnTo>
-                  <a:pt x="5563643" y="2682936"/>
-                </a:lnTo>
-                <a:lnTo>
-                  <a:pt x="5603959" y="2718119"/>
-                </a:lnTo>
-                <a:lnTo>
-                  <a:pt x="5644275" y="2755597"/>
-                </a:lnTo>
-                <a:lnTo>
-                  <a:pt x="5684591" y="2795907"/>
-                </a:lnTo>
-                <a:lnTo>
-                  <a:pt x="5724908" y="2839788"/>
-                </a:lnTo>
-                <a:lnTo>
-                  <a:pt x="5765224" y="2888300"/>
-                </a:lnTo>
-                <a:lnTo>
-                  <a:pt x="5805540" y="2943035"/>
-                </a:lnTo>
-                <a:lnTo>
-                  <a:pt x="5845856" y="3006549"/>
-                </a:lnTo>
-                <a:lnTo>
-                  <a:pt x="5886173" y="3083351"/>
-                </a:lnTo>
-                <a:lnTo>
-                  <a:pt x="5926489" y="3182579"/>
-                </a:lnTo>
-                <a:lnTo>
-                  <a:pt x="5966805" y="3327845"/>
-                </a:lnTo>
-                <a:lnTo>
-                  <a:pt x="6007121" y="3628605"/>
+                  <a:pt x="10991" y="0"/>
+                </a:lnTo>
+                <a:lnTo>
+                  <a:pt x="21982" y="0"/>
+                </a:lnTo>
+                <a:lnTo>
+                  <a:pt x="32973" y="0"/>
+                </a:lnTo>
+                <a:lnTo>
+                  <a:pt x="43964" y="0"/>
+                </a:lnTo>
+                <a:lnTo>
+                  <a:pt x="54955" y="0"/>
+                </a:lnTo>
+                <a:lnTo>
+                  <a:pt x="65946" y="0"/>
+                </a:lnTo>
+                <a:lnTo>
+                  <a:pt x="76937" y="0"/>
+                </a:lnTo>
+                <a:lnTo>
+                  <a:pt x="87928" y="0"/>
+                </a:lnTo>
+                <a:lnTo>
+                  <a:pt x="98920" y="0"/>
+                </a:lnTo>
+                <a:lnTo>
+                  <a:pt x="109911" y="0"/>
+                </a:lnTo>
+                <a:lnTo>
+                  <a:pt x="120902" y="0"/>
+                </a:lnTo>
+                <a:lnTo>
+                  <a:pt x="131893" y="0"/>
+                </a:lnTo>
+                <a:lnTo>
+                  <a:pt x="142884" y="0"/>
+                </a:lnTo>
+                <a:lnTo>
+                  <a:pt x="153875" y="0"/>
+                </a:lnTo>
+                <a:lnTo>
+                  <a:pt x="164866" y="0"/>
+                </a:lnTo>
+                <a:lnTo>
+                  <a:pt x="175857" y="0"/>
+                </a:lnTo>
+                <a:lnTo>
+                  <a:pt x="186849" y="0"/>
+                </a:lnTo>
+                <a:lnTo>
+                  <a:pt x="197840" y="0"/>
+                </a:lnTo>
+                <a:lnTo>
+                  <a:pt x="208831" y="0"/>
+                </a:lnTo>
+                <a:lnTo>
+                  <a:pt x="219822" y="0"/>
+                </a:lnTo>
+                <a:lnTo>
+                  <a:pt x="230813" y="0"/>
+                </a:lnTo>
+                <a:lnTo>
+                  <a:pt x="241804" y="0"/>
+                </a:lnTo>
+                <a:lnTo>
+                  <a:pt x="252795" y="0"/>
+                </a:lnTo>
+                <a:lnTo>
+                  <a:pt x="263786" y="0"/>
+                </a:lnTo>
+                <a:lnTo>
+                  <a:pt x="274777" y="0"/>
+                </a:lnTo>
+                <a:lnTo>
+                  <a:pt x="285769" y="0"/>
+                </a:lnTo>
+                <a:lnTo>
+                  <a:pt x="296760" y="0"/>
+                </a:lnTo>
+                <a:lnTo>
+                  <a:pt x="307751" y="0"/>
+                </a:lnTo>
+                <a:lnTo>
+                  <a:pt x="318742" y="0"/>
+                </a:lnTo>
+                <a:lnTo>
+                  <a:pt x="329733" y="0"/>
+                </a:lnTo>
+                <a:lnTo>
+                  <a:pt x="340724" y="0"/>
+                </a:lnTo>
+                <a:lnTo>
+                  <a:pt x="351715" y="0"/>
+                </a:lnTo>
+                <a:lnTo>
+                  <a:pt x="362706" y="0"/>
+                </a:lnTo>
+                <a:lnTo>
+                  <a:pt x="373698" y="0"/>
+                </a:lnTo>
+                <a:lnTo>
+                  <a:pt x="384689" y="0"/>
+                </a:lnTo>
+                <a:lnTo>
+                  <a:pt x="395680" y="0"/>
+                </a:lnTo>
+                <a:lnTo>
+                  <a:pt x="406671" y="0"/>
+                </a:lnTo>
+                <a:lnTo>
+                  <a:pt x="417662" y="0"/>
+                </a:lnTo>
+                <a:lnTo>
+                  <a:pt x="428653" y="0"/>
+                </a:lnTo>
+                <a:lnTo>
+                  <a:pt x="439644" y="0"/>
+                </a:lnTo>
+                <a:lnTo>
+                  <a:pt x="450635" y="0"/>
+                </a:lnTo>
+                <a:lnTo>
+                  <a:pt x="461626" y="0"/>
+                </a:lnTo>
+                <a:lnTo>
+                  <a:pt x="472618" y="0"/>
+                </a:lnTo>
+                <a:lnTo>
+                  <a:pt x="483609" y="0"/>
+                </a:lnTo>
+                <a:lnTo>
+                  <a:pt x="494600" y="0"/>
+                </a:lnTo>
+                <a:lnTo>
+                  <a:pt x="505591" y="0"/>
+                </a:lnTo>
+                <a:lnTo>
+                  <a:pt x="516582" y="0"/>
+                </a:lnTo>
+                <a:lnTo>
+                  <a:pt x="527573" y="0"/>
+                </a:lnTo>
+                <a:lnTo>
+                  <a:pt x="538564" y="0"/>
+                </a:lnTo>
+                <a:lnTo>
+                  <a:pt x="549555" y="0"/>
+                </a:lnTo>
+                <a:lnTo>
+                  <a:pt x="560547" y="0"/>
+                </a:lnTo>
+                <a:lnTo>
+                  <a:pt x="571538" y="0"/>
+                </a:lnTo>
+                <a:lnTo>
+                  <a:pt x="582529" y="0"/>
+                </a:lnTo>
+                <a:lnTo>
+                  <a:pt x="593520" y="0"/>
+                </a:lnTo>
+                <a:lnTo>
+                  <a:pt x="604511" y="0"/>
+                </a:lnTo>
+                <a:lnTo>
+                  <a:pt x="615502" y="0"/>
+                </a:lnTo>
+                <a:lnTo>
+                  <a:pt x="626493" y="0"/>
+                </a:lnTo>
+                <a:lnTo>
+                  <a:pt x="637484" y="0"/>
+                </a:lnTo>
+                <a:lnTo>
+                  <a:pt x="648475" y="0"/>
+                </a:lnTo>
+                <a:lnTo>
+                  <a:pt x="659467" y="0"/>
+                </a:lnTo>
+                <a:lnTo>
+                  <a:pt x="670458" y="0"/>
+                </a:lnTo>
+                <a:lnTo>
+                  <a:pt x="681449" y="0"/>
+                </a:lnTo>
+                <a:lnTo>
+                  <a:pt x="692440" y="0"/>
+                </a:lnTo>
+                <a:lnTo>
+                  <a:pt x="703431" y="0"/>
+                </a:lnTo>
+                <a:lnTo>
+                  <a:pt x="714422" y="0"/>
+                </a:lnTo>
+                <a:lnTo>
+                  <a:pt x="725413" y="0"/>
+                </a:lnTo>
+                <a:lnTo>
+                  <a:pt x="736404" y="0"/>
+                </a:lnTo>
+                <a:lnTo>
+                  <a:pt x="747396" y="0"/>
+                </a:lnTo>
+                <a:lnTo>
+                  <a:pt x="758387" y="0"/>
+                </a:lnTo>
+                <a:lnTo>
+                  <a:pt x="769378" y="0"/>
+                </a:lnTo>
+                <a:lnTo>
+                  <a:pt x="780369" y="0"/>
+                </a:lnTo>
+                <a:lnTo>
+                  <a:pt x="791360" y="0"/>
+                </a:lnTo>
+                <a:lnTo>
+                  <a:pt x="802351" y="0"/>
+                </a:lnTo>
+                <a:lnTo>
+                  <a:pt x="813342" y="0"/>
+                </a:lnTo>
+                <a:lnTo>
+                  <a:pt x="824333" y="0"/>
+                </a:lnTo>
+                <a:lnTo>
+                  <a:pt x="835325" y="0"/>
+                </a:lnTo>
+                <a:lnTo>
+                  <a:pt x="846316" y="0"/>
+                </a:lnTo>
+                <a:lnTo>
+                  <a:pt x="857307" y="0"/>
+                </a:lnTo>
+                <a:lnTo>
+                  <a:pt x="868298" y="0"/>
+                </a:lnTo>
+                <a:lnTo>
+                  <a:pt x="879289" y="0"/>
+                </a:lnTo>
+                <a:lnTo>
+                  <a:pt x="890280" y="0"/>
+                </a:lnTo>
+                <a:lnTo>
+                  <a:pt x="901271" y="0"/>
+                </a:lnTo>
+                <a:lnTo>
+                  <a:pt x="912262" y="0"/>
+                </a:lnTo>
+                <a:lnTo>
+                  <a:pt x="923253" y="0"/>
+                </a:lnTo>
+                <a:lnTo>
+                  <a:pt x="934245" y="0"/>
+                </a:lnTo>
+                <a:lnTo>
+                  <a:pt x="945236" y="0"/>
+                </a:lnTo>
+                <a:lnTo>
+                  <a:pt x="956227" y="0"/>
+                </a:lnTo>
+                <a:lnTo>
+                  <a:pt x="967218" y="0"/>
+                </a:lnTo>
+                <a:lnTo>
+                  <a:pt x="978209" y="0"/>
+                </a:lnTo>
+                <a:lnTo>
+                  <a:pt x="989200" y="0"/>
+                </a:lnTo>
+                <a:lnTo>
+                  <a:pt x="1000191" y="0"/>
+                </a:lnTo>
+                <a:lnTo>
+                  <a:pt x="1011182" y="0"/>
+                </a:lnTo>
+                <a:lnTo>
+                  <a:pt x="1022174" y="0"/>
+                </a:lnTo>
+                <a:lnTo>
+                  <a:pt x="1033165" y="0"/>
+                </a:lnTo>
+                <a:lnTo>
+                  <a:pt x="1044156" y="0"/>
+                </a:lnTo>
+                <a:lnTo>
+                  <a:pt x="1055147" y="0"/>
+                </a:lnTo>
+                <a:lnTo>
+                  <a:pt x="1066138" y="0"/>
+                </a:lnTo>
+                <a:lnTo>
+                  <a:pt x="1077129" y="0"/>
+                </a:lnTo>
+                <a:lnTo>
+                  <a:pt x="1088120" y="0"/>
+                </a:lnTo>
+                <a:lnTo>
+                  <a:pt x="1099111" y="0"/>
+                </a:lnTo>
+                <a:lnTo>
+                  <a:pt x="1110102" y="0"/>
+                </a:lnTo>
+                <a:lnTo>
+                  <a:pt x="1121094" y="0"/>
+                </a:lnTo>
+                <a:lnTo>
+                  <a:pt x="1132085" y="0"/>
+                </a:lnTo>
+                <a:lnTo>
+                  <a:pt x="1143076" y="0"/>
+                </a:lnTo>
+                <a:lnTo>
+                  <a:pt x="1154067" y="0"/>
+                </a:lnTo>
+                <a:lnTo>
+                  <a:pt x="1165058" y="0"/>
+                </a:lnTo>
+                <a:lnTo>
+                  <a:pt x="1176049" y="0"/>
+                </a:lnTo>
+                <a:lnTo>
+                  <a:pt x="1187040" y="0"/>
+                </a:lnTo>
+                <a:lnTo>
+                  <a:pt x="1198031" y="0"/>
+                </a:lnTo>
+                <a:lnTo>
+                  <a:pt x="1209023" y="0"/>
+                </a:lnTo>
+                <a:lnTo>
+                  <a:pt x="1220014" y="0"/>
+                </a:lnTo>
+                <a:lnTo>
+                  <a:pt x="1231005" y="0"/>
+                </a:lnTo>
+                <a:lnTo>
+                  <a:pt x="1241996" y="0"/>
+                </a:lnTo>
+                <a:lnTo>
+                  <a:pt x="1252987" y="0"/>
+                </a:lnTo>
+                <a:lnTo>
+                  <a:pt x="1263978" y="0"/>
+                </a:lnTo>
+                <a:lnTo>
+                  <a:pt x="1274969" y="0"/>
+                </a:lnTo>
+                <a:lnTo>
+                  <a:pt x="1285960" y="0"/>
+                </a:lnTo>
+                <a:lnTo>
+                  <a:pt x="1296951" y="0"/>
+                </a:lnTo>
+                <a:lnTo>
+                  <a:pt x="1307943" y="0"/>
+                </a:lnTo>
+                <a:lnTo>
+                  <a:pt x="1318934" y="0"/>
+                </a:lnTo>
+                <a:lnTo>
+                  <a:pt x="1329925" y="0"/>
+                </a:lnTo>
+                <a:lnTo>
+                  <a:pt x="1340916" y="0"/>
+                </a:lnTo>
+                <a:lnTo>
+                  <a:pt x="1351907" y="0"/>
+                </a:lnTo>
+                <a:lnTo>
+                  <a:pt x="1362898" y="0"/>
+                </a:lnTo>
+                <a:lnTo>
+                  <a:pt x="1373889" y="0"/>
+                </a:lnTo>
+                <a:lnTo>
+                  <a:pt x="1384880" y="0"/>
+                </a:lnTo>
+                <a:lnTo>
+                  <a:pt x="1395872" y="0"/>
+                </a:lnTo>
+                <a:lnTo>
+                  <a:pt x="1406863" y="0"/>
+                </a:lnTo>
+                <a:lnTo>
+                  <a:pt x="1417854" y="0"/>
+                </a:lnTo>
+                <a:lnTo>
+                  <a:pt x="1428845" y="0"/>
+                </a:lnTo>
+                <a:lnTo>
+                  <a:pt x="1439836" y="0"/>
+                </a:lnTo>
+                <a:lnTo>
+                  <a:pt x="1450827" y="0"/>
+                </a:lnTo>
+                <a:lnTo>
+                  <a:pt x="1461818" y="0"/>
+                </a:lnTo>
+                <a:lnTo>
+                  <a:pt x="1472809" y="0"/>
+                </a:lnTo>
+                <a:lnTo>
+                  <a:pt x="1483801" y="0"/>
+                </a:lnTo>
+                <a:lnTo>
+                  <a:pt x="1494792" y="0"/>
+                </a:lnTo>
+                <a:lnTo>
+                  <a:pt x="1505783" y="0"/>
+                </a:lnTo>
+                <a:lnTo>
+                  <a:pt x="1516774" y="0"/>
+                </a:lnTo>
+                <a:lnTo>
+                  <a:pt x="1527765" y="0"/>
+                </a:lnTo>
+                <a:lnTo>
+                  <a:pt x="1538756" y="0"/>
+                </a:lnTo>
+                <a:lnTo>
+                  <a:pt x="1549747" y="0"/>
+                </a:lnTo>
+                <a:lnTo>
+                  <a:pt x="1560738" y="0"/>
+                </a:lnTo>
+                <a:lnTo>
+                  <a:pt x="1571729" y="0"/>
+                </a:lnTo>
+                <a:lnTo>
+                  <a:pt x="1582721" y="0"/>
+                </a:lnTo>
+                <a:lnTo>
+                  <a:pt x="1593712" y="0"/>
+                </a:lnTo>
+                <a:lnTo>
+                  <a:pt x="1604703" y="0"/>
+                </a:lnTo>
+                <a:lnTo>
+                  <a:pt x="1615694" y="0"/>
+                </a:lnTo>
+                <a:lnTo>
+                  <a:pt x="1626685" y="0"/>
+                </a:lnTo>
+                <a:lnTo>
+                  <a:pt x="1637676" y="0"/>
+                </a:lnTo>
+                <a:lnTo>
+                  <a:pt x="1648667" y="0"/>
+                </a:lnTo>
+                <a:lnTo>
+                  <a:pt x="1659658" y="0"/>
+                </a:lnTo>
+                <a:lnTo>
+                  <a:pt x="1670650" y="0"/>
+                </a:lnTo>
+                <a:lnTo>
+                  <a:pt x="1681641" y="0"/>
+                </a:lnTo>
+                <a:lnTo>
+                  <a:pt x="1692632" y="0"/>
+                </a:lnTo>
+                <a:lnTo>
+                  <a:pt x="1703623" y="0"/>
+                </a:lnTo>
+                <a:lnTo>
+                  <a:pt x="1714614" y="0"/>
+                </a:lnTo>
+                <a:lnTo>
+                  <a:pt x="1725605" y="0"/>
+                </a:lnTo>
+                <a:lnTo>
+                  <a:pt x="1736596" y="0"/>
+                </a:lnTo>
+                <a:lnTo>
+                  <a:pt x="1747587" y="0"/>
+                </a:lnTo>
+                <a:lnTo>
+                  <a:pt x="1758578" y="0"/>
+                </a:lnTo>
+                <a:lnTo>
+                  <a:pt x="1769570" y="0"/>
+                </a:lnTo>
+                <a:lnTo>
+                  <a:pt x="1780561" y="0"/>
+                </a:lnTo>
+                <a:lnTo>
+                  <a:pt x="1791552" y="0"/>
+                </a:lnTo>
+                <a:lnTo>
+                  <a:pt x="1802543" y="0"/>
+                </a:lnTo>
+                <a:lnTo>
+                  <a:pt x="1813534" y="0"/>
+                </a:lnTo>
+                <a:lnTo>
+                  <a:pt x="1824525" y="0"/>
+                </a:lnTo>
+                <a:lnTo>
+                  <a:pt x="1835516" y="0"/>
+                </a:lnTo>
+                <a:lnTo>
+                  <a:pt x="1846507" y="0"/>
+                </a:lnTo>
+                <a:lnTo>
+                  <a:pt x="1857499" y="0"/>
+                </a:lnTo>
+                <a:lnTo>
+                  <a:pt x="1868490" y="0"/>
+                </a:lnTo>
+                <a:lnTo>
+                  <a:pt x="1879481" y="0"/>
+                </a:lnTo>
+                <a:lnTo>
+                  <a:pt x="1890472" y="0"/>
+                </a:lnTo>
+                <a:lnTo>
+                  <a:pt x="1901463" y="0"/>
+                </a:lnTo>
+                <a:lnTo>
+                  <a:pt x="1912454" y="0"/>
+                </a:lnTo>
+                <a:lnTo>
+                  <a:pt x="1923445" y="0"/>
+                </a:lnTo>
+                <a:lnTo>
+                  <a:pt x="1934436" y="0"/>
+                </a:lnTo>
+                <a:lnTo>
+                  <a:pt x="1945427" y="0"/>
+                </a:lnTo>
+                <a:lnTo>
+                  <a:pt x="1956419" y="0"/>
+                </a:lnTo>
+                <a:lnTo>
+                  <a:pt x="1967410" y="0"/>
+                </a:lnTo>
+                <a:lnTo>
+                  <a:pt x="1978401" y="0"/>
+                </a:lnTo>
+                <a:lnTo>
+                  <a:pt x="1989392" y="0"/>
+                </a:lnTo>
+                <a:lnTo>
+                  <a:pt x="2000383" y="0"/>
+                </a:lnTo>
+                <a:lnTo>
+                  <a:pt x="2011374" y="0"/>
+                </a:lnTo>
+                <a:lnTo>
+                  <a:pt x="2022365" y="0"/>
+                </a:lnTo>
+                <a:lnTo>
+                  <a:pt x="2033356" y="0"/>
+                </a:lnTo>
+                <a:lnTo>
+                  <a:pt x="2044348" y="0"/>
+                </a:lnTo>
+                <a:lnTo>
+                  <a:pt x="2055339" y="0"/>
+                </a:lnTo>
+                <a:lnTo>
+                  <a:pt x="2066330" y="0"/>
+                </a:lnTo>
+                <a:lnTo>
+                  <a:pt x="2077321" y="0"/>
+                </a:lnTo>
+                <a:lnTo>
+                  <a:pt x="2088312" y="0"/>
+                </a:lnTo>
+                <a:lnTo>
+                  <a:pt x="2099303" y="0"/>
+                </a:lnTo>
+                <a:lnTo>
+                  <a:pt x="2110294" y="0"/>
+                </a:lnTo>
+                <a:lnTo>
+                  <a:pt x="2121285" y="0"/>
+                </a:lnTo>
+                <a:lnTo>
+                  <a:pt x="2132276" y="0"/>
+                </a:lnTo>
+                <a:lnTo>
+                  <a:pt x="2143268" y="0"/>
+                </a:lnTo>
+                <a:lnTo>
+                  <a:pt x="2154259" y="0"/>
+                </a:lnTo>
+                <a:lnTo>
+                  <a:pt x="2165250" y="0"/>
+                </a:lnTo>
+                <a:lnTo>
+                  <a:pt x="2176241" y="0"/>
+                </a:lnTo>
+                <a:lnTo>
+                  <a:pt x="2187232" y="0"/>
+                </a:lnTo>
+                <a:lnTo>
+                  <a:pt x="2198223" y="0"/>
+                </a:lnTo>
+                <a:lnTo>
+                  <a:pt x="2209214" y="0"/>
+                </a:lnTo>
+                <a:lnTo>
+                  <a:pt x="2220205" y="0"/>
+                </a:lnTo>
+                <a:lnTo>
+                  <a:pt x="2231197" y="0"/>
+                </a:lnTo>
+                <a:lnTo>
+                  <a:pt x="2242188" y="0"/>
+                </a:lnTo>
+                <a:lnTo>
+                  <a:pt x="2253179" y="0"/>
+                </a:lnTo>
+                <a:lnTo>
+                  <a:pt x="2264170" y="0"/>
+                </a:lnTo>
+                <a:lnTo>
+                  <a:pt x="2275161" y="0"/>
+                </a:lnTo>
+                <a:lnTo>
+                  <a:pt x="2286152" y="0"/>
+                </a:lnTo>
+                <a:lnTo>
+                  <a:pt x="2297143" y="0"/>
+                </a:lnTo>
+                <a:lnTo>
+                  <a:pt x="2308134" y="0"/>
+                </a:lnTo>
+                <a:lnTo>
+                  <a:pt x="2319126" y="0"/>
+                </a:lnTo>
+                <a:lnTo>
+                  <a:pt x="2330117" y="0"/>
+                </a:lnTo>
+                <a:lnTo>
+                  <a:pt x="2341108" y="0"/>
+                </a:lnTo>
+                <a:lnTo>
+                  <a:pt x="2352099" y="0"/>
+                </a:lnTo>
+                <a:lnTo>
+                  <a:pt x="2363090" y="0"/>
+                </a:lnTo>
+                <a:lnTo>
+                  <a:pt x="2374081" y="0"/>
+                </a:lnTo>
+                <a:lnTo>
+                  <a:pt x="2385072" y="0"/>
+                </a:lnTo>
+                <a:lnTo>
+                  <a:pt x="2396063" y="0"/>
+                </a:lnTo>
+                <a:lnTo>
+                  <a:pt x="2407054" y="0"/>
+                </a:lnTo>
+                <a:lnTo>
+                  <a:pt x="2418046" y="0"/>
+                </a:lnTo>
+                <a:lnTo>
+                  <a:pt x="2429037" y="0"/>
+                </a:lnTo>
+                <a:lnTo>
+                  <a:pt x="2440028" y="0"/>
+                </a:lnTo>
+                <a:lnTo>
+                  <a:pt x="2451019" y="0"/>
+                </a:lnTo>
+                <a:lnTo>
+                  <a:pt x="2462010" y="0"/>
+                </a:lnTo>
+                <a:lnTo>
+                  <a:pt x="2473001" y="0"/>
+                </a:lnTo>
+                <a:lnTo>
+                  <a:pt x="2483992" y="0"/>
+                </a:lnTo>
+                <a:lnTo>
+                  <a:pt x="2494983" y="0"/>
+                </a:lnTo>
+                <a:lnTo>
+                  <a:pt x="2505975" y="0"/>
+                </a:lnTo>
+                <a:lnTo>
+                  <a:pt x="2516966" y="0"/>
+                </a:lnTo>
+                <a:lnTo>
+                  <a:pt x="2527957" y="0"/>
+                </a:lnTo>
+                <a:lnTo>
+                  <a:pt x="2538948" y="0"/>
+                </a:lnTo>
+                <a:lnTo>
+                  <a:pt x="2549939" y="0"/>
+                </a:lnTo>
+                <a:lnTo>
+                  <a:pt x="2560930" y="0"/>
+                </a:lnTo>
+                <a:lnTo>
+                  <a:pt x="2571921" y="0"/>
+                </a:lnTo>
+                <a:lnTo>
+                  <a:pt x="2582912" y="0"/>
+                </a:lnTo>
+                <a:lnTo>
+                  <a:pt x="2593903" y="0"/>
+                </a:lnTo>
+                <a:lnTo>
+                  <a:pt x="2604895" y="0"/>
+                </a:lnTo>
+                <a:lnTo>
+                  <a:pt x="2615886" y="0"/>
+                </a:lnTo>
+                <a:lnTo>
+                  <a:pt x="2626877" y="0"/>
+                </a:lnTo>
+                <a:lnTo>
+                  <a:pt x="2637868" y="0"/>
+                </a:lnTo>
+                <a:lnTo>
+                  <a:pt x="2648859" y="0"/>
+                </a:lnTo>
+                <a:lnTo>
+                  <a:pt x="2659850" y="0"/>
+                </a:lnTo>
+                <a:lnTo>
+                  <a:pt x="2670841" y="0"/>
+                </a:lnTo>
+                <a:lnTo>
+                  <a:pt x="2681832" y="0"/>
+                </a:lnTo>
+                <a:lnTo>
+                  <a:pt x="2692824" y="0"/>
+                </a:lnTo>
+                <a:lnTo>
+                  <a:pt x="2703815" y="0"/>
+                </a:lnTo>
+                <a:lnTo>
+                  <a:pt x="2714806" y="0"/>
+                </a:lnTo>
+                <a:lnTo>
+                  <a:pt x="2725797" y="0"/>
+                </a:lnTo>
+                <a:lnTo>
+                  <a:pt x="2736788" y="0"/>
+                </a:lnTo>
+                <a:lnTo>
+                  <a:pt x="2747779" y="0"/>
+                </a:lnTo>
+                <a:lnTo>
+                  <a:pt x="2758770" y="0"/>
+                </a:lnTo>
+                <a:lnTo>
+                  <a:pt x="2769761" y="0"/>
+                </a:lnTo>
+                <a:lnTo>
+                  <a:pt x="2780752" y="0"/>
+                </a:lnTo>
+                <a:lnTo>
+                  <a:pt x="2791744" y="0"/>
+                </a:lnTo>
+                <a:lnTo>
+                  <a:pt x="2802735" y="0"/>
+                </a:lnTo>
+                <a:lnTo>
+                  <a:pt x="2813726" y="0"/>
+                </a:lnTo>
+                <a:lnTo>
+                  <a:pt x="2824717" y="0"/>
+                </a:lnTo>
+                <a:lnTo>
+                  <a:pt x="2835708" y="0"/>
+                </a:lnTo>
+                <a:lnTo>
+                  <a:pt x="2846699" y="0"/>
+                </a:lnTo>
+                <a:lnTo>
+                  <a:pt x="2857690" y="0"/>
+                </a:lnTo>
+                <a:lnTo>
+                  <a:pt x="2868681" y="0"/>
+                </a:lnTo>
+                <a:lnTo>
+                  <a:pt x="2879673" y="0"/>
+                </a:lnTo>
+                <a:lnTo>
+                  <a:pt x="2890664" y="0"/>
+                </a:lnTo>
+                <a:lnTo>
+                  <a:pt x="2901655" y="0"/>
+                </a:lnTo>
+                <a:lnTo>
+                  <a:pt x="2912646" y="0"/>
+                </a:lnTo>
+                <a:lnTo>
+                  <a:pt x="2923637" y="0"/>
+                </a:lnTo>
+                <a:lnTo>
+                  <a:pt x="2934628" y="0"/>
+                </a:lnTo>
+                <a:lnTo>
+                  <a:pt x="2945619" y="0"/>
+                </a:lnTo>
+                <a:lnTo>
+                  <a:pt x="2956610" y="0"/>
+                </a:lnTo>
+                <a:lnTo>
+                  <a:pt x="2967602" y="0"/>
+                </a:lnTo>
+                <a:lnTo>
+                  <a:pt x="2978593" y="0"/>
+                </a:lnTo>
+                <a:lnTo>
+                  <a:pt x="2989584" y="0"/>
+                </a:lnTo>
+                <a:lnTo>
+                  <a:pt x="3000575" y="0"/>
+                </a:lnTo>
+                <a:lnTo>
+                  <a:pt x="3011566" y="0"/>
+                </a:lnTo>
+                <a:lnTo>
+                  <a:pt x="3022557" y="0"/>
+                </a:lnTo>
+                <a:lnTo>
+                  <a:pt x="3033548" y="0"/>
+                </a:lnTo>
+                <a:lnTo>
+                  <a:pt x="3044539" y="0"/>
+                </a:lnTo>
+                <a:lnTo>
+                  <a:pt x="3055530" y="0"/>
+                </a:lnTo>
+                <a:lnTo>
+                  <a:pt x="3066522" y="0"/>
+                </a:lnTo>
+                <a:lnTo>
+                  <a:pt x="3077513" y="0"/>
+                </a:lnTo>
+                <a:lnTo>
+                  <a:pt x="3088504" y="0"/>
+                </a:lnTo>
+                <a:lnTo>
+                  <a:pt x="3099495" y="0"/>
+                </a:lnTo>
+                <a:lnTo>
+                  <a:pt x="3110486" y="0"/>
+                </a:lnTo>
+                <a:lnTo>
+                  <a:pt x="3121477" y="0"/>
+                </a:lnTo>
+                <a:lnTo>
+                  <a:pt x="3132468" y="0"/>
+                </a:lnTo>
+                <a:lnTo>
+                  <a:pt x="3143459" y="0"/>
+                </a:lnTo>
+                <a:lnTo>
+                  <a:pt x="3154451" y="0"/>
+                </a:lnTo>
+                <a:lnTo>
+                  <a:pt x="3165442" y="0"/>
+                </a:lnTo>
+                <a:lnTo>
+                  <a:pt x="3176433" y="0"/>
+                </a:lnTo>
+                <a:lnTo>
+                  <a:pt x="3187424" y="0"/>
+                </a:lnTo>
+                <a:lnTo>
+                  <a:pt x="3198415" y="0"/>
+                </a:lnTo>
+                <a:lnTo>
+                  <a:pt x="3209406" y="0"/>
+                </a:lnTo>
+                <a:lnTo>
+                  <a:pt x="3220397" y="0"/>
+                </a:lnTo>
+                <a:lnTo>
+                  <a:pt x="3231388" y="0"/>
+                </a:lnTo>
+                <a:lnTo>
+                  <a:pt x="3242379" y="0"/>
+                </a:lnTo>
+                <a:lnTo>
+                  <a:pt x="3253371" y="0"/>
+                </a:lnTo>
+                <a:lnTo>
+                  <a:pt x="3264362" y="0"/>
+                </a:lnTo>
+                <a:lnTo>
+                  <a:pt x="3275353" y="0"/>
+                </a:lnTo>
+                <a:lnTo>
+                  <a:pt x="3286344" y="0"/>
+                </a:lnTo>
+                <a:lnTo>
+                  <a:pt x="3297335" y="0"/>
+                </a:lnTo>
+                <a:lnTo>
+                  <a:pt x="3308326" y="0"/>
+                </a:lnTo>
+                <a:lnTo>
+                  <a:pt x="3319317" y="0"/>
+                </a:lnTo>
+                <a:lnTo>
+                  <a:pt x="3330308" y="0"/>
+                </a:lnTo>
+                <a:lnTo>
+                  <a:pt x="3341300" y="0"/>
+                </a:lnTo>
+                <a:lnTo>
+                  <a:pt x="3352291" y="0"/>
+                </a:lnTo>
+                <a:lnTo>
+                  <a:pt x="3363282" y="0"/>
+                </a:lnTo>
+                <a:lnTo>
+                  <a:pt x="3374273" y="0"/>
+                </a:lnTo>
+                <a:lnTo>
+                  <a:pt x="3385264" y="0"/>
+                </a:lnTo>
+                <a:lnTo>
+                  <a:pt x="3396255" y="0"/>
+                </a:lnTo>
+                <a:lnTo>
+                  <a:pt x="3407246" y="0"/>
+                </a:lnTo>
+                <a:lnTo>
+                  <a:pt x="3418237" y="0"/>
+                </a:lnTo>
+                <a:lnTo>
+                  <a:pt x="3429228" y="0"/>
+                </a:lnTo>
+                <a:lnTo>
+                  <a:pt x="3440220" y="0"/>
+                </a:lnTo>
+                <a:lnTo>
+                  <a:pt x="3451211" y="0"/>
+                </a:lnTo>
+                <a:lnTo>
+                  <a:pt x="3462202" y="0"/>
+                </a:lnTo>
+                <a:lnTo>
+                  <a:pt x="3473193" y="0"/>
+                </a:lnTo>
+                <a:lnTo>
+                  <a:pt x="3484184" y="0"/>
+                </a:lnTo>
+                <a:lnTo>
+                  <a:pt x="3495175" y="0"/>
+                </a:lnTo>
+                <a:lnTo>
+                  <a:pt x="3506166" y="0"/>
+                </a:lnTo>
+                <a:lnTo>
+                  <a:pt x="3517157" y="0"/>
+                </a:lnTo>
+                <a:lnTo>
+                  <a:pt x="3528149" y="0"/>
+                </a:lnTo>
+                <a:lnTo>
+                  <a:pt x="3539140" y="0"/>
+                </a:lnTo>
+                <a:lnTo>
+                  <a:pt x="3550131" y="0"/>
+                </a:lnTo>
+                <a:lnTo>
+                  <a:pt x="3561122" y="0"/>
+                </a:lnTo>
+                <a:lnTo>
+                  <a:pt x="3572113" y="0"/>
+                </a:lnTo>
+                <a:lnTo>
+                  <a:pt x="3583104" y="0"/>
+                </a:lnTo>
+                <a:lnTo>
+                  <a:pt x="3594095" y="0"/>
+                </a:lnTo>
+                <a:lnTo>
+                  <a:pt x="3605086" y="0"/>
+                </a:lnTo>
+                <a:lnTo>
+                  <a:pt x="3616077" y="0"/>
+                </a:lnTo>
+                <a:lnTo>
+                  <a:pt x="3627069" y="0"/>
+                </a:lnTo>
+                <a:lnTo>
+                  <a:pt x="3638060" y="0"/>
+                </a:lnTo>
+                <a:lnTo>
+                  <a:pt x="3649051" y="0"/>
+                </a:lnTo>
+                <a:lnTo>
+                  <a:pt x="3660042" y="0"/>
+                </a:lnTo>
+                <a:lnTo>
+                  <a:pt x="3671033" y="0"/>
+                </a:lnTo>
+                <a:lnTo>
+                  <a:pt x="3682024" y="0"/>
+                </a:lnTo>
+                <a:lnTo>
+                  <a:pt x="3693015" y="0"/>
+                </a:lnTo>
+                <a:lnTo>
+                  <a:pt x="3704006" y="0"/>
+                </a:lnTo>
+                <a:lnTo>
+                  <a:pt x="3714998" y="0"/>
+                </a:lnTo>
+                <a:lnTo>
+                  <a:pt x="3725989" y="0"/>
+                </a:lnTo>
+                <a:lnTo>
+                  <a:pt x="3736980" y="0"/>
+                </a:lnTo>
+                <a:lnTo>
+                  <a:pt x="3747971" y="0"/>
+                </a:lnTo>
+                <a:lnTo>
+                  <a:pt x="3758962" y="0"/>
+                </a:lnTo>
+                <a:lnTo>
+                  <a:pt x="3769953" y="0"/>
+                </a:lnTo>
+                <a:lnTo>
+                  <a:pt x="3780944" y="0"/>
+                </a:lnTo>
+                <a:lnTo>
+                  <a:pt x="3791935" y="0"/>
+                </a:lnTo>
+                <a:lnTo>
+                  <a:pt x="3802927" y="0"/>
+                </a:lnTo>
+                <a:lnTo>
+                  <a:pt x="3813918" y="0"/>
+                </a:lnTo>
+                <a:lnTo>
+                  <a:pt x="3824909" y="0"/>
+                </a:lnTo>
+                <a:lnTo>
+                  <a:pt x="3835900" y="0"/>
+                </a:lnTo>
+                <a:lnTo>
+                  <a:pt x="3846891" y="0"/>
+                </a:lnTo>
+                <a:lnTo>
+                  <a:pt x="3857882" y="0"/>
+                </a:lnTo>
+                <a:lnTo>
+                  <a:pt x="3868873" y="0"/>
+                </a:lnTo>
+                <a:lnTo>
+                  <a:pt x="3879864" y="0"/>
+                </a:lnTo>
+                <a:lnTo>
+                  <a:pt x="3890855" y="0"/>
+                </a:lnTo>
+                <a:lnTo>
+                  <a:pt x="3901847" y="0"/>
+                </a:lnTo>
+                <a:lnTo>
+                  <a:pt x="3912838" y="0"/>
+                </a:lnTo>
+                <a:lnTo>
+                  <a:pt x="3923829" y="0"/>
+                </a:lnTo>
+                <a:lnTo>
+                  <a:pt x="3934820" y="0"/>
+                </a:lnTo>
+                <a:lnTo>
+                  <a:pt x="3945811" y="0"/>
+                </a:lnTo>
+                <a:lnTo>
+                  <a:pt x="3956802" y="0"/>
+                </a:lnTo>
+                <a:lnTo>
+                  <a:pt x="3967793" y="0"/>
+                </a:lnTo>
+                <a:lnTo>
+                  <a:pt x="3978784" y="0"/>
+                </a:lnTo>
+                <a:lnTo>
+                  <a:pt x="3989776" y="0"/>
+                </a:lnTo>
+                <a:lnTo>
+                  <a:pt x="4000767" y="0"/>
+                </a:lnTo>
+                <a:lnTo>
+                  <a:pt x="4011758" y="0"/>
+                </a:lnTo>
+                <a:lnTo>
+                  <a:pt x="4022749" y="0"/>
+                </a:lnTo>
+                <a:lnTo>
+                  <a:pt x="4033740" y="0"/>
+                </a:lnTo>
+                <a:lnTo>
+                  <a:pt x="4044731" y="0"/>
+                </a:lnTo>
+                <a:lnTo>
+                  <a:pt x="4055722" y="0"/>
+                </a:lnTo>
+                <a:lnTo>
+                  <a:pt x="4066713" y="0"/>
+                </a:lnTo>
+                <a:lnTo>
+                  <a:pt x="4077704" y="0"/>
+                </a:lnTo>
+                <a:lnTo>
+                  <a:pt x="4088696" y="0"/>
+                </a:lnTo>
+                <a:lnTo>
+                  <a:pt x="4099687" y="0"/>
+                </a:lnTo>
+                <a:lnTo>
+                  <a:pt x="4110678" y="0"/>
+                </a:lnTo>
+                <a:lnTo>
+                  <a:pt x="4121669" y="0"/>
+                </a:lnTo>
+                <a:lnTo>
+                  <a:pt x="4132660" y="0"/>
+                </a:lnTo>
+                <a:lnTo>
+                  <a:pt x="4143651" y="0"/>
+                </a:lnTo>
+                <a:lnTo>
+                  <a:pt x="4154642" y="0"/>
+                </a:lnTo>
+                <a:lnTo>
+                  <a:pt x="4165633" y="0"/>
+                </a:lnTo>
+                <a:lnTo>
+                  <a:pt x="4176625" y="0"/>
+                </a:lnTo>
+                <a:lnTo>
+                  <a:pt x="4187616" y="0"/>
+                </a:lnTo>
+                <a:lnTo>
+                  <a:pt x="4198607" y="0"/>
+                </a:lnTo>
+                <a:lnTo>
+                  <a:pt x="4209598" y="0"/>
+                </a:lnTo>
+                <a:lnTo>
+                  <a:pt x="4220589" y="0"/>
+                </a:lnTo>
+                <a:lnTo>
+                  <a:pt x="4231580" y="0"/>
+                </a:lnTo>
+                <a:lnTo>
+                  <a:pt x="4242571" y="0"/>
+                </a:lnTo>
+                <a:lnTo>
+                  <a:pt x="4253562" y="0"/>
+                </a:lnTo>
+                <a:lnTo>
+                  <a:pt x="4264553" y="0"/>
+                </a:lnTo>
+                <a:lnTo>
+                  <a:pt x="4275545" y="0"/>
+                </a:lnTo>
+                <a:lnTo>
+                  <a:pt x="4286536" y="0"/>
+                </a:lnTo>
+                <a:lnTo>
+                  <a:pt x="4297527" y="0"/>
+                </a:lnTo>
+                <a:lnTo>
+                  <a:pt x="4308518" y="0"/>
+                </a:lnTo>
+                <a:lnTo>
+                  <a:pt x="4319509" y="0"/>
+                </a:lnTo>
+                <a:lnTo>
+                  <a:pt x="4330500" y="0"/>
+                </a:lnTo>
+                <a:lnTo>
+                  <a:pt x="4341491" y="0"/>
+                </a:lnTo>
+                <a:lnTo>
+                  <a:pt x="4352482" y="0"/>
+                </a:lnTo>
+                <a:lnTo>
+                  <a:pt x="4363474" y="0"/>
+                </a:lnTo>
+                <a:lnTo>
+                  <a:pt x="4374465" y="0"/>
+                </a:lnTo>
+                <a:lnTo>
+                  <a:pt x="4385456" y="0"/>
+                </a:lnTo>
+                <a:lnTo>
+                  <a:pt x="4396447" y="0"/>
+                </a:lnTo>
+                <a:lnTo>
+                  <a:pt x="4407438" y="0"/>
+                </a:lnTo>
+                <a:lnTo>
+                  <a:pt x="4418429" y="0"/>
+                </a:lnTo>
+                <a:lnTo>
+                  <a:pt x="4429420" y="0"/>
+                </a:lnTo>
+                <a:lnTo>
+                  <a:pt x="4440411" y="0"/>
+                </a:lnTo>
+                <a:lnTo>
+                  <a:pt x="4451403" y="0"/>
+                </a:lnTo>
+                <a:lnTo>
+                  <a:pt x="4462394" y="0"/>
+                </a:lnTo>
+                <a:lnTo>
+                  <a:pt x="4473385" y="0"/>
+                </a:lnTo>
+                <a:lnTo>
+                  <a:pt x="4484376" y="0"/>
+                </a:lnTo>
+                <a:lnTo>
+                  <a:pt x="4495367" y="0"/>
+                </a:lnTo>
+                <a:lnTo>
+                  <a:pt x="4506358" y="0"/>
+                </a:lnTo>
+                <a:lnTo>
+                  <a:pt x="4517349" y="0"/>
+                </a:lnTo>
+                <a:lnTo>
+                  <a:pt x="4528340" y="0"/>
+                </a:lnTo>
+                <a:lnTo>
+                  <a:pt x="4539331" y="0"/>
+                </a:lnTo>
+                <a:lnTo>
+                  <a:pt x="4550323" y="0"/>
+                </a:lnTo>
+                <a:lnTo>
+                  <a:pt x="4561314" y="0"/>
+                </a:lnTo>
+                <a:lnTo>
+                  <a:pt x="4572305" y="0"/>
+                </a:lnTo>
+                <a:lnTo>
+                  <a:pt x="4583296" y="0"/>
+                </a:lnTo>
+                <a:lnTo>
+                  <a:pt x="4594287" y="0"/>
+                </a:lnTo>
+                <a:lnTo>
+                  <a:pt x="4605278" y="0"/>
+                </a:lnTo>
+                <a:lnTo>
+                  <a:pt x="4616269" y="0"/>
+                </a:lnTo>
+                <a:lnTo>
+                  <a:pt x="4627260" y="0"/>
+                </a:lnTo>
+                <a:lnTo>
+                  <a:pt x="4638252" y="0"/>
+                </a:lnTo>
+                <a:lnTo>
+                  <a:pt x="4649243" y="0"/>
+                </a:lnTo>
+                <a:lnTo>
+                  <a:pt x="4660234" y="0"/>
+                </a:lnTo>
+                <a:lnTo>
+                  <a:pt x="4671225" y="0"/>
+                </a:lnTo>
+                <a:lnTo>
+                  <a:pt x="4682216" y="0"/>
+                </a:lnTo>
+                <a:lnTo>
+                  <a:pt x="4693207" y="0"/>
+                </a:lnTo>
+                <a:lnTo>
+                  <a:pt x="4704198" y="0"/>
+                </a:lnTo>
+                <a:lnTo>
+                  <a:pt x="4715189" y="0"/>
+                </a:lnTo>
+                <a:lnTo>
+                  <a:pt x="4726180" y="0"/>
+                </a:lnTo>
+                <a:lnTo>
+                  <a:pt x="4737172" y="0"/>
+                </a:lnTo>
+                <a:lnTo>
+                  <a:pt x="4748163" y="0"/>
+                </a:lnTo>
+                <a:lnTo>
+                  <a:pt x="4759154" y="0"/>
+                </a:lnTo>
+                <a:lnTo>
+                  <a:pt x="4770145" y="0"/>
+                </a:lnTo>
+                <a:lnTo>
+                  <a:pt x="4781136" y="0"/>
+                </a:lnTo>
+                <a:lnTo>
+                  <a:pt x="4792127" y="0"/>
+                </a:lnTo>
+                <a:lnTo>
+                  <a:pt x="4803118" y="0"/>
+                </a:lnTo>
+                <a:lnTo>
+                  <a:pt x="4814109" y="0"/>
+                </a:lnTo>
+                <a:lnTo>
+                  <a:pt x="4825101" y="0"/>
+                </a:lnTo>
+                <a:lnTo>
+                  <a:pt x="4836092" y="0"/>
+                </a:lnTo>
+                <a:lnTo>
+                  <a:pt x="4847083" y="0"/>
+                </a:lnTo>
+                <a:lnTo>
+                  <a:pt x="4858074" y="0"/>
+                </a:lnTo>
+                <a:lnTo>
+                  <a:pt x="4869065" y="0"/>
+                </a:lnTo>
+                <a:lnTo>
+                  <a:pt x="4880056" y="0"/>
+                </a:lnTo>
+                <a:lnTo>
+                  <a:pt x="4891047" y="0"/>
+                </a:lnTo>
+                <a:lnTo>
+                  <a:pt x="4902038" y="0"/>
+                </a:lnTo>
+                <a:lnTo>
+                  <a:pt x="4913029" y="0"/>
+                </a:lnTo>
+                <a:lnTo>
+                  <a:pt x="4924021" y="0"/>
+                </a:lnTo>
+                <a:lnTo>
+                  <a:pt x="4935012" y="0"/>
+                </a:lnTo>
+                <a:lnTo>
+                  <a:pt x="4946003" y="975360"/>
+                </a:lnTo>
+                <a:lnTo>
+                  <a:pt x="4956994" y="975360"/>
+                </a:lnTo>
+                <a:lnTo>
+                  <a:pt x="4967985" y="975360"/>
+                </a:lnTo>
+                <a:lnTo>
+                  <a:pt x="4978976" y="975360"/>
+                </a:lnTo>
+                <a:lnTo>
+                  <a:pt x="4989967" y="975360"/>
+                </a:lnTo>
+                <a:lnTo>
+                  <a:pt x="5000958" y="975360"/>
+                </a:lnTo>
+                <a:lnTo>
+                  <a:pt x="5011950" y="975360"/>
+                </a:lnTo>
+                <a:lnTo>
+                  <a:pt x="5022941" y="975360"/>
+                </a:lnTo>
+                <a:lnTo>
+                  <a:pt x="5033932" y="975360"/>
+                </a:lnTo>
+                <a:lnTo>
+                  <a:pt x="5044923" y="975360"/>
+                </a:lnTo>
+                <a:lnTo>
+                  <a:pt x="5055914" y="975360"/>
+                </a:lnTo>
+                <a:lnTo>
+                  <a:pt x="5066905" y="975360"/>
+                </a:lnTo>
+                <a:lnTo>
+                  <a:pt x="5077896" y="975360"/>
+                </a:lnTo>
+                <a:lnTo>
+                  <a:pt x="5088887" y="975360"/>
+                </a:lnTo>
+                <a:lnTo>
+                  <a:pt x="5099878" y="975360"/>
+                </a:lnTo>
+                <a:lnTo>
+                  <a:pt x="5110870" y="975360"/>
+                </a:lnTo>
+                <a:lnTo>
+                  <a:pt x="5121861" y="975360"/>
+                </a:lnTo>
+                <a:lnTo>
+                  <a:pt x="5132852" y="975360"/>
+                </a:lnTo>
+                <a:lnTo>
+                  <a:pt x="5143843" y="975360"/>
+                </a:lnTo>
+                <a:lnTo>
+                  <a:pt x="5154834" y="975360"/>
+                </a:lnTo>
+                <a:lnTo>
+                  <a:pt x="5165825" y="975360"/>
+                </a:lnTo>
+                <a:lnTo>
+                  <a:pt x="5176816" y="975360"/>
+                </a:lnTo>
+                <a:lnTo>
+                  <a:pt x="5187807" y="975360"/>
+                </a:lnTo>
+                <a:lnTo>
+                  <a:pt x="5198799" y="975360"/>
+                </a:lnTo>
+                <a:lnTo>
+                  <a:pt x="5209790" y="975360"/>
+                </a:lnTo>
+                <a:lnTo>
+                  <a:pt x="5220781" y="975360"/>
+                </a:lnTo>
+                <a:lnTo>
+                  <a:pt x="5231772" y="975360"/>
+                </a:lnTo>
+                <a:lnTo>
+                  <a:pt x="5242763" y="975360"/>
+                </a:lnTo>
+                <a:lnTo>
+                  <a:pt x="5253754" y="975360"/>
+                </a:lnTo>
+                <a:lnTo>
+                  <a:pt x="5264745" y="975360"/>
+                </a:lnTo>
+                <a:lnTo>
+                  <a:pt x="5275736" y="975360"/>
+                </a:lnTo>
+                <a:lnTo>
+                  <a:pt x="5286728" y="975360"/>
+                </a:lnTo>
+                <a:lnTo>
+                  <a:pt x="5297719" y="975360"/>
+                </a:lnTo>
+                <a:lnTo>
+                  <a:pt x="5308710" y="975360"/>
+                </a:lnTo>
+                <a:lnTo>
+                  <a:pt x="5319701" y="975360"/>
+                </a:lnTo>
+                <a:lnTo>
+                  <a:pt x="5330692" y="975360"/>
+                </a:lnTo>
+                <a:lnTo>
+                  <a:pt x="5341683" y="975360"/>
+                </a:lnTo>
+                <a:lnTo>
+                  <a:pt x="5352674" y="975360"/>
+                </a:lnTo>
+                <a:lnTo>
+                  <a:pt x="5363665" y="975360"/>
+                </a:lnTo>
+                <a:lnTo>
+                  <a:pt x="5374656" y="975360"/>
+                </a:lnTo>
+                <a:lnTo>
+                  <a:pt x="5385648" y="975360"/>
+                </a:lnTo>
+                <a:lnTo>
+                  <a:pt x="5396639" y="975360"/>
+                </a:lnTo>
+                <a:lnTo>
+                  <a:pt x="5407630" y="975360"/>
+                </a:lnTo>
+                <a:lnTo>
+                  <a:pt x="5418621" y="975360"/>
+                </a:lnTo>
+                <a:lnTo>
+                  <a:pt x="5429612" y="975360"/>
+                </a:lnTo>
+                <a:lnTo>
+                  <a:pt x="5440603" y="975360"/>
+                </a:lnTo>
+                <a:lnTo>
+                  <a:pt x="5451594" y="975360"/>
+                </a:lnTo>
+                <a:lnTo>
+                  <a:pt x="5462585" y="975360"/>
+                </a:lnTo>
+                <a:lnTo>
+                  <a:pt x="5473577" y="975360"/>
+                </a:lnTo>
+                <a:lnTo>
+                  <a:pt x="5484568" y="975360"/>
+                </a:lnTo>
+                <a:lnTo>
+                  <a:pt x="5495559" y="975360"/>
+                </a:lnTo>
+                <a:lnTo>
+                  <a:pt x="5506550" y="975360"/>
+                </a:lnTo>
+                <a:lnTo>
+                  <a:pt x="5517541" y="975360"/>
+                </a:lnTo>
+                <a:lnTo>
+                  <a:pt x="5528532" y="975360"/>
+                </a:lnTo>
+                <a:lnTo>
+                  <a:pt x="5539523" y="975360"/>
+                </a:lnTo>
+                <a:lnTo>
+                  <a:pt x="5550514" y="975360"/>
+                </a:lnTo>
+                <a:lnTo>
+                  <a:pt x="5561505" y="975360"/>
+                </a:lnTo>
+                <a:lnTo>
+                  <a:pt x="5572497" y="975360"/>
+                </a:lnTo>
+                <a:lnTo>
+                  <a:pt x="5583488" y="975360"/>
+                </a:lnTo>
+                <a:lnTo>
+                  <a:pt x="5594479" y="975360"/>
+                </a:lnTo>
+                <a:lnTo>
+                  <a:pt x="5605470" y="975360"/>
+                </a:lnTo>
+                <a:lnTo>
+                  <a:pt x="5616461" y="975360"/>
+                </a:lnTo>
+                <a:lnTo>
+                  <a:pt x="5627452" y="975360"/>
+                </a:lnTo>
+                <a:lnTo>
+                  <a:pt x="5638443" y="975360"/>
+                </a:lnTo>
+                <a:lnTo>
+                  <a:pt x="5649434" y="975360"/>
+                </a:lnTo>
+                <a:lnTo>
+                  <a:pt x="5660426" y="975360"/>
+                </a:lnTo>
+                <a:lnTo>
+                  <a:pt x="5671417" y="975360"/>
+                </a:lnTo>
+                <a:lnTo>
+                  <a:pt x="5682408" y="975360"/>
+                </a:lnTo>
+                <a:lnTo>
+                  <a:pt x="5693399" y="975360"/>
+                </a:lnTo>
+                <a:lnTo>
+                  <a:pt x="5704390" y="975360"/>
+                </a:lnTo>
+                <a:lnTo>
+                  <a:pt x="5715381" y="975360"/>
+                </a:lnTo>
+                <a:lnTo>
+                  <a:pt x="5726372" y="975360"/>
+                </a:lnTo>
+                <a:lnTo>
+                  <a:pt x="5737363" y="975360"/>
+                </a:lnTo>
+                <a:lnTo>
+                  <a:pt x="5748354" y="975360"/>
+                </a:lnTo>
+                <a:lnTo>
+                  <a:pt x="5759346" y="975360"/>
+                </a:lnTo>
+                <a:lnTo>
+                  <a:pt x="5770337" y="975360"/>
+                </a:lnTo>
+                <a:lnTo>
+                  <a:pt x="5781328" y="975360"/>
+                </a:lnTo>
+                <a:lnTo>
+                  <a:pt x="5792319" y="975360"/>
+                </a:lnTo>
+                <a:lnTo>
+                  <a:pt x="5803310" y="975360"/>
+                </a:lnTo>
+                <a:lnTo>
+                  <a:pt x="5814301" y="975360"/>
+                </a:lnTo>
+                <a:lnTo>
+                  <a:pt x="5825292" y="975360"/>
+                </a:lnTo>
+                <a:lnTo>
+                  <a:pt x="5836283" y="975360"/>
+                </a:lnTo>
+                <a:lnTo>
+                  <a:pt x="5847275" y="975360"/>
+                </a:lnTo>
+                <a:lnTo>
+                  <a:pt x="5858266" y="975360"/>
+                </a:lnTo>
+                <a:lnTo>
+                  <a:pt x="5869257" y="975360"/>
+                </a:lnTo>
+                <a:lnTo>
+                  <a:pt x="5880248" y="975360"/>
+                </a:lnTo>
+                <a:lnTo>
+                  <a:pt x="5891239" y="975360"/>
+                </a:lnTo>
+                <a:lnTo>
+                  <a:pt x="5902230" y="975360"/>
+                </a:lnTo>
+                <a:lnTo>
+                  <a:pt x="5913221" y="975360"/>
+                </a:lnTo>
+                <a:lnTo>
+                  <a:pt x="5924212" y="975360"/>
+                </a:lnTo>
+                <a:lnTo>
+                  <a:pt x="5935204" y="975360"/>
+                </a:lnTo>
+                <a:lnTo>
+                  <a:pt x="5946195" y="975360"/>
+                </a:lnTo>
+                <a:lnTo>
+                  <a:pt x="5957186" y="975360"/>
+                </a:lnTo>
+                <a:lnTo>
+                  <a:pt x="5968177" y="975360"/>
+                </a:lnTo>
+                <a:lnTo>
+                  <a:pt x="5979168" y="975360"/>
+                </a:lnTo>
+                <a:lnTo>
+                  <a:pt x="5990159" y="975360"/>
+                </a:lnTo>
+                <a:lnTo>
+                  <a:pt x="6001150" y="975360"/>
+                </a:lnTo>
+                <a:lnTo>
+                  <a:pt x="6012141" y="975360"/>
+                </a:lnTo>
+                <a:lnTo>
+                  <a:pt x="6023132" y="975360"/>
+                </a:lnTo>
+                <a:lnTo>
+                  <a:pt x="6034124" y="975360"/>
+                </a:lnTo>
+                <a:lnTo>
+                  <a:pt x="6045115" y="975360"/>
+                </a:lnTo>
+                <a:lnTo>
+                  <a:pt x="6056106" y="975360"/>
+                </a:lnTo>
+                <a:lnTo>
+                  <a:pt x="6067097" y="975360"/>
+                </a:lnTo>
+                <a:lnTo>
+                  <a:pt x="6078088" y="975360"/>
+                </a:lnTo>
+                <a:lnTo>
+                  <a:pt x="6089079" y="975360"/>
+                </a:lnTo>
+                <a:lnTo>
+                  <a:pt x="6100070" y="975360"/>
+                </a:lnTo>
+                <a:lnTo>
+                  <a:pt x="6111061" y="975360"/>
+                </a:lnTo>
+                <a:lnTo>
+                  <a:pt x="6122053" y="975360"/>
+                </a:lnTo>
+                <a:lnTo>
+                  <a:pt x="6133044" y="975360"/>
+                </a:lnTo>
+                <a:lnTo>
+                  <a:pt x="6144035" y="975360"/>
+                </a:lnTo>
+                <a:lnTo>
+                  <a:pt x="6155026" y="975360"/>
+                </a:lnTo>
+                <a:lnTo>
+                  <a:pt x="6166017" y="975360"/>
+                </a:lnTo>
+                <a:lnTo>
+                  <a:pt x="6177008" y="975360"/>
+                </a:lnTo>
+                <a:lnTo>
+                  <a:pt x="6187999" y="975360"/>
+                </a:lnTo>
+                <a:lnTo>
+                  <a:pt x="6198990" y="975360"/>
+                </a:lnTo>
+                <a:lnTo>
+                  <a:pt x="6209981" y="975360"/>
+                </a:lnTo>
+                <a:lnTo>
+                  <a:pt x="6220973" y="975360"/>
+                </a:lnTo>
+                <a:lnTo>
+                  <a:pt x="6231964" y="975360"/>
+                </a:lnTo>
+                <a:lnTo>
+                  <a:pt x="6242955" y="975360"/>
+                </a:lnTo>
+                <a:lnTo>
+                  <a:pt x="6253946" y="975360"/>
+                </a:lnTo>
+                <a:lnTo>
+                  <a:pt x="6264937" y="975360"/>
+                </a:lnTo>
+                <a:lnTo>
+                  <a:pt x="6275928" y="975360"/>
+                </a:lnTo>
+                <a:lnTo>
+                  <a:pt x="6286919" y="975360"/>
+                </a:lnTo>
+                <a:lnTo>
+                  <a:pt x="6297910" y="975360"/>
+                </a:lnTo>
+                <a:lnTo>
+                  <a:pt x="6308902" y="975360"/>
+                </a:lnTo>
+                <a:lnTo>
+                  <a:pt x="6319893" y="975360"/>
+                </a:lnTo>
+                <a:lnTo>
+                  <a:pt x="6330884" y="975360"/>
+                </a:lnTo>
+                <a:lnTo>
+                  <a:pt x="6341875" y="975360"/>
+                </a:lnTo>
+                <a:lnTo>
+                  <a:pt x="6352866" y="975360"/>
+                </a:lnTo>
+                <a:lnTo>
+                  <a:pt x="6363857" y="975360"/>
+                </a:lnTo>
+                <a:lnTo>
+                  <a:pt x="6374848" y="975360"/>
+                </a:lnTo>
+                <a:lnTo>
+                  <a:pt x="6385839" y="975360"/>
+                </a:lnTo>
+                <a:lnTo>
+                  <a:pt x="6396830" y="975360"/>
+                </a:lnTo>
+                <a:lnTo>
+                  <a:pt x="6407822" y="975360"/>
+                </a:lnTo>
+                <a:lnTo>
+                  <a:pt x="6418813" y="975360"/>
+                </a:lnTo>
+                <a:lnTo>
+                  <a:pt x="6429804" y="975360"/>
+                </a:lnTo>
+                <a:lnTo>
+                  <a:pt x="6440795" y="975360"/>
+                </a:lnTo>
+                <a:lnTo>
+                  <a:pt x="6451786" y="975360"/>
+                </a:lnTo>
+                <a:lnTo>
+                  <a:pt x="6462777" y="975360"/>
+                </a:lnTo>
+                <a:lnTo>
+                  <a:pt x="6473768" y="975360"/>
+                </a:lnTo>
+                <a:lnTo>
+                  <a:pt x="6484759" y="975360"/>
+                </a:lnTo>
+                <a:lnTo>
+                  <a:pt x="6495751" y="975360"/>
+                </a:lnTo>
+                <a:lnTo>
+                  <a:pt x="6506742" y="975360"/>
+                </a:lnTo>
+                <a:lnTo>
+                  <a:pt x="6517733" y="975360"/>
+                </a:lnTo>
+                <a:lnTo>
+                  <a:pt x="6528724" y="975360"/>
+                </a:lnTo>
+                <a:lnTo>
+                  <a:pt x="6539715" y="975360"/>
+                </a:lnTo>
+                <a:lnTo>
+                  <a:pt x="6550706" y="975360"/>
+                </a:lnTo>
+                <a:lnTo>
+                  <a:pt x="6561697" y="975360"/>
+                </a:lnTo>
+                <a:lnTo>
+                  <a:pt x="6572688" y="975360"/>
+                </a:lnTo>
+                <a:lnTo>
+                  <a:pt x="6583679" y="975360"/>
+                </a:lnTo>
+                <a:lnTo>
+                  <a:pt x="6583679" y="975360"/>
+                </a:lnTo>
+                <a:lnTo>
+                  <a:pt x="6572688" y="975360"/>
+                </a:lnTo>
+                <a:lnTo>
+                  <a:pt x="6561697" y="975360"/>
+                </a:lnTo>
+                <a:lnTo>
+                  <a:pt x="6550706" y="975360"/>
+                </a:lnTo>
+                <a:lnTo>
+                  <a:pt x="6539715" y="975360"/>
+                </a:lnTo>
+                <a:lnTo>
+                  <a:pt x="6528724" y="975360"/>
+                </a:lnTo>
+                <a:lnTo>
+                  <a:pt x="6517733" y="975360"/>
+                </a:lnTo>
+                <a:lnTo>
+                  <a:pt x="6506742" y="975360"/>
+                </a:lnTo>
+                <a:lnTo>
+                  <a:pt x="6495751" y="975360"/>
+                </a:lnTo>
+                <a:lnTo>
+                  <a:pt x="6484759" y="975360"/>
+                </a:lnTo>
+                <a:lnTo>
+                  <a:pt x="6473768" y="975360"/>
+                </a:lnTo>
+                <a:lnTo>
+                  <a:pt x="6462777" y="975360"/>
+                </a:lnTo>
+                <a:lnTo>
+                  <a:pt x="6451786" y="975360"/>
+                </a:lnTo>
+                <a:lnTo>
+                  <a:pt x="6440795" y="975360"/>
+                </a:lnTo>
+                <a:lnTo>
+                  <a:pt x="6429804" y="975360"/>
+                </a:lnTo>
+                <a:lnTo>
+                  <a:pt x="6418813" y="975360"/>
+                </a:lnTo>
+                <a:lnTo>
+                  <a:pt x="6407822" y="975360"/>
+                </a:lnTo>
+                <a:lnTo>
+                  <a:pt x="6396830" y="975360"/>
+                </a:lnTo>
+                <a:lnTo>
+                  <a:pt x="6385839" y="975360"/>
+                </a:lnTo>
+                <a:lnTo>
+                  <a:pt x="6374848" y="975360"/>
+                </a:lnTo>
+                <a:lnTo>
+                  <a:pt x="6363857" y="975360"/>
+                </a:lnTo>
+                <a:lnTo>
+                  <a:pt x="6352866" y="975360"/>
+                </a:lnTo>
+                <a:lnTo>
+                  <a:pt x="6341875" y="975360"/>
+                </a:lnTo>
+                <a:lnTo>
+                  <a:pt x="6330884" y="975360"/>
+                </a:lnTo>
+                <a:lnTo>
+                  <a:pt x="6319893" y="975360"/>
+                </a:lnTo>
+                <a:lnTo>
+                  <a:pt x="6308902" y="975360"/>
+                </a:lnTo>
+                <a:lnTo>
+                  <a:pt x="6297910" y="975360"/>
+                </a:lnTo>
+                <a:lnTo>
+                  <a:pt x="6286919" y="975360"/>
+                </a:lnTo>
+                <a:lnTo>
+                  <a:pt x="6275928" y="975360"/>
+                </a:lnTo>
+                <a:lnTo>
+                  <a:pt x="6264937" y="975360"/>
+                </a:lnTo>
+                <a:lnTo>
+                  <a:pt x="6253946" y="975360"/>
+                </a:lnTo>
+                <a:lnTo>
+                  <a:pt x="6242955" y="975360"/>
+                </a:lnTo>
+                <a:lnTo>
+                  <a:pt x="6231964" y="975360"/>
+                </a:lnTo>
+                <a:lnTo>
+                  <a:pt x="6220973" y="975360"/>
+                </a:lnTo>
+                <a:lnTo>
+                  <a:pt x="6209981" y="975360"/>
+                </a:lnTo>
+                <a:lnTo>
+                  <a:pt x="6198990" y="975360"/>
+                </a:lnTo>
+                <a:lnTo>
+                  <a:pt x="6187999" y="975360"/>
+                </a:lnTo>
+                <a:lnTo>
+                  <a:pt x="6177008" y="975360"/>
+                </a:lnTo>
+                <a:lnTo>
+                  <a:pt x="6166017" y="975360"/>
+                </a:lnTo>
+                <a:lnTo>
+                  <a:pt x="6155026" y="975360"/>
+                </a:lnTo>
+                <a:lnTo>
+                  <a:pt x="6144035" y="975360"/>
+                </a:lnTo>
+                <a:lnTo>
+                  <a:pt x="6133044" y="975360"/>
+                </a:lnTo>
+                <a:lnTo>
+                  <a:pt x="6122053" y="975360"/>
+                </a:lnTo>
+                <a:lnTo>
+                  <a:pt x="6111061" y="975360"/>
+                </a:lnTo>
+                <a:lnTo>
+                  <a:pt x="6100070" y="975360"/>
+                </a:lnTo>
+                <a:lnTo>
+                  <a:pt x="6089079" y="975360"/>
+                </a:lnTo>
+                <a:lnTo>
+                  <a:pt x="6078088" y="975360"/>
+                </a:lnTo>
+                <a:lnTo>
+                  <a:pt x="6067097" y="975360"/>
+                </a:lnTo>
+                <a:lnTo>
+                  <a:pt x="6056106" y="975360"/>
+                </a:lnTo>
+                <a:lnTo>
+                  <a:pt x="6045115" y="975360"/>
+                </a:lnTo>
+                <a:lnTo>
+                  <a:pt x="6034124" y="975360"/>
+                </a:lnTo>
+                <a:lnTo>
+                  <a:pt x="6023132" y="975360"/>
+                </a:lnTo>
+                <a:lnTo>
+                  <a:pt x="6012141" y="975360"/>
+                </a:lnTo>
+                <a:lnTo>
+                  <a:pt x="6001150" y="975360"/>
+                </a:lnTo>
+                <a:lnTo>
+                  <a:pt x="5990159" y="975360"/>
+                </a:lnTo>
+                <a:lnTo>
+                  <a:pt x="5979168" y="975360"/>
+                </a:lnTo>
+                <a:lnTo>
+                  <a:pt x="5968177" y="975360"/>
+                </a:lnTo>
+                <a:lnTo>
+                  <a:pt x="5957186" y="975360"/>
+                </a:lnTo>
+                <a:lnTo>
+                  <a:pt x="5946195" y="975360"/>
+                </a:lnTo>
+                <a:lnTo>
+                  <a:pt x="5935204" y="975360"/>
+                </a:lnTo>
+                <a:lnTo>
+                  <a:pt x="5924212" y="975360"/>
+                </a:lnTo>
+                <a:lnTo>
+                  <a:pt x="5913221" y="975360"/>
+                </a:lnTo>
+                <a:lnTo>
+                  <a:pt x="5902230" y="975360"/>
+                </a:lnTo>
+                <a:lnTo>
+                  <a:pt x="5891239" y="975360"/>
+                </a:lnTo>
+                <a:lnTo>
+                  <a:pt x="5880248" y="975360"/>
+                </a:lnTo>
+                <a:lnTo>
+                  <a:pt x="5869257" y="975360"/>
+                </a:lnTo>
+                <a:lnTo>
+                  <a:pt x="5858266" y="975360"/>
+                </a:lnTo>
+                <a:lnTo>
+                  <a:pt x="5847275" y="975360"/>
+                </a:lnTo>
+                <a:lnTo>
+                  <a:pt x="5836283" y="975360"/>
+                </a:lnTo>
+                <a:lnTo>
+                  <a:pt x="5825292" y="975360"/>
+                </a:lnTo>
+                <a:lnTo>
+                  <a:pt x="5814301" y="975360"/>
+                </a:lnTo>
+                <a:lnTo>
+                  <a:pt x="5803310" y="975360"/>
+                </a:lnTo>
+                <a:lnTo>
+                  <a:pt x="5792319" y="975360"/>
+                </a:lnTo>
+                <a:lnTo>
+                  <a:pt x="5781328" y="975360"/>
+                </a:lnTo>
+                <a:lnTo>
+                  <a:pt x="5770337" y="975360"/>
+                </a:lnTo>
+                <a:lnTo>
+                  <a:pt x="5759346" y="975360"/>
+                </a:lnTo>
+                <a:lnTo>
+                  <a:pt x="5748354" y="975360"/>
+                </a:lnTo>
+                <a:lnTo>
+                  <a:pt x="5737363" y="975360"/>
+                </a:lnTo>
+                <a:lnTo>
+                  <a:pt x="5726372" y="975360"/>
+                </a:lnTo>
+                <a:lnTo>
+                  <a:pt x="5715381" y="975360"/>
+                </a:lnTo>
+                <a:lnTo>
+                  <a:pt x="5704390" y="975360"/>
+                </a:lnTo>
+                <a:lnTo>
+                  <a:pt x="5693399" y="975360"/>
+                </a:lnTo>
+                <a:lnTo>
+                  <a:pt x="5682408" y="975360"/>
+                </a:lnTo>
+                <a:lnTo>
+                  <a:pt x="5671417" y="975360"/>
+                </a:lnTo>
+                <a:lnTo>
+                  <a:pt x="5660426" y="975360"/>
+                </a:lnTo>
+                <a:lnTo>
+                  <a:pt x="5649434" y="975360"/>
+                </a:lnTo>
+                <a:lnTo>
+                  <a:pt x="5638443" y="975360"/>
+                </a:lnTo>
+                <a:lnTo>
+                  <a:pt x="5627452" y="975360"/>
+                </a:lnTo>
+                <a:lnTo>
+                  <a:pt x="5616461" y="975360"/>
+                </a:lnTo>
+                <a:lnTo>
+                  <a:pt x="5605470" y="975360"/>
+                </a:lnTo>
+                <a:lnTo>
+                  <a:pt x="5594479" y="975360"/>
+                </a:lnTo>
+                <a:lnTo>
+                  <a:pt x="5583488" y="975360"/>
+                </a:lnTo>
+                <a:lnTo>
+                  <a:pt x="5572497" y="975360"/>
+                </a:lnTo>
+                <a:lnTo>
+                  <a:pt x="5561505" y="975360"/>
+                </a:lnTo>
+                <a:lnTo>
+                  <a:pt x="5550514" y="975360"/>
+                </a:lnTo>
+                <a:lnTo>
+                  <a:pt x="5539523" y="975360"/>
+                </a:lnTo>
+                <a:lnTo>
+                  <a:pt x="5528532" y="975360"/>
+                </a:lnTo>
+                <a:lnTo>
+                  <a:pt x="5517541" y="975360"/>
+                </a:lnTo>
+                <a:lnTo>
+                  <a:pt x="5506550" y="975360"/>
+                </a:lnTo>
+                <a:lnTo>
+                  <a:pt x="5495559" y="975360"/>
+                </a:lnTo>
+                <a:lnTo>
+                  <a:pt x="5484568" y="975360"/>
+                </a:lnTo>
+                <a:lnTo>
+                  <a:pt x="5473577" y="975360"/>
+                </a:lnTo>
+                <a:lnTo>
+                  <a:pt x="5462585" y="975360"/>
+                </a:lnTo>
+                <a:lnTo>
+                  <a:pt x="5451594" y="975360"/>
+                </a:lnTo>
+                <a:lnTo>
+                  <a:pt x="5440603" y="975360"/>
+                </a:lnTo>
+                <a:lnTo>
+                  <a:pt x="5429612" y="975360"/>
+                </a:lnTo>
+                <a:lnTo>
+                  <a:pt x="5418621" y="975360"/>
+                </a:lnTo>
+                <a:lnTo>
+                  <a:pt x="5407630" y="975360"/>
+                </a:lnTo>
+                <a:lnTo>
+                  <a:pt x="5396639" y="975360"/>
+                </a:lnTo>
+                <a:lnTo>
+                  <a:pt x="5385648" y="975360"/>
+                </a:lnTo>
+                <a:lnTo>
+                  <a:pt x="5374656" y="975360"/>
+                </a:lnTo>
+                <a:lnTo>
+                  <a:pt x="5363665" y="975360"/>
+                </a:lnTo>
+                <a:lnTo>
+                  <a:pt x="5352674" y="975360"/>
+                </a:lnTo>
+                <a:lnTo>
+                  <a:pt x="5341683" y="975360"/>
+                </a:lnTo>
+                <a:lnTo>
+                  <a:pt x="5330692" y="975360"/>
+                </a:lnTo>
+                <a:lnTo>
+                  <a:pt x="5319701" y="975360"/>
+                </a:lnTo>
+                <a:lnTo>
+                  <a:pt x="5308710" y="975360"/>
+                </a:lnTo>
+                <a:lnTo>
+                  <a:pt x="5297719" y="975360"/>
+                </a:lnTo>
+                <a:lnTo>
+                  <a:pt x="5286728" y="975360"/>
+                </a:lnTo>
+                <a:lnTo>
+                  <a:pt x="5275736" y="975360"/>
+                </a:lnTo>
+                <a:lnTo>
+                  <a:pt x="5264745" y="975360"/>
+                </a:lnTo>
+                <a:lnTo>
+                  <a:pt x="5253754" y="975360"/>
+                </a:lnTo>
+                <a:lnTo>
+                  <a:pt x="5242763" y="975360"/>
+                </a:lnTo>
+                <a:lnTo>
+                  <a:pt x="5231772" y="975360"/>
+                </a:lnTo>
+                <a:lnTo>
+                  <a:pt x="5220781" y="975360"/>
+                </a:lnTo>
+                <a:lnTo>
+                  <a:pt x="5209790" y="975360"/>
+                </a:lnTo>
+                <a:lnTo>
+                  <a:pt x="5198799" y="975360"/>
+                </a:lnTo>
+                <a:lnTo>
+                  <a:pt x="5187807" y="975360"/>
+                </a:lnTo>
+                <a:lnTo>
+                  <a:pt x="5176816" y="975360"/>
+                </a:lnTo>
+                <a:lnTo>
+                  <a:pt x="5165825" y="975360"/>
+                </a:lnTo>
+                <a:lnTo>
+                  <a:pt x="5154834" y="975360"/>
+                </a:lnTo>
+                <a:lnTo>
+                  <a:pt x="5143843" y="975360"/>
+                </a:lnTo>
+                <a:lnTo>
+                  <a:pt x="5132852" y="975360"/>
+                </a:lnTo>
+                <a:lnTo>
+                  <a:pt x="5121861" y="975360"/>
+                </a:lnTo>
+                <a:lnTo>
+                  <a:pt x="5110870" y="975360"/>
+                </a:lnTo>
+                <a:lnTo>
+                  <a:pt x="5099878" y="975360"/>
+                </a:lnTo>
+                <a:lnTo>
+                  <a:pt x="5088887" y="975360"/>
+                </a:lnTo>
+                <a:lnTo>
+                  <a:pt x="5077896" y="975360"/>
+                </a:lnTo>
+                <a:lnTo>
+                  <a:pt x="5066905" y="975360"/>
+                </a:lnTo>
+                <a:lnTo>
+                  <a:pt x="5055914" y="975360"/>
+                </a:lnTo>
+                <a:lnTo>
+                  <a:pt x="5044923" y="975360"/>
+                </a:lnTo>
+                <a:lnTo>
+                  <a:pt x="5033932" y="975360"/>
+                </a:lnTo>
+                <a:lnTo>
+                  <a:pt x="5022941" y="975360"/>
+                </a:lnTo>
+                <a:lnTo>
+                  <a:pt x="5011950" y="975360"/>
+                </a:lnTo>
+                <a:lnTo>
+                  <a:pt x="5000958" y="975360"/>
+                </a:lnTo>
+                <a:lnTo>
+                  <a:pt x="4989967" y="975360"/>
+                </a:lnTo>
+                <a:lnTo>
+                  <a:pt x="4978976" y="975360"/>
+                </a:lnTo>
+                <a:lnTo>
+                  <a:pt x="4967985" y="975360"/>
+                </a:lnTo>
+                <a:lnTo>
+                  <a:pt x="4956994" y="975360"/>
+                </a:lnTo>
+                <a:lnTo>
+                  <a:pt x="4946003" y="975360"/>
+                </a:lnTo>
+                <a:lnTo>
+                  <a:pt x="4935012" y="975360"/>
+                </a:lnTo>
+                <a:lnTo>
+                  <a:pt x="4924021" y="975360"/>
+                </a:lnTo>
+                <a:lnTo>
+                  <a:pt x="4913029" y="975360"/>
+                </a:lnTo>
+                <a:lnTo>
+                  <a:pt x="4902038" y="975360"/>
+                </a:lnTo>
+                <a:lnTo>
+                  <a:pt x="4891047" y="975360"/>
+                </a:lnTo>
+                <a:lnTo>
+                  <a:pt x="4880056" y="975360"/>
+                </a:lnTo>
+                <a:lnTo>
+                  <a:pt x="4869065" y="975360"/>
+                </a:lnTo>
+                <a:lnTo>
+                  <a:pt x="4858074" y="975360"/>
+                </a:lnTo>
+                <a:lnTo>
+                  <a:pt x="4847083" y="975360"/>
+                </a:lnTo>
+                <a:lnTo>
+                  <a:pt x="4836092" y="975360"/>
+                </a:lnTo>
+                <a:lnTo>
+                  <a:pt x="4825101" y="975360"/>
+                </a:lnTo>
+                <a:lnTo>
+                  <a:pt x="4814109" y="975360"/>
+                </a:lnTo>
+                <a:lnTo>
+                  <a:pt x="4803118" y="975360"/>
+                </a:lnTo>
+                <a:lnTo>
+                  <a:pt x="4792127" y="975360"/>
+                </a:lnTo>
+                <a:lnTo>
+                  <a:pt x="4781136" y="975360"/>
+                </a:lnTo>
+                <a:lnTo>
+                  <a:pt x="4770145" y="975360"/>
+                </a:lnTo>
+                <a:lnTo>
+                  <a:pt x="4759154" y="975360"/>
+                </a:lnTo>
+                <a:lnTo>
+                  <a:pt x="4748163" y="975360"/>
+                </a:lnTo>
+                <a:lnTo>
+                  <a:pt x="4737172" y="975360"/>
+                </a:lnTo>
+                <a:lnTo>
+                  <a:pt x="4726180" y="975360"/>
+                </a:lnTo>
+                <a:lnTo>
+                  <a:pt x="4715189" y="975360"/>
+                </a:lnTo>
+                <a:lnTo>
+                  <a:pt x="4704198" y="975360"/>
+                </a:lnTo>
+                <a:lnTo>
+                  <a:pt x="4693207" y="975360"/>
+                </a:lnTo>
+                <a:lnTo>
+                  <a:pt x="4682216" y="975360"/>
+                </a:lnTo>
+                <a:lnTo>
+                  <a:pt x="4671225" y="975360"/>
+                </a:lnTo>
+                <a:lnTo>
+                  <a:pt x="4660234" y="975360"/>
+                </a:lnTo>
+                <a:lnTo>
+                  <a:pt x="4649243" y="975360"/>
+                </a:lnTo>
+                <a:lnTo>
+                  <a:pt x="4638252" y="975360"/>
+                </a:lnTo>
+                <a:lnTo>
+                  <a:pt x="4627260" y="975360"/>
+                </a:lnTo>
+                <a:lnTo>
+                  <a:pt x="4616269" y="975360"/>
+                </a:lnTo>
+                <a:lnTo>
+                  <a:pt x="4605278" y="975360"/>
+                </a:lnTo>
+                <a:lnTo>
+                  <a:pt x="4594287" y="975360"/>
+                </a:lnTo>
+                <a:lnTo>
+                  <a:pt x="4583296" y="975360"/>
+                </a:lnTo>
+                <a:lnTo>
+                  <a:pt x="4572305" y="975360"/>
+                </a:lnTo>
+                <a:lnTo>
+                  <a:pt x="4561314" y="975360"/>
+                </a:lnTo>
+                <a:lnTo>
+                  <a:pt x="4550323" y="975360"/>
+                </a:lnTo>
+                <a:lnTo>
+                  <a:pt x="4539331" y="975360"/>
+                </a:lnTo>
+                <a:lnTo>
+                  <a:pt x="4528340" y="975360"/>
+                </a:lnTo>
+                <a:lnTo>
+                  <a:pt x="4517349" y="975360"/>
+                </a:lnTo>
+                <a:lnTo>
+                  <a:pt x="4506358" y="975360"/>
+                </a:lnTo>
+                <a:lnTo>
+                  <a:pt x="4495367" y="975360"/>
+                </a:lnTo>
+                <a:lnTo>
+                  <a:pt x="4484376" y="975360"/>
+                </a:lnTo>
+                <a:lnTo>
+                  <a:pt x="4473385" y="975360"/>
+                </a:lnTo>
+                <a:lnTo>
+                  <a:pt x="4462394" y="975360"/>
+                </a:lnTo>
+                <a:lnTo>
+                  <a:pt x="4451403" y="975360"/>
+                </a:lnTo>
+                <a:lnTo>
+                  <a:pt x="4440411" y="975360"/>
+                </a:lnTo>
+                <a:lnTo>
+                  <a:pt x="4429420" y="975360"/>
+                </a:lnTo>
+                <a:lnTo>
+                  <a:pt x="4418429" y="975360"/>
+                </a:lnTo>
+                <a:lnTo>
+                  <a:pt x="4407438" y="975360"/>
+                </a:lnTo>
+                <a:lnTo>
+                  <a:pt x="4396447" y="975360"/>
+                </a:lnTo>
+                <a:lnTo>
+                  <a:pt x="4385456" y="975360"/>
+                </a:lnTo>
+                <a:lnTo>
+                  <a:pt x="4374465" y="975360"/>
+                </a:lnTo>
+                <a:lnTo>
+                  <a:pt x="4363474" y="975360"/>
+                </a:lnTo>
+                <a:lnTo>
+                  <a:pt x="4352482" y="975360"/>
+                </a:lnTo>
+                <a:lnTo>
+                  <a:pt x="4341491" y="975360"/>
+                </a:lnTo>
+                <a:lnTo>
+                  <a:pt x="4330500" y="975360"/>
+                </a:lnTo>
+                <a:lnTo>
+                  <a:pt x="4319509" y="975360"/>
+                </a:lnTo>
+                <a:lnTo>
+                  <a:pt x="4308518" y="975360"/>
+                </a:lnTo>
+                <a:lnTo>
+                  <a:pt x="4297527" y="975360"/>
+                </a:lnTo>
+                <a:lnTo>
+                  <a:pt x="4286536" y="975360"/>
+                </a:lnTo>
+                <a:lnTo>
+                  <a:pt x="4275545" y="975360"/>
+                </a:lnTo>
+                <a:lnTo>
+                  <a:pt x="4264553" y="975360"/>
+                </a:lnTo>
+                <a:lnTo>
+                  <a:pt x="4253562" y="975360"/>
+                </a:lnTo>
+                <a:lnTo>
+                  <a:pt x="4242571" y="975360"/>
+                </a:lnTo>
+                <a:lnTo>
+                  <a:pt x="4231580" y="975360"/>
+                </a:lnTo>
+                <a:lnTo>
+                  <a:pt x="4220589" y="975360"/>
+                </a:lnTo>
+                <a:lnTo>
+                  <a:pt x="4209598" y="975360"/>
+                </a:lnTo>
+                <a:lnTo>
+                  <a:pt x="4198607" y="975360"/>
+                </a:lnTo>
+                <a:lnTo>
+                  <a:pt x="4187616" y="975360"/>
+                </a:lnTo>
+                <a:lnTo>
+                  <a:pt x="4176625" y="975360"/>
+                </a:lnTo>
+                <a:lnTo>
+                  <a:pt x="4165633" y="975360"/>
+                </a:lnTo>
+                <a:lnTo>
+                  <a:pt x="4154642" y="975360"/>
+                </a:lnTo>
+                <a:lnTo>
+                  <a:pt x="4143651" y="975360"/>
+                </a:lnTo>
+                <a:lnTo>
+                  <a:pt x="4132660" y="975360"/>
+                </a:lnTo>
+                <a:lnTo>
+                  <a:pt x="4121669" y="975360"/>
+                </a:lnTo>
+                <a:lnTo>
+                  <a:pt x="4110678" y="975360"/>
+                </a:lnTo>
+                <a:lnTo>
+                  <a:pt x="4099687" y="975360"/>
+                </a:lnTo>
+                <a:lnTo>
+                  <a:pt x="4088696" y="975360"/>
+                </a:lnTo>
+                <a:lnTo>
+                  <a:pt x="4077704" y="975360"/>
+                </a:lnTo>
+                <a:lnTo>
+                  <a:pt x="4066713" y="975360"/>
+                </a:lnTo>
+                <a:lnTo>
+                  <a:pt x="4055722" y="975360"/>
+                </a:lnTo>
+                <a:lnTo>
+                  <a:pt x="4044731" y="975360"/>
+                </a:lnTo>
+                <a:lnTo>
+                  <a:pt x="4033740" y="975360"/>
+                </a:lnTo>
+                <a:lnTo>
+                  <a:pt x="4022749" y="975360"/>
+                </a:lnTo>
+                <a:lnTo>
+                  <a:pt x="4011758" y="975360"/>
+                </a:lnTo>
+                <a:lnTo>
+                  <a:pt x="4000767" y="975360"/>
+                </a:lnTo>
+                <a:lnTo>
+                  <a:pt x="3989776" y="975360"/>
+                </a:lnTo>
+                <a:lnTo>
+                  <a:pt x="3978784" y="975360"/>
+                </a:lnTo>
+                <a:lnTo>
+                  <a:pt x="3967793" y="975360"/>
+                </a:lnTo>
+                <a:lnTo>
+                  <a:pt x="3956802" y="975360"/>
+                </a:lnTo>
+                <a:lnTo>
+                  <a:pt x="3945811" y="975360"/>
+                </a:lnTo>
+                <a:lnTo>
+                  <a:pt x="3934820" y="975360"/>
+                </a:lnTo>
+                <a:lnTo>
+                  <a:pt x="3923829" y="975360"/>
+                </a:lnTo>
+                <a:lnTo>
+                  <a:pt x="3912838" y="975360"/>
+                </a:lnTo>
+                <a:lnTo>
+                  <a:pt x="3901847" y="975360"/>
+                </a:lnTo>
+                <a:lnTo>
+                  <a:pt x="3890855" y="975360"/>
+                </a:lnTo>
+                <a:lnTo>
+                  <a:pt x="3879864" y="975360"/>
+                </a:lnTo>
+                <a:lnTo>
+                  <a:pt x="3868873" y="975360"/>
+                </a:lnTo>
+                <a:lnTo>
+                  <a:pt x="3857882" y="975360"/>
+                </a:lnTo>
+                <a:lnTo>
+                  <a:pt x="3846891" y="975360"/>
+                </a:lnTo>
+                <a:lnTo>
+                  <a:pt x="3835900" y="975360"/>
+                </a:lnTo>
+                <a:lnTo>
+                  <a:pt x="3824909" y="975360"/>
+                </a:lnTo>
+                <a:lnTo>
+                  <a:pt x="3813918" y="975360"/>
+                </a:lnTo>
+                <a:lnTo>
+                  <a:pt x="3802927" y="975360"/>
+                </a:lnTo>
+                <a:lnTo>
+                  <a:pt x="3791935" y="975360"/>
+                </a:lnTo>
+                <a:lnTo>
+                  <a:pt x="3780944" y="975360"/>
+                </a:lnTo>
+                <a:lnTo>
+                  <a:pt x="3769953" y="975360"/>
+                </a:lnTo>
+                <a:lnTo>
+                  <a:pt x="3758962" y="975360"/>
+                </a:lnTo>
+                <a:lnTo>
+                  <a:pt x="3747971" y="975360"/>
+                </a:lnTo>
+                <a:lnTo>
+                  <a:pt x="3736980" y="975360"/>
+                </a:lnTo>
+                <a:lnTo>
+                  <a:pt x="3725989" y="975360"/>
+                </a:lnTo>
+                <a:lnTo>
+                  <a:pt x="3714998" y="975360"/>
+                </a:lnTo>
+                <a:lnTo>
+                  <a:pt x="3704006" y="975360"/>
+                </a:lnTo>
+                <a:lnTo>
+                  <a:pt x="3693015" y="975360"/>
+                </a:lnTo>
+                <a:lnTo>
+                  <a:pt x="3682024" y="975360"/>
+                </a:lnTo>
+                <a:lnTo>
+                  <a:pt x="3671033" y="975360"/>
+                </a:lnTo>
+                <a:lnTo>
+                  <a:pt x="3660042" y="975360"/>
+                </a:lnTo>
+                <a:lnTo>
+                  <a:pt x="3649051" y="975360"/>
+                </a:lnTo>
+                <a:lnTo>
+                  <a:pt x="3638060" y="975360"/>
+                </a:lnTo>
+                <a:lnTo>
+                  <a:pt x="3627069" y="975360"/>
+                </a:lnTo>
+                <a:lnTo>
+                  <a:pt x="3616077" y="975360"/>
+                </a:lnTo>
+                <a:lnTo>
+                  <a:pt x="3605086" y="975360"/>
+                </a:lnTo>
+                <a:lnTo>
+                  <a:pt x="3594095" y="975360"/>
+                </a:lnTo>
+                <a:lnTo>
+                  <a:pt x="3583104" y="975360"/>
+                </a:lnTo>
+                <a:lnTo>
+                  <a:pt x="3572113" y="975360"/>
+                </a:lnTo>
+                <a:lnTo>
+                  <a:pt x="3561122" y="975360"/>
+                </a:lnTo>
+                <a:lnTo>
+                  <a:pt x="3550131" y="975360"/>
+                </a:lnTo>
+                <a:lnTo>
+                  <a:pt x="3539140" y="975360"/>
+                </a:lnTo>
+                <a:lnTo>
+                  <a:pt x="3528149" y="975360"/>
+                </a:lnTo>
+                <a:lnTo>
+                  <a:pt x="3517157" y="975360"/>
+                </a:lnTo>
+                <a:lnTo>
+                  <a:pt x="3506166" y="975360"/>
+                </a:lnTo>
+                <a:lnTo>
+                  <a:pt x="3495175" y="975360"/>
+                </a:lnTo>
+                <a:lnTo>
+                  <a:pt x="3484184" y="975360"/>
+                </a:lnTo>
+                <a:lnTo>
+                  <a:pt x="3473193" y="975360"/>
+                </a:lnTo>
+                <a:lnTo>
+                  <a:pt x="3462202" y="975360"/>
+                </a:lnTo>
+                <a:lnTo>
+                  <a:pt x="3451211" y="975360"/>
+                </a:lnTo>
+                <a:lnTo>
+                  <a:pt x="3440220" y="975360"/>
+                </a:lnTo>
+                <a:lnTo>
+                  <a:pt x="3429228" y="975360"/>
+                </a:lnTo>
+                <a:lnTo>
+                  <a:pt x="3418237" y="975360"/>
+                </a:lnTo>
+                <a:lnTo>
+                  <a:pt x="3407246" y="975360"/>
+                </a:lnTo>
+                <a:lnTo>
+                  <a:pt x="3396255" y="975360"/>
+                </a:lnTo>
+                <a:lnTo>
+                  <a:pt x="3385264" y="975360"/>
+                </a:lnTo>
+                <a:lnTo>
+                  <a:pt x="3374273" y="975360"/>
+                </a:lnTo>
+                <a:lnTo>
+                  <a:pt x="3363282" y="975360"/>
+                </a:lnTo>
+                <a:lnTo>
+                  <a:pt x="3352291" y="975360"/>
+                </a:lnTo>
+                <a:lnTo>
+                  <a:pt x="3341300" y="975360"/>
+                </a:lnTo>
+                <a:lnTo>
+                  <a:pt x="3330308" y="975360"/>
+                </a:lnTo>
+                <a:lnTo>
+                  <a:pt x="3319317" y="975360"/>
+                </a:lnTo>
+                <a:lnTo>
+                  <a:pt x="3308326" y="975360"/>
+                </a:lnTo>
+                <a:lnTo>
+                  <a:pt x="3297335" y="975360"/>
+                </a:lnTo>
+                <a:lnTo>
+                  <a:pt x="3286344" y="975360"/>
+                </a:lnTo>
+                <a:lnTo>
+                  <a:pt x="3275353" y="975360"/>
+                </a:lnTo>
+                <a:lnTo>
+                  <a:pt x="3264362" y="975360"/>
+                </a:lnTo>
+                <a:lnTo>
+                  <a:pt x="3253371" y="975360"/>
+                </a:lnTo>
+                <a:lnTo>
+                  <a:pt x="3242379" y="975360"/>
+                </a:lnTo>
+                <a:lnTo>
+                  <a:pt x="3231388" y="975360"/>
+                </a:lnTo>
+                <a:lnTo>
+                  <a:pt x="3220397" y="975360"/>
+                </a:lnTo>
+                <a:lnTo>
+                  <a:pt x="3209406" y="975360"/>
+                </a:lnTo>
+                <a:lnTo>
+                  <a:pt x="3198415" y="975360"/>
+                </a:lnTo>
+                <a:lnTo>
+                  <a:pt x="3187424" y="975360"/>
+                </a:lnTo>
+                <a:lnTo>
+                  <a:pt x="3176433" y="975360"/>
+                </a:lnTo>
+                <a:lnTo>
+                  <a:pt x="3165442" y="975360"/>
+                </a:lnTo>
+                <a:lnTo>
+                  <a:pt x="3154451" y="975360"/>
+                </a:lnTo>
+                <a:lnTo>
+                  <a:pt x="3143459" y="975360"/>
+                </a:lnTo>
+                <a:lnTo>
+                  <a:pt x="3132468" y="975360"/>
+                </a:lnTo>
+                <a:lnTo>
+                  <a:pt x="3121477" y="975360"/>
+                </a:lnTo>
+                <a:lnTo>
+                  <a:pt x="3110486" y="975360"/>
+                </a:lnTo>
+                <a:lnTo>
+                  <a:pt x="3099495" y="975360"/>
+                </a:lnTo>
+                <a:lnTo>
+                  <a:pt x="3088504" y="975360"/>
+                </a:lnTo>
+                <a:lnTo>
+                  <a:pt x="3077513" y="975360"/>
+                </a:lnTo>
+                <a:lnTo>
+                  <a:pt x="3066522" y="975360"/>
+                </a:lnTo>
+                <a:lnTo>
+                  <a:pt x="3055530" y="975360"/>
+                </a:lnTo>
+                <a:lnTo>
+                  <a:pt x="3044539" y="975360"/>
+                </a:lnTo>
+                <a:lnTo>
+                  <a:pt x="3033548" y="975360"/>
+                </a:lnTo>
+                <a:lnTo>
+                  <a:pt x="3022557" y="975360"/>
+                </a:lnTo>
+                <a:lnTo>
+                  <a:pt x="3011566" y="975360"/>
+                </a:lnTo>
+                <a:lnTo>
+                  <a:pt x="3000575" y="975360"/>
+                </a:lnTo>
+                <a:lnTo>
+                  <a:pt x="2989584" y="975360"/>
+                </a:lnTo>
+                <a:lnTo>
+                  <a:pt x="2978593" y="975360"/>
+                </a:lnTo>
+                <a:lnTo>
+                  <a:pt x="2967602" y="975360"/>
+                </a:lnTo>
+                <a:lnTo>
+                  <a:pt x="2956610" y="975360"/>
+                </a:lnTo>
+                <a:lnTo>
+                  <a:pt x="2945619" y="975360"/>
+                </a:lnTo>
+                <a:lnTo>
+                  <a:pt x="2934628" y="975360"/>
+                </a:lnTo>
+                <a:lnTo>
+                  <a:pt x="2923637" y="975360"/>
+                </a:lnTo>
+                <a:lnTo>
+                  <a:pt x="2912646" y="975360"/>
+                </a:lnTo>
+                <a:lnTo>
+                  <a:pt x="2901655" y="975360"/>
+                </a:lnTo>
+                <a:lnTo>
+                  <a:pt x="2890664" y="975360"/>
+                </a:lnTo>
+                <a:lnTo>
+                  <a:pt x="2879673" y="975360"/>
+                </a:lnTo>
+                <a:lnTo>
+                  <a:pt x="2868681" y="975360"/>
+                </a:lnTo>
+                <a:lnTo>
+                  <a:pt x="2857690" y="975360"/>
+                </a:lnTo>
+                <a:lnTo>
+                  <a:pt x="2846699" y="975360"/>
+                </a:lnTo>
+                <a:lnTo>
+                  <a:pt x="2835708" y="975360"/>
+                </a:lnTo>
+                <a:lnTo>
+                  <a:pt x="2824717" y="975360"/>
+                </a:lnTo>
+                <a:lnTo>
+                  <a:pt x="2813726" y="975360"/>
+                </a:lnTo>
+                <a:lnTo>
+                  <a:pt x="2802735" y="975360"/>
+                </a:lnTo>
+                <a:lnTo>
+                  <a:pt x="2791744" y="975360"/>
+                </a:lnTo>
+                <a:lnTo>
+                  <a:pt x="2780752" y="975360"/>
+                </a:lnTo>
+                <a:lnTo>
+                  <a:pt x="2769761" y="975360"/>
+                </a:lnTo>
+                <a:lnTo>
+                  <a:pt x="2758770" y="975360"/>
+                </a:lnTo>
+                <a:lnTo>
+                  <a:pt x="2747779" y="975360"/>
+                </a:lnTo>
+                <a:lnTo>
+                  <a:pt x="2736788" y="975360"/>
+                </a:lnTo>
+                <a:lnTo>
+                  <a:pt x="2725797" y="975360"/>
+                </a:lnTo>
+                <a:lnTo>
+                  <a:pt x="2714806" y="975360"/>
+                </a:lnTo>
+                <a:lnTo>
+                  <a:pt x="2703815" y="975360"/>
+                </a:lnTo>
+                <a:lnTo>
+                  <a:pt x="2692824" y="975360"/>
+                </a:lnTo>
+                <a:lnTo>
+                  <a:pt x="2681832" y="975360"/>
+                </a:lnTo>
+                <a:lnTo>
+                  <a:pt x="2670841" y="975360"/>
+                </a:lnTo>
+                <a:lnTo>
+                  <a:pt x="2659850" y="975360"/>
+                </a:lnTo>
+                <a:lnTo>
+                  <a:pt x="2648859" y="975360"/>
+                </a:lnTo>
+                <a:lnTo>
+                  <a:pt x="2637868" y="975360"/>
+                </a:lnTo>
+                <a:lnTo>
+                  <a:pt x="2626877" y="975360"/>
+                </a:lnTo>
+                <a:lnTo>
+                  <a:pt x="2615886" y="975360"/>
+                </a:lnTo>
+                <a:lnTo>
+                  <a:pt x="2604895" y="975360"/>
+                </a:lnTo>
+                <a:lnTo>
+                  <a:pt x="2593903" y="975360"/>
+                </a:lnTo>
+                <a:lnTo>
+                  <a:pt x="2582912" y="975360"/>
+                </a:lnTo>
+                <a:lnTo>
+                  <a:pt x="2571921" y="975360"/>
+                </a:lnTo>
+                <a:lnTo>
+                  <a:pt x="2560930" y="975360"/>
+                </a:lnTo>
+                <a:lnTo>
+                  <a:pt x="2549939" y="975360"/>
+                </a:lnTo>
+                <a:lnTo>
+                  <a:pt x="2538948" y="975360"/>
+                </a:lnTo>
+                <a:lnTo>
+                  <a:pt x="2527957" y="975360"/>
+                </a:lnTo>
+                <a:lnTo>
+                  <a:pt x="2516966" y="975360"/>
+                </a:lnTo>
+                <a:lnTo>
+                  <a:pt x="2505975" y="975360"/>
+                </a:lnTo>
+                <a:lnTo>
+                  <a:pt x="2494983" y="975360"/>
+                </a:lnTo>
+                <a:lnTo>
+                  <a:pt x="2483992" y="975360"/>
+                </a:lnTo>
+                <a:lnTo>
+                  <a:pt x="2473001" y="975360"/>
+                </a:lnTo>
+                <a:lnTo>
+                  <a:pt x="2462010" y="975360"/>
+                </a:lnTo>
+                <a:lnTo>
+                  <a:pt x="2451019" y="975360"/>
+                </a:lnTo>
+                <a:lnTo>
+                  <a:pt x="2440028" y="975360"/>
+                </a:lnTo>
+                <a:lnTo>
+                  <a:pt x="2429037" y="975360"/>
+                </a:lnTo>
+                <a:lnTo>
+                  <a:pt x="2418046" y="975360"/>
+                </a:lnTo>
+                <a:lnTo>
+                  <a:pt x="2407054" y="975360"/>
+                </a:lnTo>
+                <a:lnTo>
+                  <a:pt x="2396063" y="975360"/>
+                </a:lnTo>
+                <a:lnTo>
+                  <a:pt x="2385072" y="975360"/>
+                </a:lnTo>
+                <a:lnTo>
+                  <a:pt x="2374081" y="975360"/>
+                </a:lnTo>
+                <a:lnTo>
+                  <a:pt x="2363090" y="975360"/>
+                </a:lnTo>
+                <a:lnTo>
+                  <a:pt x="2352099" y="975360"/>
+                </a:lnTo>
+                <a:lnTo>
+                  <a:pt x="2341108" y="975360"/>
+                </a:lnTo>
+                <a:lnTo>
+                  <a:pt x="2330117" y="975360"/>
+                </a:lnTo>
+                <a:lnTo>
+                  <a:pt x="2319126" y="975360"/>
+                </a:lnTo>
+                <a:lnTo>
+                  <a:pt x="2308134" y="975360"/>
+                </a:lnTo>
+                <a:lnTo>
+                  <a:pt x="2297143" y="975360"/>
+                </a:lnTo>
+                <a:lnTo>
+                  <a:pt x="2286152" y="975360"/>
+                </a:lnTo>
+                <a:lnTo>
+                  <a:pt x="2275161" y="975360"/>
+                </a:lnTo>
+                <a:lnTo>
+                  <a:pt x="2264170" y="975360"/>
+                </a:lnTo>
+                <a:lnTo>
+                  <a:pt x="2253179" y="975360"/>
+                </a:lnTo>
+                <a:lnTo>
+                  <a:pt x="2242188" y="975360"/>
+                </a:lnTo>
+                <a:lnTo>
+                  <a:pt x="2231197" y="975360"/>
+                </a:lnTo>
+                <a:lnTo>
+                  <a:pt x="2220205" y="975360"/>
+                </a:lnTo>
+                <a:lnTo>
+                  <a:pt x="2209214" y="975360"/>
+                </a:lnTo>
+                <a:lnTo>
+                  <a:pt x="2198223" y="975360"/>
+                </a:lnTo>
+                <a:lnTo>
+                  <a:pt x="2187232" y="975360"/>
+                </a:lnTo>
+                <a:lnTo>
+                  <a:pt x="2176241" y="975360"/>
+                </a:lnTo>
+                <a:lnTo>
+                  <a:pt x="2165250" y="975360"/>
+                </a:lnTo>
+                <a:lnTo>
+                  <a:pt x="2154259" y="975360"/>
+                </a:lnTo>
+                <a:lnTo>
+                  <a:pt x="2143268" y="975360"/>
+                </a:lnTo>
+                <a:lnTo>
+                  <a:pt x="2132276" y="975360"/>
+                </a:lnTo>
+                <a:lnTo>
+                  <a:pt x="2121285" y="975360"/>
+                </a:lnTo>
+                <a:lnTo>
+                  <a:pt x="2110294" y="975360"/>
+                </a:lnTo>
+                <a:lnTo>
+                  <a:pt x="2099303" y="975360"/>
+                </a:lnTo>
+                <a:lnTo>
+                  <a:pt x="2088312" y="975360"/>
+                </a:lnTo>
+                <a:lnTo>
+                  <a:pt x="2077321" y="975360"/>
+                </a:lnTo>
+                <a:lnTo>
+                  <a:pt x="2066330" y="975360"/>
+                </a:lnTo>
+                <a:lnTo>
+                  <a:pt x="2055339" y="975360"/>
+                </a:lnTo>
+                <a:lnTo>
+                  <a:pt x="2044348" y="975360"/>
+                </a:lnTo>
+                <a:lnTo>
+                  <a:pt x="2033356" y="975360"/>
+                </a:lnTo>
+                <a:lnTo>
+                  <a:pt x="2022365" y="975360"/>
+                </a:lnTo>
+                <a:lnTo>
+                  <a:pt x="2011374" y="975360"/>
+                </a:lnTo>
+                <a:lnTo>
+                  <a:pt x="2000383" y="975360"/>
+                </a:lnTo>
+                <a:lnTo>
+                  <a:pt x="1989392" y="975360"/>
+                </a:lnTo>
+                <a:lnTo>
+                  <a:pt x="1978401" y="975360"/>
+                </a:lnTo>
+                <a:lnTo>
+                  <a:pt x="1967410" y="975360"/>
+                </a:lnTo>
+                <a:lnTo>
+                  <a:pt x="1956419" y="975360"/>
+                </a:lnTo>
+                <a:lnTo>
+                  <a:pt x="1945427" y="975360"/>
+                </a:lnTo>
+                <a:lnTo>
+                  <a:pt x="1934436" y="975360"/>
+                </a:lnTo>
+                <a:lnTo>
+                  <a:pt x="1923445" y="975360"/>
+                </a:lnTo>
+                <a:lnTo>
+                  <a:pt x="1912454" y="975360"/>
+                </a:lnTo>
+                <a:lnTo>
+                  <a:pt x="1901463" y="975360"/>
+                </a:lnTo>
+                <a:lnTo>
+                  <a:pt x="1890472" y="975360"/>
+                </a:lnTo>
+                <a:lnTo>
+                  <a:pt x="1879481" y="975360"/>
+                </a:lnTo>
+                <a:lnTo>
+                  <a:pt x="1868490" y="975360"/>
+                </a:lnTo>
+                <a:lnTo>
+                  <a:pt x="1857499" y="975360"/>
+                </a:lnTo>
+                <a:lnTo>
+                  <a:pt x="1846507" y="975360"/>
+                </a:lnTo>
+                <a:lnTo>
+                  <a:pt x="1835516" y="975360"/>
+                </a:lnTo>
+                <a:lnTo>
+                  <a:pt x="1824525" y="975360"/>
+                </a:lnTo>
+                <a:lnTo>
+                  <a:pt x="1813534" y="975360"/>
+                </a:lnTo>
+                <a:lnTo>
+                  <a:pt x="1802543" y="975360"/>
+                </a:lnTo>
+                <a:lnTo>
+                  <a:pt x="1791552" y="975360"/>
+                </a:lnTo>
+                <a:lnTo>
+                  <a:pt x="1780561" y="975360"/>
+                </a:lnTo>
+                <a:lnTo>
+                  <a:pt x="1769570" y="975360"/>
+                </a:lnTo>
+                <a:lnTo>
+                  <a:pt x="1758578" y="975360"/>
+                </a:lnTo>
+                <a:lnTo>
+                  <a:pt x="1747587" y="975360"/>
+                </a:lnTo>
+                <a:lnTo>
+                  <a:pt x="1736596" y="975360"/>
+                </a:lnTo>
+                <a:lnTo>
+                  <a:pt x="1725605" y="975360"/>
+                </a:lnTo>
+                <a:lnTo>
+                  <a:pt x="1714614" y="975360"/>
+                </a:lnTo>
+                <a:lnTo>
+                  <a:pt x="1703623" y="975360"/>
+                </a:lnTo>
+                <a:lnTo>
+                  <a:pt x="1692632" y="975360"/>
+                </a:lnTo>
+                <a:lnTo>
+                  <a:pt x="1681641" y="975360"/>
+                </a:lnTo>
+                <a:lnTo>
+                  <a:pt x="1670650" y="975360"/>
+                </a:lnTo>
+                <a:lnTo>
+                  <a:pt x="1659658" y="975360"/>
+                </a:lnTo>
+                <a:lnTo>
+                  <a:pt x="1648667" y="975360"/>
+                </a:lnTo>
+                <a:lnTo>
+                  <a:pt x="1637676" y="975360"/>
+                </a:lnTo>
+                <a:lnTo>
+                  <a:pt x="1626685" y="975360"/>
+                </a:lnTo>
+                <a:lnTo>
+                  <a:pt x="1615694" y="975360"/>
+                </a:lnTo>
+                <a:lnTo>
+                  <a:pt x="1604703" y="975360"/>
+                </a:lnTo>
+                <a:lnTo>
+                  <a:pt x="1593712" y="975360"/>
+                </a:lnTo>
+                <a:lnTo>
+                  <a:pt x="1582721" y="975360"/>
+                </a:lnTo>
+                <a:lnTo>
+                  <a:pt x="1571729" y="975360"/>
+                </a:lnTo>
+                <a:lnTo>
+                  <a:pt x="1560738" y="975360"/>
+                </a:lnTo>
+                <a:lnTo>
+                  <a:pt x="1549747" y="975360"/>
+                </a:lnTo>
+                <a:lnTo>
+                  <a:pt x="1538756" y="975360"/>
+                </a:lnTo>
+                <a:lnTo>
+                  <a:pt x="1527765" y="975360"/>
+                </a:lnTo>
+                <a:lnTo>
+                  <a:pt x="1516774" y="975360"/>
+                </a:lnTo>
+                <a:lnTo>
+                  <a:pt x="1505783" y="975360"/>
+                </a:lnTo>
+                <a:lnTo>
+                  <a:pt x="1494792" y="975360"/>
+                </a:lnTo>
+                <a:lnTo>
+                  <a:pt x="1483801" y="975360"/>
+                </a:lnTo>
+                <a:lnTo>
+                  <a:pt x="1472809" y="975360"/>
+                </a:lnTo>
+                <a:lnTo>
+                  <a:pt x="1461818" y="975360"/>
+                </a:lnTo>
+                <a:lnTo>
+                  <a:pt x="1450827" y="975360"/>
+                </a:lnTo>
+                <a:lnTo>
+                  <a:pt x="1439836" y="975360"/>
+                </a:lnTo>
+                <a:lnTo>
+                  <a:pt x="1428845" y="975360"/>
+                </a:lnTo>
+                <a:lnTo>
+                  <a:pt x="1417854" y="975360"/>
+                </a:lnTo>
+                <a:lnTo>
+                  <a:pt x="1406863" y="975360"/>
+                </a:lnTo>
+                <a:lnTo>
+                  <a:pt x="1395872" y="975360"/>
+                </a:lnTo>
+                <a:lnTo>
+                  <a:pt x="1384880" y="975360"/>
+                </a:lnTo>
+                <a:lnTo>
+                  <a:pt x="1373889" y="975360"/>
+                </a:lnTo>
+                <a:lnTo>
+                  <a:pt x="1362898" y="975360"/>
+                </a:lnTo>
+                <a:lnTo>
+                  <a:pt x="1351907" y="975360"/>
+                </a:lnTo>
+                <a:lnTo>
+                  <a:pt x="1340916" y="975360"/>
+                </a:lnTo>
+                <a:lnTo>
+                  <a:pt x="1329925" y="975360"/>
+                </a:lnTo>
+                <a:lnTo>
+                  <a:pt x="1318934" y="975360"/>
+                </a:lnTo>
+                <a:lnTo>
+                  <a:pt x="1307943" y="975360"/>
+                </a:lnTo>
+                <a:lnTo>
+                  <a:pt x="1296951" y="975360"/>
+                </a:lnTo>
+                <a:lnTo>
+                  <a:pt x="1285960" y="975360"/>
+                </a:lnTo>
+                <a:lnTo>
+                  <a:pt x="1274969" y="975360"/>
+                </a:lnTo>
+                <a:lnTo>
+                  <a:pt x="1263978" y="975360"/>
+                </a:lnTo>
+                <a:lnTo>
+                  <a:pt x="1252987" y="975360"/>
+                </a:lnTo>
+                <a:lnTo>
+                  <a:pt x="1241996" y="975360"/>
+                </a:lnTo>
+                <a:lnTo>
+                  <a:pt x="1231005" y="975360"/>
+                </a:lnTo>
+                <a:lnTo>
+                  <a:pt x="1220014" y="975360"/>
+                </a:lnTo>
+                <a:lnTo>
+                  <a:pt x="1209023" y="975360"/>
+                </a:lnTo>
+                <a:lnTo>
+                  <a:pt x="1198031" y="975360"/>
+                </a:lnTo>
+                <a:lnTo>
+                  <a:pt x="1187040" y="975360"/>
+                </a:lnTo>
+                <a:lnTo>
+                  <a:pt x="1176049" y="975360"/>
+                </a:lnTo>
+                <a:lnTo>
+                  <a:pt x="1165058" y="975360"/>
+                </a:lnTo>
+                <a:lnTo>
+                  <a:pt x="1154067" y="975360"/>
+                </a:lnTo>
+                <a:lnTo>
+                  <a:pt x="1143076" y="975360"/>
+                </a:lnTo>
+                <a:lnTo>
+                  <a:pt x="1132085" y="975360"/>
+                </a:lnTo>
+                <a:lnTo>
+                  <a:pt x="1121094" y="975360"/>
+                </a:lnTo>
+                <a:lnTo>
+                  <a:pt x="1110102" y="975360"/>
+                </a:lnTo>
+                <a:lnTo>
+                  <a:pt x="1099111" y="975360"/>
+                </a:lnTo>
+                <a:lnTo>
+                  <a:pt x="1088120" y="975360"/>
+                </a:lnTo>
+                <a:lnTo>
+                  <a:pt x="1077129" y="975360"/>
+                </a:lnTo>
+                <a:lnTo>
+                  <a:pt x="1066138" y="975360"/>
+                </a:lnTo>
+                <a:lnTo>
+                  <a:pt x="1055147" y="975360"/>
+                </a:lnTo>
+                <a:lnTo>
+                  <a:pt x="1044156" y="975360"/>
+                </a:lnTo>
+                <a:lnTo>
+                  <a:pt x="1033165" y="975360"/>
+                </a:lnTo>
+                <a:lnTo>
+                  <a:pt x="1022174" y="975360"/>
+                </a:lnTo>
+                <a:lnTo>
+                  <a:pt x="1011182" y="975360"/>
+                </a:lnTo>
+                <a:lnTo>
+                  <a:pt x="1000191" y="975360"/>
+                </a:lnTo>
+                <a:lnTo>
+                  <a:pt x="989200" y="975360"/>
+                </a:lnTo>
+                <a:lnTo>
+                  <a:pt x="978209" y="975360"/>
+                </a:lnTo>
+                <a:lnTo>
+                  <a:pt x="967218" y="975360"/>
+                </a:lnTo>
+                <a:lnTo>
+                  <a:pt x="956227" y="975360"/>
+                </a:lnTo>
+                <a:lnTo>
+                  <a:pt x="945236" y="975360"/>
+                </a:lnTo>
+                <a:lnTo>
+                  <a:pt x="934245" y="975360"/>
+                </a:lnTo>
+                <a:lnTo>
+                  <a:pt x="923253" y="975360"/>
+                </a:lnTo>
+                <a:lnTo>
+                  <a:pt x="912262" y="975360"/>
+                </a:lnTo>
+                <a:lnTo>
+                  <a:pt x="901271" y="975360"/>
+                </a:lnTo>
+                <a:lnTo>
+                  <a:pt x="890280" y="975360"/>
+                </a:lnTo>
+                <a:lnTo>
+                  <a:pt x="879289" y="975360"/>
+                </a:lnTo>
+                <a:lnTo>
+                  <a:pt x="868298" y="975360"/>
+                </a:lnTo>
+                <a:lnTo>
+                  <a:pt x="857307" y="975360"/>
+                </a:lnTo>
+                <a:lnTo>
+                  <a:pt x="846316" y="975360"/>
+                </a:lnTo>
+                <a:lnTo>
+                  <a:pt x="835325" y="975360"/>
+                </a:lnTo>
+                <a:lnTo>
+                  <a:pt x="824333" y="975360"/>
+                </a:lnTo>
+                <a:lnTo>
+                  <a:pt x="813342" y="975360"/>
+                </a:lnTo>
+                <a:lnTo>
+                  <a:pt x="802351" y="975360"/>
+                </a:lnTo>
+                <a:lnTo>
+                  <a:pt x="791360" y="975360"/>
+                </a:lnTo>
+                <a:lnTo>
+                  <a:pt x="780369" y="975360"/>
+                </a:lnTo>
+                <a:lnTo>
+                  <a:pt x="769378" y="975360"/>
+                </a:lnTo>
+                <a:lnTo>
+                  <a:pt x="758387" y="975360"/>
+                </a:lnTo>
+                <a:lnTo>
+                  <a:pt x="747396" y="975360"/>
+                </a:lnTo>
+                <a:lnTo>
+                  <a:pt x="736404" y="975360"/>
+                </a:lnTo>
+                <a:lnTo>
+                  <a:pt x="725413" y="975360"/>
+                </a:lnTo>
+                <a:lnTo>
+                  <a:pt x="714422" y="975360"/>
+                </a:lnTo>
+                <a:lnTo>
+                  <a:pt x="703431" y="975360"/>
+                </a:lnTo>
+                <a:lnTo>
+                  <a:pt x="692440" y="975360"/>
+                </a:lnTo>
+                <a:lnTo>
+                  <a:pt x="681449" y="975360"/>
+                </a:lnTo>
+                <a:lnTo>
+                  <a:pt x="670458" y="975360"/>
+                </a:lnTo>
+                <a:lnTo>
+                  <a:pt x="659467" y="975360"/>
+                </a:lnTo>
+                <a:lnTo>
+                  <a:pt x="648475" y="975360"/>
+                </a:lnTo>
+                <a:lnTo>
+                  <a:pt x="637484" y="975360"/>
+                </a:lnTo>
+                <a:lnTo>
+                  <a:pt x="626493" y="975360"/>
+                </a:lnTo>
+                <a:lnTo>
+                  <a:pt x="615502" y="975360"/>
+                </a:lnTo>
+                <a:lnTo>
+                  <a:pt x="604511" y="975360"/>
+                </a:lnTo>
+                <a:lnTo>
+                  <a:pt x="593520" y="975360"/>
+                </a:lnTo>
+                <a:lnTo>
+                  <a:pt x="582529" y="975360"/>
+                </a:lnTo>
+                <a:lnTo>
+                  <a:pt x="571538" y="975360"/>
+                </a:lnTo>
+                <a:lnTo>
+                  <a:pt x="560547" y="975360"/>
+                </a:lnTo>
+                <a:lnTo>
+                  <a:pt x="549555" y="975360"/>
+                </a:lnTo>
+                <a:lnTo>
+                  <a:pt x="538564" y="975360"/>
+                </a:lnTo>
+                <a:lnTo>
+                  <a:pt x="527573" y="975360"/>
+                </a:lnTo>
+                <a:lnTo>
+                  <a:pt x="516582" y="975360"/>
+                </a:lnTo>
+                <a:lnTo>
+                  <a:pt x="505591" y="975360"/>
+                </a:lnTo>
+                <a:lnTo>
+                  <a:pt x="494600" y="975360"/>
+                </a:lnTo>
+                <a:lnTo>
+                  <a:pt x="483609" y="975360"/>
+                </a:lnTo>
+                <a:lnTo>
+                  <a:pt x="472618" y="975360"/>
+                </a:lnTo>
+                <a:lnTo>
+                  <a:pt x="461626" y="975360"/>
+                </a:lnTo>
+                <a:lnTo>
+                  <a:pt x="450635" y="975360"/>
+                </a:lnTo>
+                <a:lnTo>
+                  <a:pt x="439644" y="975360"/>
+                </a:lnTo>
+                <a:lnTo>
+                  <a:pt x="428653" y="975360"/>
+                </a:lnTo>
+                <a:lnTo>
+                  <a:pt x="417662" y="975360"/>
+                </a:lnTo>
+                <a:lnTo>
+                  <a:pt x="406671" y="975360"/>
+                </a:lnTo>
+                <a:lnTo>
+                  <a:pt x="395680" y="975360"/>
+                </a:lnTo>
+                <a:lnTo>
+                  <a:pt x="384689" y="975360"/>
+                </a:lnTo>
+                <a:lnTo>
+                  <a:pt x="373698" y="975360"/>
+                </a:lnTo>
+                <a:lnTo>
+                  <a:pt x="362706" y="975360"/>
+                </a:lnTo>
+                <a:lnTo>
+                  <a:pt x="351715" y="975360"/>
+                </a:lnTo>
+                <a:lnTo>
+                  <a:pt x="340724" y="975360"/>
+                </a:lnTo>
+                <a:lnTo>
+                  <a:pt x="329733" y="975360"/>
+                </a:lnTo>
+                <a:lnTo>
+                  <a:pt x="318742" y="975360"/>
+                </a:lnTo>
+                <a:lnTo>
+                  <a:pt x="307751" y="975360"/>
+                </a:lnTo>
+                <a:lnTo>
+                  <a:pt x="296760" y="975360"/>
+                </a:lnTo>
+                <a:lnTo>
+                  <a:pt x="285769" y="975360"/>
+                </a:lnTo>
+                <a:lnTo>
+                  <a:pt x="274777" y="975360"/>
+                </a:lnTo>
+                <a:lnTo>
+                  <a:pt x="263786" y="975360"/>
+                </a:lnTo>
+                <a:lnTo>
+                  <a:pt x="252795" y="975360"/>
+                </a:lnTo>
+                <a:lnTo>
+                  <a:pt x="241804" y="975360"/>
+                </a:lnTo>
+                <a:lnTo>
+                  <a:pt x="230813" y="975360"/>
+                </a:lnTo>
+                <a:lnTo>
+                  <a:pt x="219822" y="975360"/>
+                </a:lnTo>
+                <a:lnTo>
+                  <a:pt x="208831" y="975360"/>
+                </a:lnTo>
+                <a:lnTo>
+                  <a:pt x="197840" y="975360"/>
+                </a:lnTo>
+                <a:lnTo>
+                  <a:pt x="186849" y="975360"/>
+                </a:lnTo>
+                <a:lnTo>
+                  <a:pt x="175857" y="975360"/>
+                </a:lnTo>
+                <a:lnTo>
+                  <a:pt x="164866" y="975360"/>
+                </a:lnTo>
+                <a:lnTo>
+                  <a:pt x="153875" y="975360"/>
+                </a:lnTo>
+                <a:lnTo>
+                  <a:pt x="142884" y="975360"/>
+                </a:lnTo>
+                <a:lnTo>
+                  <a:pt x="131893" y="975360"/>
+                </a:lnTo>
+                <a:lnTo>
+                  <a:pt x="120902" y="975360"/>
+                </a:lnTo>
+                <a:lnTo>
+                  <a:pt x="109911" y="975360"/>
+                </a:lnTo>
+                <a:lnTo>
+                  <a:pt x="98920" y="975360"/>
+                </a:lnTo>
+                <a:lnTo>
+                  <a:pt x="87928" y="975360"/>
+                </a:lnTo>
+                <a:lnTo>
+                  <a:pt x="76937" y="975360"/>
+                </a:lnTo>
+                <a:lnTo>
+                  <a:pt x="65946" y="975360"/>
+                </a:lnTo>
+                <a:lnTo>
+                  <a:pt x="54955" y="975360"/>
+                </a:lnTo>
+                <a:lnTo>
+                  <a:pt x="43964" y="975360"/>
+                </a:lnTo>
+                <a:lnTo>
+                  <a:pt x="32973" y="975360"/>
+                </a:lnTo>
+                <a:lnTo>
+                  <a:pt x="21982" y="975360"/>
+                </a:lnTo>
+                <a:lnTo>
+                  <a:pt x="10991" y="975360"/>
+                </a:lnTo>
+                <a:lnTo>
+                  <a:pt x="0" y="975360"/>
+                </a:lnTo>
+                <a:close/>
+              </a:path>
+            </a:pathLst>
+          </a:custGeom>
+          <a:solidFill>
+            <a:srgbClr val="7FC8F8">
+              <a:alpha val="35000"/>
+            </a:srgbClr>
+          </a:solidFill>
+          <a:ln w="10160">
+            <a:solidFill>
+              <a:srgbClr val="7FC8F8">
+                <a:alpha val="35000"/>
+              </a:srgbClr>
+            </a:solidFill>
+          </a:ln>
+          <a:effectLst/>
+        </p:spPr>
+        <p:txBody>
+          <a:bodyPr rtlCol="0" anchor="ctr"/>
+          <a:lstStyle/>
+          <a:p>
+            <a:pPr algn="ctr"/>
+          </a:p>
+        </p:txBody>
+      </p:sp>
+      <p:sp>
+        <p:nvSpPr>
+          <p:cNvPr id="33" name="C1-E20 polygon 31" descr="sci-ppt:o031"/>
+          <p:cNvSpPr/>
+          <p:nvPr/>
+        </p:nvSpPr>
+        <p:spPr>
+          <a:xfrm>
+            <a:off x="914400" y="2103120"/>
+            <a:ext cx="6583679" cy="2926080"/>
+          </a:xfrm>
+          <a:custGeom>
+            <a:avLst/>
+            <a:gdLst/>
+            <a:ahLst/>
+            <a:cxnLst/>
+            <a:rect l="l" t="t" r="r" b="b"/>
+            <a:pathLst>
+              <a:path w="6583679" h="2926080">
+                <a:moveTo>
+                  <a:pt x="0" y="0"/>
+                </a:moveTo>
+                <a:lnTo>
+                  <a:pt x="10991" y="0"/>
+                </a:lnTo>
+                <a:lnTo>
+                  <a:pt x="21982" y="0"/>
+                </a:lnTo>
+                <a:lnTo>
+                  <a:pt x="32973" y="0"/>
+                </a:lnTo>
+                <a:lnTo>
+                  <a:pt x="43964" y="0"/>
+                </a:lnTo>
+                <a:lnTo>
+                  <a:pt x="54955" y="0"/>
+                </a:lnTo>
+                <a:lnTo>
+                  <a:pt x="65946" y="0"/>
+                </a:lnTo>
+                <a:lnTo>
+                  <a:pt x="76937" y="0"/>
+                </a:lnTo>
+                <a:lnTo>
+                  <a:pt x="87928" y="0"/>
+                </a:lnTo>
+                <a:lnTo>
+                  <a:pt x="98920" y="0"/>
+                </a:lnTo>
+                <a:lnTo>
+                  <a:pt x="109911" y="0"/>
+                </a:lnTo>
+                <a:lnTo>
+                  <a:pt x="120902" y="0"/>
+                </a:lnTo>
+                <a:lnTo>
+                  <a:pt x="131893" y="0"/>
+                </a:lnTo>
+                <a:lnTo>
+                  <a:pt x="142884" y="0"/>
+                </a:lnTo>
+                <a:lnTo>
+                  <a:pt x="153875" y="0"/>
+                </a:lnTo>
+                <a:lnTo>
+                  <a:pt x="164866" y="0"/>
+                </a:lnTo>
+                <a:lnTo>
+                  <a:pt x="175857" y="0"/>
+                </a:lnTo>
+                <a:lnTo>
+                  <a:pt x="186849" y="0"/>
+                </a:lnTo>
+                <a:lnTo>
+                  <a:pt x="197840" y="0"/>
+                </a:lnTo>
+                <a:lnTo>
+                  <a:pt x="208831" y="0"/>
+                </a:lnTo>
+                <a:lnTo>
+                  <a:pt x="219822" y="0"/>
+                </a:lnTo>
+                <a:lnTo>
+                  <a:pt x="230813" y="0"/>
+                </a:lnTo>
+                <a:lnTo>
+                  <a:pt x="241804" y="0"/>
+                </a:lnTo>
+                <a:lnTo>
+                  <a:pt x="252795" y="0"/>
+                </a:lnTo>
+                <a:lnTo>
+                  <a:pt x="263786" y="0"/>
+                </a:lnTo>
+                <a:lnTo>
+                  <a:pt x="274777" y="0"/>
+                </a:lnTo>
+                <a:lnTo>
+                  <a:pt x="285769" y="0"/>
+                </a:lnTo>
+                <a:lnTo>
+                  <a:pt x="296760" y="0"/>
+                </a:lnTo>
+                <a:lnTo>
+                  <a:pt x="307751" y="0"/>
+                </a:lnTo>
+                <a:lnTo>
+                  <a:pt x="318742" y="0"/>
+                </a:lnTo>
+                <a:lnTo>
+                  <a:pt x="329733" y="0"/>
+                </a:lnTo>
+                <a:lnTo>
+                  <a:pt x="340724" y="0"/>
+                </a:lnTo>
+                <a:lnTo>
+                  <a:pt x="351715" y="0"/>
+                </a:lnTo>
+                <a:lnTo>
+                  <a:pt x="362706" y="0"/>
+                </a:lnTo>
+                <a:lnTo>
+                  <a:pt x="373698" y="0"/>
+                </a:lnTo>
+                <a:lnTo>
+                  <a:pt x="384689" y="0"/>
+                </a:lnTo>
+                <a:lnTo>
+                  <a:pt x="395680" y="0"/>
+                </a:lnTo>
+                <a:lnTo>
+                  <a:pt x="406671" y="0"/>
+                </a:lnTo>
+                <a:lnTo>
+                  <a:pt x="417662" y="0"/>
+                </a:lnTo>
+                <a:lnTo>
+                  <a:pt x="428653" y="0"/>
+                </a:lnTo>
+                <a:lnTo>
+                  <a:pt x="439644" y="0"/>
+                </a:lnTo>
+                <a:lnTo>
+                  <a:pt x="450635" y="0"/>
+                </a:lnTo>
+                <a:lnTo>
+                  <a:pt x="461626" y="0"/>
+                </a:lnTo>
+                <a:lnTo>
+                  <a:pt x="472618" y="0"/>
+                </a:lnTo>
+                <a:lnTo>
+                  <a:pt x="483609" y="0"/>
+                </a:lnTo>
+                <a:lnTo>
+                  <a:pt x="494600" y="0"/>
+                </a:lnTo>
+                <a:lnTo>
+                  <a:pt x="505591" y="0"/>
+                </a:lnTo>
+                <a:lnTo>
+                  <a:pt x="516582" y="0"/>
+                </a:lnTo>
+                <a:lnTo>
+                  <a:pt x="527573" y="0"/>
+                </a:lnTo>
+                <a:lnTo>
+                  <a:pt x="538564" y="0"/>
+                </a:lnTo>
+                <a:lnTo>
+                  <a:pt x="549555" y="0"/>
+                </a:lnTo>
+                <a:lnTo>
+                  <a:pt x="560547" y="0"/>
+                </a:lnTo>
+                <a:lnTo>
+                  <a:pt x="571538" y="0"/>
+                </a:lnTo>
+                <a:lnTo>
+                  <a:pt x="582529" y="0"/>
+                </a:lnTo>
+                <a:lnTo>
+                  <a:pt x="593520" y="0"/>
+                </a:lnTo>
+                <a:lnTo>
+                  <a:pt x="604511" y="0"/>
+                </a:lnTo>
+                <a:lnTo>
+                  <a:pt x="615502" y="0"/>
+                </a:lnTo>
+                <a:lnTo>
+                  <a:pt x="626493" y="0"/>
+                </a:lnTo>
+                <a:lnTo>
+                  <a:pt x="637484" y="0"/>
+                </a:lnTo>
+                <a:lnTo>
+                  <a:pt x="648475" y="0"/>
+                </a:lnTo>
+                <a:lnTo>
+                  <a:pt x="659467" y="0"/>
+                </a:lnTo>
+                <a:lnTo>
+                  <a:pt x="670458" y="0"/>
+                </a:lnTo>
+                <a:lnTo>
+                  <a:pt x="681449" y="0"/>
+                </a:lnTo>
+                <a:lnTo>
+                  <a:pt x="692440" y="0"/>
+                </a:lnTo>
+                <a:lnTo>
+                  <a:pt x="703431" y="0"/>
+                </a:lnTo>
+                <a:lnTo>
+                  <a:pt x="714422" y="0"/>
+                </a:lnTo>
+                <a:lnTo>
+                  <a:pt x="725413" y="0"/>
+                </a:lnTo>
+                <a:lnTo>
+                  <a:pt x="736404" y="0"/>
+                </a:lnTo>
+                <a:lnTo>
+                  <a:pt x="747396" y="0"/>
+                </a:lnTo>
+                <a:lnTo>
+                  <a:pt x="758387" y="0"/>
+                </a:lnTo>
+                <a:lnTo>
+                  <a:pt x="769378" y="0"/>
+                </a:lnTo>
+                <a:lnTo>
+                  <a:pt x="780369" y="0"/>
+                </a:lnTo>
+                <a:lnTo>
+                  <a:pt x="791360" y="0"/>
+                </a:lnTo>
+                <a:lnTo>
+                  <a:pt x="802351" y="0"/>
+                </a:lnTo>
+                <a:lnTo>
+                  <a:pt x="813342" y="0"/>
+                </a:lnTo>
+                <a:lnTo>
+                  <a:pt x="824333" y="0"/>
+                </a:lnTo>
+                <a:lnTo>
+                  <a:pt x="835325" y="0"/>
+                </a:lnTo>
+                <a:lnTo>
+                  <a:pt x="846316" y="0"/>
+                </a:lnTo>
+                <a:lnTo>
+                  <a:pt x="857307" y="0"/>
+                </a:lnTo>
+                <a:lnTo>
+                  <a:pt x="868298" y="0"/>
+                </a:lnTo>
+                <a:lnTo>
+                  <a:pt x="879289" y="0"/>
+                </a:lnTo>
+                <a:lnTo>
+                  <a:pt x="890280" y="0"/>
+                </a:lnTo>
+                <a:lnTo>
+                  <a:pt x="901271" y="0"/>
+                </a:lnTo>
+                <a:lnTo>
+                  <a:pt x="912262" y="0"/>
+                </a:lnTo>
+                <a:lnTo>
+                  <a:pt x="923253" y="0"/>
+                </a:lnTo>
+                <a:lnTo>
+                  <a:pt x="934245" y="0"/>
+                </a:lnTo>
+                <a:lnTo>
+                  <a:pt x="945236" y="0"/>
+                </a:lnTo>
+                <a:lnTo>
+                  <a:pt x="956227" y="0"/>
+                </a:lnTo>
+                <a:lnTo>
+                  <a:pt x="967218" y="0"/>
+                </a:lnTo>
+                <a:lnTo>
+                  <a:pt x="978209" y="0"/>
+                </a:lnTo>
+                <a:lnTo>
+                  <a:pt x="989200" y="0"/>
+                </a:lnTo>
+                <a:lnTo>
+                  <a:pt x="1000191" y="0"/>
+                </a:lnTo>
+                <a:lnTo>
+                  <a:pt x="1011182" y="0"/>
+                </a:lnTo>
+                <a:lnTo>
+                  <a:pt x="1022174" y="0"/>
+                </a:lnTo>
+                <a:lnTo>
+                  <a:pt x="1033165" y="0"/>
+                </a:lnTo>
+                <a:lnTo>
+                  <a:pt x="1044156" y="0"/>
+                </a:lnTo>
+                <a:lnTo>
+                  <a:pt x="1055147" y="0"/>
+                </a:lnTo>
+                <a:lnTo>
+                  <a:pt x="1066138" y="0"/>
+                </a:lnTo>
+                <a:lnTo>
+                  <a:pt x="1077129" y="0"/>
+                </a:lnTo>
+                <a:lnTo>
+                  <a:pt x="1088120" y="0"/>
+                </a:lnTo>
+                <a:lnTo>
+                  <a:pt x="1099111" y="0"/>
+                </a:lnTo>
+                <a:lnTo>
+                  <a:pt x="1110102" y="0"/>
+                </a:lnTo>
+                <a:lnTo>
+                  <a:pt x="1121094" y="0"/>
+                </a:lnTo>
+                <a:lnTo>
+                  <a:pt x="1132085" y="0"/>
+                </a:lnTo>
+                <a:lnTo>
+                  <a:pt x="1143076" y="0"/>
+                </a:lnTo>
+                <a:lnTo>
+                  <a:pt x="1154067" y="0"/>
+                </a:lnTo>
+                <a:lnTo>
+                  <a:pt x="1165058" y="0"/>
+                </a:lnTo>
+                <a:lnTo>
+                  <a:pt x="1176049" y="0"/>
+                </a:lnTo>
+                <a:lnTo>
+                  <a:pt x="1187040" y="0"/>
+                </a:lnTo>
+                <a:lnTo>
+                  <a:pt x="1198031" y="0"/>
+                </a:lnTo>
+                <a:lnTo>
+                  <a:pt x="1209023" y="0"/>
+                </a:lnTo>
+                <a:lnTo>
+                  <a:pt x="1220014" y="0"/>
+                </a:lnTo>
+                <a:lnTo>
+                  <a:pt x="1231005" y="0"/>
+                </a:lnTo>
+                <a:lnTo>
+                  <a:pt x="1241996" y="0"/>
+                </a:lnTo>
+                <a:lnTo>
+                  <a:pt x="1252987" y="0"/>
+                </a:lnTo>
+                <a:lnTo>
+                  <a:pt x="1263978" y="0"/>
+                </a:lnTo>
+                <a:lnTo>
+                  <a:pt x="1274969" y="0"/>
+                </a:lnTo>
+                <a:lnTo>
+                  <a:pt x="1285960" y="0"/>
+                </a:lnTo>
+                <a:lnTo>
+                  <a:pt x="1296951" y="0"/>
+                </a:lnTo>
+                <a:lnTo>
+                  <a:pt x="1307943" y="0"/>
+                </a:lnTo>
+                <a:lnTo>
+                  <a:pt x="1318934" y="0"/>
+                </a:lnTo>
+                <a:lnTo>
+                  <a:pt x="1329925" y="0"/>
+                </a:lnTo>
+                <a:lnTo>
+                  <a:pt x="1340916" y="0"/>
+                </a:lnTo>
+                <a:lnTo>
+                  <a:pt x="1351907" y="0"/>
+                </a:lnTo>
+                <a:lnTo>
+                  <a:pt x="1362898" y="0"/>
+                </a:lnTo>
+                <a:lnTo>
+                  <a:pt x="1373889" y="0"/>
+                </a:lnTo>
+                <a:lnTo>
+                  <a:pt x="1384880" y="0"/>
+                </a:lnTo>
+                <a:lnTo>
+                  <a:pt x="1395872" y="0"/>
+                </a:lnTo>
+                <a:lnTo>
+                  <a:pt x="1406863" y="0"/>
+                </a:lnTo>
+                <a:lnTo>
+                  <a:pt x="1417854" y="0"/>
+                </a:lnTo>
+                <a:lnTo>
+                  <a:pt x="1428845" y="0"/>
+                </a:lnTo>
+                <a:lnTo>
+                  <a:pt x="1439836" y="0"/>
+                </a:lnTo>
+                <a:lnTo>
+                  <a:pt x="1450827" y="0"/>
+                </a:lnTo>
+                <a:lnTo>
+                  <a:pt x="1461818" y="0"/>
+                </a:lnTo>
+                <a:lnTo>
+                  <a:pt x="1472809" y="0"/>
+                </a:lnTo>
+                <a:lnTo>
+                  <a:pt x="1483801" y="0"/>
+                </a:lnTo>
+                <a:lnTo>
+                  <a:pt x="1494792" y="0"/>
+                </a:lnTo>
+                <a:lnTo>
+                  <a:pt x="1505783" y="0"/>
+                </a:lnTo>
+                <a:lnTo>
+                  <a:pt x="1516774" y="0"/>
+                </a:lnTo>
+                <a:lnTo>
+                  <a:pt x="1527765" y="0"/>
+                </a:lnTo>
+                <a:lnTo>
+                  <a:pt x="1538756" y="0"/>
+                </a:lnTo>
+                <a:lnTo>
+                  <a:pt x="1549747" y="0"/>
+                </a:lnTo>
+                <a:lnTo>
+                  <a:pt x="1560738" y="0"/>
+                </a:lnTo>
+                <a:lnTo>
+                  <a:pt x="1571729" y="0"/>
+                </a:lnTo>
+                <a:lnTo>
+                  <a:pt x="1582721" y="0"/>
+                </a:lnTo>
+                <a:lnTo>
+                  <a:pt x="1593712" y="0"/>
+                </a:lnTo>
+                <a:lnTo>
+                  <a:pt x="1604703" y="0"/>
+                </a:lnTo>
+                <a:lnTo>
+                  <a:pt x="1615694" y="0"/>
+                </a:lnTo>
+                <a:lnTo>
+                  <a:pt x="1626685" y="0"/>
+                </a:lnTo>
+                <a:lnTo>
+                  <a:pt x="1637676" y="0"/>
+                </a:lnTo>
+                <a:lnTo>
+                  <a:pt x="1648667" y="2926080"/>
+                </a:lnTo>
+                <a:lnTo>
+                  <a:pt x="1659658" y="2926080"/>
+                </a:lnTo>
+                <a:lnTo>
+                  <a:pt x="1670650" y="2926080"/>
+                </a:lnTo>
+                <a:lnTo>
+                  <a:pt x="1681641" y="2926080"/>
+                </a:lnTo>
+                <a:lnTo>
+                  <a:pt x="1692632" y="2926080"/>
+                </a:lnTo>
+                <a:lnTo>
+                  <a:pt x="1703623" y="2926080"/>
+                </a:lnTo>
+                <a:lnTo>
+                  <a:pt x="1714614" y="2926080"/>
+                </a:lnTo>
+                <a:lnTo>
+                  <a:pt x="1725605" y="2926080"/>
+                </a:lnTo>
+                <a:lnTo>
+                  <a:pt x="1736596" y="2926080"/>
+                </a:lnTo>
+                <a:lnTo>
+                  <a:pt x="1747587" y="2926080"/>
+                </a:lnTo>
+                <a:lnTo>
+                  <a:pt x="1758578" y="2926080"/>
+                </a:lnTo>
+                <a:lnTo>
+                  <a:pt x="1769570" y="2926080"/>
+                </a:lnTo>
+                <a:lnTo>
+                  <a:pt x="1780561" y="2926080"/>
+                </a:lnTo>
+                <a:lnTo>
+                  <a:pt x="1791552" y="2926080"/>
+                </a:lnTo>
+                <a:lnTo>
+                  <a:pt x="1802543" y="2926080"/>
+                </a:lnTo>
+                <a:lnTo>
+                  <a:pt x="1813534" y="2926080"/>
+                </a:lnTo>
+                <a:lnTo>
+                  <a:pt x="1824525" y="2926080"/>
+                </a:lnTo>
+                <a:lnTo>
+                  <a:pt x="1835516" y="2926080"/>
+                </a:lnTo>
+                <a:lnTo>
+                  <a:pt x="1846507" y="2926080"/>
+                </a:lnTo>
+                <a:lnTo>
+                  <a:pt x="1857499" y="2926080"/>
+                </a:lnTo>
+                <a:lnTo>
+                  <a:pt x="1868490" y="2926080"/>
+                </a:lnTo>
+                <a:lnTo>
+                  <a:pt x="1879481" y="2926080"/>
+                </a:lnTo>
+                <a:lnTo>
+                  <a:pt x="1890472" y="2926080"/>
+                </a:lnTo>
+                <a:lnTo>
+                  <a:pt x="1901463" y="2926080"/>
+                </a:lnTo>
+                <a:lnTo>
+                  <a:pt x="1912454" y="2926080"/>
+                </a:lnTo>
+                <a:lnTo>
+                  <a:pt x="1923445" y="2926080"/>
+                </a:lnTo>
+                <a:lnTo>
+                  <a:pt x="1934436" y="2926080"/>
+                </a:lnTo>
+                <a:lnTo>
+                  <a:pt x="1945427" y="2926080"/>
+                </a:lnTo>
+                <a:lnTo>
+                  <a:pt x="1956419" y="2926080"/>
+                </a:lnTo>
+                <a:lnTo>
+                  <a:pt x="1967410" y="2926080"/>
+                </a:lnTo>
+                <a:lnTo>
+                  <a:pt x="1978401" y="2926080"/>
+                </a:lnTo>
+                <a:lnTo>
+                  <a:pt x="1989392" y="2926080"/>
+                </a:lnTo>
+                <a:lnTo>
+                  <a:pt x="2000383" y="2926080"/>
+                </a:lnTo>
+                <a:lnTo>
+                  <a:pt x="2011374" y="2926080"/>
+                </a:lnTo>
+                <a:lnTo>
+                  <a:pt x="2022365" y="2926080"/>
+                </a:lnTo>
+                <a:lnTo>
+                  <a:pt x="2033356" y="2926080"/>
+                </a:lnTo>
+                <a:lnTo>
+                  <a:pt x="2044348" y="2926080"/>
+                </a:lnTo>
+                <a:lnTo>
+                  <a:pt x="2055339" y="2926080"/>
+                </a:lnTo>
+                <a:lnTo>
+                  <a:pt x="2066330" y="2926080"/>
+                </a:lnTo>
+                <a:lnTo>
+                  <a:pt x="2077321" y="2926080"/>
+                </a:lnTo>
+                <a:lnTo>
+                  <a:pt x="2088312" y="2926080"/>
+                </a:lnTo>
+                <a:lnTo>
+                  <a:pt x="2099303" y="2926080"/>
+                </a:lnTo>
+                <a:lnTo>
+                  <a:pt x="2110294" y="2926080"/>
+                </a:lnTo>
+                <a:lnTo>
+                  <a:pt x="2121285" y="2926080"/>
+                </a:lnTo>
+                <a:lnTo>
+                  <a:pt x="2132276" y="2926080"/>
+                </a:lnTo>
+                <a:lnTo>
+                  <a:pt x="2143268" y="2926080"/>
+                </a:lnTo>
+                <a:lnTo>
+                  <a:pt x="2154259" y="2926080"/>
+                </a:lnTo>
+                <a:lnTo>
+                  <a:pt x="2165250" y="2926080"/>
+                </a:lnTo>
+                <a:lnTo>
+                  <a:pt x="2176241" y="2926080"/>
+                </a:lnTo>
+                <a:lnTo>
+                  <a:pt x="2187232" y="2926080"/>
+                </a:lnTo>
+                <a:lnTo>
+                  <a:pt x="2198223" y="2926080"/>
+                </a:lnTo>
+                <a:lnTo>
+                  <a:pt x="2209214" y="2926080"/>
+                </a:lnTo>
+                <a:lnTo>
+                  <a:pt x="2220205" y="2926080"/>
+                </a:lnTo>
+                <a:lnTo>
+                  <a:pt x="2231197" y="2926080"/>
+                </a:lnTo>
+                <a:lnTo>
+                  <a:pt x="2242188" y="2926080"/>
+                </a:lnTo>
+                <a:lnTo>
+                  <a:pt x="2253179" y="2926080"/>
+                </a:lnTo>
+                <a:lnTo>
+                  <a:pt x="2264170" y="2926080"/>
+                </a:lnTo>
+                <a:lnTo>
+                  <a:pt x="2275161" y="2926080"/>
+                </a:lnTo>
+                <a:lnTo>
+                  <a:pt x="2286152" y="2926080"/>
+                </a:lnTo>
+                <a:lnTo>
+                  <a:pt x="2297143" y="2926080"/>
+                </a:lnTo>
+                <a:lnTo>
+                  <a:pt x="2308134" y="2926080"/>
+                </a:lnTo>
+                <a:lnTo>
+                  <a:pt x="2319126" y="2926080"/>
+                </a:lnTo>
+                <a:lnTo>
+                  <a:pt x="2330117" y="2926080"/>
+                </a:lnTo>
+                <a:lnTo>
+                  <a:pt x="2341108" y="2926080"/>
+                </a:lnTo>
+                <a:lnTo>
+                  <a:pt x="2352099" y="2926080"/>
+                </a:lnTo>
+                <a:lnTo>
+                  <a:pt x="2363090" y="2926080"/>
+                </a:lnTo>
+                <a:lnTo>
+                  <a:pt x="2374081" y="2926080"/>
+                </a:lnTo>
+                <a:lnTo>
+                  <a:pt x="2385072" y="2926080"/>
+                </a:lnTo>
+                <a:lnTo>
+                  <a:pt x="2396063" y="2926080"/>
+                </a:lnTo>
+                <a:lnTo>
+                  <a:pt x="2407054" y="2926080"/>
+                </a:lnTo>
+                <a:lnTo>
+                  <a:pt x="2418046" y="2926080"/>
+                </a:lnTo>
+                <a:lnTo>
+                  <a:pt x="2429037" y="2926080"/>
+                </a:lnTo>
+                <a:lnTo>
+                  <a:pt x="2440028" y="2926080"/>
+                </a:lnTo>
+                <a:lnTo>
+                  <a:pt x="2451019" y="2926080"/>
+                </a:lnTo>
+                <a:lnTo>
+                  <a:pt x="2462010" y="2926080"/>
+                </a:lnTo>
+                <a:lnTo>
+                  <a:pt x="2473001" y="2926080"/>
+                </a:lnTo>
+                <a:lnTo>
+                  <a:pt x="2483992" y="2926080"/>
+                </a:lnTo>
+                <a:lnTo>
+                  <a:pt x="2494983" y="2926080"/>
+                </a:lnTo>
+                <a:lnTo>
+                  <a:pt x="2505975" y="2926080"/>
+                </a:lnTo>
+                <a:lnTo>
+                  <a:pt x="2516966" y="2926080"/>
+                </a:lnTo>
+                <a:lnTo>
+                  <a:pt x="2527957" y="2926080"/>
+                </a:lnTo>
+                <a:lnTo>
+                  <a:pt x="2538948" y="2926080"/>
+                </a:lnTo>
+                <a:lnTo>
+                  <a:pt x="2549939" y="2926080"/>
+                </a:lnTo>
+                <a:lnTo>
+                  <a:pt x="2560930" y="2926080"/>
+                </a:lnTo>
+                <a:lnTo>
+                  <a:pt x="2571921" y="2926080"/>
+                </a:lnTo>
+                <a:lnTo>
+                  <a:pt x="2582912" y="2926080"/>
+                </a:lnTo>
+                <a:lnTo>
+                  <a:pt x="2593903" y="2926080"/>
+                </a:lnTo>
+                <a:lnTo>
+                  <a:pt x="2604895" y="2926080"/>
+                </a:lnTo>
+                <a:lnTo>
+                  <a:pt x="2615886" y="2926080"/>
+                </a:lnTo>
+                <a:lnTo>
+                  <a:pt x="2626877" y="2926080"/>
+                </a:lnTo>
+                <a:lnTo>
+                  <a:pt x="2637868" y="2926080"/>
+                </a:lnTo>
+                <a:lnTo>
+                  <a:pt x="2648859" y="2926080"/>
+                </a:lnTo>
+                <a:lnTo>
+                  <a:pt x="2659850" y="2926080"/>
+                </a:lnTo>
+                <a:lnTo>
+                  <a:pt x="2670841" y="2926080"/>
+                </a:lnTo>
+                <a:lnTo>
+                  <a:pt x="2681832" y="2926080"/>
+                </a:lnTo>
+                <a:lnTo>
+                  <a:pt x="2692824" y="2926080"/>
+                </a:lnTo>
+                <a:lnTo>
+                  <a:pt x="2703815" y="2926080"/>
+                </a:lnTo>
+                <a:lnTo>
+                  <a:pt x="2714806" y="2926080"/>
+                </a:lnTo>
+                <a:lnTo>
+                  <a:pt x="2725797" y="2926080"/>
+                </a:lnTo>
+                <a:lnTo>
+                  <a:pt x="2736788" y="2926080"/>
+                </a:lnTo>
+                <a:lnTo>
+                  <a:pt x="2747779" y="2926080"/>
+                </a:lnTo>
+                <a:lnTo>
+                  <a:pt x="2758770" y="2926080"/>
+                </a:lnTo>
+                <a:lnTo>
+                  <a:pt x="2769761" y="2926080"/>
+                </a:lnTo>
+                <a:lnTo>
+                  <a:pt x="2780752" y="2926080"/>
+                </a:lnTo>
+                <a:lnTo>
+                  <a:pt x="2791744" y="2926080"/>
+                </a:lnTo>
+                <a:lnTo>
+                  <a:pt x="2802735" y="2926080"/>
+                </a:lnTo>
+                <a:lnTo>
+                  <a:pt x="2813726" y="2926080"/>
+                </a:lnTo>
+                <a:lnTo>
+                  <a:pt x="2824717" y="2926080"/>
+                </a:lnTo>
+                <a:lnTo>
+                  <a:pt x="2835708" y="2926080"/>
+                </a:lnTo>
+                <a:lnTo>
+                  <a:pt x="2846699" y="2926080"/>
+                </a:lnTo>
+                <a:lnTo>
+                  <a:pt x="2857690" y="2926080"/>
+                </a:lnTo>
+                <a:lnTo>
+                  <a:pt x="2868681" y="2926080"/>
+                </a:lnTo>
+                <a:lnTo>
+                  <a:pt x="2879673" y="2926080"/>
+                </a:lnTo>
+                <a:lnTo>
+                  <a:pt x="2890664" y="2926080"/>
+                </a:lnTo>
+                <a:lnTo>
+                  <a:pt x="2901655" y="2926080"/>
+                </a:lnTo>
+                <a:lnTo>
+                  <a:pt x="2912646" y="2926080"/>
+                </a:lnTo>
+                <a:lnTo>
+                  <a:pt x="2923637" y="2926080"/>
+                </a:lnTo>
+                <a:lnTo>
+                  <a:pt x="2934628" y="2926080"/>
+                </a:lnTo>
+                <a:lnTo>
+                  <a:pt x="2945619" y="2926080"/>
+                </a:lnTo>
+                <a:lnTo>
+                  <a:pt x="2956610" y="2926080"/>
+                </a:lnTo>
+                <a:lnTo>
+                  <a:pt x="2967602" y="2926080"/>
+                </a:lnTo>
+                <a:lnTo>
+                  <a:pt x="2978593" y="2926080"/>
+                </a:lnTo>
+                <a:lnTo>
+                  <a:pt x="2989584" y="2926080"/>
+                </a:lnTo>
+                <a:lnTo>
+                  <a:pt x="3000575" y="2926080"/>
+                </a:lnTo>
+                <a:lnTo>
+                  <a:pt x="3011566" y="2926080"/>
+                </a:lnTo>
+                <a:lnTo>
+                  <a:pt x="3022557" y="2926080"/>
+                </a:lnTo>
+                <a:lnTo>
+                  <a:pt x="3033548" y="2926080"/>
+                </a:lnTo>
+                <a:lnTo>
+                  <a:pt x="3044539" y="2926080"/>
+                </a:lnTo>
+                <a:lnTo>
+                  <a:pt x="3055530" y="2926080"/>
+                </a:lnTo>
+                <a:lnTo>
+                  <a:pt x="3066522" y="2926080"/>
+                </a:lnTo>
+                <a:lnTo>
+                  <a:pt x="3077513" y="2926080"/>
+                </a:lnTo>
+                <a:lnTo>
+                  <a:pt x="3088504" y="2926080"/>
+                </a:lnTo>
+                <a:lnTo>
+                  <a:pt x="3099495" y="2926080"/>
+                </a:lnTo>
+                <a:lnTo>
+                  <a:pt x="3110486" y="2926080"/>
+                </a:lnTo>
+                <a:lnTo>
+                  <a:pt x="3121477" y="2926080"/>
+                </a:lnTo>
+                <a:lnTo>
+                  <a:pt x="3132468" y="2926080"/>
+                </a:lnTo>
+                <a:lnTo>
+                  <a:pt x="3143459" y="2926080"/>
+                </a:lnTo>
+                <a:lnTo>
+                  <a:pt x="3154451" y="2926080"/>
+                </a:lnTo>
+                <a:lnTo>
+                  <a:pt x="3165442" y="2926080"/>
+                </a:lnTo>
+                <a:lnTo>
+                  <a:pt x="3176433" y="2926080"/>
+                </a:lnTo>
+                <a:lnTo>
+                  <a:pt x="3187424" y="2926080"/>
+                </a:lnTo>
+                <a:lnTo>
+                  <a:pt x="3198415" y="2926080"/>
+                </a:lnTo>
+                <a:lnTo>
+                  <a:pt x="3209406" y="2926080"/>
+                </a:lnTo>
+                <a:lnTo>
+                  <a:pt x="3220397" y="2926080"/>
+                </a:lnTo>
+                <a:lnTo>
+                  <a:pt x="3231388" y="2926080"/>
+                </a:lnTo>
+                <a:lnTo>
+                  <a:pt x="3242379" y="2926080"/>
+                </a:lnTo>
+                <a:lnTo>
+                  <a:pt x="3253371" y="2926080"/>
+                </a:lnTo>
+                <a:lnTo>
+                  <a:pt x="3264362" y="2926080"/>
+                </a:lnTo>
+                <a:lnTo>
+                  <a:pt x="3275353" y="2926080"/>
+                </a:lnTo>
+                <a:lnTo>
+                  <a:pt x="3286344" y="2926080"/>
+                </a:lnTo>
+                <a:lnTo>
+                  <a:pt x="3297335" y="2926080"/>
+                </a:lnTo>
+                <a:lnTo>
+                  <a:pt x="3308326" y="2926080"/>
+                </a:lnTo>
+                <a:lnTo>
+                  <a:pt x="3319317" y="2926080"/>
+                </a:lnTo>
+                <a:lnTo>
+                  <a:pt x="3330308" y="2926080"/>
+                </a:lnTo>
+                <a:lnTo>
+                  <a:pt x="3341300" y="2926080"/>
+                </a:lnTo>
+                <a:lnTo>
+                  <a:pt x="3352291" y="2926080"/>
+                </a:lnTo>
+                <a:lnTo>
+                  <a:pt x="3363282" y="2926080"/>
+                </a:lnTo>
+                <a:lnTo>
+                  <a:pt x="3374273" y="2926080"/>
+                </a:lnTo>
+                <a:lnTo>
+                  <a:pt x="3385264" y="2926080"/>
+                </a:lnTo>
+                <a:lnTo>
+                  <a:pt x="3396255" y="2926080"/>
+                </a:lnTo>
+                <a:lnTo>
+                  <a:pt x="3407246" y="2926080"/>
+                </a:lnTo>
+                <a:lnTo>
+                  <a:pt x="3418237" y="2926080"/>
+                </a:lnTo>
+                <a:lnTo>
+                  <a:pt x="3429228" y="2926080"/>
+                </a:lnTo>
+                <a:lnTo>
+                  <a:pt x="3440220" y="2926080"/>
+                </a:lnTo>
+                <a:lnTo>
+                  <a:pt x="3451211" y="2926080"/>
+                </a:lnTo>
+                <a:lnTo>
+                  <a:pt x="3462202" y="2926080"/>
+                </a:lnTo>
+                <a:lnTo>
+                  <a:pt x="3473193" y="2926080"/>
+                </a:lnTo>
+                <a:lnTo>
+                  <a:pt x="3484184" y="2926080"/>
+                </a:lnTo>
+                <a:lnTo>
+                  <a:pt x="3495175" y="2926080"/>
+                </a:lnTo>
+                <a:lnTo>
+                  <a:pt x="3506166" y="2926080"/>
+                </a:lnTo>
+                <a:lnTo>
+                  <a:pt x="3517157" y="2926080"/>
+                </a:lnTo>
+                <a:lnTo>
+                  <a:pt x="3528149" y="2926080"/>
+                </a:lnTo>
+                <a:lnTo>
+                  <a:pt x="3539140" y="2926080"/>
+                </a:lnTo>
+                <a:lnTo>
+                  <a:pt x="3550131" y="2926080"/>
+                </a:lnTo>
+                <a:lnTo>
+                  <a:pt x="3561122" y="2926080"/>
+                </a:lnTo>
+                <a:lnTo>
+                  <a:pt x="3572113" y="2926080"/>
+                </a:lnTo>
+                <a:lnTo>
+                  <a:pt x="3583104" y="2926080"/>
+                </a:lnTo>
+                <a:lnTo>
+                  <a:pt x="3594095" y="2926080"/>
+                </a:lnTo>
+                <a:lnTo>
+                  <a:pt x="3605086" y="2926080"/>
+                </a:lnTo>
+                <a:lnTo>
+                  <a:pt x="3616077" y="2926080"/>
+                </a:lnTo>
+                <a:lnTo>
+                  <a:pt x="3627069" y="2926080"/>
+                </a:lnTo>
+                <a:lnTo>
+                  <a:pt x="3638060" y="2926080"/>
+                </a:lnTo>
+                <a:lnTo>
+                  <a:pt x="3649051" y="2926080"/>
+                </a:lnTo>
+                <a:lnTo>
+                  <a:pt x="3660042" y="2926080"/>
+                </a:lnTo>
+                <a:lnTo>
+                  <a:pt x="3671033" y="2926080"/>
+                </a:lnTo>
+                <a:lnTo>
+                  <a:pt x="3682024" y="2926080"/>
+                </a:lnTo>
+                <a:lnTo>
+                  <a:pt x="3693015" y="2926080"/>
+                </a:lnTo>
+                <a:lnTo>
+                  <a:pt x="3704006" y="2926080"/>
+                </a:lnTo>
+                <a:lnTo>
+                  <a:pt x="3714998" y="2926080"/>
+                </a:lnTo>
+                <a:lnTo>
+                  <a:pt x="3725989" y="2926080"/>
+                </a:lnTo>
+                <a:lnTo>
+                  <a:pt x="3736980" y="2926080"/>
+                </a:lnTo>
+                <a:lnTo>
+                  <a:pt x="3747971" y="2926080"/>
+                </a:lnTo>
+                <a:lnTo>
+                  <a:pt x="3758962" y="2926080"/>
+                </a:lnTo>
+                <a:lnTo>
+                  <a:pt x="3769953" y="2926080"/>
+                </a:lnTo>
+                <a:lnTo>
+                  <a:pt x="3780944" y="2926080"/>
+                </a:lnTo>
+                <a:lnTo>
+                  <a:pt x="3791935" y="2926080"/>
+                </a:lnTo>
+                <a:lnTo>
+                  <a:pt x="3802927" y="2926080"/>
+                </a:lnTo>
+                <a:lnTo>
+                  <a:pt x="3813918" y="2926080"/>
+                </a:lnTo>
+                <a:lnTo>
+                  <a:pt x="3824909" y="2926080"/>
+                </a:lnTo>
+                <a:lnTo>
+                  <a:pt x="3835900" y="2926080"/>
+                </a:lnTo>
+                <a:lnTo>
+                  <a:pt x="3846891" y="2926080"/>
+                </a:lnTo>
+                <a:lnTo>
+                  <a:pt x="3857882" y="2926080"/>
+                </a:lnTo>
+                <a:lnTo>
+                  <a:pt x="3868873" y="2926080"/>
+                </a:lnTo>
+                <a:lnTo>
+                  <a:pt x="3879864" y="2926080"/>
+                </a:lnTo>
+                <a:lnTo>
+                  <a:pt x="3890855" y="2926080"/>
+                </a:lnTo>
+                <a:lnTo>
+                  <a:pt x="3901847" y="2926080"/>
+                </a:lnTo>
+                <a:lnTo>
+                  <a:pt x="3912838" y="2926080"/>
+                </a:lnTo>
+                <a:lnTo>
+                  <a:pt x="3923829" y="2926080"/>
+                </a:lnTo>
+                <a:lnTo>
+                  <a:pt x="3934820" y="2926080"/>
+                </a:lnTo>
+                <a:lnTo>
+                  <a:pt x="3945811" y="2926080"/>
+                </a:lnTo>
+                <a:lnTo>
+                  <a:pt x="3956802" y="2926080"/>
+                </a:lnTo>
+                <a:lnTo>
+                  <a:pt x="3967793" y="2926080"/>
+                </a:lnTo>
+                <a:lnTo>
+                  <a:pt x="3978784" y="2926080"/>
+                </a:lnTo>
+                <a:lnTo>
+                  <a:pt x="3989776" y="2926080"/>
+                </a:lnTo>
+                <a:lnTo>
+                  <a:pt x="4000767" y="2926080"/>
+                </a:lnTo>
+                <a:lnTo>
+                  <a:pt x="4011758" y="2926080"/>
+                </a:lnTo>
+                <a:lnTo>
+                  <a:pt x="4022749" y="2926080"/>
+                </a:lnTo>
+                <a:lnTo>
+                  <a:pt x="4033740" y="2926080"/>
+                </a:lnTo>
+                <a:lnTo>
+                  <a:pt x="4044731" y="2926080"/>
+                </a:lnTo>
+                <a:lnTo>
+                  <a:pt x="4055722" y="2926080"/>
+                </a:lnTo>
+                <a:lnTo>
+                  <a:pt x="4066713" y="2926080"/>
+                </a:lnTo>
+                <a:lnTo>
+                  <a:pt x="4077704" y="2926080"/>
+                </a:lnTo>
+                <a:lnTo>
+                  <a:pt x="4088696" y="2926080"/>
+                </a:lnTo>
+                <a:lnTo>
+                  <a:pt x="4099687" y="2926080"/>
+                </a:lnTo>
+                <a:lnTo>
+                  <a:pt x="4110678" y="2926080"/>
+                </a:lnTo>
+                <a:lnTo>
+                  <a:pt x="4121669" y="2926080"/>
+                </a:lnTo>
+                <a:lnTo>
+                  <a:pt x="4132660" y="2926080"/>
+                </a:lnTo>
+                <a:lnTo>
+                  <a:pt x="4143651" y="2926080"/>
+                </a:lnTo>
+                <a:lnTo>
+                  <a:pt x="4154642" y="2926080"/>
+                </a:lnTo>
+                <a:lnTo>
+                  <a:pt x="4165633" y="2926080"/>
+                </a:lnTo>
+                <a:lnTo>
+                  <a:pt x="4176625" y="2926080"/>
+                </a:lnTo>
+                <a:lnTo>
+                  <a:pt x="4187616" y="2926080"/>
+                </a:lnTo>
+                <a:lnTo>
+                  <a:pt x="4198607" y="2926080"/>
+                </a:lnTo>
+                <a:lnTo>
+                  <a:pt x="4209598" y="2926080"/>
+                </a:lnTo>
+                <a:lnTo>
+                  <a:pt x="4220589" y="2926080"/>
+                </a:lnTo>
+                <a:lnTo>
+                  <a:pt x="4231580" y="2926080"/>
+                </a:lnTo>
+                <a:lnTo>
+                  <a:pt x="4242571" y="2926080"/>
+                </a:lnTo>
+                <a:lnTo>
+                  <a:pt x="4253562" y="2926080"/>
+                </a:lnTo>
+                <a:lnTo>
+                  <a:pt x="4264553" y="2926080"/>
+                </a:lnTo>
+                <a:lnTo>
+                  <a:pt x="4275545" y="2926080"/>
+                </a:lnTo>
+                <a:lnTo>
+                  <a:pt x="4286536" y="2926080"/>
+                </a:lnTo>
+                <a:lnTo>
+                  <a:pt x="4297527" y="2926080"/>
+                </a:lnTo>
+                <a:lnTo>
+                  <a:pt x="4308518" y="2926080"/>
+                </a:lnTo>
+                <a:lnTo>
+                  <a:pt x="4319509" y="2926080"/>
+                </a:lnTo>
+                <a:lnTo>
+                  <a:pt x="4330500" y="2926080"/>
+                </a:lnTo>
+                <a:lnTo>
+                  <a:pt x="4341491" y="2926080"/>
+                </a:lnTo>
+                <a:lnTo>
+                  <a:pt x="4352482" y="2926080"/>
+                </a:lnTo>
+                <a:lnTo>
+                  <a:pt x="4363474" y="2926080"/>
+                </a:lnTo>
+                <a:lnTo>
+                  <a:pt x="4374465" y="2926080"/>
+                </a:lnTo>
+                <a:lnTo>
+                  <a:pt x="4385456" y="2926080"/>
+                </a:lnTo>
+                <a:lnTo>
+                  <a:pt x="4396447" y="2926080"/>
+                </a:lnTo>
+                <a:lnTo>
+                  <a:pt x="4407438" y="2926080"/>
+                </a:lnTo>
+                <a:lnTo>
+                  <a:pt x="4418429" y="2926080"/>
+                </a:lnTo>
+                <a:lnTo>
+                  <a:pt x="4429420" y="2926080"/>
+                </a:lnTo>
+                <a:lnTo>
+                  <a:pt x="4440411" y="2926080"/>
+                </a:lnTo>
+                <a:lnTo>
+                  <a:pt x="4451403" y="2926080"/>
+                </a:lnTo>
+                <a:lnTo>
+                  <a:pt x="4462394" y="2926080"/>
+                </a:lnTo>
+                <a:lnTo>
+                  <a:pt x="4473385" y="2926080"/>
+                </a:lnTo>
+                <a:lnTo>
+                  <a:pt x="4484376" y="2926080"/>
+                </a:lnTo>
+                <a:lnTo>
+                  <a:pt x="4495367" y="2926080"/>
+                </a:lnTo>
+                <a:lnTo>
+                  <a:pt x="4506358" y="2926080"/>
+                </a:lnTo>
+                <a:lnTo>
+                  <a:pt x="4517349" y="2926080"/>
+                </a:lnTo>
+                <a:lnTo>
+                  <a:pt x="4528340" y="2926080"/>
+                </a:lnTo>
+                <a:lnTo>
+                  <a:pt x="4539331" y="2926080"/>
+                </a:lnTo>
+                <a:lnTo>
+                  <a:pt x="4550323" y="2926080"/>
+                </a:lnTo>
+                <a:lnTo>
+                  <a:pt x="4561314" y="2926080"/>
+                </a:lnTo>
+                <a:lnTo>
+                  <a:pt x="4572305" y="2926080"/>
+                </a:lnTo>
+                <a:lnTo>
+                  <a:pt x="4583296" y="2926080"/>
+                </a:lnTo>
+                <a:lnTo>
+                  <a:pt x="4594287" y="2926080"/>
+                </a:lnTo>
+                <a:lnTo>
+                  <a:pt x="4605278" y="2926080"/>
+                </a:lnTo>
+                <a:lnTo>
+                  <a:pt x="4616269" y="2926080"/>
+                </a:lnTo>
+                <a:lnTo>
+                  <a:pt x="4627260" y="2926080"/>
+                </a:lnTo>
+                <a:lnTo>
+                  <a:pt x="4638252" y="2926080"/>
+                </a:lnTo>
+                <a:lnTo>
+                  <a:pt x="4649243" y="2926080"/>
+                </a:lnTo>
+                <a:lnTo>
+                  <a:pt x="4660234" y="2926080"/>
+                </a:lnTo>
+                <a:lnTo>
+                  <a:pt x="4671225" y="2926080"/>
+                </a:lnTo>
+                <a:lnTo>
+                  <a:pt x="4682216" y="2926080"/>
+                </a:lnTo>
+                <a:lnTo>
+                  <a:pt x="4693207" y="2926080"/>
+                </a:lnTo>
+                <a:lnTo>
+                  <a:pt x="4704198" y="2926080"/>
+                </a:lnTo>
+                <a:lnTo>
+                  <a:pt x="4715189" y="2926080"/>
+                </a:lnTo>
+                <a:lnTo>
+                  <a:pt x="4726180" y="2926080"/>
+                </a:lnTo>
+                <a:lnTo>
+                  <a:pt x="4737172" y="2926080"/>
+                </a:lnTo>
+                <a:lnTo>
+                  <a:pt x="4748163" y="2926080"/>
+                </a:lnTo>
+                <a:lnTo>
+                  <a:pt x="4759154" y="2926080"/>
+                </a:lnTo>
+                <a:lnTo>
+                  <a:pt x="4770145" y="2926080"/>
+                </a:lnTo>
+                <a:lnTo>
+                  <a:pt x="4781136" y="2926080"/>
+                </a:lnTo>
+                <a:lnTo>
+                  <a:pt x="4792127" y="2926080"/>
+                </a:lnTo>
+                <a:lnTo>
+                  <a:pt x="4803118" y="2926080"/>
+                </a:lnTo>
+                <a:lnTo>
+                  <a:pt x="4814109" y="2926080"/>
+                </a:lnTo>
+                <a:lnTo>
+                  <a:pt x="4825101" y="2926080"/>
+                </a:lnTo>
+                <a:lnTo>
+                  <a:pt x="4836092" y="2926080"/>
+                </a:lnTo>
+                <a:lnTo>
+                  <a:pt x="4847083" y="2926080"/>
+                </a:lnTo>
+                <a:lnTo>
+                  <a:pt x="4858074" y="2926080"/>
+                </a:lnTo>
+                <a:lnTo>
+                  <a:pt x="4869065" y="2926080"/>
+                </a:lnTo>
+                <a:lnTo>
+                  <a:pt x="4880056" y="2926080"/>
+                </a:lnTo>
+                <a:lnTo>
+                  <a:pt x="4891047" y="2926080"/>
+                </a:lnTo>
+                <a:lnTo>
+                  <a:pt x="4902038" y="2926080"/>
+                </a:lnTo>
+                <a:lnTo>
+                  <a:pt x="4913029" y="2926080"/>
+                </a:lnTo>
+                <a:lnTo>
+                  <a:pt x="4924021" y="2926080"/>
+                </a:lnTo>
+                <a:lnTo>
+                  <a:pt x="4935012" y="2926080"/>
+                </a:lnTo>
+                <a:lnTo>
+                  <a:pt x="4946003" y="2926080"/>
+                </a:lnTo>
+                <a:lnTo>
+                  <a:pt x="4956994" y="2926080"/>
+                </a:lnTo>
+                <a:lnTo>
+                  <a:pt x="4967985" y="2926080"/>
+                </a:lnTo>
+                <a:lnTo>
+                  <a:pt x="4978976" y="2926080"/>
+                </a:lnTo>
+                <a:lnTo>
+                  <a:pt x="4989967" y="2926080"/>
+                </a:lnTo>
+                <a:lnTo>
+                  <a:pt x="5000958" y="2926080"/>
+                </a:lnTo>
+                <a:lnTo>
+                  <a:pt x="5011950" y="2926080"/>
+                </a:lnTo>
+                <a:lnTo>
+                  <a:pt x="5022941" y="2926080"/>
+                </a:lnTo>
+                <a:lnTo>
+                  <a:pt x="5033932" y="2926080"/>
+                </a:lnTo>
+                <a:lnTo>
+                  <a:pt x="5044923" y="2926080"/>
+                </a:lnTo>
+                <a:lnTo>
+                  <a:pt x="5055914" y="2926080"/>
+                </a:lnTo>
+                <a:lnTo>
+                  <a:pt x="5066905" y="2926080"/>
+                </a:lnTo>
+                <a:lnTo>
+                  <a:pt x="5077896" y="2926080"/>
+                </a:lnTo>
+                <a:lnTo>
+                  <a:pt x="5088887" y="2926080"/>
+                </a:lnTo>
+                <a:lnTo>
+                  <a:pt x="5099878" y="2926080"/>
+                </a:lnTo>
+                <a:lnTo>
+                  <a:pt x="5110870" y="2926080"/>
+                </a:lnTo>
+                <a:lnTo>
+                  <a:pt x="5121861" y="2926080"/>
+                </a:lnTo>
+                <a:lnTo>
+                  <a:pt x="5132852" y="2926080"/>
+                </a:lnTo>
+                <a:lnTo>
+                  <a:pt x="5143843" y="2926080"/>
+                </a:lnTo>
+                <a:lnTo>
+                  <a:pt x="5154834" y="2926080"/>
+                </a:lnTo>
+                <a:lnTo>
+                  <a:pt x="5165825" y="2926080"/>
+                </a:lnTo>
+                <a:lnTo>
+                  <a:pt x="5176816" y="2926080"/>
+                </a:lnTo>
+                <a:lnTo>
+                  <a:pt x="5187807" y="2926080"/>
+                </a:lnTo>
+                <a:lnTo>
+                  <a:pt x="5198799" y="2926080"/>
+                </a:lnTo>
+                <a:lnTo>
+                  <a:pt x="5209790" y="2926080"/>
+                </a:lnTo>
+                <a:lnTo>
+                  <a:pt x="5220781" y="2926080"/>
+                </a:lnTo>
+                <a:lnTo>
+                  <a:pt x="5231772" y="2926080"/>
+                </a:lnTo>
+                <a:lnTo>
+                  <a:pt x="5242763" y="2926080"/>
+                </a:lnTo>
+                <a:lnTo>
+                  <a:pt x="5253754" y="2926080"/>
+                </a:lnTo>
+                <a:lnTo>
+                  <a:pt x="5264745" y="2926080"/>
+                </a:lnTo>
+                <a:lnTo>
+                  <a:pt x="5275736" y="2926080"/>
+                </a:lnTo>
+                <a:lnTo>
+                  <a:pt x="5286728" y="2926080"/>
+                </a:lnTo>
+                <a:lnTo>
+                  <a:pt x="5297719" y="2926080"/>
+                </a:lnTo>
+                <a:lnTo>
+                  <a:pt x="5308710" y="2926080"/>
+                </a:lnTo>
+                <a:lnTo>
+                  <a:pt x="5319701" y="2926080"/>
+                </a:lnTo>
+                <a:lnTo>
+                  <a:pt x="5330692" y="2926080"/>
+                </a:lnTo>
+                <a:lnTo>
+                  <a:pt x="5341683" y="2926080"/>
+                </a:lnTo>
+                <a:lnTo>
+                  <a:pt x="5352674" y="2926080"/>
+                </a:lnTo>
+                <a:lnTo>
+                  <a:pt x="5363665" y="2926080"/>
+                </a:lnTo>
+                <a:lnTo>
+                  <a:pt x="5374656" y="2926080"/>
+                </a:lnTo>
+                <a:lnTo>
+                  <a:pt x="5385648" y="2926080"/>
+                </a:lnTo>
+                <a:lnTo>
+                  <a:pt x="5396639" y="2926080"/>
+                </a:lnTo>
+                <a:lnTo>
+                  <a:pt x="5407630" y="2926080"/>
+                </a:lnTo>
+                <a:lnTo>
+                  <a:pt x="5418621" y="2926080"/>
+                </a:lnTo>
+                <a:lnTo>
+                  <a:pt x="5429612" y="2926080"/>
+                </a:lnTo>
+                <a:lnTo>
+                  <a:pt x="5440603" y="2926080"/>
+                </a:lnTo>
+                <a:lnTo>
+                  <a:pt x="5451594" y="2926080"/>
+                </a:lnTo>
+                <a:lnTo>
+                  <a:pt x="5462585" y="2926080"/>
+                </a:lnTo>
+                <a:lnTo>
+                  <a:pt x="5473577" y="2926080"/>
+                </a:lnTo>
+                <a:lnTo>
+                  <a:pt x="5484568" y="2926080"/>
+                </a:lnTo>
+                <a:lnTo>
+                  <a:pt x="5495559" y="2926080"/>
+                </a:lnTo>
+                <a:lnTo>
+                  <a:pt x="5506550" y="2926080"/>
+                </a:lnTo>
+                <a:lnTo>
+                  <a:pt x="5517541" y="2926080"/>
+                </a:lnTo>
+                <a:lnTo>
+                  <a:pt x="5528532" y="2926080"/>
+                </a:lnTo>
+                <a:lnTo>
+                  <a:pt x="5539523" y="2926080"/>
+                </a:lnTo>
+                <a:lnTo>
+                  <a:pt x="5550514" y="2926080"/>
+                </a:lnTo>
+                <a:lnTo>
+                  <a:pt x="5561505" y="2926080"/>
+                </a:lnTo>
+                <a:lnTo>
+                  <a:pt x="5572497" y="2926080"/>
+                </a:lnTo>
+                <a:lnTo>
+                  <a:pt x="5583488" y="2926080"/>
+                </a:lnTo>
+                <a:lnTo>
+                  <a:pt x="5594479" y="2926080"/>
+                </a:lnTo>
+                <a:lnTo>
+                  <a:pt x="5605470" y="2926080"/>
+                </a:lnTo>
+                <a:lnTo>
+                  <a:pt x="5616461" y="2926080"/>
+                </a:lnTo>
+                <a:lnTo>
+                  <a:pt x="5627452" y="2926080"/>
+                </a:lnTo>
+                <a:lnTo>
+                  <a:pt x="5638443" y="2926080"/>
+                </a:lnTo>
+                <a:lnTo>
+                  <a:pt x="5649434" y="2926080"/>
+                </a:lnTo>
+                <a:lnTo>
+                  <a:pt x="5660426" y="2926080"/>
+                </a:lnTo>
+                <a:lnTo>
+                  <a:pt x="5671417" y="2926080"/>
+                </a:lnTo>
+                <a:lnTo>
+                  <a:pt x="5682408" y="2926080"/>
+                </a:lnTo>
+                <a:lnTo>
+                  <a:pt x="5693399" y="2926080"/>
+                </a:lnTo>
+                <a:lnTo>
+                  <a:pt x="5704390" y="2926080"/>
+                </a:lnTo>
+                <a:lnTo>
+                  <a:pt x="5715381" y="2926080"/>
+                </a:lnTo>
+                <a:lnTo>
+                  <a:pt x="5726372" y="2926080"/>
+                </a:lnTo>
+                <a:lnTo>
+                  <a:pt x="5737363" y="2926080"/>
+                </a:lnTo>
+                <a:lnTo>
+                  <a:pt x="5748354" y="2926080"/>
+                </a:lnTo>
+                <a:lnTo>
+                  <a:pt x="5759346" y="2926080"/>
+                </a:lnTo>
+                <a:lnTo>
+                  <a:pt x="5770337" y="2926080"/>
+                </a:lnTo>
+                <a:lnTo>
+                  <a:pt x="5781328" y="2926080"/>
+                </a:lnTo>
+                <a:lnTo>
+                  <a:pt x="5792319" y="2926080"/>
+                </a:lnTo>
+                <a:lnTo>
+                  <a:pt x="5803310" y="2926080"/>
+                </a:lnTo>
+                <a:lnTo>
+                  <a:pt x="5814301" y="2926080"/>
+                </a:lnTo>
+                <a:lnTo>
+                  <a:pt x="5825292" y="2926080"/>
+                </a:lnTo>
+                <a:lnTo>
+                  <a:pt x="5836283" y="2926080"/>
+                </a:lnTo>
+                <a:lnTo>
+                  <a:pt x="5847275" y="2926080"/>
+                </a:lnTo>
+                <a:lnTo>
+                  <a:pt x="5858266" y="2926080"/>
+                </a:lnTo>
+                <a:lnTo>
+                  <a:pt x="5869257" y="2926080"/>
+                </a:lnTo>
+                <a:lnTo>
+                  <a:pt x="5880248" y="2926080"/>
+                </a:lnTo>
+                <a:lnTo>
+                  <a:pt x="5891239" y="2926080"/>
+                </a:lnTo>
+                <a:lnTo>
+                  <a:pt x="5902230" y="2926080"/>
+                </a:lnTo>
+                <a:lnTo>
+                  <a:pt x="5913221" y="2926080"/>
+                </a:lnTo>
+                <a:lnTo>
+                  <a:pt x="5924212" y="2926080"/>
+                </a:lnTo>
+                <a:lnTo>
+                  <a:pt x="5935204" y="2926080"/>
+                </a:lnTo>
+                <a:lnTo>
+                  <a:pt x="5946195" y="2926080"/>
+                </a:lnTo>
+                <a:lnTo>
+                  <a:pt x="5957186" y="2926080"/>
+                </a:lnTo>
+                <a:lnTo>
+                  <a:pt x="5968177" y="2926080"/>
+                </a:lnTo>
+                <a:lnTo>
+                  <a:pt x="5979168" y="2926080"/>
+                </a:lnTo>
+                <a:lnTo>
+                  <a:pt x="5990159" y="2926080"/>
+                </a:lnTo>
+                <a:lnTo>
+                  <a:pt x="6001150" y="2926080"/>
+                </a:lnTo>
+                <a:lnTo>
+                  <a:pt x="6012141" y="2926080"/>
+                </a:lnTo>
+                <a:lnTo>
+                  <a:pt x="6023132" y="2926080"/>
+                </a:lnTo>
+                <a:lnTo>
+                  <a:pt x="6034124" y="2926080"/>
+                </a:lnTo>
+                <a:lnTo>
+                  <a:pt x="6045115" y="2926080"/>
+                </a:lnTo>
+                <a:lnTo>
+                  <a:pt x="6056106" y="2926080"/>
+                </a:lnTo>
+                <a:lnTo>
+                  <a:pt x="6067097" y="2926080"/>
+                </a:lnTo>
+                <a:lnTo>
+                  <a:pt x="6078088" y="2926080"/>
+                </a:lnTo>
+                <a:lnTo>
+                  <a:pt x="6089079" y="2926080"/>
+                </a:lnTo>
+                <a:lnTo>
+                  <a:pt x="6100070" y="2926080"/>
+                </a:lnTo>
+                <a:lnTo>
+                  <a:pt x="6111061" y="2926080"/>
+                </a:lnTo>
+                <a:lnTo>
+                  <a:pt x="6122053" y="2926080"/>
+                </a:lnTo>
+                <a:lnTo>
+                  <a:pt x="6133044" y="2926080"/>
+                </a:lnTo>
+                <a:lnTo>
+                  <a:pt x="6144035" y="2926080"/>
+                </a:lnTo>
+                <a:lnTo>
+                  <a:pt x="6155026" y="2926080"/>
+                </a:lnTo>
+                <a:lnTo>
+                  <a:pt x="6166017" y="2926080"/>
+                </a:lnTo>
+                <a:lnTo>
+                  <a:pt x="6177008" y="2926080"/>
+                </a:lnTo>
+                <a:lnTo>
+                  <a:pt x="6187999" y="2926080"/>
+                </a:lnTo>
+                <a:lnTo>
+                  <a:pt x="6198990" y="2926080"/>
+                </a:lnTo>
+                <a:lnTo>
+                  <a:pt x="6209981" y="2926080"/>
+                </a:lnTo>
+                <a:lnTo>
+                  <a:pt x="6220973" y="2926080"/>
+                </a:lnTo>
+                <a:lnTo>
+                  <a:pt x="6231964" y="2926080"/>
+                </a:lnTo>
+                <a:lnTo>
+                  <a:pt x="6242955" y="2926080"/>
+                </a:lnTo>
+                <a:lnTo>
+                  <a:pt x="6253946" y="2926080"/>
+                </a:lnTo>
+                <a:lnTo>
+                  <a:pt x="6264937" y="2926080"/>
+                </a:lnTo>
+                <a:lnTo>
+                  <a:pt x="6275928" y="2926080"/>
+                </a:lnTo>
+                <a:lnTo>
+                  <a:pt x="6286919" y="2926080"/>
+                </a:lnTo>
+                <a:lnTo>
+                  <a:pt x="6297910" y="2926080"/>
+                </a:lnTo>
+                <a:lnTo>
+                  <a:pt x="6308902" y="2926080"/>
+                </a:lnTo>
+                <a:lnTo>
+                  <a:pt x="6319893" y="2926080"/>
+                </a:lnTo>
+                <a:lnTo>
+                  <a:pt x="6330884" y="2926080"/>
+                </a:lnTo>
+                <a:lnTo>
+                  <a:pt x="6341875" y="2926080"/>
+                </a:lnTo>
+                <a:lnTo>
+                  <a:pt x="6352866" y="2926080"/>
+                </a:lnTo>
+                <a:lnTo>
+                  <a:pt x="6363857" y="2926080"/>
+                </a:lnTo>
+                <a:lnTo>
+                  <a:pt x="6374848" y="2926080"/>
+                </a:lnTo>
+                <a:lnTo>
+                  <a:pt x="6385839" y="2926080"/>
+                </a:lnTo>
+                <a:lnTo>
+                  <a:pt x="6396830" y="2926080"/>
+                </a:lnTo>
+                <a:lnTo>
+                  <a:pt x="6407822" y="2926080"/>
+                </a:lnTo>
+                <a:lnTo>
+                  <a:pt x="6418813" y="2926080"/>
+                </a:lnTo>
+                <a:lnTo>
+                  <a:pt x="6429804" y="2926080"/>
+                </a:lnTo>
+                <a:lnTo>
+                  <a:pt x="6440795" y="2926080"/>
+                </a:lnTo>
+                <a:lnTo>
+                  <a:pt x="6451786" y="2926080"/>
+                </a:lnTo>
+                <a:lnTo>
+                  <a:pt x="6462777" y="2926080"/>
+                </a:lnTo>
+                <a:lnTo>
+                  <a:pt x="6473768" y="2926080"/>
+                </a:lnTo>
+                <a:lnTo>
+                  <a:pt x="6484759" y="2926080"/>
+                </a:lnTo>
+                <a:lnTo>
+                  <a:pt x="6495751" y="2926080"/>
+                </a:lnTo>
+                <a:lnTo>
+                  <a:pt x="6506742" y="2926080"/>
+                </a:lnTo>
+                <a:lnTo>
+                  <a:pt x="6517733" y="2926080"/>
+                </a:lnTo>
+                <a:lnTo>
+                  <a:pt x="6528724" y="2926080"/>
+                </a:lnTo>
+                <a:lnTo>
+                  <a:pt x="6539715" y="2926080"/>
+                </a:lnTo>
+                <a:lnTo>
+                  <a:pt x="6550706" y="2926080"/>
+                </a:lnTo>
+                <a:lnTo>
+                  <a:pt x="6561697" y="2926080"/>
+                </a:lnTo>
+                <a:lnTo>
+                  <a:pt x="6572688" y="2926080"/>
+                </a:lnTo>
+                <a:lnTo>
+                  <a:pt x="6583679" y="2926080"/>
+                </a:lnTo>
+                <a:lnTo>
+                  <a:pt x="6583679" y="2926080"/>
+                </a:lnTo>
+                <a:lnTo>
+                  <a:pt x="6572688" y="2926080"/>
+                </a:lnTo>
+                <a:lnTo>
+                  <a:pt x="6561697" y="2926080"/>
+                </a:lnTo>
+                <a:lnTo>
+                  <a:pt x="6550706" y="2926080"/>
+                </a:lnTo>
+                <a:lnTo>
+                  <a:pt x="6539715" y="2926080"/>
+                </a:lnTo>
+                <a:lnTo>
+                  <a:pt x="6528724" y="2926080"/>
+                </a:lnTo>
+                <a:lnTo>
+                  <a:pt x="6517733" y="2926080"/>
+                </a:lnTo>
+                <a:lnTo>
+                  <a:pt x="6506742" y="2926080"/>
+                </a:lnTo>
+                <a:lnTo>
+                  <a:pt x="6495751" y="2926080"/>
+                </a:lnTo>
+                <a:lnTo>
+                  <a:pt x="6484759" y="2926080"/>
+                </a:lnTo>
+                <a:lnTo>
+                  <a:pt x="6473768" y="2926080"/>
+                </a:lnTo>
+                <a:lnTo>
+                  <a:pt x="6462777" y="2926080"/>
+                </a:lnTo>
+                <a:lnTo>
+                  <a:pt x="6451786" y="2926080"/>
+                </a:lnTo>
+                <a:lnTo>
+                  <a:pt x="6440795" y="2926080"/>
+                </a:lnTo>
+                <a:lnTo>
+                  <a:pt x="6429804" y="2926080"/>
+                </a:lnTo>
+                <a:lnTo>
+                  <a:pt x="6418813" y="2926080"/>
+                </a:lnTo>
+                <a:lnTo>
+                  <a:pt x="6407822" y="2926080"/>
+                </a:lnTo>
+                <a:lnTo>
+                  <a:pt x="6396830" y="2926080"/>
+                </a:lnTo>
+                <a:lnTo>
+                  <a:pt x="6385839" y="2926080"/>
+                </a:lnTo>
+                <a:lnTo>
+                  <a:pt x="6374848" y="2926080"/>
+                </a:lnTo>
+                <a:lnTo>
+                  <a:pt x="6363857" y="2926080"/>
+                </a:lnTo>
+                <a:lnTo>
+                  <a:pt x="6352866" y="2926080"/>
+                </a:lnTo>
+                <a:lnTo>
+                  <a:pt x="6341875" y="2926080"/>
+                </a:lnTo>
+                <a:lnTo>
+                  <a:pt x="6330884" y="2926080"/>
+                </a:lnTo>
+                <a:lnTo>
+                  <a:pt x="6319893" y="2926080"/>
+                </a:lnTo>
+                <a:lnTo>
+                  <a:pt x="6308902" y="2926080"/>
+                </a:lnTo>
+                <a:lnTo>
+                  <a:pt x="6297910" y="2926080"/>
+                </a:lnTo>
+                <a:lnTo>
+                  <a:pt x="6286919" y="2926080"/>
+                </a:lnTo>
+                <a:lnTo>
+                  <a:pt x="6275928" y="2926080"/>
+                </a:lnTo>
+                <a:lnTo>
+                  <a:pt x="6264937" y="2926080"/>
+                </a:lnTo>
+                <a:lnTo>
+                  <a:pt x="6253946" y="2926080"/>
+                </a:lnTo>
+                <a:lnTo>
+                  <a:pt x="6242955" y="2926080"/>
+                </a:lnTo>
+                <a:lnTo>
+                  <a:pt x="6231964" y="2926080"/>
+                </a:lnTo>
+                <a:lnTo>
+                  <a:pt x="6220973" y="2926080"/>
+                </a:lnTo>
+                <a:lnTo>
+                  <a:pt x="6209981" y="2926080"/>
+                </a:lnTo>
+                <a:lnTo>
+                  <a:pt x="6198990" y="2926080"/>
+                </a:lnTo>
+                <a:lnTo>
+                  <a:pt x="6187999" y="2926080"/>
+                </a:lnTo>
+                <a:lnTo>
+                  <a:pt x="6177008" y="2926080"/>
+                </a:lnTo>
+                <a:lnTo>
+                  <a:pt x="6166017" y="2926080"/>
+                </a:lnTo>
+                <a:lnTo>
+                  <a:pt x="6155026" y="2926080"/>
+                </a:lnTo>
+                <a:lnTo>
+                  <a:pt x="6144035" y="2926080"/>
+                </a:lnTo>
+                <a:lnTo>
+                  <a:pt x="6133044" y="2926080"/>
+                </a:lnTo>
+                <a:lnTo>
+                  <a:pt x="6122053" y="2926080"/>
+                </a:lnTo>
+                <a:lnTo>
+                  <a:pt x="6111061" y="2926080"/>
+                </a:lnTo>
+                <a:lnTo>
+                  <a:pt x="6100070" y="2926080"/>
+                </a:lnTo>
+                <a:lnTo>
+                  <a:pt x="6089079" y="2926080"/>
+                </a:lnTo>
+                <a:lnTo>
+                  <a:pt x="6078088" y="2926080"/>
+                </a:lnTo>
+                <a:lnTo>
+                  <a:pt x="6067097" y="2926080"/>
+                </a:lnTo>
+                <a:lnTo>
+                  <a:pt x="6056106" y="2926080"/>
+                </a:lnTo>
+                <a:lnTo>
+                  <a:pt x="6045115" y="2926080"/>
+                </a:lnTo>
+                <a:lnTo>
+                  <a:pt x="6034124" y="2926080"/>
+                </a:lnTo>
+                <a:lnTo>
+                  <a:pt x="6023132" y="2926080"/>
+                </a:lnTo>
+                <a:lnTo>
+                  <a:pt x="6012141" y="2926080"/>
+                </a:lnTo>
+                <a:lnTo>
+                  <a:pt x="6001150" y="2926080"/>
+                </a:lnTo>
+                <a:lnTo>
+                  <a:pt x="5990159" y="2926080"/>
+                </a:lnTo>
+                <a:lnTo>
+                  <a:pt x="5979168" y="2926080"/>
+                </a:lnTo>
+                <a:lnTo>
+                  <a:pt x="5968177" y="2926080"/>
+                </a:lnTo>
+                <a:lnTo>
+                  <a:pt x="5957186" y="2926080"/>
+                </a:lnTo>
+                <a:lnTo>
+                  <a:pt x="5946195" y="2926080"/>
+                </a:lnTo>
+                <a:lnTo>
+                  <a:pt x="5935204" y="2926080"/>
+                </a:lnTo>
+                <a:lnTo>
+                  <a:pt x="5924212" y="2926080"/>
+                </a:lnTo>
+                <a:lnTo>
+                  <a:pt x="5913221" y="2926080"/>
+                </a:lnTo>
+                <a:lnTo>
+                  <a:pt x="5902230" y="2926080"/>
+                </a:lnTo>
+                <a:lnTo>
+                  <a:pt x="5891239" y="2926080"/>
+                </a:lnTo>
+                <a:lnTo>
+                  <a:pt x="5880248" y="2926080"/>
+                </a:lnTo>
+                <a:lnTo>
+                  <a:pt x="5869257" y="2926080"/>
+                </a:lnTo>
+                <a:lnTo>
+                  <a:pt x="5858266" y="2926080"/>
+                </a:lnTo>
+                <a:lnTo>
+                  <a:pt x="5847275" y="2926080"/>
+                </a:lnTo>
+                <a:lnTo>
+                  <a:pt x="5836283" y="2926080"/>
+                </a:lnTo>
+                <a:lnTo>
+                  <a:pt x="5825292" y="2926080"/>
+                </a:lnTo>
+                <a:lnTo>
+                  <a:pt x="5814301" y="2926080"/>
+                </a:lnTo>
+                <a:lnTo>
+                  <a:pt x="5803310" y="2926080"/>
+                </a:lnTo>
+                <a:lnTo>
+                  <a:pt x="5792319" y="2926080"/>
+                </a:lnTo>
+                <a:lnTo>
+                  <a:pt x="5781328" y="2926080"/>
+                </a:lnTo>
+                <a:lnTo>
+                  <a:pt x="5770337" y="2926080"/>
+                </a:lnTo>
+                <a:lnTo>
+                  <a:pt x="5759346" y="2926080"/>
+                </a:lnTo>
+                <a:lnTo>
+                  <a:pt x="5748354" y="2926080"/>
+                </a:lnTo>
+                <a:lnTo>
+                  <a:pt x="5737363" y="2926080"/>
+                </a:lnTo>
+                <a:lnTo>
+                  <a:pt x="5726372" y="2926080"/>
+                </a:lnTo>
+                <a:lnTo>
+                  <a:pt x="5715381" y="2926080"/>
+                </a:lnTo>
+                <a:lnTo>
+                  <a:pt x="5704390" y="2926080"/>
+                </a:lnTo>
+                <a:lnTo>
+                  <a:pt x="5693399" y="2926080"/>
+                </a:lnTo>
+                <a:lnTo>
+                  <a:pt x="5682408" y="2926080"/>
+                </a:lnTo>
+                <a:lnTo>
+                  <a:pt x="5671417" y="2926080"/>
+                </a:lnTo>
+                <a:lnTo>
+                  <a:pt x="5660426" y="2926080"/>
+                </a:lnTo>
+                <a:lnTo>
+                  <a:pt x="5649434" y="2926080"/>
+                </a:lnTo>
+                <a:lnTo>
+                  <a:pt x="5638443" y="2926080"/>
+                </a:lnTo>
+                <a:lnTo>
+                  <a:pt x="5627452" y="2926080"/>
+                </a:lnTo>
+                <a:lnTo>
+                  <a:pt x="5616461" y="2926080"/>
+                </a:lnTo>
+                <a:lnTo>
+                  <a:pt x="5605470" y="2926080"/>
+                </a:lnTo>
+                <a:lnTo>
+                  <a:pt x="5594479" y="2926080"/>
+                </a:lnTo>
+                <a:lnTo>
+                  <a:pt x="5583488" y="2926080"/>
+                </a:lnTo>
+                <a:lnTo>
+                  <a:pt x="5572497" y="2926080"/>
+                </a:lnTo>
+                <a:lnTo>
+                  <a:pt x="5561505" y="2926080"/>
+                </a:lnTo>
+                <a:lnTo>
+                  <a:pt x="5550514" y="2926080"/>
+                </a:lnTo>
+                <a:lnTo>
+                  <a:pt x="5539523" y="2926080"/>
+                </a:lnTo>
+                <a:lnTo>
+                  <a:pt x="5528532" y="2926080"/>
+                </a:lnTo>
+                <a:lnTo>
+                  <a:pt x="5517541" y="2926080"/>
+                </a:lnTo>
+                <a:lnTo>
+                  <a:pt x="5506550" y="2926080"/>
+                </a:lnTo>
+                <a:lnTo>
+                  <a:pt x="5495559" y="2926080"/>
+                </a:lnTo>
+                <a:lnTo>
+                  <a:pt x="5484568" y="2926080"/>
+                </a:lnTo>
+                <a:lnTo>
+                  <a:pt x="5473577" y="2926080"/>
+                </a:lnTo>
+                <a:lnTo>
+                  <a:pt x="5462585" y="2926080"/>
+                </a:lnTo>
+                <a:lnTo>
+                  <a:pt x="5451594" y="2926080"/>
+                </a:lnTo>
+                <a:lnTo>
+                  <a:pt x="5440603" y="2926080"/>
+                </a:lnTo>
+                <a:lnTo>
+                  <a:pt x="5429612" y="2926080"/>
+                </a:lnTo>
+                <a:lnTo>
+                  <a:pt x="5418621" y="2926080"/>
+                </a:lnTo>
+                <a:lnTo>
+                  <a:pt x="5407630" y="2926080"/>
+                </a:lnTo>
+                <a:lnTo>
+                  <a:pt x="5396639" y="2926080"/>
+                </a:lnTo>
+                <a:lnTo>
+                  <a:pt x="5385648" y="2926080"/>
+                </a:lnTo>
+                <a:lnTo>
+                  <a:pt x="5374656" y="2926080"/>
+                </a:lnTo>
+                <a:lnTo>
+                  <a:pt x="5363665" y="2926080"/>
+                </a:lnTo>
+                <a:lnTo>
+                  <a:pt x="5352674" y="2926080"/>
+                </a:lnTo>
+                <a:lnTo>
+                  <a:pt x="5341683" y="2926080"/>
+                </a:lnTo>
+                <a:lnTo>
+                  <a:pt x="5330692" y="2926080"/>
+                </a:lnTo>
+                <a:lnTo>
+                  <a:pt x="5319701" y="2926080"/>
+                </a:lnTo>
+                <a:lnTo>
+                  <a:pt x="5308710" y="2926080"/>
+                </a:lnTo>
+                <a:lnTo>
+                  <a:pt x="5297719" y="2926080"/>
+                </a:lnTo>
+                <a:lnTo>
+                  <a:pt x="5286728" y="2926080"/>
+                </a:lnTo>
+                <a:lnTo>
+                  <a:pt x="5275736" y="2926080"/>
+                </a:lnTo>
+                <a:lnTo>
+                  <a:pt x="5264745" y="2926080"/>
+                </a:lnTo>
+                <a:lnTo>
+                  <a:pt x="5253754" y="2926080"/>
+                </a:lnTo>
+                <a:lnTo>
+                  <a:pt x="5242763" y="2926080"/>
+                </a:lnTo>
+                <a:lnTo>
+                  <a:pt x="5231772" y="2926080"/>
+                </a:lnTo>
+                <a:lnTo>
+                  <a:pt x="5220781" y="2926080"/>
+                </a:lnTo>
+                <a:lnTo>
+                  <a:pt x="5209790" y="2926080"/>
+                </a:lnTo>
+                <a:lnTo>
+                  <a:pt x="5198799" y="2926080"/>
+                </a:lnTo>
+                <a:lnTo>
+                  <a:pt x="5187807" y="2926080"/>
+                </a:lnTo>
+                <a:lnTo>
+                  <a:pt x="5176816" y="2926080"/>
+                </a:lnTo>
+                <a:lnTo>
+                  <a:pt x="5165825" y="2926080"/>
+                </a:lnTo>
+                <a:lnTo>
+                  <a:pt x="5154834" y="2926080"/>
+                </a:lnTo>
+                <a:lnTo>
+                  <a:pt x="5143843" y="2926080"/>
+                </a:lnTo>
+                <a:lnTo>
+                  <a:pt x="5132852" y="2926080"/>
+                </a:lnTo>
+                <a:lnTo>
+                  <a:pt x="5121861" y="2926080"/>
+                </a:lnTo>
+                <a:lnTo>
+                  <a:pt x="5110870" y="2926080"/>
+                </a:lnTo>
+                <a:lnTo>
+                  <a:pt x="5099878" y="2926080"/>
+                </a:lnTo>
+                <a:lnTo>
+                  <a:pt x="5088887" y="2926080"/>
+                </a:lnTo>
+                <a:lnTo>
+                  <a:pt x="5077896" y="2926080"/>
+                </a:lnTo>
+                <a:lnTo>
+                  <a:pt x="5066905" y="2926080"/>
+                </a:lnTo>
+                <a:lnTo>
+                  <a:pt x="5055914" y="2926080"/>
+                </a:lnTo>
+                <a:lnTo>
+                  <a:pt x="5044923" y="2926080"/>
+                </a:lnTo>
+                <a:lnTo>
+                  <a:pt x="5033932" y="2926080"/>
+                </a:lnTo>
+                <a:lnTo>
+                  <a:pt x="5022941" y="2926080"/>
+                </a:lnTo>
+                <a:lnTo>
+                  <a:pt x="5011950" y="2926080"/>
+                </a:lnTo>
+                <a:lnTo>
+                  <a:pt x="5000958" y="2926080"/>
+                </a:lnTo>
+                <a:lnTo>
+                  <a:pt x="4989967" y="2926080"/>
+                </a:lnTo>
+                <a:lnTo>
+                  <a:pt x="4978976" y="2926080"/>
+                </a:lnTo>
+                <a:lnTo>
+                  <a:pt x="4967985" y="2926080"/>
+                </a:lnTo>
+                <a:lnTo>
+                  <a:pt x="4956994" y="2926080"/>
+                </a:lnTo>
+                <a:lnTo>
+                  <a:pt x="4946003" y="2926080"/>
+                </a:lnTo>
+                <a:lnTo>
+                  <a:pt x="4935012" y="2926080"/>
+                </a:lnTo>
+                <a:lnTo>
+                  <a:pt x="4924021" y="2926080"/>
+                </a:lnTo>
+                <a:lnTo>
+                  <a:pt x="4913029" y="2926080"/>
+                </a:lnTo>
+                <a:lnTo>
+                  <a:pt x="4902038" y="2926080"/>
+                </a:lnTo>
+                <a:lnTo>
+                  <a:pt x="4891047" y="2926080"/>
+                </a:lnTo>
+                <a:lnTo>
+                  <a:pt x="4880056" y="2926080"/>
+                </a:lnTo>
+                <a:lnTo>
+                  <a:pt x="4869065" y="2926080"/>
+                </a:lnTo>
+                <a:lnTo>
+                  <a:pt x="4858074" y="2926080"/>
+                </a:lnTo>
+                <a:lnTo>
+                  <a:pt x="4847083" y="2926080"/>
+                </a:lnTo>
+                <a:lnTo>
+                  <a:pt x="4836092" y="2926080"/>
+                </a:lnTo>
+                <a:lnTo>
+                  <a:pt x="4825101" y="2926080"/>
+                </a:lnTo>
+                <a:lnTo>
+                  <a:pt x="4814109" y="2926080"/>
+                </a:lnTo>
+                <a:lnTo>
+                  <a:pt x="4803118" y="2926080"/>
+                </a:lnTo>
+                <a:lnTo>
+                  <a:pt x="4792127" y="2926080"/>
+                </a:lnTo>
+                <a:lnTo>
+                  <a:pt x="4781136" y="2926080"/>
+                </a:lnTo>
+                <a:lnTo>
+                  <a:pt x="4770145" y="2926080"/>
+                </a:lnTo>
+                <a:lnTo>
+                  <a:pt x="4759154" y="2926080"/>
+                </a:lnTo>
+                <a:lnTo>
+                  <a:pt x="4748163" y="2926080"/>
+                </a:lnTo>
+                <a:lnTo>
+                  <a:pt x="4737172" y="2926080"/>
+                </a:lnTo>
+                <a:lnTo>
+                  <a:pt x="4726180" y="2926080"/>
+                </a:lnTo>
+                <a:lnTo>
+                  <a:pt x="4715189" y="2926080"/>
+                </a:lnTo>
+                <a:lnTo>
+                  <a:pt x="4704198" y="2926080"/>
+                </a:lnTo>
+                <a:lnTo>
+                  <a:pt x="4693207" y="2926080"/>
+                </a:lnTo>
+                <a:lnTo>
+                  <a:pt x="4682216" y="2926080"/>
+                </a:lnTo>
+                <a:lnTo>
+                  <a:pt x="4671225" y="2926080"/>
+                </a:lnTo>
+                <a:lnTo>
+                  <a:pt x="4660234" y="2926080"/>
+                </a:lnTo>
+                <a:lnTo>
+                  <a:pt x="4649243" y="2926080"/>
+                </a:lnTo>
+                <a:lnTo>
+                  <a:pt x="4638252" y="2926080"/>
+                </a:lnTo>
+                <a:lnTo>
+                  <a:pt x="4627260" y="2926080"/>
+                </a:lnTo>
+                <a:lnTo>
+                  <a:pt x="4616269" y="2926080"/>
+                </a:lnTo>
+                <a:lnTo>
+                  <a:pt x="4605278" y="2926080"/>
+                </a:lnTo>
+                <a:lnTo>
+                  <a:pt x="4594287" y="2926080"/>
+                </a:lnTo>
+                <a:lnTo>
+                  <a:pt x="4583296" y="2926080"/>
+                </a:lnTo>
+                <a:lnTo>
+                  <a:pt x="4572305" y="2926080"/>
+                </a:lnTo>
+                <a:lnTo>
+                  <a:pt x="4561314" y="2926080"/>
+                </a:lnTo>
+                <a:lnTo>
+                  <a:pt x="4550323" y="2926080"/>
+                </a:lnTo>
+                <a:lnTo>
+                  <a:pt x="4539331" y="2926080"/>
+                </a:lnTo>
+                <a:lnTo>
+                  <a:pt x="4528340" y="2926080"/>
+                </a:lnTo>
+                <a:lnTo>
+                  <a:pt x="4517349" y="2926080"/>
+                </a:lnTo>
+                <a:lnTo>
+                  <a:pt x="4506358" y="2926080"/>
+                </a:lnTo>
+                <a:lnTo>
+                  <a:pt x="4495367" y="2926080"/>
+                </a:lnTo>
+                <a:lnTo>
+                  <a:pt x="4484376" y="2926080"/>
+                </a:lnTo>
+                <a:lnTo>
+                  <a:pt x="4473385" y="2926080"/>
+                </a:lnTo>
+                <a:lnTo>
+                  <a:pt x="4462394" y="2926080"/>
+                </a:lnTo>
+                <a:lnTo>
+                  <a:pt x="4451403" y="2926080"/>
+                </a:lnTo>
+                <a:lnTo>
+                  <a:pt x="4440411" y="2926080"/>
+                </a:lnTo>
+                <a:lnTo>
+                  <a:pt x="4429420" y="2926080"/>
+                </a:lnTo>
+                <a:lnTo>
+                  <a:pt x="4418429" y="2926080"/>
+                </a:lnTo>
+                <a:lnTo>
+                  <a:pt x="4407438" y="2926080"/>
+                </a:lnTo>
+                <a:lnTo>
+                  <a:pt x="4396447" y="2926080"/>
+                </a:lnTo>
+                <a:lnTo>
+                  <a:pt x="4385456" y="2926080"/>
+                </a:lnTo>
+                <a:lnTo>
+                  <a:pt x="4374465" y="2926080"/>
+                </a:lnTo>
+                <a:lnTo>
+                  <a:pt x="4363474" y="2926080"/>
+                </a:lnTo>
+                <a:lnTo>
+                  <a:pt x="4352482" y="2926080"/>
+                </a:lnTo>
+                <a:lnTo>
+                  <a:pt x="4341491" y="2926080"/>
+                </a:lnTo>
+                <a:lnTo>
+                  <a:pt x="4330500" y="2926080"/>
+                </a:lnTo>
+                <a:lnTo>
+                  <a:pt x="4319509" y="2926080"/>
+                </a:lnTo>
+                <a:lnTo>
+                  <a:pt x="4308518" y="2926080"/>
+                </a:lnTo>
+                <a:lnTo>
+                  <a:pt x="4297527" y="2926080"/>
+                </a:lnTo>
+                <a:lnTo>
+                  <a:pt x="4286536" y="2926080"/>
+                </a:lnTo>
+                <a:lnTo>
+                  <a:pt x="4275545" y="2926080"/>
+                </a:lnTo>
+                <a:lnTo>
+                  <a:pt x="4264553" y="2926080"/>
+                </a:lnTo>
+                <a:lnTo>
+                  <a:pt x="4253562" y="2926080"/>
+                </a:lnTo>
+                <a:lnTo>
+                  <a:pt x="4242571" y="2926080"/>
+                </a:lnTo>
+                <a:lnTo>
+                  <a:pt x="4231580" y="2926080"/>
+                </a:lnTo>
+                <a:lnTo>
+                  <a:pt x="4220589" y="2926080"/>
+                </a:lnTo>
+                <a:lnTo>
+                  <a:pt x="4209598" y="2926080"/>
+                </a:lnTo>
+                <a:lnTo>
+                  <a:pt x="4198607" y="2926080"/>
+                </a:lnTo>
+                <a:lnTo>
+                  <a:pt x="4187616" y="2926080"/>
+                </a:lnTo>
+                <a:lnTo>
+                  <a:pt x="4176625" y="2926080"/>
+                </a:lnTo>
+                <a:lnTo>
+                  <a:pt x="4165633" y="2926080"/>
+                </a:lnTo>
+                <a:lnTo>
+                  <a:pt x="4154642" y="2926080"/>
+                </a:lnTo>
+                <a:lnTo>
+                  <a:pt x="4143651" y="2926080"/>
+                </a:lnTo>
+                <a:lnTo>
+                  <a:pt x="4132660" y="2926080"/>
+                </a:lnTo>
+                <a:lnTo>
+                  <a:pt x="4121669" y="2926080"/>
+                </a:lnTo>
+                <a:lnTo>
+                  <a:pt x="4110678" y="2926080"/>
+                </a:lnTo>
+                <a:lnTo>
+                  <a:pt x="4099687" y="2926080"/>
+                </a:lnTo>
+                <a:lnTo>
+                  <a:pt x="4088696" y="2926080"/>
+                </a:lnTo>
+                <a:lnTo>
+                  <a:pt x="4077704" y="2926080"/>
+                </a:lnTo>
+                <a:lnTo>
+                  <a:pt x="4066713" y="2926080"/>
+                </a:lnTo>
+                <a:lnTo>
+                  <a:pt x="4055722" y="2926080"/>
+                </a:lnTo>
+                <a:lnTo>
+                  <a:pt x="4044731" y="2926080"/>
+                </a:lnTo>
+                <a:lnTo>
+                  <a:pt x="4033740" y="2926080"/>
+                </a:lnTo>
+                <a:lnTo>
+                  <a:pt x="4022749" y="2926080"/>
+                </a:lnTo>
+                <a:lnTo>
+                  <a:pt x="4011758" y="2926080"/>
+                </a:lnTo>
+                <a:lnTo>
+                  <a:pt x="4000767" y="2926080"/>
+                </a:lnTo>
+                <a:lnTo>
+                  <a:pt x="3989776" y="2926080"/>
+                </a:lnTo>
+                <a:lnTo>
+                  <a:pt x="3978784" y="2926080"/>
+                </a:lnTo>
+                <a:lnTo>
+                  <a:pt x="3967793" y="2926080"/>
+                </a:lnTo>
+                <a:lnTo>
+                  <a:pt x="3956802" y="2926080"/>
+                </a:lnTo>
+                <a:lnTo>
+                  <a:pt x="3945811" y="2926080"/>
+                </a:lnTo>
+                <a:lnTo>
+                  <a:pt x="3934820" y="2926080"/>
+                </a:lnTo>
+                <a:lnTo>
+                  <a:pt x="3923829" y="2926080"/>
+                </a:lnTo>
+                <a:lnTo>
+                  <a:pt x="3912838" y="2926080"/>
+                </a:lnTo>
+                <a:lnTo>
+                  <a:pt x="3901847" y="2926080"/>
+                </a:lnTo>
+                <a:lnTo>
+                  <a:pt x="3890855" y="2926080"/>
+                </a:lnTo>
+                <a:lnTo>
+                  <a:pt x="3879864" y="2926080"/>
+                </a:lnTo>
+                <a:lnTo>
+                  <a:pt x="3868873" y="2926080"/>
+                </a:lnTo>
+                <a:lnTo>
+                  <a:pt x="3857882" y="2926080"/>
+                </a:lnTo>
+                <a:lnTo>
+                  <a:pt x="3846891" y="2926080"/>
+                </a:lnTo>
+                <a:lnTo>
+                  <a:pt x="3835900" y="2926080"/>
+                </a:lnTo>
+                <a:lnTo>
+                  <a:pt x="3824909" y="2926080"/>
+                </a:lnTo>
+                <a:lnTo>
+                  <a:pt x="3813918" y="2926080"/>
+                </a:lnTo>
+                <a:lnTo>
+                  <a:pt x="3802927" y="2926080"/>
+                </a:lnTo>
+                <a:lnTo>
+                  <a:pt x="3791935" y="2926080"/>
+                </a:lnTo>
+                <a:lnTo>
+                  <a:pt x="3780944" y="2926080"/>
+                </a:lnTo>
+                <a:lnTo>
+                  <a:pt x="3769953" y="2926080"/>
+                </a:lnTo>
+                <a:lnTo>
+                  <a:pt x="3758962" y="2926080"/>
+                </a:lnTo>
+                <a:lnTo>
+                  <a:pt x="3747971" y="2926080"/>
+                </a:lnTo>
+                <a:lnTo>
+                  <a:pt x="3736980" y="2926080"/>
+                </a:lnTo>
+                <a:lnTo>
+                  <a:pt x="3725989" y="2926080"/>
+                </a:lnTo>
+                <a:lnTo>
+                  <a:pt x="3714998" y="2926080"/>
+                </a:lnTo>
+                <a:lnTo>
+                  <a:pt x="3704006" y="2926080"/>
+                </a:lnTo>
+                <a:lnTo>
+                  <a:pt x="3693015" y="2926080"/>
+                </a:lnTo>
+                <a:lnTo>
+                  <a:pt x="3682024" y="2926080"/>
+                </a:lnTo>
+                <a:lnTo>
+                  <a:pt x="3671033" y="2926080"/>
+                </a:lnTo>
+                <a:lnTo>
+                  <a:pt x="3660042" y="2926080"/>
+                </a:lnTo>
+                <a:lnTo>
+                  <a:pt x="3649051" y="2926080"/>
+                </a:lnTo>
+                <a:lnTo>
+                  <a:pt x="3638060" y="2926080"/>
+                </a:lnTo>
+                <a:lnTo>
+                  <a:pt x="3627069" y="2926080"/>
+                </a:lnTo>
+                <a:lnTo>
+                  <a:pt x="3616077" y="2926080"/>
+                </a:lnTo>
+                <a:lnTo>
+                  <a:pt x="3605086" y="2926080"/>
+                </a:lnTo>
+                <a:lnTo>
+                  <a:pt x="3594095" y="2926080"/>
+                </a:lnTo>
+                <a:lnTo>
+                  <a:pt x="3583104" y="2926080"/>
+                </a:lnTo>
+                <a:lnTo>
+                  <a:pt x="3572113" y="2926080"/>
+                </a:lnTo>
+                <a:lnTo>
+                  <a:pt x="3561122" y="2926080"/>
+                </a:lnTo>
+                <a:lnTo>
+                  <a:pt x="3550131" y="2926080"/>
+                </a:lnTo>
+                <a:lnTo>
+                  <a:pt x="3539140" y="2926080"/>
+                </a:lnTo>
+                <a:lnTo>
+                  <a:pt x="3528149" y="2926080"/>
+                </a:lnTo>
+                <a:lnTo>
+                  <a:pt x="3517157" y="2926080"/>
+                </a:lnTo>
+                <a:lnTo>
+                  <a:pt x="3506166" y="2926080"/>
+                </a:lnTo>
+                <a:lnTo>
+                  <a:pt x="3495175" y="2926080"/>
+                </a:lnTo>
+                <a:lnTo>
+                  <a:pt x="3484184" y="2926080"/>
+                </a:lnTo>
+                <a:lnTo>
+                  <a:pt x="3473193" y="2926080"/>
+                </a:lnTo>
+                <a:lnTo>
+                  <a:pt x="3462202" y="2926080"/>
+                </a:lnTo>
+                <a:lnTo>
+                  <a:pt x="3451211" y="2926080"/>
+                </a:lnTo>
+                <a:lnTo>
+                  <a:pt x="3440220" y="2926080"/>
+                </a:lnTo>
+                <a:lnTo>
+                  <a:pt x="3429228" y="2926080"/>
+                </a:lnTo>
+                <a:lnTo>
+                  <a:pt x="3418237" y="2926080"/>
+                </a:lnTo>
+                <a:lnTo>
+                  <a:pt x="3407246" y="2926080"/>
+                </a:lnTo>
+                <a:lnTo>
+                  <a:pt x="3396255" y="2926080"/>
+                </a:lnTo>
+                <a:lnTo>
+                  <a:pt x="3385264" y="2926080"/>
+                </a:lnTo>
+                <a:lnTo>
+                  <a:pt x="3374273" y="2926080"/>
+                </a:lnTo>
+                <a:lnTo>
+                  <a:pt x="3363282" y="2926080"/>
+                </a:lnTo>
+                <a:lnTo>
+                  <a:pt x="3352291" y="2926080"/>
+                </a:lnTo>
+                <a:lnTo>
+                  <a:pt x="3341300" y="2926080"/>
+                </a:lnTo>
+                <a:lnTo>
+                  <a:pt x="3330308" y="2926080"/>
+                </a:lnTo>
+                <a:lnTo>
+                  <a:pt x="3319317" y="2926080"/>
+                </a:lnTo>
+                <a:lnTo>
+                  <a:pt x="3308326" y="2926080"/>
+                </a:lnTo>
+                <a:lnTo>
+                  <a:pt x="3297335" y="2926080"/>
+                </a:lnTo>
+                <a:lnTo>
+                  <a:pt x="3286344" y="2926080"/>
+                </a:lnTo>
+                <a:lnTo>
+                  <a:pt x="3275353" y="2926080"/>
+                </a:lnTo>
+                <a:lnTo>
+                  <a:pt x="3264362" y="2926080"/>
+                </a:lnTo>
+                <a:lnTo>
+                  <a:pt x="3253371" y="2926080"/>
+                </a:lnTo>
+                <a:lnTo>
+                  <a:pt x="3242379" y="2926080"/>
+                </a:lnTo>
+                <a:lnTo>
+                  <a:pt x="3231388" y="2926080"/>
+                </a:lnTo>
+                <a:lnTo>
+                  <a:pt x="3220397" y="2926080"/>
+                </a:lnTo>
+                <a:lnTo>
+                  <a:pt x="3209406" y="2926080"/>
+                </a:lnTo>
+                <a:lnTo>
+                  <a:pt x="3198415" y="2926080"/>
+                </a:lnTo>
+                <a:lnTo>
+                  <a:pt x="3187424" y="2926080"/>
+                </a:lnTo>
+                <a:lnTo>
+                  <a:pt x="3176433" y="2926080"/>
+                </a:lnTo>
+                <a:lnTo>
+                  <a:pt x="3165442" y="2926080"/>
+                </a:lnTo>
+                <a:lnTo>
+                  <a:pt x="3154451" y="2926080"/>
+                </a:lnTo>
+                <a:lnTo>
+                  <a:pt x="3143459" y="2926080"/>
+                </a:lnTo>
+                <a:lnTo>
+                  <a:pt x="3132468" y="2926080"/>
+                </a:lnTo>
+                <a:lnTo>
+                  <a:pt x="3121477" y="2926080"/>
+                </a:lnTo>
+                <a:lnTo>
+                  <a:pt x="3110486" y="2926080"/>
+                </a:lnTo>
+                <a:lnTo>
+                  <a:pt x="3099495" y="2926080"/>
+                </a:lnTo>
+                <a:lnTo>
+                  <a:pt x="3088504" y="2926080"/>
+                </a:lnTo>
+                <a:lnTo>
+                  <a:pt x="3077513" y="2926080"/>
+                </a:lnTo>
+                <a:lnTo>
+                  <a:pt x="3066522" y="2926080"/>
+                </a:lnTo>
+                <a:lnTo>
+                  <a:pt x="3055530" y="2926080"/>
+                </a:lnTo>
+                <a:lnTo>
+                  <a:pt x="3044539" y="2926080"/>
+                </a:lnTo>
+                <a:lnTo>
+                  <a:pt x="3033548" y="2926080"/>
+                </a:lnTo>
+                <a:lnTo>
+                  <a:pt x="3022557" y="2926080"/>
+                </a:lnTo>
+                <a:lnTo>
+                  <a:pt x="3011566" y="2926080"/>
+                </a:lnTo>
+                <a:lnTo>
+                  <a:pt x="3000575" y="2926080"/>
+                </a:lnTo>
+                <a:lnTo>
+                  <a:pt x="2989584" y="2926080"/>
+                </a:lnTo>
+                <a:lnTo>
+                  <a:pt x="2978593" y="2926080"/>
+                </a:lnTo>
+                <a:lnTo>
+                  <a:pt x="2967602" y="2926080"/>
+                </a:lnTo>
+                <a:lnTo>
+                  <a:pt x="2956610" y="2926080"/>
+                </a:lnTo>
+                <a:lnTo>
+                  <a:pt x="2945619" y="2926080"/>
+                </a:lnTo>
+                <a:lnTo>
+                  <a:pt x="2934628" y="2926080"/>
+                </a:lnTo>
+                <a:lnTo>
+                  <a:pt x="2923637" y="2926080"/>
+                </a:lnTo>
+                <a:lnTo>
+                  <a:pt x="2912646" y="2926080"/>
+                </a:lnTo>
+                <a:lnTo>
+                  <a:pt x="2901655" y="2926080"/>
+                </a:lnTo>
+                <a:lnTo>
+                  <a:pt x="2890664" y="2926080"/>
+                </a:lnTo>
+                <a:lnTo>
+                  <a:pt x="2879673" y="2926080"/>
+                </a:lnTo>
+                <a:lnTo>
+                  <a:pt x="2868681" y="2926080"/>
+                </a:lnTo>
+                <a:lnTo>
+                  <a:pt x="2857690" y="2926080"/>
+                </a:lnTo>
+                <a:lnTo>
+                  <a:pt x="2846699" y="2926080"/>
+                </a:lnTo>
+                <a:lnTo>
+                  <a:pt x="2835708" y="2926080"/>
+                </a:lnTo>
+                <a:lnTo>
+                  <a:pt x="2824717" y="2926080"/>
+                </a:lnTo>
+                <a:lnTo>
+                  <a:pt x="2813726" y="2926080"/>
+                </a:lnTo>
+                <a:lnTo>
+                  <a:pt x="2802735" y="2926080"/>
+                </a:lnTo>
+                <a:lnTo>
+                  <a:pt x="2791744" y="2926080"/>
+                </a:lnTo>
+                <a:lnTo>
+                  <a:pt x="2780752" y="2926080"/>
+                </a:lnTo>
+                <a:lnTo>
+                  <a:pt x="2769761" y="2926080"/>
+                </a:lnTo>
+                <a:lnTo>
+                  <a:pt x="2758770" y="2926080"/>
+                </a:lnTo>
+                <a:lnTo>
+                  <a:pt x="2747779" y="2926080"/>
+                </a:lnTo>
+                <a:lnTo>
+                  <a:pt x="2736788" y="2926080"/>
+                </a:lnTo>
+                <a:lnTo>
+                  <a:pt x="2725797" y="2926080"/>
+                </a:lnTo>
+                <a:lnTo>
+                  <a:pt x="2714806" y="2926080"/>
+                </a:lnTo>
+                <a:lnTo>
+                  <a:pt x="2703815" y="2926080"/>
+                </a:lnTo>
+                <a:lnTo>
+                  <a:pt x="2692824" y="2926080"/>
+                </a:lnTo>
+                <a:lnTo>
+                  <a:pt x="2681832" y="2926080"/>
+                </a:lnTo>
+                <a:lnTo>
+                  <a:pt x="2670841" y="2926080"/>
+                </a:lnTo>
+                <a:lnTo>
+                  <a:pt x="2659850" y="2926080"/>
+                </a:lnTo>
+                <a:lnTo>
+                  <a:pt x="2648859" y="2926080"/>
+                </a:lnTo>
+                <a:lnTo>
+                  <a:pt x="2637868" y="2926080"/>
+                </a:lnTo>
+                <a:lnTo>
+                  <a:pt x="2626877" y="2926080"/>
+                </a:lnTo>
+                <a:lnTo>
+                  <a:pt x="2615886" y="2926080"/>
+                </a:lnTo>
+                <a:lnTo>
+                  <a:pt x="2604895" y="2926080"/>
+                </a:lnTo>
+                <a:lnTo>
+                  <a:pt x="2593903" y="2926080"/>
+                </a:lnTo>
+                <a:lnTo>
+                  <a:pt x="2582912" y="2926080"/>
+                </a:lnTo>
+                <a:lnTo>
+                  <a:pt x="2571921" y="2926080"/>
+                </a:lnTo>
+                <a:lnTo>
+                  <a:pt x="2560930" y="2926080"/>
+                </a:lnTo>
+                <a:lnTo>
+                  <a:pt x="2549939" y="2926080"/>
+                </a:lnTo>
+                <a:lnTo>
+                  <a:pt x="2538948" y="2926080"/>
+                </a:lnTo>
+                <a:lnTo>
+                  <a:pt x="2527957" y="2926080"/>
+                </a:lnTo>
+                <a:lnTo>
+                  <a:pt x="2516966" y="2926080"/>
+                </a:lnTo>
+                <a:lnTo>
+                  <a:pt x="2505975" y="2926080"/>
+                </a:lnTo>
+                <a:lnTo>
+                  <a:pt x="2494983" y="2926080"/>
+                </a:lnTo>
+                <a:lnTo>
+                  <a:pt x="2483992" y="2926080"/>
+                </a:lnTo>
+                <a:lnTo>
+                  <a:pt x="2473001" y="2926080"/>
+                </a:lnTo>
+                <a:lnTo>
+                  <a:pt x="2462010" y="2926080"/>
+                </a:lnTo>
+                <a:lnTo>
+                  <a:pt x="2451019" y="2926080"/>
+                </a:lnTo>
+                <a:lnTo>
+                  <a:pt x="2440028" y="2926080"/>
+                </a:lnTo>
+                <a:lnTo>
+                  <a:pt x="2429037" y="2926080"/>
+                </a:lnTo>
+                <a:lnTo>
+                  <a:pt x="2418046" y="2926080"/>
+                </a:lnTo>
+                <a:lnTo>
+                  <a:pt x="2407054" y="2926080"/>
+                </a:lnTo>
+                <a:lnTo>
+                  <a:pt x="2396063" y="2926080"/>
+                </a:lnTo>
+                <a:lnTo>
+                  <a:pt x="2385072" y="2926080"/>
+                </a:lnTo>
+                <a:lnTo>
+                  <a:pt x="2374081" y="2926080"/>
+                </a:lnTo>
+                <a:lnTo>
+                  <a:pt x="2363090" y="2926080"/>
+                </a:lnTo>
+                <a:lnTo>
+                  <a:pt x="2352099" y="2926080"/>
+                </a:lnTo>
+                <a:lnTo>
+                  <a:pt x="2341108" y="2926080"/>
+                </a:lnTo>
+                <a:lnTo>
+                  <a:pt x="2330117" y="2926080"/>
+                </a:lnTo>
+                <a:lnTo>
+                  <a:pt x="2319126" y="2926080"/>
+                </a:lnTo>
+                <a:lnTo>
+                  <a:pt x="2308134" y="2926080"/>
+                </a:lnTo>
+                <a:lnTo>
+                  <a:pt x="2297143" y="2926080"/>
+                </a:lnTo>
+                <a:lnTo>
+                  <a:pt x="2286152" y="2926080"/>
+                </a:lnTo>
+                <a:lnTo>
+                  <a:pt x="2275161" y="2926080"/>
+                </a:lnTo>
+                <a:lnTo>
+                  <a:pt x="2264170" y="2926080"/>
+                </a:lnTo>
+                <a:lnTo>
+                  <a:pt x="2253179" y="2926080"/>
+                </a:lnTo>
+                <a:lnTo>
+                  <a:pt x="2242188" y="2926080"/>
+                </a:lnTo>
+                <a:lnTo>
+                  <a:pt x="2231197" y="2926080"/>
+                </a:lnTo>
+                <a:lnTo>
+                  <a:pt x="2220205" y="2926080"/>
+                </a:lnTo>
+                <a:lnTo>
+                  <a:pt x="2209214" y="2926080"/>
+                </a:lnTo>
+                <a:lnTo>
+                  <a:pt x="2198223" y="2926080"/>
+                </a:lnTo>
+                <a:lnTo>
+                  <a:pt x="2187232" y="2926080"/>
+                </a:lnTo>
+                <a:lnTo>
+                  <a:pt x="2176241" y="2926080"/>
+                </a:lnTo>
+                <a:lnTo>
+                  <a:pt x="2165250" y="2926080"/>
+                </a:lnTo>
+                <a:lnTo>
+                  <a:pt x="2154259" y="2926080"/>
+                </a:lnTo>
+                <a:lnTo>
+                  <a:pt x="2143268" y="2926080"/>
+                </a:lnTo>
+                <a:lnTo>
+                  <a:pt x="2132276" y="2926080"/>
+                </a:lnTo>
+                <a:lnTo>
+                  <a:pt x="2121285" y="2926080"/>
+                </a:lnTo>
+                <a:lnTo>
+                  <a:pt x="2110294" y="2926080"/>
+                </a:lnTo>
+                <a:lnTo>
+                  <a:pt x="2099303" y="2926080"/>
+                </a:lnTo>
+                <a:lnTo>
+                  <a:pt x="2088312" y="2926080"/>
+                </a:lnTo>
+                <a:lnTo>
+                  <a:pt x="2077321" y="2926080"/>
+                </a:lnTo>
+                <a:lnTo>
+                  <a:pt x="2066330" y="2926080"/>
+                </a:lnTo>
+                <a:lnTo>
+                  <a:pt x="2055339" y="2926080"/>
+                </a:lnTo>
+                <a:lnTo>
+                  <a:pt x="2044348" y="2926080"/>
+                </a:lnTo>
+                <a:lnTo>
+                  <a:pt x="2033356" y="2926080"/>
+                </a:lnTo>
+                <a:lnTo>
+                  <a:pt x="2022365" y="2926080"/>
+                </a:lnTo>
+                <a:lnTo>
+                  <a:pt x="2011374" y="2926080"/>
+                </a:lnTo>
+                <a:lnTo>
+                  <a:pt x="2000383" y="2926080"/>
+                </a:lnTo>
+                <a:lnTo>
+                  <a:pt x="1989392" y="2926080"/>
+                </a:lnTo>
+                <a:lnTo>
+                  <a:pt x="1978401" y="2926080"/>
+                </a:lnTo>
+                <a:lnTo>
+                  <a:pt x="1967410" y="2926080"/>
+                </a:lnTo>
+                <a:lnTo>
+                  <a:pt x="1956419" y="2926080"/>
+                </a:lnTo>
+                <a:lnTo>
+                  <a:pt x="1945427" y="2926080"/>
+                </a:lnTo>
+                <a:lnTo>
+                  <a:pt x="1934436" y="2926080"/>
+                </a:lnTo>
+                <a:lnTo>
+                  <a:pt x="1923445" y="2926080"/>
+                </a:lnTo>
+                <a:lnTo>
+                  <a:pt x="1912454" y="2926080"/>
+                </a:lnTo>
+                <a:lnTo>
+                  <a:pt x="1901463" y="2926080"/>
+                </a:lnTo>
+                <a:lnTo>
+                  <a:pt x="1890472" y="2926080"/>
+                </a:lnTo>
+                <a:lnTo>
+                  <a:pt x="1879481" y="2926080"/>
+                </a:lnTo>
+                <a:lnTo>
+                  <a:pt x="1868490" y="2926080"/>
+                </a:lnTo>
+                <a:lnTo>
+                  <a:pt x="1857499" y="2926080"/>
+                </a:lnTo>
+                <a:lnTo>
+                  <a:pt x="1846507" y="2926080"/>
+                </a:lnTo>
+                <a:lnTo>
+                  <a:pt x="1835516" y="2926080"/>
+                </a:lnTo>
+                <a:lnTo>
+                  <a:pt x="1824525" y="2926080"/>
+                </a:lnTo>
+                <a:lnTo>
+                  <a:pt x="1813534" y="2926080"/>
+                </a:lnTo>
+                <a:lnTo>
+                  <a:pt x="1802543" y="2926080"/>
+                </a:lnTo>
+                <a:lnTo>
+                  <a:pt x="1791552" y="2926080"/>
+                </a:lnTo>
+                <a:lnTo>
+                  <a:pt x="1780561" y="2926080"/>
+                </a:lnTo>
+                <a:lnTo>
+                  <a:pt x="1769570" y="2926080"/>
+                </a:lnTo>
+                <a:lnTo>
+                  <a:pt x="1758578" y="2926080"/>
+                </a:lnTo>
+                <a:lnTo>
+                  <a:pt x="1747587" y="2926080"/>
+                </a:lnTo>
+                <a:lnTo>
+                  <a:pt x="1736596" y="2926080"/>
+                </a:lnTo>
+                <a:lnTo>
+                  <a:pt x="1725605" y="2926080"/>
+                </a:lnTo>
+                <a:lnTo>
+                  <a:pt x="1714614" y="2926080"/>
+                </a:lnTo>
+                <a:lnTo>
+                  <a:pt x="1703623" y="2926080"/>
+                </a:lnTo>
+                <a:lnTo>
+                  <a:pt x="1692632" y="2926080"/>
+                </a:lnTo>
+                <a:lnTo>
+                  <a:pt x="1681641" y="2926080"/>
+                </a:lnTo>
+                <a:lnTo>
+                  <a:pt x="1670650" y="2926080"/>
+                </a:lnTo>
+                <a:lnTo>
+                  <a:pt x="1659658" y="2926080"/>
+                </a:lnTo>
+                <a:lnTo>
+                  <a:pt x="1648667" y="2926080"/>
+                </a:lnTo>
+                <a:lnTo>
+                  <a:pt x="1637676" y="2926080"/>
+                </a:lnTo>
+                <a:lnTo>
+                  <a:pt x="1626685" y="2926080"/>
+                </a:lnTo>
+                <a:lnTo>
+                  <a:pt x="1615694" y="2926080"/>
+                </a:lnTo>
+                <a:lnTo>
+                  <a:pt x="1604703" y="2926080"/>
+                </a:lnTo>
+                <a:lnTo>
+                  <a:pt x="1593712" y="2926080"/>
+                </a:lnTo>
+                <a:lnTo>
+                  <a:pt x="1582721" y="2926080"/>
+                </a:lnTo>
+                <a:lnTo>
+                  <a:pt x="1571729" y="2926080"/>
+                </a:lnTo>
+                <a:lnTo>
+                  <a:pt x="1560738" y="2926080"/>
+                </a:lnTo>
+                <a:lnTo>
+                  <a:pt x="1549747" y="2926080"/>
+                </a:lnTo>
+                <a:lnTo>
+                  <a:pt x="1538756" y="2926080"/>
+                </a:lnTo>
+                <a:lnTo>
+                  <a:pt x="1527765" y="2926080"/>
+                </a:lnTo>
+                <a:lnTo>
+                  <a:pt x="1516774" y="2926080"/>
+                </a:lnTo>
+                <a:lnTo>
+                  <a:pt x="1505783" y="2926080"/>
+                </a:lnTo>
+                <a:lnTo>
+                  <a:pt x="1494792" y="2926080"/>
+                </a:lnTo>
+                <a:lnTo>
+                  <a:pt x="1483801" y="2926080"/>
+                </a:lnTo>
+                <a:lnTo>
+                  <a:pt x="1472809" y="2926080"/>
+                </a:lnTo>
+                <a:lnTo>
+                  <a:pt x="1461818" y="2926080"/>
+                </a:lnTo>
+                <a:lnTo>
+                  <a:pt x="1450827" y="2926080"/>
+                </a:lnTo>
+                <a:lnTo>
+                  <a:pt x="1439836" y="2926080"/>
+                </a:lnTo>
+                <a:lnTo>
+                  <a:pt x="1428845" y="2926080"/>
+                </a:lnTo>
+                <a:lnTo>
+                  <a:pt x="1417854" y="2926080"/>
+                </a:lnTo>
+                <a:lnTo>
+                  <a:pt x="1406863" y="2926080"/>
+                </a:lnTo>
+                <a:lnTo>
+                  <a:pt x="1395872" y="2926080"/>
+                </a:lnTo>
+                <a:lnTo>
+                  <a:pt x="1384880" y="2926080"/>
+                </a:lnTo>
+                <a:lnTo>
+                  <a:pt x="1373889" y="2926080"/>
+                </a:lnTo>
+                <a:lnTo>
+                  <a:pt x="1362898" y="2926080"/>
+                </a:lnTo>
+                <a:lnTo>
+                  <a:pt x="1351907" y="2926080"/>
+                </a:lnTo>
+                <a:lnTo>
+                  <a:pt x="1340916" y="2926080"/>
+                </a:lnTo>
+                <a:lnTo>
+                  <a:pt x="1329925" y="2926080"/>
+                </a:lnTo>
+                <a:lnTo>
+                  <a:pt x="1318934" y="2926080"/>
+                </a:lnTo>
+                <a:lnTo>
+                  <a:pt x="1307943" y="2926080"/>
+                </a:lnTo>
+                <a:lnTo>
+                  <a:pt x="1296951" y="2926080"/>
+                </a:lnTo>
+                <a:lnTo>
+                  <a:pt x="1285960" y="2926080"/>
+                </a:lnTo>
+                <a:lnTo>
+                  <a:pt x="1274969" y="2926080"/>
+                </a:lnTo>
+                <a:lnTo>
+                  <a:pt x="1263978" y="2926080"/>
+                </a:lnTo>
+                <a:lnTo>
+                  <a:pt x="1252987" y="2926080"/>
+                </a:lnTo>
+                <a:lnTo>
+                  <a:pt x="1241996" y="2926080"/>
+                </a:lnTo>
+                <a:lnTo>
+                  <a:pt x="1231005" y="2926080"/>
+                </a:lnTo>
+                <a:lnTo>
+                  <a:pt x="1220014" y="2926080"/>
+                </a:lnTo>
+                <a:lnTo>
+                  <a:pt x="1209023" y="2926080"/>
+                </a:lnTo>
+                <a:lnTo>
+                  <a:pt x="1198031" y="2926080"/>
+                </a:lnTo>
+                <a:lnTo>
+                  <a:pt x="1187040" y="2926080"/>
+                </a:lnTo>
+                <a:lnTo>
+                  <a:pt x="1176049" y="2926080"/>
+                </a:lnTo>
+                <a:lnTo>
+                  <a:pt x="1165058" y="2926080"/>
+                </a:lnTo>
+                <a:lnTo>
+                  <a:pt x="1154067" y="2926080"/>
+                </a:lnTo>
+                <a:lnTo>
+                  <a:pt x="1143076" y="2926080"/>
+                </a:lnTo>
+                <a:lnTo>
+                  <a:pt x="1132085" y="2926080"/>
+                </a:lnTo>
+                <a:lnTo>
+                  <a:pt x="1121094" y="2926080"/>
+                </a:lnTo>
+                <a:lnTo>
+                  <a:pt x="1110102" y="2926080"/>
+                </a:lnTo>
+                <a:lnTo>
+                  <a:pt x="1099111" y="2926080"/>
+                </a:lnTo>
+                <a:lnTo>
+                  <a:pt x="1088120" y="2926080"/>
+                </a:lnTo>
+                <a:lnTo>
+                  <a:pt x="1077129" y="2926080"/>
+                </a:lnTo>
+                <a:lnTo>
+                  <a:pt x="1066138" y="2926080"/>
+                </a:lnTo>
+                <a:lnTo>
+                  <a:pt x="1055147" y="2926080"/>
+                </a:lnTo>
+                <a:lnTo>
+                  <a:pt x="1044156" y="2926080"/>
+                </a:lnTo>
+                <a:lnTo>
+                  <a:pt x="1033165" y="2926080"/>
+                </a:lnTo>
+                <a:lnTo>
+                  <a:pt x="1022174" y="2926080"/>
+                </a:lnTo>
+                <a:lnTo>
+                  <a:pt x="1011182" y="2926080"/>
+                </a:lnTo>
+                <a:lnTo>
+                  <a:pt x="1000191" y="2926080"/>
+                </a:lnTo>
+                <a:lnTo>
+                  <a:pt x="989200" y="2926080"/>
+                </a:lnTo>
+                <a:lnTo>
+                  <a:pt x="978209" y="2926080"/>
+                </a:lnTo>
+                <a:lnTo>
+                  <a:pt x="967218" y="2926080"/>
+                </a:lnTo>
+                <a:lnTo>
+                  <a:pt x="956227" y="2926080"/>
+                </a:lnTo>
+                <a:lnTo>
+                  <a:pt x="945236" y="2926080"/>
+                </a:lnTo>
+                <a:lnTo>
+                  <a:pt x="934245" y="2926080"/>
+                </a:lnTo>
+                <a:lnTo>
+                  <a:pt x="923253" y="2926080"/>
+                </a:lnTo>
+                <a:lnTo>
+                  <a:pt x="912262" y="2926080"/>
+                </a:lnTo>
+                <a:lnTo>
+                  <a:pt x="901271" y="2926080"/>
+                </a:lnTo>
+                <a:lnTo>
+                  <a:pt x="890280" y="2926080"/>
+                </a:lnTo>
+                <a:lnTo>
+                  <a:pt x="879289" y="2926080"/>
+                </a:lnTo>
+                <a:lnTo>
+                  <a:pt x="868298" y="2926080"/>
+                </a:lnTo>
+                <a:lnTo>
+                  <a:pt x="857307" y="2926080"/>
+                </a:lnTo>
+                <a:lnTo>
+                  <a:pt x="846316" y="2926080"/>
+                </a:lnTo>
+                <a:lnTo>
+                  <a:pt x="835325" y="2926080"/>
+                </a:lnTo>
+                <a:lnTo>
+                  <a:pt x="824333" y="2926080"/>
+                </a:lnTo>
+                <a:lnTo>
+                  <a:pt x="813342" y="2926080"/>
+                </a:lnTo>
+                <a:lnTo>
+                  <a:pt x="802351" y="2926080"/>
+                </a:lnTo>
+                <a:lnTo>
+                  <a:pt x="791360" y="2926080"/>
+                </a:lnTo>
+                <a:lnTo>
+                  <a:pt x="780369" y="2926080"/>
+                </a:lnTo>
+                <a:lnTo>
+                  <a:pt x="769378" y="2926080"/>
+                </a:lnTo>
+                <a:lnTo>
+                  <a:pt x="758387" y="2926080"/>
+                </a:lnTo>
+                <a:lnTo>
+                  <a:pt x="747396" y="2926080"/>
+                </a:lnTo>
+                <a:lnTo>
+                  <a:pt x="736404" y="2926080"/>
+                </a:lnTo>
+                <a:lnTo>
+                  <a:pt x="725413" y="2926080"/>
+                </a:lnTo>
+                <a:lnTo>
+                  <a:pt x="714422" y="2926080"/>
+                </a:lnTo>
+                <a:lnTo>
+                  <a:pt x="703431" y="2926080"/>
+                </a:lnTo>
+                <a:lnTo>
+                  <a:pt x="692440" y="2926080"/>
+                </a:lnTo>
+                <a:lnTo>
+                  <a:pt x="681449" y="2926080"/>
+                </a:lnTo>
+                <a:lnTo>
+                  <a:pt x="670458" y="2926080"/>
+                </a:lnTo>
+                <a:lnTo>
+                  <a:pt x="659467" y="2926080"/>
+                </a:lnTo>
+                <a:lnTo>
+                  <a:pt x="648475" y="2926080"/>
+                </a:lnTo>
+                <a:lnTo>
+                  <a:pt x="637484" y="2926080"/>
+                </a:lnTo>
+                <a:lnTo>
+                  <a:pt x="626493" y="2926080"/>
+                </a:lnTo>
+                <a:lnTo>
+                  <a:pt x="615502" y="2926080"/>
+                </a:lnTo>
+                <a:lnTo>
+                  <a:pt x="604511" y="2926080"/>
+                </a:lnTo>
+                <a:lnTo>
+                  <a:pt x="593520" y="2926080"/>
+                </a:lnTo>
+                <a:lnTo>
+                  <a:pt x="582529" y="2926080"/>
+                </a:lnTo>
+                <a:lnTo>
+                  <a:pt x="571538" y="2926080"/>
+                </a:lnTo>
+                <a:lnTo>
+                  <a:pt x="560547" y="2926080"/>
+                </a:lnTo>
+                <a:lnTo>
+                  <a:pt x="549555" y="2926080"/>
+                </a:lnTo>
+                <a:lnTo>
+                  <a:pt x="538564" y="2926080"/>
+                </a:lnTo>
+                <a:lnTo>
+                  <a:pt x="527573" y="2926080"/>
+                </a:lnTo>
+                <a:lnTo>
+                  <a:pt x="516582" y="2926080"/>
+                </a:lnTo>
+                <a:lnTo>
+                  <a:pt x="505591" y="2926080"/>
+                </a:lnTo>
+                <a:lnTo>
+                  <a:pt x="494600" y="2926080"/>
+                </a:lnTo>
+                <a:lnTo>
+                  <a:pt x="483609" y="2926080"/>
+                </a:lnTo>
+                <a:lnTo>
+                  <a:pt x="472618" y="2926080"/>
+                </a:lnTo>
+                <a:lnTo>
+                  <a:pt x="461626" y="2926080"/>
+                </a:lnTo>
+                <a:lnTo>
+                  <a:pt x="450635" y="2926080"/>
+                </a:lnTo>
+                <a:lnTo>
+                  <a:pt x="439644" y="2926080"/>
+                </a:lnTo>
+                <a:lnTo>
+                  <a:pt x="428653" y="2926080"/>
+                </a:lnTo>
+                <a:lnTo>
+                  <a:pt x="417662" y="2926080"/>
+                </a:lnTo>
+                <a:lnTo>
+                  <a:pt x="406671" y="2926080"/>
+                </a:lnTo>
+                <a:lnTo>
+                  <a:pt x="395680" y="2926080"/>
+                </a:lnTo>
+                <a:lnTo>
+                  <a:pt x="384689" y="2926080"/>
+                </a:lnTo>
+                <a:lnTo>
+                  <a:pt x="373698" y="2926080"/>
+                </a:lnTo>
+                <a:lnTo>
+                  <a:pt x="362706" y="2926080"/>
+                </a:lnTo>
+                <a:lnTo>
+                  <a:pt x="351715" y="2926080"/>
+                </a:lnTo>
+                <a:lnTo>
+                  <a:pt x="340724" y="2926080"/>
+                </a:lnTo>
+                <a:lnTo>
+                  <a:pt x="329733" y="2926080"/>
+                </a:lnTo>
+                <a:lnTo>
+                  <a:pt x="318742" y="2926080"/>
+                </a:lnTo>
+                <a:lnTo>
+                  <a:pt x="307751" y="2926080"/>
+                </a:lnTo>
+                <a:lnTo>
+                  <a:pt x="296760" y="2926080"/>
+                </a:lnTo>
+                <a:lnTo>
+                  <a:pt x="285769" y="2926080"/>
+                </a:lnTo>
+                <a:lnTo>
+                  <a:pt x="274777" y="2926080"/>
+                </a:lnTo>
+                <a:lnTo>
+                  <a:pt x="263786" y="2926080"/>
+                </a:lnTo>
+                <a:lnTo>
+                  <a:pt x="252795" y="2926080"/>
+                </a:lnTo>
+                <a:lnTo>
+                  <a:pt x="241804" y="2926080"/>
+                </a:lnTo>
+                <a:lnTo>
+                  <a:pt x="230813" y="2926080"/>
+                </a:lnTo>
+                <a:lnTo>
+                  <a:pt x="219822" y="2926080"/>
+                </a:lnTo>
+                <a:lnTo>
+                  <a:pt x="208831" y="2926080"/>
+                </a:lnTo>
+                <a:lnTo>
+                  <a:pt x="197840" y="2926080"/>
+                </a:lnTo>
+                <a:lnTo>
+                  <a:pt x="186849" y="2926080"/>
+                </a:lnTo>
+                <a:lnTo>
+                  <a:pt x="175857" y="2926080"/>
+                </a:lnTo>
+                <a:lnTo>
+                  <a:pt x="164866" y="2926080"/>
+                </a:lnTo>
+                <a:lnTo>
+                  <a:pt x="153875" y="2926080"/>
+                </a:lnTo>
+                <a:lnTo>
+                  <a:pt x="142884" y="2926080"/>
+                </a:lnTo>
+                <a:lnTo>
+                  <a:pt x="131893" y="2926080"/>
+                </a:lnTo>
+                <a:lnTo>
+                  <a:pt x="120902" y="2926080"/>
+                </a:lnTo>
+                <a:lnTo>
+                  <a:pt x="109911" y="2926080"/>
+                </a:lnTo>
+                <a:lnTo>
+                  <a:pt x="98920" y="2926080"/>
+                </a:lnTo>
+                <a:lnTo>
+                  <a:pt x="87928" y="2926080"/>
+                </a:lnTo>
+                <a:lnTo>
+                  <a:pt x="76937" y="2926080"/>
+                </a:lnTo>
+                <a:lnTo>
+                  <a:pt x="65946" y="2926080"/>
+                </a:lnTo>
+                <a:lnTo>
+                  <a:pt x="54955" y="2926080"/>
+                </a:lnTo>
+                <a:lnTo>
+                  <a:pt x="43964" y="2926080"/>
+                </a:lnTo>
+                <a:lnTo>
+                  <a:pt x="32973" y="2926080"/>
+                </a:lnTo>
+                <a:lnTo>
+                  <a:pt x="21982" y="2926080"/>
+                </a:lnTo>
+                <a:lnTo>
+                  <a:pt x="10991" y="2926080"/>
+                </a:lnTo>
+                <a:lnTo>
+                  <a:pt x="0" y="2926080"/>
+                </a:lnTo>
+                <a:close/>
+              </a:path>
+            </a:pathLst>
+          </a:custGeom>
+          <a:solidFill>
+            <a:srgbClr val="8EDBD4">
+              <a:alpha val="45000"/>
+            </a:srgbClr>
+          </a:solidFill>
+          <a:ln w="10160">
+            <a:solidFill>
+              <a:srgbClr val="8EDBD4">
+                <a:alpha val="45000"/>
+              </a:srgbClr>
+            </a:solidFill>
+          </a:ln>
+          <a:effectLst/>
+        </p:spPr>
+        <p:txBody>
+          <a:bodyPr rtlCol="0" anchor="ctr"/>
+          <a:lstStyle/>
+          <a:p>
+            <a:pPr algn="ctr"/>
+          </a:p>
+        </p:txBody>
+      </p:sp>
+      <p:sp>
+        <p:nvSpPr>
+          <p:cNvPr id="34" name="C1-E20 polygon 32" descr="sci-ppt:o032"/>
+          <p:cNvSpPr/>
+          <p:nvPr/>
+        </p:nvSpPr>
+        <p:spPr>
+          <a:xfrm>
+            <a:off x="914400" y="2103120"/>
+            <a:ext cx="6583679" cy="2926080"/>
+          </a:xfrm>
+          <a:custGeom>
+            <a:avLst/>
+            <a:gdLst/>
+            <a:ahLst/>
+            <a:cxnLst/>
+            <a:rect l="l" t="t" r="r" b="b"/>
+            <a:pathLst>
+              <a:path w="6583679" h="2926080">
+                <a:moveTo>
+                  <a:pt x="0" y="2926080"/>
+                </a:moveTo>
+                <a:lnTo>
+                  <a:pt x="0" y="0"/>
+                </a:lnTo>
+                <a:lnTo>
+                  <a:pt x="1645920" y="0"/>
+                </a:lnTo>
+                <a:lnTo>
+                  <a:pt x="1645920" y="2926080"/>
+                </a:lnTo>
+                <a:lnTo>
+                  <a:pt x="6583679" y="2926080"/>
                 </a:lnTo>
               </a:path>
             </a:pathLst>
@@ -4526,39 +11297,70 @@
           </a:p>
         </p:txBody>
       </p:sp>
-      <p:cxnSp>
-        <p:nvCxnSpPr>
-          <p:cNvPr id="36" name="C1-E20 line 34" descr="sci-ppt:o034"/>
-          <p:cNvCxnSpPr/>
+      <p:sp>
+        <p:nvSpPr>
+          <p:cNvPr id="35" name="C1-E20 polygon 33" descr="sci-ppt:o033"/>
+          <p:cNvSpPr/>
           <p:nvPr/>
-        </p:nvCxnSpPr>
+        </p:nvSpPr>
         <p:spPr>
           <a:xfrm>
-            <a:off x="914400" y="2590800"/>
-            <a:ext cx="6035040" cy="0"/>
+            <a:off x="914400" y="4053840"/>
+            <a:ext cx="6583679" cy="975360"/>
           </a:xfrm>
-          <a:prstGeom prst="line">
+          <a:custGeom>
             <a:avLst/>
-          </a:prstGeom>
-          <a:ln w="16510">
+            <a:gdLst/>
+            <a:ahLst/>
+            <a:cxnLst/>
+            <a:rect l="l" t="t" r="r" b="b"/>
+            <a:pathLst>
+              <a:path w="6583679" h="975360">
+                <a:moveTo>
+                  <a:pt x="0" y="975360"/>
+                </a:moveTo>
+                <a:lnTo>
+                  <a:pt x="0" y="0"/>
+                </a:lnTo>
+                <a:lnTo>
+                  <a:pt x="4937760" y="0"/>
+                </a:lnTo>
+                <a:lnTo>
+                  <a:pt x="4937760" y="975360"/>
+                </a:lnTo>
+                <a:lnTo>
+                  <a:pt x="6583679" y="975360"/>
+                </a:lnTo>
+              </a:path>
+            </a:pathLst>
+          </a:custGeom>
+          <a:noFill/>
+          <a:ln w="38100">
             <a:solidFill>
-              <a:srgbClr val="F2B880"/>
+              <a:srgbClr val="7FC8F8"/>
             </a:solidFill>
             <a:prstDash val="dash"/>
           </a:ln>
           <a:effectLst/>
         </p:spPr>
-      </p:cxnSp>
+        <p:txBody>
+          <a:bodyPr rtlCol="0" anchor="ctr"/>
+          <a:lstStyle/>
+          <a:p>
+            <a:pPr algn="ctr"/>
+          </a:p>
+        </p:txBody>
+      </p:sp>
       <p:sp>
         <p:nvSpPr>
-          <p:cNvPr id="37" name="C1-E20 text 35" descr="sci-ppt:o035"/>
+          <p:cNvPr id="36" name="C1-E20 text 34" descr="sci-ppt:o034"/>
           <p:cNvSpPr txBox="1"/>
           <p:nvPr/>
         </p:nvSpPr>
         <p:spPr>
           <a:xfrm>
-            <a:off x="5888596" y="2298192"/>
-            <a:ext cx="1371600" cy="239395"/>
+            <a:off x="2816352" y="1920240"/>
+            <a:ext cx="2560320" cy="239395"/>
           </a:xfrm>
           <a:prstGeom prst="rect">
             <a:avLst/>
@@ -4580,137 +11382,25 @@
             <a:r>
               <a:rPr sz="1250" b="0" i="0">
                 <a:solidFill>
-                  <a:srgbClr val="F2B880"/>
+                  <a:srgbClr val="8EDBD4"/>
                 </a:solidFill>
                 <a:latin typeface="Arial"/>
               </a:rPr>
-              <a:t>M* = 0.1</a:t>
+              <a:t>Δp = 0.6 MPa for 0.5 µs</a:t>
             </a:r>
           </a:p>
         </p:txBody>
       </p:sp>
       <p:sp>
         <p:nvSpPr>
-          <p:cNvPr id="38" name="C1-E20 polygon 36" descr="sci-ppt:o036"/>
-          <p:cNvSpPr/>
-          <p:nvPr/>
-        </p:nvSpPr>
-        <p:spPr>
-          <a:xfrm>
-            <a:off x="922160" y="1371600"/>
-            <a:ext cx="2850955" cy="3657600"/>
-          </a:xfrm>
-          <a:custGeom>
-            <a:avLst/>
-            <a:gdLst/>
-            <a:ahLst/>
-            <a:cxnLst/>
-            <a:rect l="l" t="t" r="r" b="b"/>
-            <a:pathLst>
-              <a:path w="2850955" h="3657600">
-                <a:moveTo>
-                  <a:pt x="0" y="0"/>
-                </a:moveTo>
-                <a:lnTo>
-                  <a:pt x="2850955" y="0"/>
-                </a:lnTo>
-                <a:lnTo>
-                  <a:pt x="2850955" y="3657600"/>
-                </a:lnTo>
-                <a:lnTo>
-                  <a:pt x="0" y="3657600"/>
-                </a:lnTo>
-                <a:close/>
-              </a:path>
-            </a:pathLst>
-          </a:custGeom>
-          <a:solidFill>
-            <a:srgbClr val="F28BA0">
-              <a:alpha val="18000"/>
-            </a:srgbClr>
-          </a:solidFill>
-          <a:ln w="6350">
-            <a:solidFill>
-              <a:srgbClr val="F28BA0">
-                <a:alpha val="18000"/>
-              </a:srgbClr>
-            </a:solidFill>
-          </a:ln>
-          <a:effectLst/>
-        </p:spPr>
-        <p:txBody>
-          <a:bodyPr rtlCol="0" anchor="ctr"/>
-          <a:lstStyle/>
-          <a:p>
-            <a:pPr algn="ctr"/>
-          </a:p>
-        </p:txBody>
-      </p:sp>
-      <p:cxnSp>
-        <p:nvCxnSpPr>
-          <p:cNvPr id="39" name="C1-E20 line 37" descr="sci-ppt:o037"/>
-          <p:cNvCxnSpPr/>
-          <p:nvPr/>
-        </p:nvCxnSpPr>
-        <p:spPr>
-          <a:xfrm>
-            <a:off x="3773115" y="1371600"/>
-            <a:ext cx="0" cy="3657600"/>
-          </a:xfrm>
-          <a:prstGeom prst="line">
-            <a:avLst/>
-          </a:prstGeom>
-          <a:ln w="16510">
-            <a:solidFill>
-              <a:srgbClr val="F28BA0"/>
-            </a:solidFill>
-            <a:prstDash val="dash"/>
-          </a:ln>
-          <a:effectLst/>
-        </p:spPr>
-      </p:cxnSp>
-      <p:sp>
-        <p:nvSpPr>
-          <p:cNvPr id="40" name="C1-E20 ellipse 38" descr="sci-ppt:o038"/>
-          <p:cNvSpPr/>
-          <p:nvPr/>
-        </p:nvSpPr>
-        <p:spPr>
-          <a:xfrm>
-            <a:off x="3699963" y="2517648"/>
-            <a:ext cx="146304" cy="146304"/>
-          </a:xfrm>
-          <a:prstGeom prst="ellipse">
-            <a:avLst/>
-          </a:prstGeom>
-          <a:solidFill>
-            <a:srgbClr val="F28BA0"/>
-          </a:solidFill>
-          <a:ln w="12700">
-            <a:solidFill>
-              <a:srgbClr val="F28BA0"/>
-            </a:solidFill>
-          </a:ln>
-          <a:effectLst/>
-        </p:spPr>
-        <p:txBody>
-          <a:bodyPr rtlCol="0" anchor="ctr"/>
-          <a:lstStyle/>
-          <a:p>
-            <a:pPr algn="ctr"/>
-          </a:p>
-        </p:txBody>
-      </p:sp>
-      <p:sp>
-        <p:nvSpPr>
-          <p:cNvPr id="41" name="C1-E20 text 39" descr="sci-ppt:o039"/>
+          <p:cNvPr id="37" name="C1-E20 text 35" descr="sci-ppt:o035"/>
           <p:cNvSpPr txBox="1"/>
           <p:nvPr/>
         </p:nvSpPr>
         <p:spPr>
           <a:xfrm>
-            <a:off x="3864555" y="2133600"/>
-            <a:ext cx="2011680" cy="231648"/>
+            <a:off x="4206240" y="3706368"/>
+            <a:ext cx="2560320" cy="239395"/>
           </a:xfrm>
           <a:prstGeom prst="rect">
             <a:avLst/>
@@ -4730,83 +11420,27 @@
               </a:spcAft>
             </a:pPr>
             <a:r>
-              <a:rPr sz="1200" b="0" i="0">
+              <a:rPr sz="1250" b="0" i="0">
                 <a:solidFill>
-                  <a:srgbClr val="F28BA0"/>
+                  <a:srgbClr val="7FC8F8"/>
                 </a:solidFill>
                 <a:latin typeface="Arial"/>
               </a:rPr>
-              <a:t>x_M = 0.143487</a:t>
+              <a:t>Δp = 0.2 MPa for 1.5 µs</a:t>
             </a:r>
           </a:p>
         </p:txBody>
       </p:sp>
       <p:sp>
         <p:nvSpPr>
-          <p:cNvPr id="42" name="C1-E20 text 40" descr="sci-ppt:o040"/>
-          <p:cNvSpPr txBox="1"/>
-          <p:nvPr/>
-        </p:nvSpPr>
-        <p:spPr>
-          <a:xfrm>
-            <a:off x="1113460" y="3837968"/>
-            <a:ext cx="2011680" cy="417576"/>
-          </a:xfrm>
-          <a:prstGeom prst="rect">
-            <a:avLst/>
-          </a:prstGeom>
-          <a:noFill/>
-          <a:effectLst/>
-        </p:spPr>
-        <p:txBody>
-          <a:bodyPr wrap="none" lIns="18288" rIns="18288" tIns="18288" bIns="18288" anchor="t">
-            <a:spAutoFit/>
-          </a:bodyPr>
-          <a:lstStyle/>
-          <a:p>
-            <a:pPr algn="l">
-              <a:spcAft>
-                <a:spcPts val="0"/>
-              </a:spcAft>
-            </a:pPr>
-            <a:r>
-              <a:rPr sz="1200" b="0" i="0">
-                <a:solidFill>
-                  <a:srgbClr val="F28BA0"/>
-                </a:solidFill>
-                <a:latin typeface="Arial"/>
-              </a:rPr>
-              <a:t>incompressible model</a:t>
-            </a:r>
-          </a:p>
-          <a:p>
-            <a:pPr algn="l">
-              <a:spcAft>
-                <a:spcPts val="0"/>
-              </a:spcAft>
-            </a:pPr>
-            <a:r>
-              <a:rPr sz="1200" b="0" i="0">
-                <a:solidFill>
-                  <a:srgbClr val="F28BA0"/>
-                </a:solidFill>
-                <a:latin typeface="Arial"/>
-              </a:rPr>
-              <a:t>not trusted here</a:t>
-            </a:r>
-          </a:p>
-        </p:txBody>
-      </p:sp>
-      <p:sp>
-        <p:nvSpPr>
-          <p:cNvPr id="43" name="C1-E20 round_rect 41" descr="sci-ppt:o041"/>
+          <p:cNvPr id="38" name="C1-E20 round_rect 36" descr="sci-ppt:o036"/>
           <p:cNvSpPr/>
           <p:nvPr/>
         </p:nvSpPr>
         <p:spPr>
           <a:xfrm>
-            <a:off x="7315200" y="1371600"/>
-            <a:ext cx="4526280" cy="3657600"/>
+            <a:off x="7863840" y="1371600"/>
+            <a:ext cx="3977639" cy="3657600"/>
           </a:xfrm>
           <a:prstGeom prst="roundRect">
             <a:avLst/>
@@ -4831,14 +11465,14 @@
       </p:sp>
       <p:sp>
         <p:nvSpPr>
-          <p:cNvPr id="44" name="C1-E20 text 42" descr="sci-ppt:o042"/>
+          <p:cNvPr id="39" name="C1-E20 text 37" descr="sci-ppt:o037"/>
           <p:cNvSpPr txBox="1"/>
           <p:nvPr/>
         </p:nvSpPr>
         <p:spPr>
           <a:xfrm>
-            <a:off x="7424927" y="1426464"/>
-            <a:ext cx="4306824" cy="254889"/>
+            <a:off x="7973567" y="1426464"/>
+            <a:ext cx="3758183" cy="254889"/>
           </a:xfrm>
           <a:prstGeom prst="rect">
             <a:avLst/>
@@ -4864,21 +11498,21 @@
                 </a:solidFill>
                 <a:latin typeface="Arial"/>
               </a:rPr>
-              <a:t>A diagnostic, not a limit</a:t>
+              <a:t>One impulse, two pulses</a:t>
             </a:r>
           </a:p>
         </p:txBody>
       </p:sp>
       <p:sp>
         <p:nvSpPr>
-          <p:cNvPr id="45" name="C1-E20 text 43" descr="sci-ppt:o043"/>
+          <p:cNvPr id="40" name="C1-E20 text 38" descr="sci-ppt:o038"/>
           <p:cNvSpPr txBox="1"/>
           <p:nvPr/>
         </p:nvSpPr>
         <p:spPr>
           <a:xfrm>
-            <a:off x="7452360" y="1828800"/>
-            <a:ext cx="4297680" cy="247142"/>
+            <a:off x="8001000" y="1828800"/>
+            <a:ext cx="3749039" cy="464057"/>
           </a:xfrm>
           <a:prstGeom prst="rect">
             <a:avLst/>
@@ -4898,27 +11532,43 @@
               </a:spcAft>
             </a:pPr>
             <a:r>
-              <a:rPr sz="1300" b="1" i="0">
+              <a:rPr sz="1350" b="1" i="0">
                 <a:solidFill>
                   <a:srgbClr val="E7F0F3"/>
                 </a:solidFill>
                 <a:latin typeface="Arial"/>
               </a:rPr>
-              <a:t>x_M = [ 1 + 3ρc²M*² / (2Δp_c) ]^(−1/3)</a:t>
+              <a:t>Π(x) = ∫ [p(x,t) − p_ref(t)] dt</a:t>
+            </a:r>
+          </a:p>
+          <a:p>
+            <a:pPr algn="l">
+              <a:spcAft>
+                <a:spcPts val="0"/>
+              </a:spcAft>
+            </a:pPr>
+            <a:r>
+              <a:rPr sz="1350" b="1" i="0">
+                <a:solidFill>
+                  <a:srgbClr val="E7F0F3"/>
+                </a:solidFill>
+                <a:latin typeface="Arial"/>
+              </a:rPr>
+              <a:t>[Π] = Pa·s</a:t>
             </a:r>
           </a:p>
         </p:txBody>
       </p:sp>
       <p:sp>
         <p:nvSpPr>
-          <p:cNvPr id="46" name="C1-E20 text 44" descr="sci-ppt:o044"/>
+          <p:cNvPr id="41" name="C1-E20 text 39" descr="sci-ppt:o039"/>
           <p:cNvSpPr txBox="1"/>
           <p:nvPr/>
         </p:nvSpPr>
         <p:spPr>
           <a:xfrm>
-            <a:off x="7653528" y="2423160"/>
-            <a:ext cx="4096512" cy="433070"/>
+            <a:off x="8001000" y="2606040"/>
+            <a:ext cx="3749039" cy="433070"/>
           </a:xfrm>
           <a:prstGeom prst="rect">
             <a:avLst/>
@@ -4944,7 +11594,7 @@
                 </a:solidFill>
                 <a:latin typeface="Arial"/>
               </a:rPr>
-              <a:t>With c = 1500 m/s and M* = 0.1 the ideal</a:t>
+              <a:t>Both shaded areas equal 0.30 Pa·s, so they</a:t>
             </a:r>
           </a:p>
           <a:p>
@@ -4960,53 +11610,21 @@
                 </a:solidFill>
                 <a:latin typeface="Arial"/>
               </a:rPr>
-              <a:t>collapse reaches M* at R = 0.143 Rₘₐₓ.</a:t>
+              <a:t>deliver the same impulse at this point.</a:t>
             </a:r>
           </a:p>
         </p:txBody>
       </p:sp>
       <p:sp>
         <p:nvSpPr>
-          <p:cNvPr id="47" name="C1-E20 ellipse 45" descr="sci-ppt:o045"/>
-          <p:cNvSpPr/>
-          <p:nvPr/>
-        </p:nvSpPr>
-        <p:spPr>
-          <a:xfrm>
-            <a:off x="7484364" y="2480437"/>
-            <a:ext cx="82296" cy="82296"/>
-          </a:xfrm>
-          <a:prstGeom prst="ellipse">
-            <a:avLst/>
-          </a:prstGeom>
-          <a:solidFill>
-            <a:srgbClr val="8EDBD4"/>
-          </a:solidFill>
-          <a:ln w="12700">
-            <a:solidFill>
-              <a:srgbClr val="8EDBD4"/>
-            </a:solidFill>
-          </a:ln>
-          <a:effectLst/>
-        </p:spPr>
-        <p:txBody>
-          <a:bodyPr rtlCol="0" anchor="ctr"/>
-          <a:lstStyle/>
-          <a:p>
-            <a:pPr algn="ctr"/>
-          </a:p>
-        </p:txBody>
-      </p:sp>
-      <p:sp>
-        <p:nvSpPr>
-          <p:cNvPr id="48" name="C1-E20 text 46" descr="sci-ppt:o046"/>
+          <p:cNvPr id="42" name="C1-E20 text 40" descr="sci-ppt:o040"/>
           <p:cNvSpPr txBox="1"/>
           <p:nvPr/>
         </p:nvSpPr>
         <p:spPr>
           <a:xfrm>
-            <a:off x="7653528" y="2901949"/>
-            <a:ext cx="4096512" cy="433070"/>
+            <a:off x="8001000" y="3520440"/>
+            <a:ext cx="3749039" cy="626745"/>
           </a:xfrm>
           <a:prstGeom prst="rect">
             <a:avLst/>
@@ -5028,11 +11646,11 @@
             <a:r>
               <a:rPr sz="1250" b="0" i="0">
                 <a:solidFill>
-                  <a:srgbClr val="E7F0F3"/>
+                  <a:srgbClr val="F2B880"/>
                 </a:solidFill>
                 <a:latin typeface="Arial"/>
               </a:rPr>
-              <a:t>Inside that radius the speed is large enough</a:t>
+              <a:t>Peak pressure alone cannot tell them apart.</a:t>
             </a:r>
           </a:p>
           <a:p>
@@ -5044,57 +11662,41 @@
             <a:r>
               <a:rPr sz="1250" b="0" i="0">
                 <a:solidFill>
-                  <a:srgbClr val="E7F0F3"/>
+                  <a:srgbClr val="F2B880"/>
                 </a:solidFill>
                 <a:latin typeface="Arial"/>
               </a:rPr>
-              <a:t>that liquid compressibility must be added.</a:t>
+              <a:t>Amplitude and duration enter together,</a:t>
+            </a:r>
+          </a:p>
+          <a:p>
+            <a:pPr algn="l">
+              <a:spcAft>
+                <a:spcPts val="0"/>
+              </a:spcAft>
+            </a:pPr>
+            <a:r>
+              <a:rPr sz="1250" b="0" i="0">
+                <a:solidFill>
+                  <a:srgbClr val="F2B880"/>
+                </a:solidFill>
+                <a:latin typeface="Arial"/>
+              </a:rPr>
+              <a:t>position by position.</a:t>
             </a:r>
           </a:p>
         </p:txBody>
       </p:sp>
       <p:sp>
         <p:nvSpPr>
-          <p:cNvPr id="49" name="C1-E20 ellipse 47" descr="sci-ppt:o047"/>
-          <p:cNvSpPr/>
-          <p:nvPr/>
-        </p:nvSpPr>
-        <p:spPr>
-          <a:xfrm>
-            <a:off x="7484364" y="2959226"/>
-            <a:ext cx="82296" cy="82296"/>
-          </a:xfrm>
-          <a:prstGeom prst="ellipse">
-            <a:avLst/>
-          </a:prstGeom>
-          <a:solidFill>
-            <a:srgbClr val="8EDBD4"/>
-          </a:solidFill>
-          <a:ln w="12700">
-            <a:solidFill>
-              <a:srgbClr val="8EDBD4"/>
-            </a:solidFill>
-          </a:ln>
-          <a:effectLst/>
-        </p:spPr>
-        <p:txBody>
-          <a:bodyPr rtlCol="0" anchor="ctr"/>
-          <a:lstStyle/>
-          <a:p>
-            <a:pPr algn="ctr"/>
-          </a:p>
-        </p:txBody>
-      </p:sp>
-      <p:sp>
-        <p:nvSpPr>
-          <p:cNvPr id="50" name="C1-E20 text 48" descr="sci-ppt:o048"/>
+          <p:cNvPr id="43" name="C1-E20 text 41" descr="sci-ppt:o041"/>
           <p:cNvSpPr txBox="1"/>
           <p:nvPr/>
         </p:nvSpPr>
         <p:spPr>
           <a:xfrm>
-            <a:off x="7653528" y="3380739"/>
-            <a:ext cx="4096512" cy="433070"/>
+            <a:off x="914400" y="5760720"/>
+            <a:ext cx="10972800" cy="254889"/>
           </a:xfrm>
           <a:prstGeom prst="rect">
             <a:avLst/>
@@ -5114,108 +11716,20 @@
               </a:spcAft>
             </a:pPr>
             <a:r>
-              <a:rPr sz="1250" b="0" i="0">
+              <a:rPr sz="1350" b="1" i="0">
                 <a:solidFill>
                   <a:srgbClr val="E7F0F3"/>
                 </a:solidFill>
                 <a:latin typeface="Arial"/>
               </a:rPr>
-              <a:t>The ideal trajectory itself is not a physical</a:t>
-            </a:r>
-          </a:p>
-          <a:p>
-            <a:pPr algn="l">
-              <a:spcAft>
-                <a:spcPts val="0"/>
-              </a:spcAft>
-            </a:pPr>
-            <a:r>
-              <a:rPr sz="1250" b="0" i="0">
-                <a:solidFill>
-                  <a:srgbClr val="E7F0F3"/>
-                </a:solidFill>
-                <a:latin typeface="Arial"/>
-              </a:rPr>
-              <a:t>prediction.</a:t>
+              <a:t>Π = 0.6 MPa × 0.5 µs = 0.2 MPa × 1.5 µs = 0.30 Pa·s</a:t>
             </a:r>
           </a:p>
         </p:txBody>
       </p:sp>
       <p:sp>
         <p:nvSpPr>
-          <p:cNvPr id="51" name="C1-E20 ellipse 49" descr="sci-ppt:o049"/>
-          <p:cNvSpPr/>
-          <p:nvPr/>
-        </p:nvSpPr>
-        <p:spPr>
-          <a:xfrm>
-            <a:off x="7484364" y="3438016"/>
-            <a:ext cx="82296" cy="82296"/>
-          </a:xfrm>
-          <a:prstGeom prst="ellipse">
-            <a:avLst/>
-          </a:prstGeom>
-          <a:solidFill>
-            <a:srgbClr val="8EDBD4"/>
-          </a:solidFill>
-          <a:ln w="12700">
-            <a:solidFill>
-              <a:srgbClr val="8EDBD4"/>
-            </a:solidFill>
-          </a:ln>
-          <a:effectLst/>
-        </p:spPr>
-        <p:txBody>
-          <a:bodyPr rtlCol="0" anchor="ctr"/>
-          <a:lstStyle/>
-          <a:p>
-            <a:pPr algn="ctr"/>
-          </a:p>
-        </p:txBody>
-      </p:sp>
-      <p:sp>
-        <p:nvSpPr>
-          <p:cNvPr id="52" name="C1-E20 text 50" descr="sci-ppt:o050"/>
-          <p:cNvSpPr txBox="1"/>
-          <p:nvPr/>
-        </p:nvSpPr>
-        <p:spPr>
-          <a:xfrm>
-            <a:off x="914400" y="5733288"/>
-            <a:ext cx="10972800" cy="247142"/>
-          </a:xfrm>
-          <a:prstGeom prst="rect">
-            <a:avLst/>
-          </a:prstGeom>
-          <a:noFill/>
-          <a:effectLst/>
-        </p:spPr>
-        <p:txBody>
-          <a:bodyPr wrap="none" lIns="18288" rIns="18288" tIns="18288" bIns="18288" anchor="t">
-            <a:spAutoFit/>
-          </a:bodyPr>
-          <a:lstStyle/>
-          <a:p>
-            <a:pPr algn="l">
-              <a:spcAft>
-                <a:spcPts val="0"/>
-              </a:spcAft>
-            </a:pPr>
-            <a:r>
-              <a:rPr sz="1300" b="0" i="0">
-                <a:solidFill>
-                  <a:srgbClr val="E7F0F3"/>
-                </a:solidFill>
-                <a:latin typeface="Arial"/>
-              </a:rPr>
-              <a:t>Wall Mach number M_w = |Ṙ|/c grows as R shrinks, so the incompressible formulas lose validity near the end of the collapse.</a:t>
-            </a:r>
-          </a:p>
-        </p:txBody>
-      </p:sp>
-      <p:sp>
-        <p:nvSpPr>
-          <p:cNvPr id="53" name="C1-E20 text 51" descr="sci-ppt:o051"/>
+          <p:cNvPr id="44" name="C1-E20 text 42" descr="sci-ppt:o042"/>
           <p:cNvSpPr txBox="1"/>
           <p:nvPr/>
         </p:nvSpPr>
@@ -5248,7 +11762,7 @@
                 </a:solidFill>
                 <a:latin typeface="Arial"/>
               </a:rPr>
-              <a:t>Curve from Eq. C1-E15 with c = 1500 m/s; threshold from Eq. C1-E20 (teaching inputs).</a:t>
+              <a:t>Rectangular pulses chosen for clarity; any waveform with the same area gives the same Π.</a:t>
             </a:r>
           </a:p>
         </p:txBody>
